--- a/docs/CHARACTER_SETTING.pptx
+++ b/docs/CHARACTER_SETTING.pptx
@@ -1,26 +1,26 @@
 
 <file path=ppt/presentation.xml><?xml version="1.0" encoding="utf-8"?>
-<p:presentation xmlns:p="http://schemas.openxmlformats.org/presentationml/2006/main">
+<p:presentation xmlns:a="http://schemas.openxmlformats.org/drawingml/2006/main" xmlns:r="http://schemas.openxmlformats.org/officeDocument/2006/relationships" xmlns:p="http://schemas.openxmlformats.org/presentationml/2006/main">
   <p:sldMasterIdLst>
-    <p:sldMasterId xmlns:r="http://schemas.openxmlformats.org/officeDocument/2006/relationships" id="2147483648" r:id="R650ab0ae007744dc"/>
+    <p:sldMasterId id="2147483648" r:id="rId1"/>
   </p:sldMasterIdLst>
   <p:notesMasterIdLst>
-    <p:notesMasterId xmlns:r="http://schemas.openxmlformats.org/officeDocument/2006/relationships" r:id="R1129541f2a6f4f82"/>
+    <p:notesMasterId r:id="rId7"/>
   </p:notesMasterIdLst>
   <p:sldIdLst>
-    <p:sldId xmlns:r="http://schemas.openxmlformats.org/officeDocument/2006/relationships" id="256" r:id="R8628ad91f07d4ca1"/>
-    <p:sldId xmlns:r="http://schemas.openxmlformats.org/officeDocument/2006/relationships" id="257" r:id="Rc4fc728aca51430a"/>
-    <p:sldId xmlns:r="http://schemas.openxmlformats.org/officeDocument/2006/relationships" id="258" r:id="R27e206ba5f5a405c"/>
-    <p:sldId xmlns:r="http://schemas.openxmlformats.org/officeDocument/2006/relationships" id="259" r:id="R294eb6f4c2074bc3"/>
-    <p:sldId xmlns:r="http://schemas.openxmlformats.org/officeDocument/2006/relationships" id="260" r:id="R3d5f01a0ae734432"/>
+    <p:sldId id="256" r:id="rId2"/>
+    <p:sldId id="257" r:id="rId3"/>
+    <p:sldId id="258" r:id="rId4"/>
+    <p:sldId id="259" r:id="rId5"/>
+    <p:sldId id="260" r:id="rId6"/>
   </p:sldIdLst>
   <p:sldSz cx="12192000" cy="6858000"/>
   <p:notesSz cx="6858000" cy="9144000"/>
   <p:defaultTextStyle>
-    <a:defPPr xmlns:a="http://schemas.openxmlformats.org/drawingml/2006/main">
+    <a:defPPr>
       <a:defRPr lang="en-US"/>
     </a:defPPr>
-    <a:lvl1pPr xmlns:a="http://schemas.openxmlformats.org/drawingml/2006/main" marL="0" indent="0" algn="l" defTabSz="914400">
+    <a:lvl1pPr marL="0" indent="0" algn="l" defTabSz="914400">
       <a:defRPr sz="1800" kern="1200">
         <a:solidFill>
           <a:schemeClr val="tx1"/>
@@ -30,7 +30,7 @@
         <a:cs typeface="+mn-cs"/>
       </a:defRPr>
     </a:lvl1pPr>
-    <a:lvl2pPr xmlns:a="http://schemas.openxmlformats.org/drawingml/2006/main" marL="457200" indent="0" algn="l" defTabSz="914400">
+    <a:lvl2pPr marL="457200" indent="0" algn="l" defTabSz="914400">
       <a:defRPr sz="1800" kern="1200">
         <a:solidFill>
           <a:schemeClr val="tx1"/>
@@ -40,7 +40,7 @@
         <a:cs typeface="+mn-cs"/>
       </a:defRPr>
     </a:lvl2pPr>
-    <a:lvl3pPr xmlns:a="http://schemas.openxmlformats.org/drawingml/2006/main" marL="914400" indent="0" algn="l" defTabSz="914400">
+    <a:lvl3pPr marL="914400" indent="0" algn="l" defTabSz="914400">
       <a:defRPr sz="1800" kern="1200">
         <a:solidFill>
           <a:schemeClr val="tx1"/>
@@ -50,7 +50,7 @@
         <a:cs typeface="+mn-cs"/>
       </a:defRPr>
     </a:lvl3pPr>
-    <a:lvl4pPr xmlns:a="http://schemas.openxmlformats.org/drawingml/2006/main" marL="1371600" indent="0" algn="l" defTabSz="914400">
+    <a:lvl4pPr marL="1371600" indent="0" algn="l" defTabSz="914400">
       <a:defRPr sz="1800" kern="1200">
         <a:solidFill>
           <a:schemeClr val="tx1"/>
@@ -60,7 +60,7 @@
         <a:cs typeface="+mn-cs"/>
       </a:defRPr>
     </a:lvl4pPr>
-    <a:lvl5pPr xmlns:a="http://schemas.openxmlformats.org/drawingml/2006/main" marL="1828800" indent="0" algn="l" defTabSz="914400">
+    <a:lvl5pPr marL="1828800" indent="0" algn="l" defTabSz="914400">
       <a:defRPr sz="1800" kern="1200">
         <a:solidFill>
           <a:schemeClr val="tx1"/>
@@ -70,7 +70,7 @@
         <a:cs typeface="+mn-cs"/>
       </a:defRPr>
     </a:lvl5pPr>
-    <a:lvl6pPr xmlns:a="http://schemas.openxmlformats.org/drawingml/2006/main" marL="2286000" indent="0" algn="l" defTabSz="914400">
+    <a:lvl6pPr marL="2286000" indent="0" algn="l" defTabSz="914400">
       <a:defRPr sz="1800" kern="1200">
         <a:solidFill>
           <a:schemeClr val="tx1"/>
@@ -80,7 +80,7 @@
         <a:cs typeface="+mn-cs"/>
       </a:defRPr>
     </a:lvl6pPr>
-    <a:lvl7pPr xmlns:a="http://schemas.openxmlformats.org/drawingml/2006/main" marL="2743200" indent="0" algn="l" defTabSz="914400">
+    <a:lvl7pPr marL="2743200" indent="0" algn="l" defTabSz="914400">
       <a:defRPr sz="1800" kern="1200">
         <a:solidFill>
           <a:schemeClr val="tx1"/>
@@ -90,7 +90,7 @@
         <a:cs typeface="+mn-cs"/>
       </a:defRPr>
     </a:lvl7pPr>
-    <a:lvl8pPr xmlns:a="http://schemas.openxmlformats.org/drawingml/2006/main" marL="3200400" indent="0" algn="l" defTabSz="914400">
+    <a:lvl8pPr marL="3200400" indent="0" algn="l" defTabSz="914400">
       <a:defRPr sz="1800" kern="1200">
         <a:solidFill>
           <a:schemeClr val="tx1"/>
@@ -100,7 +100,7 @@
         <a:cs typeface="+mn-cs"/>
       </a:defRPr>
     </a:lvl8pPr>
-    <a:lvl9pPr xmlns:a="http://schemas.openxmlformats.org/drawingml/2006/main" marL="3657600" indent="0" algn="l" defTabSz="914400">
+    <a:lvl9pPr marL="3657600" indent="0" algn="l" defTabSz="914400">
       <a:defRPr sz="1800" kern="1200">
         <a:solidFill>
           <a:schemeClr val="tx1"/>
@@ -115,11 +115,11 @@
 </file>
 
 <file path=ppt/notesMasters/notesMaster1.xml><?xml version="1.0" encoding="utf-8"?>
-<p:notesMaster xmlns:p="http://schemas.openxmlformats.org/presentationml/2006/main">
+<p:notesMaster xmlns:a="http://schemas.openxmlformats.org/drawingml/2006/main" xmlns:r="http://schemas.openxmlformats.org/officeDocument/2006/relationships" xmlns:p="http://schemas.openxmlformats.org/presentationml/2006/main">
   <p:cSld>
     <p:bg>
       <p:bgRef idx="1001">
-        <a:schemeClr xmlns:a="http://schemas.openxmlformats.org/drawingml/2006/main" val="bg1"/>
+        <a:schemeClr val="bg1"/>
       </p:bgRef>
     </p:bg>
     <p:spTree>
@@ -129,380 +129,164 @@
         <p:nvPr/>
       </p:nvGrpSpPr>
       <p:grpSpPr>
-        <a:xfrm xmlns:a="http://schemas.openxmlformats.org/drawingml/2006/main"/>
+        <a:xfrm>
+          <a:off x="0" y="0"/>
+          <a:ext cx="0" cy="0"/>
+          <a:chOff x="0" y="0"/>
+          <a:chExt cx="0" cy="0"/>
+        </a:xfrm>
       </p:grpSpPr>
       <p:sp>
         <p:nvSpPr>
           <p:cNvPr id="2" name="Header Placeholder"/>
-          <p:cNvSpPr/>
+          <p:cNvSpPr>
+            <a:spLocks noGrp="1"/>
+          </p:cNvSpPr>
           <p:nvPr>
             <p:ph type="hdr" sz="quarter"/>
           </p:nvPr>
         </p:nvSpPr>
         <p:spPr>
-          <a:prstGeom xmlns:a="http://schemas.openxmlformats.org/drawingml/2006/main" prst="rect">
-            <a:avLst/>
-          </a:prstGeom>
-        </p:spPr>
-        <p:txBody>
-          <a:bodyPr xmlns:a="http://schemas.openxmlformats.org/drawingml/2006/main"/>
-          <a:lstStyle xmlns:a="http://schemas.openxmlformats.org/drawingml/2006/main"/>
-          <a:p xmlns:a="http://schemas.openxmlformats.org/drawingml/2006/main"/>
+          <a:prstGeom prst="rect">
+            <a:avLst/>
+          </a:prstGeom>
+        </p:spPr>
+        <p:txBody>
+          <a:bodyPr/>
+          <a:lstStyle/>
+          <a:p>
+            <a:endParaRPr/>
+          </a:p>
         </p:txBody>
       </p:sp>
       <p:sp>
         <p:nvSpPr>
           <p:cNvPr id="3" name="Date Placeholder"/>
-          <p:cNvSpPr/>
+          <p:cNvSpPr>
+            <a:spLocks noGrp="1"/>
+          </p:cNvSpPr>
           <p:nvPr>
             <p:ph type="dt" sz="quarter" idx="1"/>
           </p:nvPr>
         </p:nvSpPr>
         <p:spPr>
-          <a:prstGeom xmlns:a="http://schemas.openxmlformats.org/drawingml/2006/main" prst="rect">
-            <a:avLst/>
-          </a:prstGeom>
-        </p:spPr>
-        <p:txBody>
-          <a:bodyPr xmlns:a="http://schemas.openxmlformats.org/drawingml/2006/main"/>
-          <a:lstStyle xmlns:a="http://schemas.openxmlformats.org/drawingml/2006/main"/>
-          <a:p xmlns:a="http://schemas.openxmlformats.org/drawingml/2006/main"/>
+          <a:prstGeom prst="rect">
+            <a:avLst/>
+          </a:prstGeom>
+        </p:spPr>
+        <p:txBody>
+          <a:bodyPr/>
+          <a:lstStyle/>
+          <a:p>
+            <a:endParaRPr/>
+          </a:p>
         </p:txBody>
       </p:sp>
       <p:sp>
         <p:nvSpPr>
           <p:cNvPr id="4" name="Slide Image Placeholder"/>
-          <p:cNvSpPr/>
+          <p:cNvSpPr>
+            <a:spLocks noGrp="1" noRot="1" noChangeAspect="1"/>
+          </p:cNvSpPr>
           <p:nvPr>
             <p:ph type="sldImg" idx="2"/>
           </p:nvPr>
         </p:nvSpPr>
         <p:spPr>
-          <a:prstGeom xmlns:a="http://schemas.openxmlformats.org/drawingml/2006/main" prst="rect">
-            <a:avLst/>
-          </a:prstGeom>
-        </p:spPr>
-        <p:txBody>
-          <a:bodyPr xmlns:a="http://schemas.openxmlformats.org/drawingml/2006/main"/>
-          <a:lstStyle xmlns:a="http://schemas.openxmlformats.org/drawingml/2006/main"/>
-          <a:p xmlns:a="http://schemas.openxmlformats.org/drawingml/2006/main"/>
+          <a:prstGeom prst="rect">
+            <a:avLst/>
+          </a:prstGeom>
+        </p:spPr>
+        <p:txBody>
+          <a:bodyPr/>
+          <a:lstStyle/>
+          <a:p>
+            <a:endParaRPr/>
+          </a:p>
         </p:txBody>
       </p:sp>
       <p:sp>
         <p:nvSpPr>
           <p:cNvPr id="5" name="Notes Placeholder"/>
-          <p:cNvSpPr/>
+          <p:cNvSpPr>
+            <a:spLocks noGrp="1"/>
+          </p:cNvSpPr>
           <p:nvPr>
             <p:ph type="body" sz="quarter" idx="3"/>
           </p:nvPr>
         </p:nvSpPr>
         <p:spPr>
-          <a:prstGeom xmlns:a="http://schemas.openxmlformats.org/drawingml/2006/main" prst="rect">
-            <a:avLst/>
-          </a:prstGeom>
-        </p:spPr>
-        <p:txBody>
-          <a:bodyPr xmlns:a="http://schemas.openxmlformats.org/drawingml/2006/main"/>
-          <a:lstStyle xmlns:a="http://schemas.openxmlformats.org/drawingml/2006/main"/>
-          <a:p xmlns:a="http://schemas.openxmlformats.org/drawingml/2006/main"/>
+          <a:prstGeom prst="rect">
+            <a:avLst/>
+          </a:prstGeom>
+        </p:spPr>
+        <p:txBody>
+          <a:bodyPr/>
+          <a:lstStyle/>
+          <a:p>
+            <a:endParaRPr/>
+          </a:p>
         </p:txBody>
       </p:sp>
       <p:sp>
         <p:nvSpPr>
           <p:cNvPr id="6" name="Footer Placeholder"/>
-          <p:cNvSpPr/>
+          <p:cNvSpPr>
+            <a:spLocks noGrp="1"/>
+          </p:cNvSpPr>
           <p:nvPr>
             <p:ph type="ftr" sz="quarter" idx="4"/>
           </p:nvPr>
         </p:nvSpPr>
         <p:spPr>
-          <a:prstGeom xmlns:a="http://schemas.openxmlformats.org/drawingml/2006/main" prst="rect">
-            <a:avLst/>
-          </a:prstGeom>
-        </p:spPr>
-        <p:txBody>
-          <a:bodyPr xmlns:a="http://schemas.openxmlformats.org/drawingml/2006/main"/>
-          <a:lstStyle xmlns:a="http://schemas.openxmlformats.org/drawingml/2006/main"/>
-          <a:p xmlns:a="http://schemas.openxmlformats.org/drawingml/2006/main"/>
+          <a:prstGeom prst="rect">
+            <a:avLst/>
+          </a:prstGeom>
+        </p:spPr>
+        <p:txBody>
+          <a:bodyPr/>
+          <a:lstStyle/>
+          <a:p>
+            <a:endParaRPr/>
+          </a:p>
         </p:txBody>
       </p:sp>
       <p:sp>
         <p:nvSpPr>
           <p:cNvPr id="7" name="Slide Number Placeholder"/>
-          <p:cNvSpPr/>
+          <p:cNvSpPr>
+            <a:spLocks noGrp="1"/>
+          </p:cNvSpPr>
           <p:nvPr>
             <p:ph type="sldNum" sz="quarter" idx="5"/>
           </p:nvPr>
         </p:nvSpPr>
         <p:spPr>
-          <a:prstGeom xmlns:a="http://schemas.openxmlformats.org/drawingml/2006/main" prst="rect">
-            <a:avLst/>
-          </a:prstGeom>
-        </p:spPr>
-        <p:txBody>
-          <a:bodyPr xmlns:a="http://schemas.openxmlformats.org/drawingml/2006/main"/>
-          <a:lstStyle xmlns:a="http://schemas.openxmlformats.org/drawingml/2006/main"/>
-          <a:p xmlns:a="http://schemas.openxmlformats.org/drawingml/2006/main"/>
+          <a:prstGeom prst="rect">
+            <a:avLst/>
+          </a:prstGeom>
+        </p:spPr>
+        <p:txBody>
+          <a:bodyPr/>
+          <a:lstStyle/>
+          <a:p>
+            <a:endParaRPr/>
+          </a:p>
         </p:txBody>
       </p:sp>
     </p:spTree>
   </p:cSld>
   <p:clrMap bg1="lt1" tx1="dk1" bg2="lt2" tx2="dk2" accent1="accent1" accent2="accent2" accent3="accent3" accent4="accent4" accent5="accent5" accent6="accent6" hlink="hlink" folHlink="folHlink"/>
   <p:notesStyle>
-    <a:lvl1pPr xmlns:a="http://schemas.openxmlformats.org/drawingml/2006/main" marL="0" algn="l" defTabSz="914400" rtl="0" eaLnBrk="1" latinLnBrk="0" hangingPunct="1">
+    <a:lvl1pPr marL="0" algn="l" defTabSz="914400" rtl="0" eaLnBrk="1" latinLnBrk="0" hangingPunct="1">
       <a:defRPr sz="1200" kern="1200"/>
     </a:lvl1pPr>
   </p:notesStyle>
 </p:notesMaster>
 </file>
 
-<file path=ppt/notesMasters/theme/theme3.xml><?xml version="1.0" encoding="utf-8"?>
-<a:theme xmlns:a="http://schemas.openxmlformats.org/drawingml/2006/main" name="ChatGPT">
-  <a:themeElements>
-    <a:clrScheme name="ChatGPT">
-      <a:dk1>
-        <a:srgbClr val="000000"/>
-      </a:dk1>
-      <a:lt1>
-        <a:srgbClr val="FFFFFF"/>
-      </a:lt1>
-      <a:dk2>
-        <a:srgbClr val="0E2841"/>
-      </a:dk2>
-      <a:lt2>
-        <a:srgbClr val="E8E8E8"/>
-      </a:lt2>
-      <a:accent1>
-        <a:srgbClr val="156082"/>
-      </a:accent1>
-      <a:accent2>
-        <a:srgbClr val="E97132"/>
-      </a:accent2>
-      <a:accent3>
-        <a:srgbClr val="196B24"/>
-      </a:accent3>
-      <a:accent4>
-        <a:srgbClr val="0F9ED5"/>
-      </a:accent4>
-      <a:accent5>
-        <a:srgbClr val="A02B93"/>
-      </a:accent5>
-      <a:accent6>
-        <a:srgbClr val="4EA72E"/>
-      </a:accent6>
-      <a:hlink>
-        <a:srgbClr val="467886"/>
-      </a:hlink>
-      <a:folHlink>
-        <a:srgbClr val="96607D"/>
-      </a:folHlink>
-    </a:clrScheme>
-    <a:fontScheme name="Office">
-      <a:majorFont>
-        <a:latin typeface="Calibri Light"/>
-        <a:ea typeface="Calibri Light"/>
-        <a:cs typeface="Calibri Light"/>
-      </a:majorFont>
-      <a:minorFont>
-        <a:latin typeface="Calibri"/>
-        <a:ea typeface="Calibri"/>
-        <a:cs typeface="Calibri"/>
-      </a:minorFont>
-    </a:fontScheme>
-    <a:fmtScheme name="ChatGPT">
-      <a:fillStyleLst>
-        <a:solidFill>
-          <a:schemeClr val="phClr"/>
-        </a:solidFill>
-        <a:gradFill>
-          <a:gsLst>
-            <a:gs pos="0">
-              <a:schemeClr val="phClr">
-                <a:tint val="67000"/>
-                <a:lumMod val="110000"/>
-                <a:satMod val="105000"/>
-              </a:schemeClr>
-            </a:gs>
-            <a:gs pos="50000">
-              <a:schemeClr val="phClr">
-                <a:tint val="73000"/>
-                <a:lumMod val="105000"/>
-                <a:satMod val="103000"/>
-              </a:schemeClr>
-            </a:gs>
-            <a:gs pos="100000">
-              <a:schemeClr val="phClr">
-                <a:tint val="81000"/>
-                <a:lumMod val="105000"/>
-                <a:satMod val="109000"/>
-              </a:schemeClr>
-            </a:gs>
-          </a:gsLst>
-          <a:lin ang="5400000" scaled="0"/>
-        </a:gradFill>
-        <a:gradFill>
-          <a:gsLst>
-            <a:gs pos="0">
-              <a:schemeClr val="phClr">
-                <a:tint val="94000"/>
-                <a:lumMod val="102000"/>
-                <a:satMod val="103000"/>
-              </a:schemeClr>
-            </a:gs>
-            <a:gs pos="50000">
-              <a:schemeClr val="phClr">
-                <a:shade val="100000"/>
-                <a:lumMod val="100000"/>
-                <a:satMod val="110000"/>
-              </a:schemeClr>
-            </a:gs>
-            <a:gs pos="100000">
-              <a:schemeClr val="phClr">
-                <a:shade val="78000"/>
-                <a:lumMod val="99000"/>
-                <a:satMod val="120000"/>
-              </a:schemeClr>
-            </a:gs>
-          </a:gsLst>
-          <a:lin ang="5400000" scaled="0"/>
-        </a:gradFill>
-      </a:fillStyleLst>
-      <a:lnStyleLst>
-        <a:ln w="12700">
-          <a:solidFill>
-            <a:schemeClr val="phClr"/>
-          </a:solidFill>
-          <a:prstDash val="solid"/>
-        </a:ln>
-        <a:ln w="19050">
-          <a:solidFill>
-            <a:schemeClr val="phClr"/>
-          </a:solidFill>
-          <a:prstDash val="solid"/>
-        </a:ln>
-        <a:ln w="25400">
-          <a:solidFill>
-            <a:schemeClr val="phClr"/>
-          </a:solidFill>
-          <a:prstDash val="solid"/>
-        </a:ln>
-      </a:lnStyleLst>
-      <a:effectStyleLst>
-        <a:effectStyle>
-          <a:effectLst/>
-        </a:effectStyle>
-        <a:effectStyle>
-          <a:effectLst/>
-        </a:effectStyle>
-        <a:effectStyle>
-          <a:effectLst>
-            <a:outerShdw blurRad="57150" dist="19050" dir="5400000">
-              <a:srgbClr val="000000">
-                <a:alpha val="16000"/>
-              </a:srgbClr>
-            </a:outerShdw>
-          </a:effectLst>
-        </a:effectStyle>
-        <a:effectStyle>
-          <a:effectLst>
-            <a:outerShdw blurRad="19050" dist="9525" dir="5400000">
-              <a:srgbClr val="000000">
-                <a:alpha val="6000"/>
-              </a:srgbClr>
-            </a:outerShdw>
-          </a:effectLst>
-        </a:effectStyle>
-        <a:effectStyle>
-          <a:effectLst>
-            <a:outerShdw blurRad="28575" dist="9525" dir="5400000">
-              <a:srgbClr val="000000">
-                <a:alpha val="8000"/>
-              </a:srgbClr>
-            </a:outerShdw>
-          </a:effectLst>
-        </a:effectStyle>
-        <a:effectStyle>
-          <a:effectLst>
-            <a:outerShdw blurRad="57150" dist="19050" dir="5400000">
-              <a:srgbClr val="000000">
-                <a:alpha val="10000"/>
-              </a:srgbClr>
-            </a:outerShdw>
-          </a:effectLst>
-        </a:effectStyle>
-        <a:effectStyle>
-          <a:effectLst>
-            <a:outerShdw blurRad="114300" dist="38100" dir="5400000">
-              <a:srgbClr val="000000">
-                <a:alpha val="12000"/>
-              </a:srgbClr>
-            </a:outerShdw>
-          </a:effectLst>
-        </a:effectStyle>
-        <a:effectStyle>
-          <a:effectLst>
-            <a:outerShdw blurRad="171450" dist="57150" dir="5400000">
-              <a:srgbClr val="000000">
-                <a:alpha val="16000"/>
-              </a:srgbClr>
-            </a:outerShdw>
-          </a:effectLst>
-        </a:effectStyle>
-        <a:effectStyle>
-          <a:effectLst>
-            <a:outerShdw blurRad="266700" dist="95250" dir="5400000">
-              <a:srgbClr val="000000">
-                <a:alpha val="24000"/>
-              </a:srgbClr>
-            </a:outerShdw>
-          </a:effectLst>
-        </a:effectStyle>
-      </a:effectStyleLst>
-      <a:bgFillStyleLst>
-        <a:solidFill>
-          <a:schemeClr val="phClr"/>
-        </a:solidFill>
-        <a:solidFill>
-          <a:schemeClr val="phClr">
-            <a:tint val="95000"/>
-            <a:satMod val="170000"/>
-          </a:schemeClr>
-        </a:solidFill>
-        <a:gradFill>
-          <a:gsLst>
-            <a:gs pos="0">
-              <a:schemeClr val="phClr">
-                <a:tint val="93000"/>
-                <a:shade val="98000"/>
-                <a:lumMod val="102000"/>
-                <a:satMod val="150000"/>
-              </a:schemeClr>
-            </a:gs>
-            <a:gs pos="50000">
-              <a:schemeClr val="phClr">
-                <a:tint val="98000"/>
-                <a:shade val="90000"/>
-                <a:lumMod val="103000"/>
-                <a:satMod val="130000"/>
-              </a:schemeClr>
-            </a:gs>
-            <a:gs pos="100000">
-              <a:schemeClr val="phClr">
-                <a:shade val="63000"/>
-                <a:satMod val="120000"/>
-              </a:schemeClr>
-            </a:gs>
-          </a:gsLst>
-          <a:lin ang="5400000" scaled="0"/>
-        </a:gradFill>
-      </a:bgFillStyleLst>
-    </a:fmtScheme>
-  </a:themeElements>
-</a:theme>
-</file>
-
 <file path=ppt/notesSlides/notesSlide1.xml><?xml version="1.0" encoding="utf-8"?>
-<p:notes xmlns:p="http://schemas.openxmlformats.org/presentationml/2006/main">
+<p:notes xmlns:a="http://schemas.openxmlformats.org/drawingml/2006/main" xmlns:r="http://schemas.openxmlformats.org/officeDocument/2006/relationships" xmlns:p="http://schemas.openxmlformats.org/presentationml/2006/main">
   <p:cSld>
     <p:spTree>
       <p:nvGrpSpPr>
@@ -511,16 +295,21 @@
         <p:nvPr/>
       </p:nvGrpSpPr>
       <p:grpSpPr>
-        <a:xfrm xmlns:a="http://schemas.openxmlformats.org/drawingml/2006/main"/>
+        <a:xfrm>
+          <a:off x="0" y="0"/>
+          <a:ext cx="0" cy="0"/>
+          <a:chOff x="0" y="0"/>
+          <a:chExt cx="0" cy="0"/>
+        </a:xfrm>
       </p:grpSpPr>
       <p:sp>
         <p:nvSpPr>
           <p:cNvPr id="2" name="Slide Image Placeholder 1"/>
           <p:cNvSpPr>
-            <a:spLocks xmlns:a="http://schemas.openxmlformats.org/drawingml/2006/main" noGrp="1"/>
+            <a:spLocks noGrp="1" noRot="1" noChangeAspect="1"/>
           </p:cNvSpPr>
           <p:nvPr>
-            <p:ph type="sldImg" idx="0"/>
+            <p:ph type="sldImg"/>
           </p:nvPr>
         </p:nvSpPr>
         <p:spPr/>
@@ -529,7 +318,7 @@
         <p:nvSpPr>
           <p:cNvPr id="3" name="Notes Placeholder 2"/>
           <p:cNvSpPr>
-            <a:spLocks xmlns:a="http://schemas.openxmlformats.org/drawingml/2006/main" noGrp="1"/>
+            <a:spLocks noGrp="1"/>
           </p:cNvSpPr>
           <p:nvPr>
             <p:ph type="body" idx="1"/>
@@ -537,16 +326,18 @@
         </p:nvSpPr>
         <p:spPr/>
         <p:txBody>
-          <a:bodyPr xmlns:a="http://schemas.openxmlformats.org/drawingml/2006/main"/>
-          <a:lstStyle xmlns:a="http://schemas.openxmlformats.org/drawingml/2006/main"/>
-          <a:p xmlns:a="http://schemas.openxmlformats.org/drawingml/2006/main"/>
+          <a:bodyPr/>
+          <a:lstStyle/>
+          <a:p>
+            <a:endParaRPr/>
+          </a:p>
         </p:txBody>
       </p:sp>
       <p:sp>
         <p:nvSpPr>
           <p:cNvPr id="4" name="Slide Number Placeholder 3"/>
           <p:cNvSpPr>
-            <a:spLocks xmlns:a="http://schemas.openxmlformats.org/drawingml/2006/main" noGrp="1"/>
+            <a:spLocks noGrp="1"/>
           </p:cNvSpPr>
           <p:nvPr>
             <p:ph type="sldNum" idx="5"/>
@@ -554,21 +345,23 @@
         </p:nvSpPr>
         <p:spPr/>
         <p:txBody>
-          <a:bodyPr xmlns:a="http://schemas.openxmlformats.org/drawingml/2006/main"/>
-          <a:lstStyle xmlns:a="http://schemas.openxmlformats.org/drawingml/2006/main"/>
-          <a:p xmlns:a="http://schemas.openxmlformats.org/drawingml/2006/main"/>
+          <a:bodyPr/>
+          <a:lstStyle/>
+          <a:p>
+            <a:endParaRPr/>
+          </a:p>
         </p:txBody>
       </p:sp>
     </p:spTree>
   </p:cSld>
   <p:clrMapOvr>
-    <a:masterClrMapping xmlns:a="http://schemas.openxmlformats.org/drawingml/2006/main"/>
+    <a:masterClrMapping/>
   </p:clrMapOvr>
 </p:notes>
 </file>
 
 <file path=ppt/notesSlides/notesSlide2.xml><?xml version="1.0" encoding="utf-8"?>
-<p:notes xmlns:p="http://schemas.openxmlformats.org/presentationml/2006/main">
+<p:notes xmlns:a="http://schemas.openxmlformats.org/drawingml/2006/main" xmlns:r="http://schemas.openxmlformats.org/officeDocument/2006/relationships" xmlns:p="http://schemas.openxmlformats.org/presentationml/2006/main">
   <p:cSld>
     <p:spTree>
       <p:nvGrpSpPr>
@@ -577,16 +370,21 @@
         <p:nvPr/>
       </p:nvGrpSpPr>
       <p:grpSpPr>
-        <a:xfrm xmlns:a="http://schemas.openxmlformats.org/drawingml/2006/main"/>
+        <a:xfrm>
+          <a:off x="0" y="0"/>
+          <a:ext cx="0" cy="0"/>
+          <a:chOff x="0" y="0"/>
+          <a:chExt cx="0" cy="0"/>
+        </a:xfrm>
       </p:grpSpPr>
       <p:sp>
         <p:nvSpPr>
           <p:cNvPr id="2" name="Slide Image Placeholder 1"/>
           <p:cNvSpPr>
-            <a:spLocks xmlns:a="http://schemas.openxmlformats.org/drawingml/2006/main" noGrp="1"/>
+            <a:spLocks noGrp="1" noRot="1" noChangeAspect="1"/>
           </p:cNvSpPr>
           <p:nvPr>
-            <p:ph type="sldImg" idx="0"/>
+            <p:ph type="sldImg"/>
           </p:nvPr>
         </p:nvSpPr>
         <p:spPr/>
@@ -595,7 +393,7 @@
         <p:nvSpPr>
           <p:cNvPr id="3" name="Notes Placeholder 2"/>
           <p:cNvSpPr>
-            <a:spLocks xmlns:a="http://schemas.openxmlformats.org/drawingml/2006/main" noGrp="1"/>
+            <a:spLocks noGrp="1"/>
           </p:cNvSpPr>
           <p:nvPr>
             <p:ph type="body" idx="1"/>
@@ -603,16 +401,18 @@
         </p:nvSpPr>
         <p:spPr/>
         <p:txBody>
-          <a:bodyPr xmlns:a="http://schemas.openxmlformats.org/drawingml/2006/main"/>
-          <a:lstStyle xmlns:a="http://schemas.openxmlformats.org/drawingml/2006/main"/>
-          <a:p xmlns:a="http://schemas.openxmlformats.org/drawingml/2006/main"/>
+          <a:bodyPr/>
+          <a:lstStyle/>
+          <a:p>
+            <a:endParaRPr/>
+          </a:p>
         </p:txBody>
       </p:sp>
       <p:sp>
         <p:nvSpPr>
           <p:cNvPr id="4" name="Slide Number Placeholder 3"/>
           <p:cNvSpPr>
-            <a:spLocks xmlns:a="http://schemas.openxmlformats.org/drawingml/2006/main" noGrp="1"/>
+            <a:spLocks noGrp="1"/>
           </p:cNvSpPr>
           <p:nvPr>
             <p:ph type="sldNum" idx="5"/>
@@ -620,21 +420,23 @@
         </p:nvSpPr>
         <p:spPr/>
         <p:txBody>
-          <a:bodyPr xmlns:a="http://schemas.openxmlformats.org/drawingml/2006/main"/>
-          <a:lstStyle xmlns:a="http://schemas.openxmlformats.org/drawingml/2006/main"/>
-          <a:p xmlns:a="http://schemas.openxmlformats.org/drawingml/2006/main"/>
+          <a:bodyPr/>
+          <a:lstStyle/>
+          <a:p>
+            <a:endParaRPr/>
+          </a:p>
         </p:txBody>
       </p:sp>
     </p:spTree>
   </p:cSld>
   <p:clrMapOvr>
-    <a:masterClrMapping xmlns:a="http://schemas.openxmlformats.org/drawingml/2006/main"/>
+    <a:masterClrMapping/>
   </p:clrMapOvr>
 </p:notes>
 </file>
 
 <file path=ppt/notesSlides/notesSlide3.xml><?xml version="1.0" encoding="utf-8"?>
-<p:notes xmlns:p="http://schemas.openxmlformats.org/presentationml/2006/main">
+<p:notes xmlns:a="http://schemas.openxmlformats.org/drawingml/2006/main" xmlns:r="http://schemas.openxmlformats.org/officeDocument/2006/relationships" xmlns:p="http://schemas.openxmlformats.org/presentationml/2006/main">
   <p:cSld>
     <p:spTree>
       <p:nvGrpSpPr>
@@ -643,16 +445,21 @@
         <p:nvPr/>
       </p:nvGrpSpPr>
       <p:grpSpPr>
-        <a:xfrm xmlns:a="http://schemas.openxmlformats.org/drawingml/2006/main"/>
+        <a:xfrm>
+          <a:off x="0" y="0"/>
+          <a:ext cx="0" cy="0"/>
+          <a:chOff x="0" y="0"/>
+          <a:chExt cx="0" cy="0"/>
+        </a:xfrm>
       </p:grpSpPr>
       <p:sp>
         <p:nvSpPr>
           <p:cNvPr id="2" name="Slide Image Placeholder 1"/>
           <p:cNvSpPr>
-            <a:spLocks xmlns:a="http://schemas.openxmlformats.org/drawingml/2006/main" noGrp="1"/>
+            <a:spLocks noGrp="1" noRot="1" noChangeAspect="1"/>
           </p:cNvSpPr>
           <p:nvPr>
-            <p:ph type="sldImg" idx="0"/>
+            <p:ph type="sldImg"/>
           </p:nvPr>
         </p:nvSpPr>
         <p:spPr/>
@@ -661,7 +468,7 @@
         <p:nvSpPr>
           <p:cNvPr id="3" name="Notes Placeholder 2"/>
           <p:cNvSpPr>
-            <a:spLocks xmlns:a="http://schemas.openxmlformats.org/drawingml/2006/main" noGrp="1"/>
+            <a:spLocks noGrp="1"/>
           </p:cNvSpPr>
           <p:nvPr>
             <p:ph type="body" idx="1"/>
@@ -669,16 +476,18 @@
         </p:nvSpPr>
         <p:spPr/>
         <p:txBody>
-          <a:bodyPr xmlns:a="http://schemas.openxmlformats.org/drawingml/2006/main"/>
-          <a:lstStyle xmlns:a="http://schemas.openxmlformats.org/drawingml/2006/main"/>
-          <a:p xmlns:a="http://schemas.openxmlformats.org/drawingml/2006/main"/>
+          <a:bodyPr/>
+          <a:lstStyle/>
+          <a:p>
+            <a:endParaRPr/>
+          </a:p>
         </p:txBody>
       </p:sp>
       <p:sp>
         <p:nvSpPr>
           <p:cNvPr id="4" name="Slide Number Placeholder 3"/>
           <p:cNvSpPr>
-            <a:spLocks xmlns:a="http://schemas.openxmlformats.org/drawingml/2006/main" noGrp="1"/>
+            <a:spLocks noGrp="1"/>
           </p:cNvSpPr>
           <p:nvPr>
             <p:ph type="sldNum" idx="5"/>
@@ -686,21 +495,23 @@
         </p:nvSpPr>
         <p:spPr/>
         <p:txBody>
-          <a:bodyPr xmlns:a="http://schemas.openxmlformats.org/drawingml/2006/main"/>
-          <a:lstStyle xmlns:a="http://schemas.openxmlformats.org/drawingml/2006/main"/>
-          <a:p xmlns:a="http://schemas.openxmlformats.org/drawingml/2006/main"/>
+          <a:bodyPr/>
+          <a:lstStyle/>
+          <a:p>
+            <a:endParaRPr/>
+          </a:p>
         </p:txBody>
       </p:sp>
     </p:spTree>
   </p:cSld>
   <p:clrMapOvr>
-    <a:masterClrMapping xmlns:a="http://schemas.openxmlformats.org/drawingml/2006/main"/>
+    <a:masterClrMapping/>
   </p:clrMapOvr>
 </p:notes>
 </file>
 
 <file path=ppt/notesSlides/notesSlide4.xml><?xml version="1.0" encoding="utf-8"?>
-<p:notes xmlns:p="http://schemas.openxmlformats.org/presentationml/2006/main">
+<p:notes xmlns:a="http://schemas.openxmlformats.org/drawingml/2006/main" xmlns:r="http://schemas.openxmlformats.org/officeDocument/2006/relationships" xmlns:p="http://schemas.openxmlformats.org/presentationml/2006/main">
   <p:cSld>
     <p:spTree>
       <p:nvGrpSpPr>
@@ -709,16 +520,21 @@
         <p:nvPr/>
       </p:nvGrpSpPr>
       <p:grpSpPr>
-        <a:xfrm xmlns:a="http://schemas.openxmlformats.org/drawingml/2006/main"/>
+        <a:xfrm>
+          <a:off x="0" y="0"/>
+          <a:ext cx="0" cy="0"/>
+          <a:chOff x="0" y="0"/>
+          <a:chExt cx="0" cy="0"/>
+        </a:xfrm>
       </p:grpSpPr>
       <p:sp>
         <p:nvSpPr>
           <p:cNvPr id="2" name="Slide Image Placeholder 1"/>
           <p:cNvSpPr>
-            <a:spLocks xmlns:a="http://schemas.openxmlformats.org/drawingml/2006/main" noGrp="1"/>
+            <a:spLocks noGrp="1" noRot="1" noChangeAspect="1"/>
           </p:cNvSpPr>
           <p:nvPr>
-            <p:ph type="sldImg" idx="0"/>
+            <p:ph type="sldImg"/>
           </p:nvPr>
         </p:nvSpPr>
         <p:spPr/>
@@ -727,7 +543,7 @@
         <p:nvSpPr>
           <p:cNvPr id="3" name="Notes Placeholder 2"/>
           <p:cNvSpPr>
-            <a:spLocks xmlns:a="http://schemas.openxmlformats.org/drawingml/2006/main" noGrp="1"/>
+            <a:spLocks noGrp="1"/>
           </p:cNvSpPr>
           <p:nvPr>
             <p:ph type="body" idx="1"/>
@@ -735,16 +551,18 @@
         </p:nvSpPr>
         <p:spPr/>
         <p:txBody>
-          <a:bodyPr xmlns:a="http://schemas.openxmlformats.org/drawingml/2006/main"/>
-          <a:lstStyle xmlns:a="http://schemas.openxmlformats.org/drawingml/2006/main"/>
-          <a:p xmlns:a="http://schemas.openxmlformats.org/drawingml/2006/main"/>
+          <a:bodyPr/>
+          <a:lstStyle/>
+          <a:p>
+            <a:endParaRPr/>
+          </a:p>
         </p:txBody>
       </p:sp>
       <p:sp>
         <p:nvSpPr>
           <p:cNvPr id="4" name="Slide Number Placeholder 3"/>
           <p:cNvSpPr>
-            <a:spLocks xmlns:a="http://schemas.openxmlformats.org/drawingml/2006/main" noGrp="1"/>
+            <a:spLocks noGrp="1"/>
           </p:cNvSpPr>
           <p:nvPr>
             <p:ph type="sldNum" idx="5"/>
@@ -752,21 +570,23 @@
         </p:nvSpPr>
         <p:spPr/>
         <p:txBody>
-          <a:bodyPr xmlns:a="http://schemas.openxmlformats.org/drawingml/2006/main"/>
-          <a:lstStyle xmlns:a="http://schemas.openxmlformats.org/drawingml/2006/main"/>
-          <a:p xmlns:a="http://schemas.openxmlformats.org/drawingml/2006/main"/>
+          <a:bodyPr/>
+          <a:lstStyle/>
+          <a:p>
+            <a:endParaRPr/>
+          </a:p>
         </p:txBody>
       </p:sp>
     </p:spTree>
   </p:cSld>
   <p:clrMapOvr>
-    <a:masterClrMapping xmlns:a="http://schemas.openxmlformats.org/drawingml/2006/main"/>
+    <a:masterClrMapping/>
   </p:clrMapOvr>
 </p:notes>
 </file>
 
 <file path=ppt/notesSlides/notesSlide5.xml><?xml version="1.0" encoding="utf-8"?>
-<p:notes xmlns:p="http://schemas.openxmlformats.org/presentationml/2006/main">
+<p:notes xmlns:a="http://schemas.openxmlformats.org/drawingml/2006/main" xmlns:r="http://schemas.openxmlformats.org/officeDocument/2006/relationships" xmlns:p="http://schemas.openxmlformats.org/presentationml/2006/main">
   <p:cSld>
     <p:spTree>
       <p:nvGrpSpPr>
@@ -775,16 +595,21 @@
         <p:nvPr/>
       </p:nvGrpSpPr>
       <p:grpSpPr>
-        <a:xfrm xmlns:a="http://schemas.openxmlformats.org/drawingml/2006/main"/>
+        <a:xfrm>
+          <a:off x="0" y="0"/>
+          <a:ext cx="0" cy="0"/>
+          <a:chOff x="0" y="0"/>
+          <a:chExt cx="0" cy="0"/>
+        </a:xfrm>
       </p:grpSpPr>
       <p:sp>
         <p:nvSpPr>
           <p:cNvPr id="2" name="Slide Image Placeholder 1"/>
           <p:cNvSpPr>
-            <a:spLocks xmlns:a="http://schemas.openxmlformats.org/drawingml/2006/main" noGrp="1"/>
+            <a:spLocks noGrp="1" noRot="1" noChangeAspect="1"/>
           </p:cNvSpPr>
           <p:nvPr>
-            <p:ph type="sldImg" idx="0"/>
+            <p:ph type="sldImg"/>
           </p:nvPr>
         </p:nvSpPr>
         <p:spPr/>
@@ -793,7 +618,7 @@
         <p:nvSpPr>
           <p:cNvPr id="3" name="Notes Placeholder 2"/>
           <p:cNvSpPr>
-            <a:spLocks xmlns:a="http://schemas.openxmlformats.org/drawingml/2006/main" noGrp="1"/>
+            <a:spLocks noGrp="1"/>
           </p:cNvSpPr>
           <p:nvPr>
             <p:ph type="body" idx="1"/>
@@ -801,16 +626,18 @@
         </p:nvSpPr>
         <p:spPr/>
         <p:txBody>
-          <a:bodyPr xmlns:a="http://schemas.openxmlformats.org/drawingml/2006/main"/>
-          <a:lstStyle xmlns:a="http://schemas.openxmlformats.org/drawingml/2006/main"/>
-          <a:p xmlns:a="http://schemas.openxmlformats.org/drawingml/2006/main"/>
+          <a:bodyPr/>
+          <a:lstStyle/>
+          <a:p>
+            <a:endParaRPr/>
+          </a:p>
         </p:txBody>
       </p:sp>
       <p:sp>
         <p:nvSpPr>
           <p:cNvPr id="4" name="Slide Number Placeholder 3"/>
           <p:cNvSpPr>
-            <a:spLocks xmlns:a="http://schemas.openxmlformats.org/drawingml/2006/main" noGrp="1"/>
+            <a:spLocks noGrp="1"/>
           </p:cNvSpPr>
           <p:nvPr>
             <p:ph type="sldNum" idx="5"/>
@@ -818,21 +645,23 @@
         </p:nvSpPr>
         <p:spPr/>
         <p:txBody>
-          <a:bodyPr xmlns:a="http://schemas.openxmlformats.org/drawingml/2006/main"/>
-          <a:lstStyle xmlns:a="http://schemas.openxmlformats.org/drawingml/2006/main"/>
-          <a:p xmlns:a="http://schemas.openxmlformats.org/drawingml/2006/main"/>
+          <a:bodyPr/>
+          <a:lstStyle/>
+          <a:p>
+            <a:endParaRPr/>
+          </a:p>
         </p:txBody>
       </p:sp>
     </p:spTree>
   </p:cSld>
   <p:clrMapOvr>
-    <a:masterClrMapping xmlns:a="http://schemas.openxmlformats.org/drawingml/2006/main"/>
+    <a:masterClrMapping/>
   </p:clrMapOvr>
 </p:notes>
 </file>
 
 <file path=ppt/slideLayouts/slideLayout1.xml><?xml version="1.0" encoding="utf-8"?>
-<p:sldLayout xmlns:p="http://schemas.openxmlformats.org/presentationml/2006/main" type="title">
+<p:sldLayout xmlns:a="http://schemas.openxmlformats.org/drawingml/2006/main" xmlns:r="http://schemas.openxmlformats.org/officeDocument/2006/relationships" xmlns:p="http://schemas.openxmlformats.org/presentationml/2006/main" type="title">
   <p:cSld name="Title Slide">
     <p:spTree>
       <p:nvGrpSpPr>
@@ -841,19 +670,27 @@
         <p:nvPr/>
       </p:nvGrpSpPr>
       <p:grpSpPr>
-        <a:xfrm xmlns:a="http://schemas.openxmlformats.org/drawingml/2006/main"/>
+        <a:xfrm>
+          <a:off x="0" y="0"/>
+          <a:ext cx="0" cy="0"/>
+          <a:chOff x="0" y="0"/>
+          <a:chExt cx="0" cy="0"/>
+        </a:xfrm>
       </p:grpSpPr>
     </p:spTree>
   </p:cSld>
+  <p:clrMapOvr>
+    <a:masterClrMapping/>
+  </p:clrMapOvr>
 </p:sldLayout>
 </file>
 
 <file path=ppt/slideMasters/slideMaster1.xml><?xml version="1.0" encoding="utf-8"?>
-<p:sldMaster xmlns:p="http://schemas.openxmlformats.org/presentationml/2006/main">
+<p:sldMaster xmlns:a="http://schemas.openxmlformats.org/drawingml/2006/main" xmlns:r="http://schemas.openxmlformats.org/officeDocument/2006/relationships" xmlns:p="http://schemas.openxmlformats.org/presentationml/2006/main">
   <p:cSld name="Master">
     <p:bg>
       <p:bgRef idx="1001">
-        <a:schemeClr xmlns:a="http://schemas.openxmlformats.org/drawingml/2006/main" val="bg1"/>
+        <a:schemeClr val="bg1"/>
       </p:bgRef>
     </p:bg>
     <p:spTree>
@@ -863,17 +700,22 @@
         <p:nvPr/>
       </p:nvGrpSpPr>
       <p:grpSpPr>
-        <a:xfrm xmlns:a="http://schemas.openxmlformats.org/drawingml/2006/main"/>
+        <a:xfrm>
+          <a:off x="0" y="0"/>
+          <a:ext cx="0" cy="0"/>
+          <a:chOff x="0" y="0"/>
+          <a:chExt cx="0" cy="0"/>
+        </a:xfrm>
       </p:grpSpPr>
     </p:spTree>
   </p:cSld>
   <p:clrMap bg1="lt1" tx1="dk1" bg2="lt2" tx2="dk2" accent1="accent1" accent2="accent2" accent3="accent3" accent4="accent4" accent5="accent5" accent6="accent6" hlink="hlink" folHlink="folHlink"/>
   <p:sldLayoutIdLst>
-    <p:sldLayoutId xmlns:r="http://schemas.openxmlformats.org/officeDocument/2006/relationships" id="2147483649" r:id="R8514adfdc3654692"/>
+    <p:sldLayoutId id="2147483649" r:id="rId1"/>
   </p:sldLayoutIdLst>
   <p:txStyles>
     <p:titleStyle>
-      <a:lvl1pPr xmlns:a="http://schemas.openxmlformats.org/drawingml/2006/main" algn="l">
+      <a:lvl1pPr algn="l">
         <a:lnSpc>
           <a:spcPct val="90000"/>
         </a:lnSpc>
@@ -892,7 +734,7 @@
       </a:lvl1pPr>
     </p:titleStyle>
     <p:bodyStyle>
-      <a:lvl1pPr xmlns:a="http://schemas.openxmlformats.org/drawingml/2006/main" marL="228600" indent="-228600" algn="l">
+      <a:lvl1pPr marL="228600" indent="-228600" algn="l">
         <a:lnSpc>
           <a:spcPct val="90000"/>
         </a:lnSpc>
@@ -909,7 +751,7 @@
           <a:cs typeface="+mn-lt"/>
         </a:defRPr>
       </a:lvl1pPr>
-      <a:lvl2pPr xmlns:a="http://schemas.openxmlformats.org/drawingml/2006/main" marL="685800" indent="-228600" algn="l">
+      <a:lvl2pPr marL="685800" indent="-228600" algn="l">
         <a:lnSpc>
           <a:spcPct val="90000"/>
         </a:lnSpc>
@@ -926,7 +768,7 @@
           <a:cs typeface="+mn-lt"/>
         </a:defRPr>
       </a:lvl2pPr>
-      <a:lvl3pPr xmlns:a="http://schemas.openxmlformats.org/drawingml/2006/main" marL="1143000" indent="-228600" algn="l">
+      <a:lvl3pPr marL="1143000" indent="-228600" algn="l">
         <a:lnSpc>
           <a:spcPct val="90000"/>
         </a:lnSpc>
@@ -943,7 +785,7 @@
           <a:cs typeface="+mn-lt"/>
         </a:defRPr>
       </a:lvl3pPr>
-      <a:lvl4pPr xmlns:a="http://schemas.openxmlformats.org/drawingml/2006/main" marL="1600200" indent="-228600" algn="l">
+      <a:lvl4pPr marL="1600200" indent="-228600" algn="l">
         <a:lnSpc>
           <a:spcPct val="90000"/>
         </a:lnSpc>
@@ -960,7 +802,7 @@
           <a:cs typeface="+mn-lt"/>
         </a:defRPr>
       </a:lvl4pPr>
-      <a:lvl5pPr xmlns:a="http://schemas.openxmlformats.org/drawingml/2006/main" marL="2057400" indent="-228600" algn="l">
+      <a:lvl5pPr marL="2057400" indent="-228600" algn="l">
         <a:lnSpc>
           <a:spcPct val="90000"/>
         </a:lnSpc>
@@ -977,7 +819,7 @@
           <a:cs typeface="+mn-lt"/>
         </a:defRPr>
       </a:lvl5pPr>
-      <a:lvl6pPr xmlns:a="http://schemas.openxmlformats.org/drawingml/2006/main" marL="2514600" indent="-228600" algn="l">
+      <a:lvl6pPr marL="2514600" indent="-228600" algn="l">
         <a:lnSpc>
           <a:spcPct val="90000"/>
         </a:lnSpc>
@@ -994,7 +836,7 @@
           <a:cs typeface="+mn-lt"/>
         </a:defRPr>
       </a:lvl6pPr>
-      <a:lvl7pPr xmlns:a="http://schemas.openxmlformats.org/drawingml/2006/main" marL="2971800" indent="-228600" algn="l">
+      <a:lvl7pPr marL="2971800" indent="-228600" algn="l">
         <a:lnSpc>
           <a:spcPct val="90000"/>
         </a:lnSpc>
@@ -1011,7 +853,7 @@
           <a:cs typeface="+mn-lt"/>
         </a:defRPr>
       </a:lvl7pPr>
-      <a:lvl8pPr xmlns:a="http://schemas.openxmlformats.org/drawingml/2006/main" marL="3429000" indent="-228600" algn="l">
+      <a:lvl8pPr marL="3429000" indent="-228600" algn="l">
         <a:lnSpc>
           <a:spcPct val="90000"/>
         </a:lnSpc>
@@ -1028,7 +870,7 @@
           <a:cs typeface="+mn-lt"/>
         </a:defRPr>
       </a:lvl8pPr>
-      <a:lvl9pPr xmlns:a="http://schemas.openxmlformats.org/drawingml/2006/main" marL="3886200" indent="-228600" algn="l">
+      <a:lvl9pPr marL="3886200" indent="-228600" algn="l">
         <a:lnSpc>
           <a:spcPct val="90000"/>
         </a:lnSpc>
@@ -1047,7 +889,7 @@
       </a:lvl9pPr>
     </p:bodyStyle>
     <p:otherStyle>
-      <a:lvl1pPr xmlns:a="http://schemas.openxmlformats.org/drawingml/2006/main" marL="0" algn="l">
+      <a:lvl1pPr marL="0" algn="l">
         <a:buNone/>
         <a:defRPr sz="1800">
           <a:solidFill>
@@ -1058,7 +900,7 @@
           <a:cs typeface="+mn-lt"/>
         </a:defRPr>
       </a:lvl1pPr>
-      <a:lvl2pPr xmlns:a="http://schemas.openxmlformats.org/drawingml/2006/main" marL="457200" algn="l">
+      <a:lvl2pPr marL="457200" algn="l">
         <a:buNone/>
         <a:defRPr sz="1800">
           <a:solidFill>
@@ -1069,7 +911,7 @@
           <a:cs typeface="+mn-lt"/>
         </a:defRPr>
       </a:lvl2pPr>
-      <a:lvl3pPr xmlns:a="http://schemas.openxmlformats.org/drawingml/2006/main" marL="914400" algn="l">
+      <a:lvl3pPr marL="914400" algn="l">
         <a:buNone/>
         <a:defRPr sz="1800">
           <a:solidFill>
@@ -1080,7 +922,7 @@
           <a:cs typeface="+mn-lt"/>
         </a:defRPr>
       </a:lvl3pPr>
-      <a:lvl4pPr xmlns:a="http://schemas.openxmlformats.org/drawingml/2006/main" marL="1371600" algn="l">
+      <a:lvl4pPr marL="1371600" algn="l">
         <a:buNone/>
         <a:defRPr sz="1800">
           <a:solidFill>
@@ -1091,7 +933,7 @@
           <a:cs typeface="+mn-lt"/>
         </a:defRPr>
       </a:lvl4pPr>
-      <a:lvl5pPr xmlns:a="http://schemas.openxmlformats.org/drawingml/2006/main" marL="1828800" algn="l">
+      <a:lvl5pPr marL="1828800" algn="l">
         <a:buNone/>
         <a:defRPr sz="1800">
           <a:solidFill>
@@ -1102,7 +944,7 @@
           <a:cs typeface="+mn-lt"/>
         </a:defRPr>
       </a:lvl5pPr>
-      <a:lvl6pPr xmlns:a="http://schemas.openxmlformats.org/drawingml/2006/main" marL="2286000" algn="l">
+      <a:lvl6pPr marL="2286000" algn="l">
         <a:buNone/>
         <a:defRPr sz="1800">
           <a:solidFill>
@@ -1113,7 +955,7 @@
           <a:cs typeface="+mn-lt"/>
         </a:defRPr>
       </a:lvl6pPr>
-      <a:lvl7pPr xmlns:a="http://schemas.openxmlformats.org/drawingml/2006/main" marL="2743200" algn="l">
+      <a:lvl7pPr marL="2743200" algn="l">
         <a:buNone/>
         <a:defRPr sz="1800">
           <a:solidFill>
@@ -1124,7 +966,7 @@
           <a:cs typeface="+mn-lt"/>
         </a:defRPr>
       </a:lvl7pPr>
-      <a:lvl8pPr xmlns:a="http://schemas.openxmlformats.org/drawingml/2006/main" marL="3200400" algn="l">
+      <a:lvl8pPr marL="3200400" algn="l">
         <a:buNone/>
         <a:defRPr sz="1800">
           <a:solidFill>
@@ -1135,7 +977,7 @@
           <a:cs typeface="+mn-lt"/>
         </a:defRPr>
       </a:lvl8pPr>
-      <a:lvl9pPr xmlns:a="http://schemas.openxmlformats.org/drawingml/2006/main" marL="3657600" algn="l">
+      <a:lvl9pPr marL="3657600" algn="l">
         <a:buNone/>
         <a:defRPr sz="1800">
           <a:solidFill>
@@ -1151,259 +993,15 @@
 </p:sldMaster>
 </file>
 
-<file path=ppt/slideMasters/theme/theme2.xml><?xml version="1.0" encoding="utf-8"?>
-<a:theme xmlns:a="http://schemas.openxmlformats.org/drawingml/2006/main" name="ChatGPT">
-  <a:themeElements>
-    <a:clrScheme name="ChatGPT">
-      <a:dk1>
-        <a:srgbClr val="000000"/>
-      </a:dk1>
-      <a:lt1>
-        <a:srgbClr val="FFFFFF"/>
-      </a:lt1>
-      <a:dk2>
-        <a:srgbClr val="0E2841"/>
-      </a:dk2>
-      <a:lt2>
-        <a:srgbClr val="E8E8E8"/>
-      </a:lt2>
-      <a:accent1>
-        <a:srgbClr val="156082"/>
-      </a:accent1>
-      <a:accent2>
-        <a:srgbClr val="E97132"/>
-      </a:accent2>
-      <a:accent3>
-        <a:srgbClr val="196B24"/>
-      </a:accent3>
-      <a:accent4>
-        <a:srgbClr val="0F9ED5"/>
-      </a:accent4>
-      <a:accent5>
-        <a:srgbClr val="A02B93"/>
-      </a:accent5>
-      <a:accent6>
-        <a:srgbClr val="4EA72E"/>
-      </a:accent6>
-      <a:hlink>
-        <a:srgbClr val="467886"/>
-      </a:hlink>
-      <a:folHlink>
-        <a:srgbClr val="96607D"/>
-      </a:folHlink>
-    </a:clrScheme>
-    <a:fontScheme name="Office">
-      <a:majorFont>
-        <a:latin typeface="Calibri Light"/>
-        <a:ea typeface="Calibri Light"/>
-        <a:cs typeface="Calibri Light"/>
-      </a:majorFont>
-      <a:minorFont>
-        <a:latin typeface="Calibri"/>
-        <a:ea typeface="Calibri"/>
-        <a:cs typeface="Calibri"/>
-      </a:minorFont>
-    </a:fontScheme>
-    <a:fmtScheme name="ChatGPT">
-      <a:fillStyleLst>
-        <a:solidFill>
-          <a:schemeClr val="phClr"/>
-        </a:solidFill>
-        <a:gradFill>
-          <a:gsLst>
-            <a:gs pos="0">
-              <a:schemeClr val="phClr">
-                <a:tint val="67000"/>
-                <a:lumMod val="110000"/>
-                <a:satMod val="105000"/>
-              </a:schemeClr>
-            </a:gs>
-            <a:gs pos="50000">
-              <a:schemeClr val="phClr">
-                <a:tint val="73000"/>
-                <a:lumMod val="105000"/>
-                <a:satMod val="103000"/>
-              </a:schemeClr>
-            </a:gs>
-            <a:gs pos="100000">
-              <a:schemeClr val="phClr">
-                <a:tint val="81000"/>
-                <a:lumMod val="105000"/>
-                <a:satMod val="109000"/>
-              </a:schemeClr>
-            </a:gs>
-          </a:gsLst>
-          <a:lin ang="5400000" scaled="0"/>
-        </a:gradFill>
-        <a:gradFill>
-          <a:gsLst>
-            <a:gs pos="0">
-              <a:schemeClr val="phClr">
-                <a:tint val="94000"/>
-                <a:lumMod val="102000"/>
-                <a:satMod val="103000"/>
-              </a:schemeClr>
-            </a:gs>
-            <a:gs pos="50000">
-              <a:schemeClr val="phClr">
-                <a:shade val="100000"/>
-                <a:lumMod val="100000"/>
-                <a:satMod val="110000"/>
-              </a:schemeClr>
-            </a:gs>
-            <a:gs pos="100000">
-              <a:schemeClr val="phClr">
-                <a:shade val="78000"/>
-                <a:lumMod val="99000"/>
-                <a:satMod val="120000"/>
-              </a:schemeClr>
-            </a:gs>
-          </a:gsLst>
-          <a:lin ang="5400000" scaled="0"/>
-        </a:gradFill>
-      </a:fillStyleLst>
-      <a:lnStyleLst>
-        <a:ln w="12700">
-          <a:solidFill>
-            <a:schemeClr val="phClr"/>
-          </a:solidFill>
-          <a:prstDash val="solid"/>
-        </a:ln>
-        <a:ln w="19050">
-          <a:solidFill>
-            <a:schemeClr val="phClr"/>
-          </a:solidFill>
-          <a:prstDash val="solid"/>
-        </a:ln>
-        <a:ln w="25400">
-          <a:solidFill>
-            <a:schemeClr val="phClr"/>
-          </a:solidFill>
-          <a:prstDash val="solid"/>
-        </a:ln>
-      </a:lnStyleLst>
-      <a:effectStyleLst>
-        <a:effectStyle>
-          <a:effectLst/>
-        </a:effectStyle>
-        <a:effectStyle>
-          <a:effectLst/>
-        </a:effectStyle>
-        <a:effectStyle>
-          <a:effectLst>
-            <a:outerShdw blurRad="57150" dist="19050" dir="5400000">
-              <a:srgbClr val="000000">
-                <a:alpha val="16000"/>
-              </a:srgbClr>
-            </a:outerShdw>
-          </a:effectLst>
-        </a:effectStyle>
-        <a:effectStyle>
-          <a:effectLst>
-            <a:outerShdw blurRad="19050" dist="9525" dir="5400000">
-              <a:srgbClr val="000000">
-                <a:alpha val="6000"/>
-              </a:srgbClr>
-            </a:outerShdw>
-          </a:effectLst>
-        </a:effectStyle>
-        <a:effectStyle>
-          <a:effectLst>
-            <a:outerShdw blurRad="28575" dist="9525" dir="5400000">
-              <a:srgbClr val="000000">
-                <a:alpha val="8000"/>
-              </a:srgbClr>
-            </a:outerShdw>
-          </a:effectLst>
-        </a:effectStyle>
-        <a:effectStyle>
-          <a:effectLst>
-            <a:outerShdw blurRad="57150" dist="19050" dir="5400000">
-              <a:srgbClr val="000000">
-                <a:alpha val="10000"/>
-              </a:srgbClr>
-            </a:outerShdw>
-          </a:effectLst>
-        </a:effectStyle>
-        <a:effectStyle>
-          <a:effectLst>
-            <a:outerShdw blurRad="114300" dist="38100" dir="5400000">
-              <a:srgbClr val="000000">
-                <a:alpha val="12000"/>
-              </a:srgbClr>
-            </a:outerShdw>
-          </a:effectLst>
-        </a:effectStyle>
-        <a:effectStyle>
-          <a:effectLst>
-            <a:outerShdw blurRad="171450" dist="57150" dir="5400000">
-              <a:srgbClr val="000000">
-                <a:alpha val="16000"/>
-              </a:srgbClr>
-            </a:outerShdw>
-          </a:effectLst>
-        </a:effectStyle>
-        <a:effectStyle>
-          <a:effectLst>
-            <a:outerShdw blurRad="266700" dist="95250" dir="5400000">
-              <a:srgbClr val="000000">
-                <a:alpha val="24000"/>
-              </a:srgbClr>
-            </a:outerShdw>
-          </a:effectLst>
-        </a:effectStyle>
-      </a:effectStyleLst>
-      <a:bgFillStyleLst>
-        <a:solidFill>
-          <a:schemeClr val="phClr"/>
-        </a:solidFill>
-        <a:solidFill>
-          <a:schemeClr val="phClr">
-            <a:tint val="95000"/>
-            <a:satMod val="170000"/>
-          </a:schemeClr>
-        </a:solidFill>
-        <a:gradFill>
-          <a:gsLst>
-            <a:gs pos="0">
-              <a:schemeClr val="phClr">
-                <a:tint val="93000"/>
-                <a:shade val="98000"/>
-                <a:lumMod val="102000"/>
-                <a:satMod val="150000"/>
-              </a:schemeClr>
-            </a:gs>
-            <a:gs pos="50000">
-              <a:schemeClr val="phClr">
-                <a:tint val="98000"/>
-                <a:shade val="90000"/>
-                <a:lumMod val="103000"/>
-                <a:satMod val="130000"/>
-              </a:schemeClr>
-            </a:gs>
-            <a:gs pos="100000">
-              <a:schemeClr val="phClr">
-                <a:shade val="63000"/>
-                <a:satMod val="120000"/>
-              </a:schemeClr>
-            </a:gs>
-          </a:gsLst>
-          <a:lin ang="5400000" scaled="0"/>
-        </a:gradFill>
-      </a:bgFillStyleLst>
-    </a:fmtScheme>
-  </a:themeElements>
-</a:theme>
-</file>
-
 <file path=ppt/slides/slide1.xml><?xml version="1.0" encoding="utf-8"?>
-<p:sld xmlns:p="http://schemas.openxmlformats.org/presentationml/2006/main">
+<p:sld xmlns:a="http://schemas.openxmlformats.org/drawingml/2006/main" xmlns:r="http://schemas.openxmlformats.org/officeDocument/2006/relationships" xmlns:p="http://schemas.openxmlformats.org/presentationml/2006/main">
   <p:cSld>
     <p:bg>
       <p:bgPr>
-        <a:solidFill xmlns:a="http://schemas.openxmlformats.org/drawingml/2006/main">
+        <a:solidFill>
           <a:srgbClr val="FFFFFF"/>
         </a:solidFill>
+        <a:effectLst/>
       </p:bgPr>
     </p:bg>
     <p:spTree>
@@ -1413,31 +1011,36 @@
         <p:nvPr/>
       </p:nvGrpSpPr>
       <p:grpSpPr>
-        <a:xfrm xmlns:a="http://schemas.openxmlformats.org/drawingml/2006/main"/>
+        <a:xfrm>
+          <a:off x="0" y="0"/>
+          <a:ext cx="0" cy="0"/>
+          <a:chOff x="0" y="0"/>
+          <a:chExt cx="0" cy="0"/>
+        </a:xfrm>
       </p:grpSpPr>
       <p:sp>
         <p:nvSpPr>
-          <p:cNvPr id="1" name="cover-top-rule">
-            <a:extLst xmlns:a="http://schemas.openxmlformats.org/drawingml/2006/main">
+          <p:cNvPr id="13" name="cover-top-rule">
+            <a:extLst>
               <a:ext uri="{FF2B5EF4-FFF2-40B4-BE49-F238E27FC236}">
                 <a16:creationId xmlns:a16="http://schemas.microsoft.com/office/drawing/2014/main" id="{0FA0D15F-D479-44FD-8F23-DD19BDEA7F48}"/>
               </a:ext>
             </a:extLst>
           </p:cNvPr>
           <p:cNvSpPr>
-            <a:spLocks xmlns:a="http://schemas.openxmlformats.org/drawingml/2006/main" noGrp="1"/>
-          </p:cNvSpPr>
-          <p:nvPr/>
-        </p:nvSpPr>
-        <p:spPr>
-          <a:xfrm xmlns:a="http://schemas.openxmlformats.org/drawingml/2006/main">
+            <a:spLocks noGrp="1"/>
+          </p:cNvSpPr>
+          <p:nvPr/>
+        </p:nvSpPr>
+        <p:spPr>
+          <a:xfrm>
             <a:off x="400050" y="381000"/>
             <a:ext cx="11391900" cy="28575"/>
           </a:xfrm>
-          <a:prstGeom xmlns:a="http://schemas.openxmlformats.org/drawingml/2006/main" prst="rect">
-            <a:avLst/>
-          </a:prstGeom>
-          <a:solidFill xmlns:a="http://schemas.openxmlformats.org/drawingml/2006/main">
+          <a:prstGeom prst="rect">
+            <a:avLst/>
+          </a:prstGeom>
+          <a:solidFill>
             <a:srgbClr val="000000"/>
           </a:solidFill>
         </p:spPr>
@@ -1445,32 +1048,32 @@
       <p:sp>
         <p:nvSpPr>
           <p:cNvPr id="2" name="cover-title">
-            <a:extLst xmlns:a="http://schemas.openxmlformats.org/drawingml/2006/main">
+            <a:extLst>
               <a:ext uri="{FF2B5EF4-FFF2-40B4-BE49-F238E27FC236}">
                 <a16:creationId xmlns:a16="http://schemas.microsoft.com/office/drawing/2014/main" id="{08434625-0596-45D6-B344-D1820A354DF9}"/>
               </a:ext>
             </a:extLst>
           </p:cNvPr>
           <p:cNvSpPr>
-            <a:spLocks xmlns:a="http://schemas.openxmlformats.org/drawingml/2006/main" noGrp="1"/>
-          </p:cNvSpPr>
-          <p:nvPr/>
-        </p:nvSpPr>
-        <p:spPr>
-          <a:xfrm xmlns:a="http://schemas.openxmlformats.org/drawingml/2006/main">
+            <a:spLocks noGrp="1"/>
+          </p:cNvSpPr>
+          <p:nvPr/>
+        </p:nvSpPr>
+        <p:spPr>
+          <a:xfrm>
             <a:off x="400050" y="914400"/>
             <a:ext cx="6572250" cy="1428750"/>
           </a:xfrm>
-          <a:prstGeom xmlns:a="http://schemas.openxmlformats.org/drawingml/2006/main" prst="rect">
-            <a:avLst/>
-          </a:prstGeom>
-        </p:spPr>
-        <p:txBody>
-          <a:bodyPr xmlns:a="http://schemas.openxmlformats.org/drawingml/2006/main" spcFirstLastPara="1" lIns="0" tIns="0" rIns="0" bIns="0" anchor="t">
-            <a:normAutofit fontScale="100000"/>
-          </a:bodyPr>
-          <a:lstStyle xmlns:a="http://schemas.openxmlformats.org/drawingml/2006/main"/>
-          <a:p xmlns:a="http://schemas.openxmlformats.org/drawingml/2006/main">
+          <a:prstGeom prst="rect">
+            <a:avLst/>
+          </a:prstGeom>
+        </p:spPr>
+        <p:txBody>
+          <a:bodyPr spcFirstLastPara="1" lIns="0" tIns="0" rIns="0" bIns="0" anchor="t">
+            <a:normAutofit/>
+          </a:bodyPr>
+          <a:lstStyle/>
+          <a:p>
             <a:pPr>
               <a:defRPr sz="4800" b="1">
                 <a:solidFill>
@@ -1490,32 +1093,32 @@
       <p:sp>
         <p:nvSpPr>
           <p:cNvPr id="3" name="cover-subtitle">
-            <a:extLst xmlns:a="http://schemas.openxmlformats.org/drawingml/2006/main">
+            <a:extLst>
               <a:ext uri="{FF2B5EF4-FFF2-40B4-BE49-F238E27FC236}">
                 <a16:creationId xmlns:a16="http://schemas.microsoft.com/office/drawing/2014/main" id="{3F23780B-7754-47B6-9CC3-F781154C1643}"/>
               </a:ext>
             </a:extLst>
           </p:cNvPr>
           <p:cNvSpPr>
-            <a:spLocks xmlns:a="http://schemas.openxmlformats.org/drawingml/2006/main" noGrp="1"/>
-          </p:cNvSpPr>
-          <p:nvPr/>
-        </p:nvSpPr>
-        <p:spPr>
-          <a:xfrm xmlns:a="http://schemas.openxmlformats.org/drawingml/2006/main">
+            <a:spLocks noGrp="1"/>
+          </p:cNvSpPr>
+          <p:nvPr/>
+        </p:nvSpPr>
+        <p:spPr>
+          <a:xfrm>
             <a:off x="457200" y="2533650"/>
             <a:ext cx="5334000" cy="419100"/>
           </a:xfrm>
-          <a:prstGeom xmlns:a="http://schemas.openxmlformats.org/drawingml/2006/main" prst="rect">
-            <a:avLst/>
-          </a:prstGeom>
-        </p:spPr>
-        <p:txBody>
-          <a:bodyPr xmlns:a="http://schemas.openxmlformats.org/drawingml/2006/main" spcFirstLastPara="1" lIns="0" tIns="0" rIns="0" bIns="0" anchor="t">
-            <a:normAutofit fontScale="100000"/>
-          </a:bodyPr>
-          <a:lstStyle xmlns:a="http://schemas.openxmlformats.org/drawingml/2006/main"/>
-          <a:p xmlns:a="http://schemas.openxmlformats.org/drawingml/2006/main">
+          <a:prstGeom prst="rect">
+            <a:avLst/>
+          </a:prstGeom>
+        </p:spPr>
+        <p:txBody>
+          <a:bodyPr spcFirstLastPara="1" lIns="0" tIns="0" rIns="0" bIns="0" anchor="t">
+            <a:normAutofit/>
+          </a:bodyPr>
+          <a:lstStyle/>
+          <a:p>
             <a:pPr>
               <a:defRPr sz="2100" b="0">
                 <a:solidFill>
@@ -1535,32 +1138,32 @@
       <p:sp>
         <p:nvSpPr>
           <p:cNvPr id="4" name="cover-character-list">
-            <a:extLst xmlns:a="http://schemas.openxmlformats.org/drawingml/2006/main">
+            <a:extLst>
               <a:ext uri="{FF2B5EF4-FFF2-40B4-BE49-F238E27FC236}">
                 <a16:creationId xmlns:a16="http://schemas.microsoft.com/office/drawing/2014/main" id="{CBA6EBAF-F9AF-4D5C-8946-6CE9D9BFE9F0}"/>
               </a:ext>
             </a:extLst>
           </p:cNvPr>
           <p:cNvSpPr>
-            <a:spLocks xmlns:a="http://schemas.openxmlformats.org/drawingml/2006/main" noGrp="1"/>
-          </p:cNvSpPr>
-          <p:nvPr/>
-        </p:nvSpPr>
-        <p:spPr>
-          <a:xfrm xmlns:a="http://schemas.openxmlformats.org/drawingml/2006/main">
+            <a:spLocks noGrp="1"/>
+          </p:cNvSpPr>
+          <p:nvPr/>
+        </p:nvSpPr>
+        <p:spPr>
+          <a:xfrm>
             <a:off x="457200" y="3619500"/>
             <a:ext cx="5810250" cy="552450"/>
           </a:xfrm>
-          <a:prstGeom xmlns:a="http://schemas.openxmlformats.org/drawingml/2006/main" prst="rect">
-            <a:avLst/>
-          </a:prstGeom>
-        </p:spPr>
-        <p:txBody>
-          <a:bodyPr xmlns:a="http://schemas.openxmlformats.org/drawingml/2006/main" spcFirstLastPara="1" lIns="0" tIns="0" rIns="0" bIns="0" anchor="t">
-            <a:normAutofit fontScale="100000"/>
-          </a:bodyPr>
-          <a:lstStyle xmlns:a="http://schemas.openxmlformats.org/drawingml/2006/main"/>
-          <a:p xmlns:a="http://schemas.openxmlformats.org/drawingml/2006/main">
+          <a:prstGeom prst="rect">
+            <a:avLst/>
+          </a:prstGeom>
+        </p:spPr>
+        <p:txBody>
+          <a:bodyPr spcFirstLastPara="1" lIns="0" tIns="0" rIns="0" bIns="0" anchor="t">
+            <a:normAutofit/>
+          </a:bodyPr>
+          <a:lstStyle/>
+          <a:p>
             <a:pPr>
               <a:defRPr sz="2250" b="1">
                 <a:solidFill>
@@ -1580,32 +1183,32 @@
       <p:sp>
         <p:nvSpPr>
           <p:cNvPr id="5" name="cover-purpose">
-            <a:extLst xmlns:a="http://schemas.openxmlformats.org/drawingml/2006/main">
+            <a:extLst>
               <a:ext uri="{FF2B5EF4-FFF2-40B4-BE49-F238E27FC236}">
                 <a16:creationId xmlns:a16="http://schemas.microsoft.com/office/drawing/2014/main" id="{76E3B0C4-5DCD-4929-BCC0-787D6C5256E4}"/>
               </a:ext>
             </a:extLst>
           </p:cNvPr>
           <p:cNvSpPr>
-            <a:spLocks xmlns:a="http://schemas.openxmlformats.org/drawingml/2006/main" noGrp="1"/>
-          </p:cNvSpPr>
-          <p:nvPr/>
-        </p:nvSpPr>
-        <p:spPr>
-          <a:xfrm xmlns:a="http://schemas.openxmlformats.org/drawingml/2006/main">
+            <a:spLocks noGrp="1"/>
+          </p:cNvSpPr>
+          <p:nvPr/>
+        </p:nvSpPr>
+        <p:spPr>
+          <a:xfrm>
             <a:off x="457200" y="4400550"/>
             <a:ext cx="6096000" cy="723900"/>
           </a:xfrm>
-          <a:prstGeom xmlns:a="http://schemas.openxmlformats.org/drawingml/2006/main" prst="rect">
-            <a:avLst/>
-          </a:prstGeom>
-        </p:spPr>
-        <p:txBody>
-          <a:bodyPr xmlns:a="http://schemas.openxmlformats.org/drawingml/2006/main" spcFirstLastPara="1" lIns="0" tIns="0" rIns="0" bIns="0" anchor="t">
-            <a:normAutofit fontScale="100000"/>
-          </a:bodyPr>
-          <a:lstStyle xmlns:a="http://schemas.openxmlformats.org/drawingml/2006/main"/>
-          <a:p xmlns:a="http://schemas.openxmlformats.org/drawingml/2006/main">
+          <a:prstGeom prst="rect">
+            <a:avLst/>
+          </a:prstGeom>
+        </p:spPr>
+        <p:txBody>
+          <a:bodyPr spcFirstLastPara="1" lIns="0" tIns="0" rIns="0" bIns="0" anchor="t">
+            <a:normAutofit/>
+          </a:bodyPr>
+          <a:lstStyle/>
+          <a:p>
             <a:pPr>
               <a:defRPr sz="1650" b="0">
                 <a:solidFill>
@@ -1625,26 +1228,26 @@
       <p:sp>
         <p:nvSpPr>
           <p:cNvPr id="6" name="cover-image-slot-panel">
-            <a:extLst xmlns:a="http://schemas.openxmlformats.org/drawingml/2006/main">
+            <a:extLst>
               <a:ext uri="{FF2B5EF4-FFF2-40B4-BE49-F238E27FC236}">
                 <a16:creationId xmlns:a16="http://schemas.microsoft.com/office/drawing/2014/main" id="{EF7C14B7-2117-4FF4-B6F9-B0801A64082D}"/>
               </a:ext>
             </a:extLst>
           </p:cNvPr>
           <p:cNvSpPr>
-            <a:spLocks xmlns:a="http://schemas.openxmlformats.org/drawingml/2006/main" noGrp="1"/>
-          </p:cNvSpPr>
-          <p:nvPr/>
-        </p:nvSpPr>
-        <p:spPr>
-          <a:xfrm xmlns:a="http://schemas.openxmlformats.org/drawingml/2006/main">
+            <a:spLocks noGrp="1"/>
+          </p:cNvSpPr>
+          <p:nvPr/>
+        </p:nvSpPr>
+        <p:spPr>
+          <a:xfrm>
             <a:off x="7372350" y="704850"/>
             <a:ext cx="4419600" cy="4914900"/>
           </a:xfrm>
-          <a:prstGeom xmlns:a="http://schemas.openxmlformats.org/drawingml/2006/main" prst="rect">
-            <a:avLst/>
-          </a:prstGeom>
-          <a:solidFill xmlns:a="http://schemas.openxmlformats.org/drawingml/2006/main">
+          <a:prstGeom prst="rect">
+            <a:avLst/>
+          </a:prstGeom>
+          <a:solidFill>
             <a:srgbClr val="EDEDED"/>
           </a:solidFill>
         </p:spPr>
@@ -1652,26 +1255,26 @@
       <p:sp>
         <p:nvSpPr>
           <p:cNvPr id="7" name="cover-image-slot-accent">
-            <a:extLst xmlns:a="http://schemas.openxmlformats.org/drawingml/2006/main">
+            <a:extLst>
               <a:ext uri="{FF2B5EF4-FFF2-40B4-BE49-F238E27FC236}">
                 <a16:creationId xmlns:a16="http://schemas.microsoft.com/office/drawing/2014/main" id="{B663AE2F-EEB2-4E13-BB9F-576BD84DFEEE}"/>
               </a:ext>
             </a:extLst>
           </p:cNvPr>
           <p:cNvSpPr>
-            <a:spLocks xmlns:a="http://schemas.openxmlformats.org/drawingml/2006/main" noGrp="1"/>
-          </p:cNvSpPr>
-          <p:nvPr/>
-        </p:nvSpPr>
-        <p:spPr>
-          <a:xfrm xmlns:a="http://schemas.openxmlformats.org/drawingml/2006/main">
+            <a:spLocks noGrp="1"/>
+          </p:cNvSpPr>
+          <p:nvPr/>
+        </p:nvSpPr>
+        <p:spPr>
+          <a:xfrm>
             <a:off x="7372350" y="704850"/>
             <a:ext cx="76200" cy="4914900"/>
           </a:xfrm>
-          <a:prstGeom xmlns:a="http://schemas.openxmlformats.org/drawingml/2006/main" prst="rect">
-            <a:avLst/>
-          </a:prstGeom>
-          <a:solidFill xmlns:a="http://schemas.openxmlformats.org/drawingml/2006/main">
+          <a:prstGeom prst="rect">
+            <a:avLst/>
+          </a:prstGeom>
+          <a:solidFill>
             <a:srgbClr val="FF6B35"/>
           </a:solidFill>
         </p:spPr>
@@ -1679,32 +1282,32 @@
       <p:sp>
         <p:nvSpPr>
           <p:cNvPr id="8" name="cover-image-slot-label">
-            <a:extLst xmlns:a="http://schemas.openxmlformats.org/drawingml/2006/main">
+            <a:extLst>
               <a:ext uri="{FF2B5EF4-FFF2-40B4-BE49-F238E27FC236}">
                 <a16:creationId xmlns:a16="http://schemas.microsoft.com/office/drawing/2014/main" id="{A200A43D-2ABC-43EE-9445-EFAB1164A773}"/>
               </a:ext>
             </a:extLst>
           </p:cNvPr>
           <p:cNvSpPr>
-            <a:spLocks xmlns:a="http://schemas.openxmlformats.org/drawingml/2006/main" noGrp="1"/>
-          </p:cNvSpPr>
-          <p:nvPr/>
-        </p:nvSpPr>
-        <p:spPr>
-          <a:xfrm xmlns:a="http://schemas.openxmlformats.org/drawingml/2006/main">
+            <a:spLocks noGrp="1"/>
+          </p:cNvSpPr>
+          <p:nvPr/>
+        </p:nvSpPr>
+        <p:spPr>
+          <a:xfrm>
             <a:off x="7639050" y="971550"/>
             <a:ext cx="3886200" cy="323850"/>
           </a:xfrm>
-          <a:prstGeom xmlns:a="http://schemas.openxmlformats.org/drawingml/2006/main" prst="rect">
-            <a:avLst/>
-          </a:prstGeom>
-        </p:spPr>
-        <p:txBody>
-          <a:bodyPr xmlns:a="http://schemas.openxmlformats.org/drawingml/2006/main" spcFirstLastPara="1" lIns="0" tIns="0" rIns="0" bIns="0" anchor="t">
-            <a:normAutofit fontScale="100000"/>
-          </a:bodyPr>
-          <a:lstStyle xmlns:a="http://schemas.openxmlformats.org/drawingml/2006/main"/>
-          <a:p xmlns:a="http://schemas.openxmlformats.org/drawingml/2006/main">
+          <a:prstGeom prst="rect">
+            <a:avLst/>
+          </a:prstGeom>
+        </p:spPr>
+        <p:txBody>
+          <a:bodyPr spcFirstLastPara="1" lIns="0" tIns="0" rIns="0" bIns="0" anchor="t">
+            <a:normAutofit/>
+          </a:bodyPr>
+          <a:lstStyle/>
+          <a:p>
             <a:pPr>
               <a:defRPr sz="1800" b="1">
                 <a:solidFill>
@@ -1724,32 +1327,32 @@
       <p:sp>
         <p:nvSpPr>
           <p:cNvPr id="9" name="cover-image-slot-hint">
-            <a:extLst xmlns:a="http://schemas.openxmlformats.org/drawingml/2006/main">
+            <a:extLst>
               <a:ext uri="{FF2B5EF4-FFF2-40B4-BE49-F238E27FC236}">
                 <a16:creationId xmlns:a16="http://schemas.microsoft.com/office/drawing/2014/main" id="{3CF0547B-C797-4885-8585-37C9BBFFE8FA}"/>
               </a:ext>
             </a:extLst>
           </p:cNvPr>
           <p:cNvSpPr>
-            <a:spLocks xmlns:a="http://schemas.openxmlformats.org/drawingml/2006/main" noGrp="1"/>
-          </p:cNvSpPr>
-          <p:nvPr/>
-        </p:nvSpPr>
-        <p:spPr>
-          <a:xfrm xmlns:a="http://schemas.openxmlformats.org/drawingml/2006/main">
+            <a:spLocks noGrp="1"/>
+          </p:cNvSpPr>
+          <p:nvPr/>
+        </p:nvSpPr>
+        <p:spPr>
+          <a:xfrm>
             <a:off x="7639050" y="4972050"/>
             <a:ext cx="3886200" cy="381000"/>
           </a:xfrm>
-          <a:prstGeom xmlns:a="http://schemas.openxmlformats.org/drawingml/2006/main" prst="rect">
-            <a:avLst/>
-          </a:prstGeom>
-        </p:spPr>
-        <p:txBody>
-          <a:bodyPr xmlns:a="http://schemas.openxmlformats.org/drawingml/2006/main" spcFirstLastPara="1" lIns="0" tIns="0" rIns="0" bIns="0" anchor="t">
-            <a:normAutofit fontScale="100000"/>
-          </a:bodyPr>
-          <a:lstStyle xmlns:a="http://schemas.openxmlformats.org/drawingml/2006/main"/>
-          <a:p xmlns:a="http://schemas.openxmlformats.org/drawingml/2006/main">
+          <a:prstGeom prst="rect">
+            <a:avLst/>
+          </a:prstGeom>
+        </p:spPr>
+        <p:txBody>
+          <a:bodyPr spcFirstLastPara="1" lIns="0" tIns="0" rIns="0" bIns="0" anchor="t">
+            <a:normAutofit/>
+          </a:bodyPr>
+          <a:lstStyle/>
+          <a:p>
             <a:pPr>
               <a:defRPr sz="1350" b="0">
                 <a:solidFill>
@@ -1769,26 +1372,26 @@
       <p:sp>
         <p:nvSpPr>
           <p:cNvPr id="10" name="footer-rule-1">
-            <a:extLst xmlns:a="http://schemas.openxmlformats.org/drawingml/2006/main">
+            <a:extLst>
               <a:ext uri="{FF2B5EF4-FFF2-40B4-BE49-F238E27FC236}">
                 <a16:creationId xmlns:a16="http://schemas.microsoft.com/office/drawing/2014/main" id="{45CF7E94-5517-40C6-9265-19ED62826C8E}"/>
               </a:ext>
             </a:extLst>
           </p:cNvPr>
           <p:cNvSpPr>
-            <a:spLocks xmlns:a="http://schemas.openxmlformats.org/drawingml/2006/main" noGrp="1"/>
-          </p:cNvSpPr>
-          <p:nvPr/>
-        </p:nvSpPr>
-        <p:spPr>
-          <a:xfrm xmlns:a="http://schemas.openxmlformats.org/drawingml/2006/main">
+            <a:spLocks noGrp="1"/>
+          </p:cNvSpPr>
+          <p:nvPr/>
+        </p:nvSpPr>
+        <p:spPr>
+          <a:xfrm>
             <a:off x="400050" y="6172200"/>
             <a:ext cx="11391900" cy="9525"/>
           </a:xfrm>
-          <a:prstGeom xmlns:a="http://schemas.openxmlformats.org/drawingml/2006/main" prst="rect">
-            <a:avLst/>
-          </a:prstGeom>
-          <a:solidFill xmlns:a="http://schemas.openxmlformats.org/drawingml/2006/main">
+          <a:prstGeom prst="rect">
+            <a:avLst/>
+          </a:prstGeom>
+          <a:solidFill>
             <a:srgbClr val="B8BCC4"/>
           </a:solidFill>
         </p:spPr>
@@ -1796,32 +1399,32 @@
       <p:sp>
         <p:nvSpPr>
           <p:cNvPr id="11" name="footer-source-1">
-            <a:extLst xmlns:a="http://schemas.openxmlformats.org/drawingml/2006/main">
+            <a:extLst>
               <a:ext uri="{FF2B5EF4-FFF2-40B4-BE49-F238E27FC236}">
                 <a16:creationId xmlns:a16="http://schemas.microsoft.com/office/drawing/2014/main" id="{F7A2104D-B1C2-44F7-9640-783C73BFD191}"/>
               </a:ext>
             </a:extLst>
           </p:cNvPr>
           <p:cNvSpPr>
-            <a:spLocks xmlns:a="http://schemas.openxmlformats.org/drawingml/2006/main" noGrp="1"/>
-          </p:cNvSpPr>
-          <p:nvPr/>
-        </p:nvSpPr>
-        <p:spPr>
-          <a:xfrm xmlns:a="http://schemas.openxmlformats.org/drawingml/2006/main">
+            <a:spLocks noGrp="1"/>
+          </p:cNvSpPr>
+          <p:nvPr/>
+        </p:nvSpPr>
+        <p:spPr>
+          <a:xfrm>
             <a:off x="400050" y="6305550"/>
             <a:ext cx="3429000" cy="228600"/>
           </a:xfrm>
-          <a:prstGeom xmlns:a="http://schemas.openxmlformats.org/drawingml/2006/main" prst="rect">
-            <a:avLst/>
-          </a:prstGeom>
-        </p:spPr>
-        <p:txBody>
-          <a:bodyPr xmlns:a="http://schemas.openxmlformats.org/drawingml/2006/main" spcFirstLastPara="1" lIns="0" tIns="0" rIns="0" bIns="0" anchor="t">
-            <a:normAutofit fontScale="100000"/>
-          </a:bodyPr>
-          <a:lstStyle xmlns:a="http://schemas.openxmlformats.org/drawingml/2006/main"/>
-          <a:p xmlns:a="http://schemas.openxmlformats.org/drawingml/2006/main">
+          <a:prstGeom prst="rect">
+            <a:avLst/>
+          </a:prstGeom>
+        </p:spPr>
+        <p:txBody>
+          <a:bodyPr spcFirstLastPara="1" lIns="0" tIns="0" rIns="0" bIns="0" anchor="t">
+            <a:normAutofit/>
+          </a:bodyPr>
+          <a:lstStyle/>
+          <a:p>
             <a:pPr>
               <a:defRPr sz="1125" b="0">
                 <a:solidFill>
@@ -1841,32 +1444,32 @@
       <p:sp>
         <p:nvSpPr>
           <p:cNvPr id="12" name="footer-page-1">
-            <a:extLst xmlns:a="http://schemas.openxmlformats.org/drawingml/2006/main">
+            <a:extLst>
               <a:ext uri="{FF2B5EF4-FFF2-40B4-BE49-F238E27FC236}">
                 <a16:creationId xmlns:a16="http://schemas.microsoft.com/office/drawing/2014/main" id="{4D6C0275-839A-43AB-85E2-57BF0DF9E40B}"/>
               </a:ext>
             </a:extLst>
           </p:cNvPr>
           <p:cNvSpPr>
-            <a:spLocks xmlns:a="http://schemas.openxmlformats.org/drawingml/2006/main" noGrp="1"/>
-          </p:cNvSpPr>
-          <p:nvPr/>
-        </p:nvSpPr>
-        <p:spPr>
-          <a:xfrm xmlns:a="http://schemas.openxmlformats.org/drawingml/2006/main">
+            <a:spLocks noGrp="1"/>
+          </p:cNvSpPr>
+          <p:nvPr/>
+        </p:nvSpPr>
+        <p:spPr>
+          <a:xfrm>
             <a:off x="11277600" y="6305550"/>
             <a:ext cx="514350" cy="228600"/>
           </a:xfrm>
-          <a:prstGeom xmlns:a="http://schemas.openxmlformats.org/drawingml/2006/main" prst="rect">
-            <a:avLst/>
-          </a:prstGeom>
-        </p:spPr>
-        <p:txBody>
-          <a:bodyPr xmlns:a="http://schemas.openxmlformats.org/drawingml/2006/main" spcFirstLastPara="1" lIns="0" tIns="0" rIns="0" bIns="0" anchor="t">
-            <a:normAutofit fontScale="100000"/>
-          </a:bodyPr>
-          <a:lstStyle xmlns:a="http://schemas.openxmlformats.org/drawingml/2006/main"/>
-          <a:p xmlns:a="http://schemas.openxmlformats.org/drawingml/2006/main">
+          <a:prstGeom prst="rect">
+            <a:avLst/>
+          </a:prstGeom>
+        </p:spPr>
+        <p:txBody>
+          <a:bodyPr spcFirstLastPara="1" lIns="0" tIns="0" rIns="0" bIns="0" anchor="t">
+            <a:normAutofit/>
+          </a:bodyPr>
+          <a:lstStyle/>
+          <a:p>
             <a:pPr algn="r">
               <a:defRPr sz="1125" b="0">
                 <a:solidFill>
@@ -1890,17 +1493,21 @@
       </p:ext>
     </p:extLst>
   </p:cSld>
+  <p:clrMapOvr>
+    <a:masterClrMapping/>
+  </p:clrMapOvr>
 </p:sld>
 </file>
 
 <file path=ppt/slides/slide2.xml><?xml version="1.0" encoding="utf-8"?>
-<p:sld xmlns:p="http://schemas.openxmlformats.org/presentationml/2006/main">
+<p:sld xmlns:a="http://schemas.openxmlformats.org/drawingml/2006/main" xmlns:r="http://schemas.openxmlformats.org/officeDocument/2006/relationships" xmlns:p="http://schemas.openxmlformats.org/presentationml/2006/main">
   <p:cSld>
     <p:bg>
       <p:bgPr>
-        <a:solidFill xmlns:a="http://schemas.openxmlformats.org/drawingml/2006/main">
+        <a:solidFill>
           <a:srgbClr val="FFFFFF"/>
         </a:solidFill>
+        <a:effectLst/>
       </p:bgPr>
     </p:bg>
     <p:spTree>
@@ -1910,37 +1517,42 @@
         <p:nvPr/>
       </p:nvGrpSpPr>
       <p:grpSpPr>
-        <a:xfrm xmlns:a="http://schemas.openxmlformats.org/drawingml/2006/main"/>
+        <a:xfrm>
+          <a:off x="0" y="0"/>
+          <a:ext cx="0" cy="0"/>
+          <a:chOff x="0" y="0"/>
+          <a:chExt cx="0" cy="0"/>
+        </a:xfrm>
       </p:grpSpPr>
       <p:sp>
         <p:nvSpPr>
-          <p:cNvPr id="1" name="cannon-title">
-            <a:extLst xmlns:a="http://schemas.openxmlformats.org/drawingml/2006/main">
+          <p:cNvPr id="34" name="cannon-title">
+            <a:extLst>
               <a:ext uri="{FF2B5EF4-FFF2-40B4-BE49-F238E27FC236}">
                 <a16:creationId xmlns:a16="http://schemas.microsoft.com/office/drawing/2014/main" id="{AA59AC21-6AC9-4AB8-8EF9-F842441775C5}"/>
               </a:ext>
             </a:extLst>
           </p:cNvPr>
           <p:cNvSpPr>
-            <a:spLocks xmlns:a="http://schemas.openxmlformats.org/drawingml/2006/main" noGrp="1"/>
-          </p:cNvSpPr>
-          <p:nvPr/>
-        </p:nvSpPr>
-        <p:spPr>
-          <a:xfrm xmlns:a="http://schemas.openxmlformats.org/drawingml/2006/main">
+            <a:spLocks noGrp="1"/>
+          </p:cNvSpPr>
+          <p:nvPr/>
+        </p:nvSpPr>
+        <p:spPr>
+          <a:xfrm>
             <a:off x="400050" y="342900"/>
             <a:ext cx="5905500" cy="704850"/>
           </a:xfrm>
-          <a:prstGeom xmlns:a="http://schemas.openxmlformats.org/drawingml/2006/main" prst="rect">
-            <a:avLst/>
-          </a:prstGeom>
-        </p:spPr>
-        <p:txBody>
-          <a:bodyPr xmlns:a="http://schemas.openxmlformats.org/drawingml/2006/main" spcFirstLastPara="1" lIns="0" tIns="0" rIns="0" bIns="0" anchor="t">
-            <a:normAutofit fontScale="100000"/>
-          </a:bodyPr>
-          <a:lstStyle xmlns:a="http://schemas.openxmlformats.org/drawingml/2006/main"/>
-          <a:p xmlns:a="http://schemas.openxmlformats.org/drawingml/2006/main">
+          <a:prstGeom prst="rect">
+            <a:avLst/>
+          </a:prstGeom>
+        </p:spPr>
+        <p:txBody>
+          <a:bodyPr spcFirstLastPara="1" lIns="0" tIns="0" rIns="0" bIns="0" anchor="t">
+            <a:normAutofit/>
+          </a:bodyPr>
+          <a:lstStyle/>
+          <a:p>
             <a:pPr>
               <a:defRPr sz="3750" b="1">
                 <a:solidFill>
@@ -1960,32 +1572,32 @@
       <p:sp>
         <p:nvSpPr>
           <p:cNvPr id="2" name="cannon-eyebrow">
-            <a:extLst xmlns:a="http://schemas.openxmlformats.org/drawingml/2006/main">
+            <a:extLst>
               <a:ext uri="{FF2B5EF4-FFF2-40B4-BE49-F238E27FC236}">
                 <a16:creationId xmlns:a16="http://schemas.microsoft.com/office/drawing/2014/main" id="{5A59B614-F9CA-4A00-8597-BA1A3682A884}"/>
               </a:ext>
             </a:extLst>
           </p:cNvPr>
           <p:cNvSpPr>
-            <a:spLocks xmlns:a="http://schemas.openxmlformats.org/drawingml/2006/main" noGrp="1"/>
-          </p:cNvSpPr>
-          <p:nvPr/>
-        </p:nvSpPr>
-        <p:spPr>
-          <a:xfrm xmlns:a="http://schemas.openxmlformats.org/drawingml/2006/main">
+            <a:spLocks noGrp="1"/>
+          </p:cNvSpPr>
+          <p:nvPr/>
+        </p:nvSpPr>
+        <p:spPr>
+          <a:xfrm>
             <a:off x="7372350" y="476250"/>
             <a:ext cx="4419600" cy="323850"/>
           </a:xfrm>
-          <a:prstGeom xmlns:a="http://schemas.openxmlformats.org/drawingml/2006/main" prst="rect">
-            <a:avLst/>
-          </a:prstGeom>
-        </p:spPr>
-        <p:txBody>
-          <a:bodyPr xmlns:a="http://schemas.openxmlformats.org/drawingml/2006/main" spcFirstLastPara="1" lIns="0" tIns="0" rIns="0" bIns="0" anchor="t">
-            <a:normAutofit fontScale="100000"/>
-          </a:bodyPr>
-          <a:lstStyle xmlns:a="http://schemas.openxmlformats.org/drawingml/2006/main"/>
-          <a:p xmlns:a="http://schemas.openxmlformats.org/drawingml/2006/main">
+          <a:prstGeom prst="rect">
+            <a:avLst/>
+          </a:prstGeom>
+        </p:spPr>
+        <p:txBody>
+          <a:bodyPr spcFirstLastPara="1" lIns="0" tIns="0" rIns="0" bIns="0" anchor="t">
+            <a:normAutofit/>
+          </a:bodyPr>
+          <a:lstStyle/>
+          <a:p>
             <a:pPr algn="r">
               <a:defRPr sz="1350" b="0">
                 <a:solidFill>
@@ -2005,32 +1617,32 @@
       <p:sp>
         <p:nvSpPr>
           <p:cNvPr id="3" name="cannon-콘셉트-heading">
-            <a:extLst xmlns:a="http://schemas.openxmlformats.org/drawingml/2006/main">
+            <a:extLst>
               <a:ext uri="{FF2B5EF4-FFF2-40B4-BE49-F238E27FC236}">
                 <a16:creationId xmlns:a16="http://schemas.microsoft.com/office/drawing/2014/main" id="{6DDA241C-5D6F-4D69-940C-320CEB53A168}"/>
               </a:ext>
             </a:extLst>
           </p:cNvPr>
           <p:cNvSpPr>
-            <a:spLocks xmlns:a="http://schemas.openxmlformats.org/drawingml/2006/main" noGrp="1"/>
-          </p:cNvSpPr>
-          <p:nvPr/>
-        </p:nvSpPr>
-        <p:spPr>
-          <a:xfrm xmlns:a="http://schemas.openxmlformats.org/drawingml/2006/main">
+            <a:spLocks noGrp="1"/>
+          </p:cNvSpPr>
+          <p:nvPr/>
+        </p:nvSpPr>
+        <p:spPr>
+          <a:xfrm>
             <a:off x="400050" y="1390650"/>
             <a:ext cx="6096000" cy="323850"/>
           </a:xfrm>
-          <a:prstGeom xmlns:a="http://schemas.openxmlformats.org/drawingml/2006/main" prst="rect">
-            <a:avLst/>
-          </a:prstGeom>
-        </p:spPr>
-        <p:txBody>
-          <a:bodyPr xmlns:a="http://schemas.openxmlformats.org/drawingml/2006/main" spcFirstLastPara="1" lIns="0" tIns="0" rIns="0" bIns="0" anchor="t">
-            <a:normAutofit fontScale="100000"/>
-          </a:bodyPr>
-          <a:lstStyle xmlns:a="http://schemas.openxmlformats.org/drawingml/2006/main"/>
-          <a:p xmlns:a="http://schemas.openxmlformats.org/drawingml/2006/main">
+          <a:prstGeom prst="rect">
+            <a:avLst/>
+          </a:prstGeom>
+        </p:spPr>
+        <p:txBody>
+          <a:bodyPr spcFirstLastPara="1" lIns="0" tIns="0" rIns="0" bIns="0" anchor="t">
+            <a:normAutofit/>
+          </a:bodyPr>
+          <a:lstStyle/>
+          <a:p>
             <a:pPr>
               <a:defRPr sz="1800" b="1">
                 <a:solidFill>
@@ -2050,26 +1662,26 @@
       <p:sp>
         <p:nvSpPr>
           <p:cNvPr id="4" name="cannon-콘셉트-rule">
-            <a:extLst xmlns:a="http://schemas.openxmlformats.org/drawingml/2006/main">
+            <a:extLst>
               <a:ext uri="{FF2B5EF4-FFF2-40B4-BE49-F238E27FC236}">
                 <a16:creationId xmlns:a16="http://schemas.microsoft.com/office/drawing/2014/main" id="{B84EED27-B918-4DF9-A982-0E292E88765B}"/>
               </a:ext>
             </a:extLst>
           </p:cNvPr>
           <p:cNvSpPr>
-            <a:spLocks xmlns:a="http://schemas.openxmlformats.org/drawingml/2006/main" noGrp="1"/>
-          </p:cNvSpPr>
-          <p:nvPr/>
-        </p:nvSpPr>
-        <p:spPr>
-          <a:xfrm xmlns:a="http://schemas.openxmlformats.org/drawingml/2006/main">
+            <a:spLocks noGrp="1"/>
+          </p:cNvSpPr>
+          <p:nvPr/>
+        </p:nvSpPr>
+        <p:spPr>
+          <a:xfrm>
             <a:off x="400050" y="1790700"/>
             <a:ext cx="685800" cy="38100"/>
           </a:xfrm>
-          <a:prstGeom xmlns:a="http://schemas.openxmlformats.org/drawingml/2006/main" prst="rect">
-            <a:avLst/>
-          </a:prstGeom>
-          <a:solidFill xmlns:a="http://schemas.openxmlformats.org/drawingml/2006/main">
+          <a:prstGeom prst="rect">
+            <a:avLst/>
+          </a:prstGeom>
+          <a:solidFill>
             <a:srgbClr val="FF6B35"/>
           </a:solidFill>
         </p:spPr>
@@ -2077,32 +1689,32 @@
       <p:sp>
         <p:nvSpPr>
           <p:cNvPr id="5" name="cannon-콘셉트-body">
-            <a:extLst xmlns:a="http://schemas.openxmlformats.org/drawingml/2006/main">
+            <a:extLst>
               <a:ext uri="{FF2B5EF4-FFF2-40B4-BE49-F238E27FC236}">
                 <a16:creationId xmlns:a16="http://schemas.microsoft.com/office/drawing/2014/main" id="{02116CAD-808B-48C2-9D05-8DB668B89317}"/>
               </a:ext>
             </a:extLst>
           </p:cNvPr>
           <p:cNvSpPr>
-            <a:spLocks xmlns:a="http://schemas.openxmlformats.org/drawingml/2006/main" noGrp="1"/>
-          </p:cNvSpPr>
-          <p:nvPr/>
-        </p:nvSpPr>
-        <p:spPr>
-          <a:xfrm xmlns:a="http://schemas.openxmlformats.org/drawingml/2006/main">
+            <a:spLocks noGrp="1"/>
+          </p:cNvSpPr>
+          <p:nvPr/>
+        </p:nvSpPr>
+        <p:spPr>
+          <a:xfrm>
             <a:off x="400050" y="1962150"/>
             <a:ext cx="6096000" cy="819150"/>
           </a:xfrm>
-          <a:prstGeom xmlns:a="http://schemas.openxmlformats.org/drawingml/2006/main" prst="rect">
-            <a:avLst/>
-          </a:prstGeom>
-        </p:spPr>
-        <p:txBody>
-          <a:bodyPr xmlns:a="http://schemas.openxmlformats.org/drawingml/2006/main" spcFirstLastPara="1" lIns="0" tIns="0" rIns="0" bIns="0" anchor="t">
-            <a:normAutofit fontScale="100000"/>
-          </a:bodyPr>
-          <a:lstStyle xmlns:a="http://schemas.openxmlformats.org/drawingml/2006/main"/>
-          <a:p xmlns:a="http://schemas.openxmlformats.org/drawingml/2006/main">
+          <a:prstGeom prst="rect">
+            <a:avLst/>
+          </a:prstGeom>
+        </p:spPr>
+        <p:txBody>
+          <a:bodyPr spcFirstLastPara="1" lIns="0" tIns="0" rIns="0" bIns="0" anchor="t">
+            <a:normAutofit/>
+          </a:bodyPr>
+          <a:lstStyle/>
+          <a:p>
             <a:pPr>
               <a:defRPr sz="1575" b="0">
                 <a:solidFill>
@@ -2114,7 +1726,28 @@
               </a:defRPr>
             </a:pPr>
             <a:r>
-              <a:t>중세 대포처럼 생긴 캐릭터.</a:t>
+              <a:rPr dirty="0" err="1"/>
+              <a:t>대포처럼</a:t>
+            </a:r>
+            <a:r>
+              <a:rPr dirty="0"/>
+              <a:t> </a:t>
+            </a:r>
+            <a:r>
+              <a:rPr dirty="0" err="1"/>
+              <a:t>생긴</a:t>
+            </a:r>
+            <a:r>
+              <a:rPr dirty="0"/>
+              <a:t> </a:t>
+            </a:r>
+            <a:r>
+              <a:rPr dirty="0" err="1"/>
+              <a:t>캐릭터</a:t>
+            </a:r>
+            <a:r>
+              <a:rPr dirty="0"/>
+              <a:t>.</a:t>
             </a:r>
           </a:p>
         </p:txBody>
@@ -2122,32 +1755,32 @@
       <p:sp>
         <p:nvSpPr>
           <p:cNvPr id="6" name="cannon-특수 공격-heading">
-            <a:extLst xmlns:a="http://schemas.openxmlformats.org/drawingml/2006/main">
+            <a:extLst>
               <a:ext uri="{FF2B5EF4-FFF2-40B4-BE49-F238E27FC236}">
                 <a16:creationId xmlns:a16="http://schemas.microsoft.com/office/drawing/2014/main" id="{9744B86F-A718-455B-91D4-1EC71724A930}"/>
               </a:ext>
             </a:extLst>
           </p:cNvPr>
           <p:cNvSpPr>
-            <a:spLocks xmlns:a="http://schemas.openxmlformats.org/drawingml/2006/main" noGrp="1"/>
-          </p:cNvSpPr>
-          <p:nvPr/>
-        </p:nvSpPr>
-        <p:spPr>
-          <a:xfrm xmlns:a="http://schemas.openxmlformats.org/drawingml/2006/main">
+            <a:spLocks noGrp="1"/>
+          </p:cNvSpPr>
+          <p:nvPr/>
+        </p:nvSpPr>
+        <p:spPr>
+          <a:xfrm>
             <a:off x="400050" y="3143250"/>
             <a:ext cx="6096000" cy="323850"/>
           </a:xfrm>
-          <a:prstGeom xmlns:a="http://schemas.openxmlformats.org/drawingml/2006/main" prst="rect">
-            <a:avLst/>
-          </a:prstGeom>
-        </p:spPr>
-        <p:txBody>
-          <a:bodyPr xmlns:a="http://schemas.openxmlformats.org/drawingml/2006/main" spcFirstLastPara="1" lIns="0" tIns="0" rIns="0" bIns="0" anchor="t">
-            <a:normAutofit fontScale="100000"/>
-          </a:bodyPr>
-          <a:lstStyle xmlns:a="http://schemas.openxmlformats.org/drawingml/2006/main"/>
-          <a:p xmlns:a="http://schemas.openxmlformats.org/drawingml/2006/main">
+          <a:prstGeom prst="rect">
+            <a:avLst/>
+          </a:prstGeom>
+        </p:spPr>
+        <p:txBody>
+          <a:bodyPr spcFirstLastPara="1" lIns="0" tIns="0" rIns="0" bIns="0" anchor="t">
+            <a:normAutofit/>
+          </a:bodyPr>
+          <a:lstStyle/>
+          <a:p>
             <a:pPr>
               <a:defRPr sz="1800" b="1">
                 <a:solidFill>
@@ -2167,26 +1800,26 @@
       <p:sp>
         <p:nvSpPr>
           <p:cNvPr id="7" name="cannon-특수 공격-rule">
-            <a:extLst xmlns:a="http://schemas.openxmlformats.org/drawingml/2006/main">
+            <a:extLst>
               <a:ext uri="{FF2B5EF4-FFF2-40B4-BE49-F238E27FC236}">
                 <a16:creationId xmlns:a16="http://schemas.microsoft.com/office/drawing/2014/main" id="{317AAC03-DE2E-408B-85E0-551C720FDF9C}"/>
               </a:ext>
             </a:extLst>
           </p:cNvPr>
           <p:cNvSpPr>
-            <a:spLocks xmlns:a="http://schemas.openxmlformats.org/drawingml/2006/main" noGrp="1"/>
-          </p:cNvSpPr>
-          <p:nvPr/>
-        </p:nvSpPr>
-        <p:spPr>
-          <a:xfrm xmlns:a="http://schemas.openxmlformats.org/drawingml/2006/main">
+            <a:spLocks noGrp="1"/>
+          </p:cNvSpPr>
+          <p:nvPr/>
+        </p:nvSpPr>
+        <p:spPr>
+          <a:xfrm>
             <a:off x="400050" y="3543300"/>
             <a:ext cx="685800" cy="38100"/>
           </a:xfrm>
-          <a:prstGeom xmlns:a="http://schemas.openxmlformats.org/drawingml/2006/main" prst="rect">
-            <a:avLst/>
-          </a:prstGeom>
-          <a:solidFill xmlns:a="http://schemas.openxmlformats.org/drawingml/2006/main">
+          <a:prstGeom prst="rect">
+            <a:avLst/>
+          </a:prstGeom>
+          <a:solidFill>
             <a:srgbClr val="FF6B35"/>
           </a:solidFill>
         </p:spPr>
@@ -2194,32 +1827,32 @@
       <p:sp>
         <p:nvSpPr>
           <p:cNvPr id="8" name="cannon-특수 공격-body">
-            <a:extLst xmlns:a="http://schemas.openxmlformats.org/drawingml/2006/main">
+            <a:extLst>
               <a:ext uri="{FF2B5EF4-FFF2-40B4-BE49-F238E27FC236}">
                 <a16:creationId xmlns:a16="http://schemas.microsoft.com/office/drawing/2014/main" id="{C9D1B7D4-C8DE-4056-B209-EE2ED89428EA}"/>
               </a:ext>
             </a:extLst>
           </p:cNvPr>
           <p:cNvSpPr>
-            <a:spLocks xmlns:a="http://schemas.openxmlformats.org/drawingml/2006/main" noGrp="1"/>
-          </p:cNvSpPr>
-          <p:nvPr/>
-        </p:nvSpPr>
-        <p:spPr>
-          <a:xfrm xmlns:a="http://schemas.openxmlformats.org/drawingml/2006/main">
+            <a:spLocks noGrp="1"/>
+          </p:cNvSpPr>
+          <p:nvPr/>
+        </p:nvSpPr>
+        <p:spPr>
+          <a:xfrm>
             <a:off x="400050" y="3714750"/>
             <a:ext cx="6096000" cy="1104900"/>
           </a:xfrm>
-          <a:prstGeom xmlns:a="http://schemas.openxmlformats.org/drawingml/2006/main" prst="rect">
-            <a:avLst/>
-          </a:prstGeom>
-        </p:spPr>
-        <p:txBody>
-          <a:bodyPr xmlns:a="http://schemas.openxmlformats.org/drawingml/2006/main" spcFirstLastPara="1" lIns="0" tIns="0" rIns="0" bIns="0" anchor="t">
-            <a:normAutofit fontScale="100000"/>
-          </a:bodyPr>
-          <a:lstStyle xmlns:a="http://schemas.openxmlformats.org/drawingml/2006/main"/>
-          <a:p xmlns:a="http://schemas.openxmlformats.org/drawingml/2006/main">
+          <a:prstGeom prst="rect">
+            <a:avLst/>
+          </a:prstGeom>
+        </p:spPr>
+        <p:txBody>
+          <a:bodyPr spcFirstLastPara="1" lIns="0" tIns="0" rIns="0" bIns="0" anchor="t">
+            <a:normAutofit/>
+          </a:bodyPr>
+          <a:lstStyle/>
+          <a:p>
             <a:pPr>
               <a:defRPr sz="1575" b="0">
                 <a:solidFill>
@@ -2239,26 +1872,26 @@
       <p:sp>
         <p:nvSpPr>
           <p:cNvPr id="9" name="cannon-note-band">
-            <a:extLst xmlns:a="http://schemas.openxmlformats.org/drawingml/2006/main">
+            <a:extLst>
               <a:ext uri="{FF2B5EF4-FFF2-40B4-BE49-F238E27FC236}">
                 <a16:creationId xmlns:a16="http://schemas.microsoft.com/office/drawing/2014/main" id="{96998A13-1C1A-4AC3-BF03-C89CC9D660D9}"/>
               </a:ext>
             </a:extLst>
           </p:cNvPr>
           <p:cNvSpPr>
-            <a:spLocks xmlns:a="http://schemas.openxmlformats.org/drawingml/2006/main" noGrp="1"/>
-          </p:cNvSpPr>
-          <p:nvPr/>
-        </p:nvSpPr>
-        <p:spPr>
-          <a:xfrm xmlns:a="http://schemas.openxmlformats.org/drawingml/2006/main">
+            <a:spLocks noGrp="1"/>
+          </p:cNvSpPr>
+          <p:nvPr/>
+        </p:nvSpPr>
+        <p:spPr>
+          <a:xfrm>
             <a:off x="400050" y="5219700"/>
             <a:ext cx="6096000" cy="666750"/>
           </a:xfrm>
-          <a:prstGeom xmlns:a="http://schemas.openxmlformats.org/drawingml/2006/main" prst="rect">
-            <a:avLst/>
-          </a:prstGeom>
-          <a:solidFill xmlns:a="http://schemas.openxmlformats.org/drawingml/2006/main">
+          <a:prstGeom prst="rect">
+            <a:avLst/>
+          </a:prstGeom>
+          <a:solidFill>
             <a:srgbClr val="EDEDED"/>
           </a:solidFill>
         </p:spPr>
@@ -2266,32 +1899,32 @@
       <p:sp>
         <p:nvSpPr>
           <p:cNvPr id="10" name="cannon-note">
-            <a:extLst xmlns:a="http://schemas.openxmlformats.org/drawingml/2006/main">
+            <a:extLst>
               <a:ext uri="{FF2B5EF4-FFF2-40B4-BE49-F238E27FC236}">
                 <a16:creationId xmlns:a16="http://schemas.microsoft.com/office/drawing/2014/main" id="{0EECBD9E-7391-4DB6-9212-B4139798448A}"/>
               </a:ext>
             </a:extLst>
           </p:cNvPr>
           <p:cNvSpPr>
-            <a:spLocks xmlns:a="http://schemas.openxmlformats.org/drawingml/2006/main" noGrp="1"/>
-          </p:cNvSpPr>
-          <p:nvPr/>
-        </p:nvSpPr>
-        <p:spPr>
-          <a:xfrm xmlns:a="http://schemas.openxmlformats.org/drawingml/2006/main">
+            <a:spLocks noGrp="1"/>
+          </p:cNvSpPr>
+          <p:nvPr/>
+        </p:nvSpPr>
+        <p:spPr>
+          <a:xfrm>
             <a:off x="609600" y="5391150"/>
             <a:ext cx="5676900" cy="323850"/>
           </a:xfrm>
-          <a:prstGeom xmlns:a="http://schemas.openxmlformats.org/drawingml/2006/main" prst="rect">
-            <a:avLst/>
-          </a:prstGeom>
-        </p:spPr>
-        <p:txBody>
-          <a:bodyPr xmlns:a="http://schemas.openxmlformats.org/drawingml/2006/main" spcFirstLastPara="1" lIns="0" tIns="0" rIns="0" bIns="0" anchor="t">
-            <a:normAutofit fontScale="100000"/>
-          </a:bodyPr>
-          <a:lstStyle xmlns:a="http://schemas.openxmlformats.org/drawingml/2006/main"/>
-          <a:p xmlns:a="http://schemas.openxmlformats.org/drawingml/2006/main">
+          <a:prstGeom prst="rect">
+            <a:avLst/>
+          </a:prstGeom>
+        </p:spPr>
+        <p:txBody>
+          <a:bodyPr spcFirstLastPara="1" lIns="0" tIns="0" rIns="0" bIns="0" anchor="t">
+            <a:normAutofit/>
+          </a:bodyPr>
+          <a:lstStyle/>
+          <a:p>
             <a:pPr>
               <a:defRPr sz="1350" b="0">
                 <a:solidFill>
@@ -2311,26 +1944,26 @@
       <p:sp>
         <p:nvSpPr>
           <p:cNvPr id="11" name="cannon-image-slot-panel">
-            <a:extLst xmlns:a="http://schemas.openxmlformats.org/drawingml/2006/main">
+            <a:extLst>
               <a:ext uri="{FF2B5EF4-FFF2-40B4-BE49-F238E27FC236}">
                 <a16:creationId xmlns:a16="http://schemas.microsoft.com/office/drawing/2014/main" id="{F5639004-B6D1-4497-BF82-B6E5AC274DF6}"/>
               </a:ext>
             </a:extLst>
           </p:cNvPr>
           <p:cNvSpPr>
-            <a:spLocks xmlns:a="http://schemas.openxmlformats.org/drawingml/2006/main" noGrp="1"/>
-          </p:cNvSpPr>
-          <p:nvPr/>
-        </p:nvSpPr>
-        <p:spPr>
-          <a:xfrm xmlns:a="http://schemas.openxmlformats.org/drawingml/2006/main">
+            <a:spLocks noGrp="1"/>
+          </p:cNvSpPr>
+          <p:nvPr/>
+        </p:nvSpPr>
+        <p:spPr>
+          <a:xfrm>
             <a:off x="7372350" y="1181100"/>
             <a:ext cx="4419600" cy="2609850"/>
           </a:xfrm>
-          <a:prstGeom xmlns:a="http://schemas.openxmlformats.org/drawingml/2006/main" prst="rect">
-            <a:avLst/>
-          </a:prstGeom>
-          <a:solidFill xmlns:a="http://schemas.openxmlformats.org/drawingml/2006/main">
+          <a:prstGeom prst="rect">
+            <a:avLst/>
+          </a:prstGeom>
+          <a:solidFill>
             <a:srgbClr val="EDEDED"/>
           </a:solidFill>
         </p:spPr>
@@ -2338,26 +1971,26 @@
       <p:sp>
         <p:nvSpPr>
           <p:cNvPr id="12" name="cannon-image-slot-accent">
-            <a:extLst xmlns:a="http://schemas.openxmlformats.org/drawingml/2006/main">
+            <a:extLst>
               <a:ext uri="{FF2B5EF4-FFF2-40B4-BE49-F238E27FC236}">
                 <a16:creationId xmlns:a16="http://schemas.microsoft.com/office/drawing/2014/main" id="{411E9A9A-128C-40D5-91E5-E2CEBC95453B}"/>
               </a:ext>
             </a:extLst>
           </p:cNvPr>
           <p:cNvSpPr>
-            <a:spLocks xmlns:a="http://schemas.openxmlformats.org/drawingml/2006/main" noGrp="1"/>
-          </p:cNvSpPr>
-          <p:nvPr/>
-        </p:nvSpPr>
-        <p:spPr>
-          <a:xfrm xmlns:a="http://schemas.openxmlformats.org/drawingml/2006/main">
+            <a:spLocks noGrp="1"/>
+          </p:cNvSpPr>
+          <p:nvPr/>
+        </p:nvSpPr>
+        <p:spPr>
+          <a:xfrm>
             <a:off x="7372350" y="1181100"/>
             <a:ext cx="76200" cy="2609850"/>
           </a:xfrm>
-          <a:prstGeom xmlns:a="http://schemas.openxmlformats.org/drawingml/2006/main" prst="rect">
-            <a:avLst/>
-          </a:prstGeom>
-          <a:solidFill xmlns:a="http://schemas.openxmlformats.org/drawingml/2006/main">
+          <a:prstGeom prst="rect">
+            <a:avLst/>
+          </a:prstGeom>
+          <a:solidFill>
             <a:srgbClr val="FF6B35"/>
           </a:solidFill>
         </p:spPr>
@@ -2365,32 +1998,32 @@
       <p:sp>
         <p:nvSpPr>
           <p:cNvPr id="13" name="cannon-image-slot-label">
-            <a:extLst xmlns:a="http://schemas.openxmlformats.org/drawingml/2006/main">
+            <a:extLst>
               <a:ext uri="{FF2B5EF4-FFF2-40B4-BE49-F238E27FC236}">
                 <a16:creationId xmlns:a16="http://schemas.microsoft.com/office/drawing/2014/main" id="{89CE1EAF-0FD3-4781-BB05-18EE1843AB22}"/>
               </a:ext>
             </a:extLst>
           </p:cNvPr>
           <p:cNvSpPr>
-            <a:spLocks xmlns:a="http://schemas.openxmlformats.org/drawingml/2006/main" noGrp="1"/>
-          </p:cNvSpPr>
-          <p:nvPr/>
-        </p:nvSpPr>
-        <p:spPr>
-          <a:xfrm xmlns:a="http://schemas.openxmlformats.org/drawingml/2006/main">
+            <a:spLocks noGrp="1"/>
+          </p:cNvSpPr>
+          <p:nvPr/>
+        </p:nvSpPr>
+        <p:spPr>
+          <a:xfrm>
             <a:off x="7639050" y="1447800"/>
             <a:ext cx="3886200" cy="323850"/>
           </a:xfrm>
-          <a:prstGeom xmlns:a="http://schemas.openxmlformats.org/drawingml/2006/main" prst="rect">
-            <a:avLst/>
-          </a:prstGeom>
-        </p:spPr>
-        <p:txBody>
-          <a:bodyPr xmlns:a="http://schemas.openxmlformats.org/drawingml/2006/main" spcFirstLastPara="1" lIns="0" tIns="0" rIns="0" bIns="0" anchor="t">
-            <a:normAutofit fontScale="100000"/>
-          </a:bodyPr>
-          <a:lstStyle xmlns:a="http://schemas.openxmlformats.org/drawingml/2006/main"/>
-          <a:p xmlns:a="http://schemas.openxmlformats.org/drawingml/2006/main">
+          <a:prstGeom prst="rect">
+            <a:avLst/>
+          </a:prstGeom>
+        </p:spPr>
+        <p:txBody>
+          <a:bodyPr spcFirstLastPara="1" lIns="0" tIns="0" rIns="0" bIns="0" anchor="t">
+            <a:normAutofit/>
+          </a:bodyPr>
+          <a:lstStyle/>
+          <a:p>
             <a:pPr>
               <a:defRPr sz="1800" b="1">
                 <a:solidFill>
@@ -2410,32 +2043,32 @@
       <p:sp>
         <p:nvSpPr>
           <p:cNvPr id="14" name="cannon-image-slot-hint">
-            <a:extLst xmlns:a="http://schemas.openxmlformats.org/drawingml/2006/main">
+            <a:extLst>
               <a:ext uri="{FF2B5EF4-FFF2-40B4-BE49-F238E27FC236}">
                 <a16:creationId xmlns:a16="http://schemas.microsoft.com/office/drawing/2014/main" id="{48A14E89-042B-47EE-99B4-FC2BF9C39AD8}"/>
               </a:ext>
             </a:extLst>
           </p:cNvPr>
           <p:cNvSpPr>
-            <a:spLocks xmlns:a="http://schemas.openxmlformats.org/drawingml/2006/main" noGrp="1"/>
-          </p:cNvSpPr>
-          <p:nvPr/>
-        </p:nvSpPr>
-        <p:spPr>
-          <a:xfrm xmlns:a="http://schemas.openxmlformats.org/drawingml/2006/main">
+            <a:spLocks noGrp="1"/>
+          </p:cNvSpPr>
+          <p:nvPr/>
+        </p:nvSpPr>
+        <p:spPr>
+          <a:xfrm>
             <a:off x="7639050" y="3143250"/>
             <a:ext cx="3886200" cy="381000"/>
           </a:xfrm>
-          <a:prstGeom xmlns:a="http://schemas.openxmlformats.org/drawingml/2006/main" prst="rect">
-            <a:avLst/>
-          </a:prstGeom>
-        </p:spPr>
-        <p:txBody>
-          <a:bodyPr xmlns:a="http://schemas.openxmlformats.org/drawingml/2006/main" spcFirstLastPara="1" lIns="0" tIns="0" rIns="0" bIns="0" anchor="t">
-            <a:normAutofit fontScale="100000"/>
-          </a:bodyPr>
-          <a:lstStyle xmlns:a="http://schemas.openxmlformats.org/drawingml/2006/main"/>
-          <a:p xmlns:a="http://schemas.openxmlformats.org/drawingml/2006/main">
+          <a:prstGeom prst="rect">
+            <a:avLst/>
+          </a:prstGeom>
+        </p:spPr>
+        <p:txBody>
+          <a:bodyPr spcFirstLastPara="1" lIns="0" tIns="0" rIns="0" bIns="0" anchor="t">
+            <a:normAutofit/>
+          </a:bodyPr>
+          <a:lstStyle/>
+          <a:p>
             <a:pPr>
               <a:defRPr sz="1350" b="0">
                 <a:solidFill>
@@ -2455,32 +2088,32 @@
       <p:sp>
         <p:nvSpPr>
           <p:cNvPr id="15" name="cannon-stats-heading">
-            <a:extLst xmlns:a="http://schemas.openxmlformats.org/drawingml/2006/main">
+            <a:extLst>
               <a:ext uri="{FF2B5EF4-FFF2-40B4-BE49-F238E27FC236}">
                 <a16:creationId xmlns:a16="http://schemas.microsoft.com/office/drawing/2014/main" id="{20F4BBE7-9064-45C9-BE58-A683609FAB64}"/>
               </a:ext>
             </a:extLst>
           </p:cNvPr>
           <p:cNvSpPr>
-            <a:spLocks xmlns:a="http://schemas.openxmlformats.org/drawingml/2006/main" noGrp="1"/>
-          </p:cNvSpPr>
-          <p:nvPr/>
-        </p:nvSpPr>
-        <p:spPr>
-          <a:xfrm xmlns:a="http://schemas.openxmlformats.org/drawingml/2006/main">
+            <a:spLocks noGrp="1"/>
+          </p:cNvSpPr>
+          <p:nvPr/>
+        </p:nvSpPr>
+        <p:spPr>
+          <a:xfrm>
             <a:off x="7372350" y="4057650"/>
             <a:ext cx="4419600" cy="323850"/>
           </a:xfrm>
-          <a:prstGeom xmlns:a="http://schemas.openxmlformats.org/drawingml/2006/main" prst="rect">
-            <a:avLst/>
-          </a:prstGeom>
-        </p:spPr>
-        <p:txBody>
-          <a:bodyPr xmlns:a="http://schemas.openxmlformats.org/drawingml/2006/main" spcFirstLastPara="1" lIns="0" tIns="0" rIns="0" bIns="0" anchor="t">
-            <a:normAutofit fontScale="100000"/>
-          </a:bodyPr>
-          <a:lstStyle xmlns:a="http://schemas.openxmlformats.org/drawingml/2006/main"/>
-          <a:p xmlns:a="http://schemas.openxmlformats.org/drawingml/2006/main">
+          <a:prstGeom prst="rect">
+            <a:avLst/>
+          </a:prstGeom>
+        </p:spPr>
+        <p:txBody>
+          <a:bodyPr spcFirstLastPara="1" lIns="0" tIns="0" rIns="0" bIns="0" anchor="t">
+            <a:normAutofit/>
+          </a:bodyPr>
+          <a:lstStyle/>
+          <a:p>
             <a:pPr>
               <a:defRPr sz="1800" b="1">
                 <a:solidFill>
@@ -2500,26 +2133,26 @@
       <p:sp>
         <p:nvSpPr>
           <p:cNvPr id="16" name="cannon-stat-bg-1">
-            <a:extLst xmlns:a="http://schemas.openxmlformats.org/drawingml/2006/main">
+            <a:extLst>
               <a:ext uri="{FF2B5EF4-FFF2-40B4-BE49-F238E27FC236}">
                 <a16:creationId xmlns:a16="http://schemas.microsoft.com/office/drawing/2014/main" id="{FCC102C0-0093-4E55-AD3F-AF1148795035}"/>
               </a:ext>
             </a:extLst>
           </p:cNvPr>
           <p:cNvSpPr>
-            <a:spLocks xmlns:a="http://schemas.openxmlformats.org/drawingml/2006/main" noGrp="1"/>
-          </p:cNvSpPr>
-          <p:nvPr/>
-        </p:nvSpPr>
-        <p:spPr>
-          <a:xfrm xmlns:a="http://schemas.openxmlformats.org/drawingml/2006/main">
+            <a:spLocks noGrp="1"/>
+          </p:cNvSpPr>
+          <p:nvPr/>
+        </p:nvSpPr>
+        <p:spPr>
+          <a:xfrm>
             <a:off x="7372350" y="4438650"/>
             <a:ext cx="4419600" cy="280035"/>
           </a:xfrm>
-          <a:prstGeom xmlns:a="http://schemas.openxmlformats.org/drawingml/2006/main" prst="rect">
-            <a:avLst/>
-          </a:prstGeom>
-          <a:solidFill xmlns:a="http://schemas.openxmlformats.org/drawingml/2006/main">
+          <a:prstGeom prst="rect">
+            <a:avLst/>
+          </a:prstGeom>
+          <a:solidFill>
             <a:srgbClr val="F5F5F5"/>
           </a:solidFill>
         </p:spPr>
@@ -2527,32 +2160,32 @@
       <p:sp>
         <p:nvSpPr>
           <p:cNvPr id="17" name="cannon-stat-label-1">
-            <a:extLst xmlns:a="http://schemas.openxmlformats.org/drawingml/2006/main">
+            <a:extLst>
               <a:ext uri="{FF2B5EF4-FFF2-40B4-BE49-F238E27FC236}">
                 <a16:creationId xmlns:a16="http://schemas.microsoft.com/office/drawing/2014/main" id="{9EF96083-168C-47E7-AD4F-D4DB5DE16380}"/>
               </a:ext>
             </a:extLst>
           </p:cNvPr>
           <p:cNvSpPr>
-            <a:spLocks xmlns:a="http://schemas.openxmlformats.org/drawingml/2006/main" noGrp="1"/>
-          </p:cNvSpPr>
-          <p:nvPr/>
-        </p:nvSpPr>
-        <p:spPr>
-          <a:xfrm xmlns:a="http://schemas.openxmlformats.org/drawingml/2006/main">
+            <a:spLocks noGrp="1"/>
+          </p:cNvSpPr>
+          <p:nvPr/>
+        </p:nvSpPr>
+        <p:spPr>
+          <a:xfrm>
             <a:off x="7505700" y="4486275"/>
             <a:ext cx="1352550" cy="213360"/>
           </a:xfrm>
-          <a:prstGeom xmlns:a="http://schemas.openxmlformats.org/drawingml/2006/main" prst="rect">
-            <a:avLst/>
-          </a:prstGeom>
-        </p:spPr>
-        <p:txBody>
-          <a:bodyPr xmlns:a="http://schemas.openxmlformats.org/drawingml/2006/main" spcFirstLastPara="1" lIns="0" tIns="0" rIns="0" bIns="0" anchor="ctr">
-            <a:normAutofit fontScale="100000"/>
-          </a:bodyPr>
-          <a:lstStyle xmlns:a="http://schemas.openxmlformats.org/drawingml/2006/main"/>
-          <a:p xmlns:a="http://schemas.openxmlformats.org/drawingml/2006/main">
+          <a:prstGeom prst="rect">
+            <a:avLst/>
+          </a:prstGeom>
+        </p:spPr>
+        <p:txBody>
+          <a:bodyPr spcFirstLastPara="1" lIns="0" tIns="0" rIns="0" bIns="0" anchor="ctr">
+            <a:normAutofit/>
+          </a:bodyPr>
+          <a:lstStyle/>
+          <a:p>
             <a:pPr>
               <a:defRPr sz="1350" b="1">
                 <a:solidFill>
@@ -2572,32 +2205,32 @@
       <p:sp>
         <p:nvSpPr>
           <p:cNvPr id="18" name="cannon-stat-value-1">
-            <a:extLst xmlns:a="http://schemas.openxmlformats.org/drawingml/2006/main">
+            <a:extLst>
               <a:ext uri="{FF2B5EF4-FFF2-40B4-BE49-F238E27FC236}">
                 <a16:creationId xmlns:a16="http://schemas.microsoft.com/office/drawing/2014/main" id="{2AF46C49-D1FF-46E7-8C42-7B1D4CC3A1D3}"/>
               </a:ext>
             </a:extLst>
           </p:cNvPr>
           <p:cNvSpPr>
-            <a:spLocks xmlns:a="http://schemas.openxmlformats.org/drawingml/2006/main" noGrp="1"/>
-          </p:cNvSpPr>
-          <p:nvPr/>
-        </p:nvSpPr>
-        <p:spPr>
-          <a:xfrm xmlns:a="http://schemas.openxmlformats.org/drawingml/2006/main">
+            <a:spLocks noGrp="1"/>
+          </p:cNvSpPr>
+          <p:nvPr/>
+        </p:nvSpPr>
+        <p:spPr>
+          <a:xfrm>
             <a:off x="8896350" y="4486275"/>
             <a:ext cx="2762250" cy="213360"/>
           </a:xfrm>
-          <a:prstGeom xmlns:a="http://schemas.openxmlformats.org/drawingml/2006/main" prst="rect">
-            <a:avLst/>
-          </a:prstGeom>
-        </p:spPr>
-        <p:txBody>
-          <a:bodyPr xmlns:a="http://schemas.openxmlformats.org/drawingml/2006/main" spcFirstLastPara="1" lIns="0" tIns="0" rIns="0" bIns="0" anchor="ctr">
+          <a:prstGeom prst="rect">
+            <a:avLst/>
+          </a:prstGeom>
+        </p:spPr>
+        <p:txBody>
+          <a:bodyPr spcFirstLastPara="1" lIns="0" tIns="0" rIns="0" bIns="0" anchor="ctr">
             <a:normAutofit fontScale="98246"/>
           </a:bodyPr>
-          <a:lstStyle xmlns:a="http://schemas.openxmlformats.org/drawingml/2006/main"/>
-          <a:p xmlns:a="http://schemas.openxmlformats.org/drawingml/2006/main">
+          <a:lstStyle/>
+          <a:p>
             <a:pPr>
               <a:defRPr sz="1425" b="0">
                 <a:solidFill>
@@ -2617,26 +2250,26 @@
       <p:sp>
         <p:nvSpPr>
           <p:cNvPr id="19" name="cannon-stat-bg-2">
-            <a:extLst xmlns:a="http://schemas.openxmlformats.org/drawingml/2006/main">
+            <a:extLst>
               <a:ext uri="{FF2B5EF4-FFF2-40B4-BE49-F238E27FC236}">
                 <a16:creationId xmlns:a16="http://schemas.microsoft.com/office/drawing/2014/main" id="{CC8F0319-BBF4-437D-A59F-4CB46D742E63}"/>
               </a:ext>
             </a:extLst>
           </p:cNvPr>
           <p:cNvSpPr>
-            <a:spLocks xmlns:a="http://schemas.openxmlformats.org/drawingml/2006/main" noGrp="1"/>
-          </p:cNvSpPr>
-          <p:nvPr/>
-        </p:nvSpPr>
-        <p:spPr>
-          <a:xfrm xmlns:a="http://schemas.openxmlformats.org/drawingml/2006/main">
+            <a:spLocks noGrp="1"/>
+          </p:cNvSpPr>
+          <p:nvPr/>
+        </p:nvSpPr>
+        <p:spPr>
+          <a:xfrm>
             <a:off x="7372350" y="4728210"/>
             <a:ext cx="4419600" cy="280035"/>
           </a:xfrm>
-          <a:prstGeom xmlns:a="http://schemas.openxmlformats.org/drawingml/2006/main" prst="rect">
-            <a:avLst/>
-          </a:prstGeom>
-          <a:solidFill xmlns:a="http://schemas.openxmlformats.org/drawingml/2006/main">
+          <a:prstGeom prst="rect">
+            <a:avLst/>
+          </a:prstGeom>
+          <a:solidFill>
             <a:srgbClr val="FFFFFF"/>
           </a:solidFill>
         </p:spPr>
@@ -2644,32 +2277,32 @@
       <p:sp>
         <p:nvSpPr>
           <p:cNvPr id="20" name="cannon-stat-label-2">
-            <a:extLst xmlns:a="http://schemas.openxmlformats.org/drawingml/2006/main">
+            <a:extLst>
               <a:ext uri="{FF2B5EF4-FFF2-40B4-BE49-F238E27FC236}">
                 <a16:creationId xmlns:a16="http://schemas.microsoft.com/office/drawing/2014/main" id="{1C1D2F75-3983-4180-B47C-0EC323BCBE9A}"/>
               </a:ext>
             </a:extLst>
           </p:cNvPr>
           <p:cNvSpPr>
-            <a:spLocks xmlns:a="http://schemas.openxmlformats.org/drawingml/2006/main" noGrp="1"/>
-          </p:cNvSpPr>
-          <p:nvPr/>
-        </p:nvSpPr>
-        <p:spPr>
-          <a:xfrm xmlns:a="http://schemas.openxmlformats.org/drawingml/2006/main">
+            <a:spLocks noGrp="1"/>
+          </p:cNvSpPr>
+          <p:nvPr/>
+        </p:nvSpPr>
+        <p:spPr>
+          <a:xfrm>
             <a:off x="7505700" y="4775835"/>
             <a:ext cx="1352550" cy="213360"/>
           </a:xfrm>
-          <a:prstGeom xmlns:a="http://schemas.openxmlformats.org/drawingml/2006/main" prst="rect">
-            <a:avLst/>
-          </a:prstGeom>
-        </p:spPr>
-        <p:txBody>
-          <a:bodyPr xmlns:a="http://schemas.openxmlformats.org/drawingml/2006/main" spcFirstLastPara="1" lIns="0" tIns="0" rIns="0" bIns="0" anchor="ctr">
-            <a:normAutofit fontScale="100000"/>
-          </a:bodyPr>
-          <a:lstStyle xmlns:a="http://schemas.openxmlformats.org/drawingml/2006/main"/>
-          <a:p xmlns:a="http://schemas.openxmlformats.org/drawingml/2006/main">
+          <a:prstGeom prst="rect">
+            <a:avLst/>
+          </a:prstGeom>
+        </p:spPr>
+        <p:txBody>
+          <a:bodyPr spcFirstLastPara="1" lIns="0" tIns="0" rIns="0" bIns="0" anchor="ctr">
+            <a:normAutofit/>
+          </a:bodyPr>
+          <a:lstStyle/>
+          <a:p>
             <a:pPr>
               <a:defRPr sz="1350" b="1">
                 <a:solidFill>
@@ -2689,32 +2322,32 @@
       <p:sp>
         <p:nvSpPr>
           <p:cNvPr id="21" name="cannon-stat-value-2">
-            <a:extLst xmlns:a="http://schemas.openxmlformats.org/drawingml/2006/main">
+            <a:extLst>
               <a:ext uri="{FF2B5EF4-FFF2-40B4-BE49-F238E27FC236}">
                 <a16:creationId xmlns:a16="http://schemas.microsoft.com/office/drawing/2014/main" id="{8DED9082-006A-4098-A920-F47179904882}"/>
               </a:ext>
             </a:extLst>
           </p:cNvPr>
           <p:cNvSpPr>
-            <a:spLocks xmlns:a="http://schemas.openxmlformats.org/drawingml/2006/main" noGrp="1"/>
-          </p:cNvSpPr>
-          <p:nvPr/>
-        </p:nvSpPr>
-        <p:spPr>
-          <a:xfrm xmlns:a="http://schemas.openxmlformats.org/drawingml/2006/main">
+            <a:spLocks noGrp="1"/>
+          </p:cNvSpPr>
+          <p:nvPr/>
+        </p:nvSpPr>
+        <p:spPr>
+          <a:xfrm>
             <a:off x="8896350" y="4775835"/>
             <a:ext cx="2762250" cy="213360"/>
           </a:xfrm>
-          <a:prstGeom xmlns:a="http://schemas.openxmlformats.org/drawingml/2006/main" prst="rect">
-            <a:avLst/>
-          </a:prstGeom>
-        </p:spPr>
-        <p:txBody>
-          <a:bodyPr xmlns:a="http://schemas.openxmlformats.org/drawingml/2006/main" spcFirstLastPara="1" lIns="0" tIns="0" rIns="0" bIns="0" anchor="ctr">
+          <a:prstGeom prst="rect">
+            <a:avLst/>
+          </a:prstGeom>
+        </p:spPr>
+        <p:txBody>
+          <a:bodyPr spcFirstLastPara="1" lIns="0" tIns="0" rIns="0" bIns="0" anchor="ctr">
             <a:normAutofit fontScale="98246"/>
           </a:bodyPr>
-          <a:lstStyle xmlns:a="http://schemas.openxmlformats.org/drawingml/2006/main"/>
-          <a:p xmlns:a="http://schemas.openxmlformats.org/drawingml/2006/main">
+          <a:lstStyle/>
+          <a:p>
             <a:pPr>
               <a:defRPr sz="1425" b="0">
                 <a:solidFill>
@@ -2734,26 +2367,26 @@
       <p:sp>
         <p:nvSpPr>
           <p:cNvPr id="22" name="cannon-stat-bg-3">
-            <a:extLst xmlns:a="http://schemas.openxmlformats.org/drawingml/2006/main">
+            <a:extLst>
               <a:ext uri="{FF2B5EF4-FFF2-40B4-BE49-F238E27FC236}">
                 <a16:creationId xmlns:a16="http://schemas.microsoft.com/office/drawing/2014/main" id="{B44C5060-677A-4807-B08D-6EE48A3BA97D}"/>
               </a:ext>
             </a:extLst>
           </p:cNvPr>
           <p:cNvSpPr>
-            <a:spLocks xmlns:a="http://schemas.openxmlformats.org/drawingml/2006/main" noGrp="1"/>
-          </p:cNvSpPr>
-          <p:nvPr/>
-        </p:nvSpPr>
-        <p:spPr>
-          <a:xfrm xmlns:a="http://schemas.openxmlformats.org/drawingml/2006/main">
+            <a:spLocks noGrp="1"/>
+          </p:cNvSpPr>
+          <p:nvPr/>
+        </p:nvSpPr>
+        <p:spPr>
+          <a:xfrm>
             <a:off x="7372350" y="5017770"/>
             <a:ext cx="4419600" cy="280035"/>
           </a:xfrm>
-          <a:prstGeom xmlns:a="http://schemas.openxmlformats.org/drawingml/2006/main" prst="rect">
-            <a:avLst/>
-          </a:prstGeom>
-          <a:solidFill xmlns:a="http://schemas.openxmlformats.org/drawingml/2006/main">
+          <a:prstGeom prst="rect">
+            <a:avLst/>
+          </a:prstGeom>
+          <a:solidFill>
             <a:srgbClr val="F5F5F5"/>
           </a:solidFill>
         </p:spPr>
@@ -2761,32 +2394,32 @@
       <p:sp>
         <p:nvSpPr>
           <p:cNvPr id="23" name="cannon-stat-label-3">
-            <a:extLst xmlns:a="http://schemas.openxmlformats.org/drawingml/2006/main">
+            <a:extLst>
               <a:ext uri="{FF2B5EF4-FFF2-40B4-BE49-F238E27FC236}">
                 <a16:creationId xmlns:a16="http://schemas.microsoft.com/office/drawing/2014/main" id="{42DC9451-3268-4D5E-A36A-E8BC2FEC01F7}"/>
               </a:ext>
             </a:extLst>
           </p:cNvPr>
           <p:cNvSpPr>
-            <a:spLocks xmlns:a="http://schemas.openxmlformats.org/drawingml/2006/main" noGrp="1"/>
-          </p:cNvSpPr>
-          <p:nvPr/>
-        </p:nvSpPr>
-        <p:spPr>
-          <a:xfrm xmlns:a="http://schemas.openxmlformats.org/drawingml/2006/main">
+            <a:spLocks noGrp="1"/>
+          </p:cNvSpPr>
+          <p:nvPr/>
+        </p:nvSpPr>
+        <p:spPr>
+          <a:xfrm>
             <a:off x="7505700" y="5065395"/>
             <a:ext cx="1352550" cy="213360"/>
           </a:xfrm>
-          <a:prstGeom xmlns:a="http://schemas.openxmlformats.org/drawingml/2006/main" prst="rect">
-            <a:avLst/>
-          </a:prstGeom>
-        </p:spPr>
-        <p:txBody>
-          <a:bodyPr xmlns:a="http://schemas.openxmlformats.org/drawingml/2006/main" spcFirstLastPara="1" lIns="0" tIns="0" rIns="0" bIns="0" anchor="ctr">
-            <a:normAutofit fontScale="100000"/>
-          </a:bodyPr>
-          <a:lstStyle xmlns:a="http://schemas.openxmlformats.org/drawingml/2006/main"/>
-          <a:p xmlns:a="http://schemas.openxmlformats.org/drawingml/2006/main">
+          <a:prstGeom prst="rect">
+            <a:avLst/>
+          </a:prstGeom>
+        </p:spPr>
+        <p:txBody>
+          <a:bodyPr spcFirstLastPara="1" lIns="0" tIns="0" rIns="0" bIns="0" anchor="ctr">
+            <a:normAutofit/>
+          </a:bodyPr>
+          <a:lstStyle/>
+          <a:p>
             <a:pPr>
               <a:defRPr sz="1350" b="1">
                 <a:solidFill>
@@ -2806,32 +2439,32 @@
       <p:sp>
         <p:nvSpPr>
           <p:cNvPr id="24" name="cannon-stat-value-3">
-            <a:extLst xmlns:a="http://schemas.openxmlformats.org/drawingml/2006/main">
+            <a:extLst>
               <a:ext uri="{FF2B5EF4-FFF2-40B4-BE49-F238E27FC236}">
                 <a16:creationId xmlns:a16="http://schemas.microsoft.com/office/drawing/2014/main" id="{21B192BA-B120-49E9-8784-57EA229D5A7E}"/>
               </a:ext>
             </a:extLst>
           </p:cNvPr>
           <p:cNvSpPr>
-            <a:spLocks xmlns:a="http://schemas.openxmlformats.org/drawingml/2006/main" noGrp="1"/>
-          </p:cNvSpPr>
-          <p:nvPr/>
-        </p:nvSpPr>
-        <p:spPr>
-          <a:xfrm xmlns:a="http://schemas.openxmlformats.org/drawingml/2006/main">
+            <a:spLocks noGrp="1"/>
+          </p:cNvSpPr>
+          <p:nvPr/>
+        </p:nvSpPr>
+        <p:spPr>
+          <a:xfrm>
             <a:off x="8896350" y="5065395"/>
             <a:ext cx="2762250" cy="213360"/>
           </a:xfrm>
-          <a:prstGeom xmlns:a="http://schemas.openxmlformats.org/drawingml/2006/main" prst="rect">
-            <a:avLst/>
-          </a:prstGeom>
-        </p:spPr>
-        <p:txBody>
-          <a:bodyPr xmlns:a="http://schemas.openxmlformats.org/drawingml/2006/main" spcFirstLastPara="1" lIns="0" tIns="0" rIns="0" bIns="0" anchor="ctr">
+          <a:prstGeom prst="rect">
+            <a:avLst/>
+          </a:prstGeom>
+        </p:spPr>
+        <p:txBody>
+          <a:bodyPr spcFirstLastPara="1" lIns="0" tIns="0" rIns="0" bIns="0" anchor="ctr">
             <a:normAutofit fontScale="98246"/>
           </a:bodyPr>
-          <a:lstStyle xmlns:a="http://schemas.openxmlformats.org/drawingml/2006/main"/>
-          <a:p xmlns:a="http://schemas.openxmlformats.org/drawingml/2006/main">
+          <a:lstStyle/>
+          <a:p>
             <a:pPr>
               <a:defRPr sz="1425" b="0">
                 <a:solidFill>
@@ -2851,26 +2484,26 @@
       <p:sp>
         <p:nvSpPr>
           <p:cNvPr id="25" name="cannon-stat-bg-4">
-            <a:extLst xmlns:a="http://schemas.openxmlformats.org/drawingml/2006/main">
+            <a:extLst>
               <a:ext uri="{FF2B5EF4-FFF2-40B4-BE49-F238E27FC236}">
                 <a16:creationId xmlns:a16="http://schemas.microsoft.com/office/drawing/2014/main" id="{B993CBF8-B33F-4679-86FE-C9623C1E9C51}"/>
               </a:ext>
             </a:extLst>
           </p:cNvPr>
           <p:cNvSpPr>
-            <a:spLocks xmlns:a="http://schemas.openxmlformats.org/drawingml/2006/main" noGrp="1"/>
-          </p:cNvSpPr>
-          <p:nvPr/>
-        </p:nvSpPr>
-        <p:spPr>
-          <a:xfrm xmlns:a="http://schemas.openxmlformats.org/drawingml/2006/main">
+            <a:spLocks noGrp="1"/>
+          </p:cNvSpPr>
+          <p:nvPr/>
+        </p:nvSpPr>
+        <p:spPr>
+          <a:xfrm>
             <a:off x="7372350" y="5307330"/>
             <a:ext cx="4419600" cy="280035"/>
           </a:xfrm>
-          <a:prstGeom xmlns:a="http://schemas.openxmlformats.org/drawingml/2006/main" prst="rect">
-            <a:avLst/>
-          </a:prstGeom>
-          <a:solidFill xmlns:a="http://schemas.openxmlformats.org/drawingml/2006/main">
+          <a:prstGeom prst="rect">
+            <a:avLst/>
+          </a:prstGeom>
+          <a:solidFill>
             <a:srgbClr val="FFFFFF"/>
           </a:solidFill>
         </p:spPr>
@@ -2878,32 +2511,32 @@
       <p:sp>
         <p:nvSpPr>
           <p:cNvPr id="26" name="cannon-stat-label-4">
-            <a:extLst xmlns:a="http://schemas.openxmlformats.org/drawingml/2006/main">
+            <a:extLst>
               <a:ext uri="{FF2B5EF4-FFF2-40B4-BE49-F238E27FC236}">
                 <a16:creationId xmlns:a16="http://schemas.microsoft.com/office/drawing/2014/main" id="{99606750-3997-4707-886A-94D9D61B32C4}"/>
               </a:ext>
             </a:extLst>
           </p:cNvPr>
           <p:cNvSpPr>
-            <a:spLocks xmlns:a="http://schemas.openxmlformats.org/drawingml/2006/main" noGrp="1"/>
-          </p:cNvSpPr>
-          <p:nvPr/>
-        </p:nvSpPr>
-        <p:spPr>
-          <a:xfrm xmlns:a="http://schemas.openxmlformats.org/drawingml/2006/main">
+            <a:spLocks noGrp="1"/>
+          </p:cNvSpPr>
+          <p:nvPr/>
+        </p:nvSpPr>
+        <p:spPr>
+          <a:xfrm>
             <a:off x="7505700" y="5354955"/>
             <a:ext cx="1352550" cy="213360"/>
           </a:xfrm>
-          <a:prstGeom xmlns:a="http://schemas.openxmlformats.org/drawingml/2006/main" prst="rect">
-            <a:avLst/>
-          </a:prstGeom>
-        </p:spPr>
-        <p:txBody>
-          <a:bodyPr xmlns:a="http://schemas.openxmlformats.org/drawingml/2006/main" spcFirstLastPara="1" lIns="0" tIns="0" rIns="0" bIns="0" anchor="ctr">
-            <a:normAutofit fontScale="100000"/>
-          </a:bodyPr>
-          <a:lstStyle xmlns:a="http://schemas.openxmlformats.org/drawingml/2006/main"/>
-          <a:p xmlns:a="http://schemas.openxmlformats.org/drawingml/2006/main">
+          <a:prstGeom prst="rect">
+            <a:avLst/>
+          </a:prstGeom>
+        </p:spPr>
+        <p:txBody>
+          <a:bodyPr spcFirstLastPara="1" lIns="0" tIns="0" rIns="0" bIns="0" anchor="ctr">
+            <a:normAutofit/>
+          </a:bodyPr>
+          <a:lstStyle/>
+          <a:p>
             <a:pPr>
               <a:defRPr sz="1350" b="1">
                 <a:solidFill>
@@ -2923,32 +2556,32 @@
       <p:sp>
         <p:nvSpPr>
           <p:cNvPr id="27" name="cannon-stat-value-4">
-            <a:extLst xmlns:a="http://schemas.openxmlformats.org/drawingml/2006/main">
+            <a:extLst>
               <a:ext uri="{FF2B5EF4-FFF2-40B4-BE49-F238E27FC236}">
                 <a16:creationId xmlns:a16="http://schemas.microsoft.com/office/drawing/2014/main" id="{EF71E24D-F4D7-487D-9F7E-A378C750A039}"/>
               </a:ext>
             </a:extLst>
           </p:cNvPr>
           <p:cNvSpPr>
-            <a:spLocks xmlns:a="http://schemas.openxmlformats.org/drawingml/2006/main" noGrp="1"/>
-          </p:cNvSpPr>
-          <p:nvPr/>
-        </p:nvSpPr>
-        <p:spPr>
-          <a:xfrm xmlns:a="http://schemas.openxmlformats.org/drawingml/2006/main">
+            <a:spLocks noGrp="1"/>
+          </p:cNvSpPr>
+          <p:nvPr/>
+        </p:nvSpPr>
+        <p:spPr>
+          <a:xfrm>
             <a:off x="8896350" y="5354955"/>
             <a:ext cx="2762250" cy="213360"/>
           </a:xfrm>
-          <a:prstGeom xmlns:a="http://schemas.openxmlformats.org/drawingml/2006/main" prst="rect">
-            <a:avLst/>
-          </a:prstGeom>
-        </p:spPr>
-        <p:txBody>
-          <a:bodyPr xmlns:a="http://schemas.openxmlformats.org/drawingml/2006/main" spcFirstLastPara="1" lIns="0" tIns="0" rIns="0" bIns="0" anchor="ctr">
+          <a:prstGeom prst="rect">
+            <a:avLst/>
+          </a:prstGeom>
+        </p:spPr>
+        <p:txBody>
+          <a:bodyPr spcFirstLastPara="1" lIns="0" tIns="0" rIns="0" bIns="0" anchor="ctr">
             <a:normAutofit fontScale="98246"/>
           </a:bodyPr>
-          <a:lstStyle xmlns:a="http://schemas.openxmlformats.org/drawingml/2006/main"/>
-          <a:p xmlns:a="http://schemas.openxmlformats.org/drawingml/2006/main">
+          <a:lstStyle/>
+          <a:p>
             <a:pPr>
               <a:defRPr sz="1425" b="0">
                 <a:solidFill>
@@ -2968,26 +2601,26 @@
       <p:sp>
         <p:nvSpPr>
           <p:cNvPr id="28" name="cannon-stat-bg-5">
-            <a:extLst xmlns:a="http://schemas.openxmlformats.org/drawingml/2006/main">
+            <a:extLst>
               <a:ext uri="{FF2B5EF4-FFF2-40B4-BE49-F238E27FC236}">
                 <a16:creationId xmlns:a16="http://schemas.microsoft.com/office/drawing/2014/main" id="{37EC278E-5D45-40F4-820C-5538A0C0B701}"/>
               </a:ext>
             </a:extLst>
           </p:cNvPr>
           <p:cNvSpPr>
-            <a:spLocks xmlns:a="http://schemas.openxmlformats.org/drawingml/2006/main" noGrp="1"/>
-          </p:cNvSpPr>
-          <p:nvPr/>
-        </p:nvSpPr>
-        <p:spPr>
-          <a:xfrm xmlns:a="http://schemas.openxmlformats.org/drawingml/2006/main">
+            <a:spLocks noGrp="1"/>
+          </p:cNvSpPr>
+          <p:nvPr/>
+        </p:nvSpPr>
+        <p:spPr>
+          <a:xfrm>
             <a:off x="7372350" y="5596890"/>
             <a:ext cx="4419600" cy="280035"/>
           </a:xfrm>
-          <a:prstGeom xmlns:a="http://schemas.openxmlformats.org/drawingml/2006/main" prst="rect">
-            <a:avLst/>
-          </a:prstGeom>
-          <a:solidFill xmlns:a="http://schemas.openxmlformats.org/drawingml/2006/main">
+          <a:prstGeom prst="rect">
+            <a:avLst/>
+          </a:prstGeom>
+          <a:solidFill>
             <a:srgbClr val="F5F5F5"/>
           </a:solidFill>
         </p:spPr>
@@ -2995,32 +2628,32 @@
       <p:sp>
         <p:nvSpPr>
           <p:cNvPr id="29" name="cannon-stat-label-5">
-            <a:extLst xmlns:a="http://schemas.openxmlformats.org/drawingml/2006/main">
+            <a:extLst>
               <a:ext uri="{FF2B5EF4-FFF2-40B4-BE49-F238E27FC236}">
                 <a16:creationId xmlns:a16="http://schemas.microsoft.com/office/drawing/2014/main" id="{A2DD3F94-BC97-4815-A49A-57CCC2F3D1B8}"/>
               </a:ext>
             </a:extLst>
           </p:cNvPr>
           <p:cNvSpPr>
-            <a:spLocks xmlns:a="http://schemas.openxmlformats.org/drawingml/2006/main" noGrp="1"/>
-          </p:cNvSpPr>
-          <p:nvPr/>
-        </p:nvSpPr>
-        <p:spPr>
-          <a:xfrm xmlns:a="http://schemas.openxmlformats.org/drawingml/2006/main">
+            <a:spLocks noGrp="1"/>
+          </p:cNvSpPr>
+          <p:nvPr/>
+        </p:nvSpPr>
+        <p:spPr>
+          <a:xfrm>
             <a:off x="7505700" y="5644515"/>
             <a:ext cx="1352550" cy="213360"/>
           </a:xfrm>
-          <a:prstGeom xmlns:a="http://schemas.openxmlformats.org/drawingml/2006/main" prst="rect">
-            <a:avLst/>
-          </a:prstGeom>
-        </p:spPr>
-        <p:txBody>
-          <a:bodyPr xmlns:a="http://schemas.openxmlformats.org/drawingml/2006/main" spcFirstLastPara="1" lIns="0" tIns="0" rIns="0" bIns="0" anchor="ctr">
-            <a:normAutofit fontScale="100000"/>
-          </a:bodyPr>
-          <a:lstStyle xmlns:a="http://schemas.openxmlformats.org/drawingml/2006/main"/>
-          <a:p xmlns:a="http://schemas.openxmlformats.org/drawingml/2006/main">
+          <a:prstGeom prst="rect">
+            <a:avLst/>
+          </a:prstGeom>
+        </p:spPr>
+        <p:txBody>
+          <a:bodyPr spcFirstLastPara="1" lIns="0" tIns="0" rIns="0" bIns="0" anchor="ctr">
+            <a:normAutofit/>
+          </a:bodyPr>
+          <a:lstStyle/>
+          <a:p>
             <a:pPr>
               <a:defRPr sz="1350" b="1">
                 <a:solidFill>
@@ -3040,32 +2673,32 @@
       <p:sp>
         <p:nvSpPr>
           <p:cNvPr id="30" name="cannon-stat-value-5">
-            <a:extLst xmlns:a="http://schemas.openxmlformats.org/drawingml/2006/main">
+            <a:extLst>
               <a:ext uri="{FF2B5EF4-FFF2-40B4-BE49-F238E27FC236}">
                 <a16:creationId xmlns:a16="http://schemas.microsoft.com/office/drawing/2014/main" id="{872A529B-7629-454E-9F04-125CC0B940A0}"/>
               </a:ext>
             </a:extLst>
           </p:cNvPr>
           <p:cNvSpPr>
-            <a:spLocks xmlns:a="http://schemas.openxmlformats.org/drawingml/2006/main" noGrp="1"/>
-          </p:cNvSpPr>
-          <p:nvPr/>
-        </p:nvSpPr>
-        <p:spPr>
-          <a:xfrm xmlns:a="http://schemas.openxmlformats.org/drawingml/2006/main">
+            <a:spLocks noGrp="1"/>
+          </p:cNvSpPr>
+          <p:nvPr/>
+        </p:nvSpPr>
+        <p:spPr>
+          <a:xfrm>
             <a:off x="8896350" y="5644515"/>
             <a:ext cx="2762250" cy="213360"/>
           </a:xfrm>
-          <a:prstGeom xmlns:a="http://schemas.openxmlformats.org/drawingml/2006/main" prst="rect">
-            <a:avLst/>
-          </a:prstGeom>
-        </p:spPr>
-        <p:txBody>
-          <a:bodyPr xmlns:a="http://schemas.openxmlformats.org/drawingml/2006/main" spcFirstLastPara="1" lIns="0" tIns="0" rIns="0" bIns="0" anchor="ctr">
+          <a:prstGeom prst="rect">
+            <a:avLst/>
+          </a:prstGeom>
+        </p:spPr>
+        <p:txBody>
+          <a:bodyPr spcFirstLastPara="1" lIns="0" tIns="0" rIns="0" bIns="0" anchor="ctr">
             <a:normAutofit fontScale="98246"/>
           </a:bodyPr>
-          <a:lstStyle xmlns:a="http://schemas.openxmlformats.org/drawingml/2006/main"/>
-          <a:p xmlns:a="http://schemas.openxmlformats.org/drawingml/2006/main">
+          <a:lstStyle/>
+          <a:p>
             <a:pPr>
               <a:defRPr sz="1425" b="0">
                 <a:solidFill>
@@ -3085,26 +2718,26 @@
       <p:sp>
         <p:nvSpPr>
           <p:cNvPr id="31" name="footer-rule-2">
-            <a:extLst xmlns:a="http://schemas.openxmlformats.org/drawingml/2006/main">
+            <a:extLst>
               <a:ext uri="{FF2B5EF4-FFF2-40B4-BE49-F238E27FC236}">
                 <a16:creationId xmlns:a16="http://schemas.microsoft.com/office/drawing/2014/main" id="{01038593-43AD-4266-A95C-B845F47DCE6C}"/>
               </a:ext>
             </a:extLst>
           </p:cNvPr>
           <p:cNvSpPr>
-            <a:spLocks xmlns:a="http://schemas.openxmlformats.org/drawingml/2006/main" noGrp="1"/>
-          </p:cNvSpPr>
-          <p:nvPr/>
-        </p:nvSpPr>
-        <p:spPr>
-          <a:xfrm xmlns:a="http://schemas.openxmlformats.org/drawingml/2006/main">
+            <a:spLocks noGrp="1"/>
+          </p:cNvSpPr>
+          <p:nvPr/>
+        </p:nvSpPr>
+        <p:spPr>
+          <a:xfrm>
             <a:off x="400050" y="6172200"/>
             <a:ext cx="11391900" cy="9525"/>
           </a:xfrm>
-          <a:prstGeom xmlns:a="http://schemas.openxmlformats.org/drawingml/2006/main" prst="rect">
-            <a:avLst/>
-          </a:prstGeom>
-          <a:solidFill xmlns:a="http://schemas.openxmlformats.org/drawingml/2006/main">
+          <a:prstGeom prst="rect">
+            <a:avLst/>
+          </a:prstGeom>
+          <a:solidFill>
             <a:srgbClr val="B8BCC4"/>
           </a:solidFill>
         </p:spPr>
@@ -3112,32 +2745,32 @@
       <p:sp>
         <p:nvSpPr>
           <p:cNvPr id="32" name="footer-source-2">
-            <a:extLst xmlns:a="http://schemas.openxmlformats.org/drawingml/2006/main">
+            <a:extLst>
               <a:ext uri="{FF2B5EF4-FFF2-40B4-BE49-F238E27FC236}">
                 <a16:creationId xmlns:a16="http://schemas.microsoft.com/office/drawing/2014/main" id="{CE958354-EF5A-44B1-9D48-80135315FFCF}"/>
               </a:ext>
             </a:extLst>
           </p:cNvPr>
           <p:cNvSpPr>
-            <a:spLocks xmlns:a="http://schemas.openxmlformats.org/drawingml/2006/main" noGrp="1"/>
-          </p:cNvSpPr>
-          <p:nvPr/>
-        </p:nvSpPr>
-        <p:spPr>
-          <a:xfrm xmlns:a="http://schemas.openxmlformats.org/drawingml/2006/main">
+            <a:spLocks noGrp="1"/>
+          </p:cNvSpPr>
+          <p:nvPr/>
+        </p:nvSpPr>
+        <p:spPr>
+          <a:xfrm>
             <a:off x="400050" y="6305550"/>
             <a:ext cx="3429000" cy="228600"/>
           </a:xfrm>
-          <a:prstGeom xmlns:a="http://schemas.openxmlformats.org/drawingml/2006/main" prst="rect">
-            <a:avLst/>
-          </a:prstGeom>
-        </p:spPr>
-        <p:txBody>
-          <a:bodyPr xmlns:a="http://schemas.openxmlformats.org/drawingml/2006/main" spcFirstLastPara="1" lIns="0" tIns="0" rIns="0" bIns="0" anchor="t">
-            <a:normAutofit fontScale="100000"/>
-          </a:bodyPr>
-          <a:lstStyle xmlns:a="http://schemas.openxmlformats.org/drawingml/2006/main"/>
-          <a:p xmlns:a="http://schemas.openxmlformats.org/drawingml/2006/main">
+          <a:prstGeom prst="rect">
+            <a:avLst/>
+          </a:prstGeom>
+        </p:spPr>
+        <p:txBody>
+          <a:bodyPr spcFirstLastPara="1" lIns="0" tIns="0" rIns="0" bIns="0" anchor="t">
+            <a:normAutofit/>
+          </a:bodyPr>
+          <a:lstStyle/>
+          <a:p>
             <a:pPr>
               <a:defRPr sz="1125" b="0">
                 <a:solidFill>
@@ -3157,32 +2790,32 @@
       <p:sp>
         <p:nvSpPr>
           <p:cNvPr id="33" name="footer-page-2">
-            <a:extLst xmlns:a="http://schemas.openxmlformats.org/drawingml/2006/main">
+            <a:extLst>
               <a:ext uri="{FF2B5EF4-FFF2-40B4-BE49-F238E27FC236}">
                 <a16:creationId xmlns:a16="http://schemas.microsoft.com/office/drawing/2014/main" id="{3AF8333E-1D70-419F-AE95-1A2399834C4D}"/>
               </a:ext>
             </a:extLst>
           </p:cNvPr>
           <p:cNvSpPr>
-            <a:spLocks xmlns:a="http://schemas.openxmlformats.org/drawingml/2006/main" noGrp="1"/>
-          </p:cNvSpPr>
-          <p:nvPr/>
-        </p:nvSpPr>
-        <p:spPr>
-          <a:xfrm xmlns:a="http://schemas.openxmlformats.org/drawingml/2006/main">
+            <a:spLocks noGrp="1"/>
+          </p:cNvSpPr>
+          <p:nvPr/>
+        </p:nvSpPr>
+        <p:spPr>
+          <a:xfrm>
             <a:off x="11277600" y="6305550"/>
             <a:ext cx="514350" cy="228600"/>
           </a:xfrm>
-          <a:prstGeom xmlns:a="http://schemas.openxmlformats.org/drawingml/2006/main" prst="rect">
-            <a:avLst/>
-          </a:prstGeom>
-        </p:spPr>
-        <p:txBody>
-          <a:bodyPr xmlns:a="http://schemas.openxmlformats.org/drawingml/2006/main" spcFirstLastPara="1" lIns="0" tIns="0" rIns="0" bIns="0" anchor="t">
-            <a:normAutofit fontScale="100000"/>
-          </a:bodyPr>
-          <a:lstStyle xmlns:a="http://schemas.openxmlformats.org/drawingml/2006/main"/>
-          <a:p xmlns:a="http://schemas.openxmlformats.org/drawingml/2006/main">
+          <a:prstGeom prst="rect">
+            <a:avLst/>
+          </a:prstGeom>
+        </p:spPr>
+        <p:txBody>
+          <a:bodyPr spcFirstLastPara="1" lIns="0" tIns="0" rIns="0" bIns="0" anchor="t">
+            <a:normAutofit/>
+          </a:bodyPr>
+          <a:lstStyle/>
+          <a:p>
             <a:pPr algn="r">
               <a:defRPr sz="1125" b="0">
                 <a:solidFill>
@@ -3206,17 +2839,21 @@
       </p:ext>
     </p:extLst>
   </p:cSld>
+  <p:clrMapOvr>
+    <a:masterClrMapping/>
+  </p:clrMapOvr>
 </p:sld>
 </file>
 
 <file path=ppt/slides/slide3.xml><?xml version="1.0" encoding="utf-8"?>
-<p:sld xmlns:p="http://schemas.openxmlformats.org/presentationml/2006/main">
+<p:sld xmlns:a="http://schemas.openxmlformats.org/drawingml/2006/main" xmlns:r="http://schemas.openxmlformats.org/officeDocument/2006/relationships" xmlns:p="http://schemas.openxmlformats.org/presentationml/2006/main">
   <p:cSld>
     <p:bg>
       <p:bgPr>
-        <a:solidFill xmlns:a="http://schemas.openxmlformats.org/drawingml/2006/main">
+        <a:solidFill>
           <a:srgbClr val="FFFFFF"/>
         </a:solidFill>
+        <a:effectLst/>
       </p:bgPr>
     </p:bg>
     <p:spTree>
@@ -3226,37 +2863,42 @@
         <p:nvPr/>
       </p:nvGrpSpPr>
       <p:grpSpPr>
-        <a:xfrm xmlns:a="http://schemas.openxmlformats.org/drawingml/2006/main"/>
+        <a:xfrm>
+          <a:off x="0" y="0"/>
+          <a:ext cx="0" cy="0"/>
+          <a:chOff x="0" y="0"/>
+          <a:chExt cx="0" cy="0"/>
+        </a:xfrm>
       </p:grpSpPr>
       <p:sp>
         <p:nvSpPr>
-          <p:cNvPr id="1" name="bandit-title">
-            <a:extLst xmlns:a="http://schemas.openxmlformats.org/drawingml/2006/main">
+          <p:cNvPr id="34" name="bandit-title">
+            <a:extLst>
               <a:ext uri="{FF2B5EF4-FFF2-40B4-BE49-F238E27FC236}">
                 <a16:creationId xmlns:a16="http://schemas.microsoft.com/office/drawing/2014/main" id="{DB59B0EE-DCAC-47E5-9321-E2C87EC11764}"/>
               </a:ext>
             </a:extLst>
           </p:cNvPr>
           <p:cNvSpPr>
-            <a:spLocks xmlns:a="http://schemas.openxmlformats.org/drawingml/2006/main" noGrp="1"/>
-          </p:cNvSpPr>
-          <p:nvPr/>
-        </p:nvSpPr>
-        <p:spPr>
-          <a:xfrm xmlns:a="http://schemas.openxmlformats.org/drawingml/2006/main">
+            <a:spLocks noGrp="1"/>
+          </p:cNvSpPr>
+          <p:nvPr/>
+        </p:nvSpPr>
+        <p:spPr>
+          <a:xfrm>
             <a:off x="400050" y="342900"/>
             <a:ext cx="5905500" cy="704850"/>
           </a:xfrm>
-          <a:prstGeom xmlns:a="http://schemas.openxmlformats.org/drawingml/2006/main" prst="rect">
-            <a:avLst/>
-          </a:prstGeom>
-        </p:spPr>
-        <p:txBody>
-          <a:bodyPr xmlns:a="http://schemas.openxmlformats.org/drawingml/2006/main" spcFirstLastPara="1" lIns="0" tIns="0" rIns="0" bIns="0" anchor="t">
-            <a:normAutofit fontScale="100000"/>
-          </a:bodyPr>
-          <a:lstStyle xmlns:a="http://schemas.openxmlformats.org/drawingml/2006/main"/>
-          <a:p xmlns:a="http://schemas.openxmlformats.org/drawingml/2006/main">
+          <a:prstGeom prst="rect">
+            <a:avLst/>
+          </a:prstGeom>
+        </p:spPr>
+        <p:txBody>
+          <a:bodyPr spcFirstLastPara="1" lIns="0" tIns="0" rIns="0" bIns="0" anchor="t">
+            <a:normAutofit/>
+          </a:bodyPr>
+          <a:lstStyle/>
+          <a:p>
             <a:pPr>
               <a:defRPr sz="3750" b="1">
                 <a:solidFill>
@@ -3276,32 +2918,32 @@
       <p:sp>
         <p:nvSpPr>
           <p:cNvPr id="2" name="bandit-eyebrow">
-            <a:extLst xmlns:a="http://schemas.openxmlformats.org/drawingml/2006/main">
+            <a:extLst>
               <a:ext uri="{FF2B5EF4-FFF2-40B4-BE49-F238E27FC236}">
                 <a16:creationId xmlns:a16="http://schemas.microsoft.com/office/drawing/2014/main" id="{88919C50-CAEF-4246-8A52-0AC454924AC2}"/>
               </a:ext>
             </a:extLst>
           </p:cNvPr>
           <p:cNvSpPr>
-            <a:spLocks xmlns:a="http://schemas.openxmlformats.org/drawingml/2006/main" noGrp="1"/>
-          </p:cNvSpPr>
-          <p:nvPr/>
-        </p:nvSpPr>
-        <p:spPr>
-          <a:xfrm xmlns:a="http://schemas.openxmlformats.org/drawingml/2006/main">
+            <a:spLocks noGrp="1"/>
+          </p:cNvSpPr>
+          <p:nvPr/>
+        </p:nvSpPr>
+        <p:spPr>
+          <a:xfrm>
             <a:off x="7372350" y="476250"/>
             <a:ext cx="4419600" cy="323850"/>
           </a:xfrm>
-          <a:prstGeom xmlns:a="http://schemas.openxmlformats.org/drawingml/2006/main" prst="rect">
-            <a:avLst/>
-          </a:prstGeom>
-        </p:spPr>
-        <p:txBody>
-          <a:bodyPr xmlns:a="http://schemas.openxmlformats.org/drawingml/2006/main" spcFirstLastPara="1" lIns="0" tIns="0" rIns="0" bIns="0" anchor="t">
-            <a:normAutofit fontScale="100000"/>
-          </a:bodyPr>
-          <a:lstStyle xmlns:a="http://schemas.openxmlformats.org/drawingml/2006/main"/>
-          <a:p xmlns:a="http://schemas.openxmlformats.org/drawingml/2006/main">
+          <a:prstGeom prst="rect">
+            <a:avLst/>
+          </a:prstGeom>
+        </p:spPr>
+        <p:txBody>
+          <a:bodyPr spcFirstLastPara="1" lIns="0" tIns="0" rIns="0" bIns="0" anchor="t">
+            <a:normAutofit/>
+          </a:bodyPr>
+          <a:lstStyle/>
+          <a:p>
             <a:pPr algn="r">
               <a:defRPr sz="1350" b="0">
                 <a:solidFill>
@@ -3321,32 +2963,32 @@
       <p:sp>
         <p:nvSpPr>
           <p:cNvPr id="3" name="bandit-콘셉트-heading">
-            <a:extLst xmlns:a="http://schemas.openxmlformats.org/drawingml/2006/main">
+            <a:extLst>
               <a:ext uri="{FF2B5EF4-FFF2-40B4-BE49-F238E27FC236}">
                 <a16:creationId xmlns:a16="http://schemas.microsoft.com/office/drawing/2014/main" id="{DB0265CF-8FFA-4D70-AEE3-B3EB86D70439}"/>
               </a:ext>
             </a:extLst>
           </p:cNvPr>
           <p:cNvSpPr>
-            <a:spLocks xmlns:a="http://schemas.openxmlformats.org/drawingml/2006/main" noGrp="1"/>
-          </p:cNvSpPr>
-          <p:nvPr/>
-        </p:nvSpPr>
-        <p:spPr>
-          <a:xfrm xmlns:a="http://schemas.openxmlformats.org/drawingml/2006/main">
+            <a:spLocks noGrp="1"/>
+          </p:cNvSpPr>
+          <p:nvPr/>
+        </p:nvSpPr>
+        <p:spPr>
+          <a:xfrm>
             <a:off x="400050" y="1390650"/>
             <a:ext cx="6096000" cy="323850"/>
           </a:xfrm>
-          <a:prstGeom xmlns:a="http://schemas.openxmlformats.org/drawingml/2006/main" prst="rect">
-            <a:avLst/>
-          </a:prstGeom>
-        </p:spPr>
-        <p:txBody>
-          <a:bodyPr xmlns:a="http://schemas.openxmlformats.org/drawingml/2006/main" spcFirstLastPara="1" lIns="0" tIns="0" rIns="0" bIns="0" anchor="t">
-            <a:normAutofit fontScale="100000"/>
-          </a:bodyPr>
-          <a:lstStyle xmlns:a="http://schemas.openxmlformats.org/drawingml/2006/main"/>
-          <a:p xmlns:a="http://schemas.openxmlformats.org/drawingml/2006/main">
+          <a:prstGeom prst="rect">
+            <a:avLst/>
+          </a:prstGeom>
+        </p:spPr>
+        <p:txBody>
+          <a:bodyPr spcFirstLastPara="1" lIns="0" tIns="0" rIns="0" bIns="0" anchor="t">
+            <a:normAutofit/>
+          </a:bodyPr>
+          <a:lstStyle/>
+          <a:p>
             <a:pPr>
               <a:defRPr sz="1800" b="1">
                 <a:solidFill>
@@ -3366,26 +3008,26 @@
       <p:sp>
         <p:nvSpPr>
           <p:cNvPr id="4" name="bandit-콘셉트-rule">
-            <a:extLst xmlns:a="http://schemas.openxmlformats.org/drawingml/2006/main">
+            <a:extLst>
               <a:ext uri="{FF2B5EF4-FFF2-40B4-BE49-F238E27FC236}">
                 <a16:creationId xmlns:a16="http://schemas.microsoft.com/office/drawing/2014/main" id="{EE9FEF32-F0BD-42B1-B272-23CF89CA405A}"/>
               </a:ext>
             </a:extLst>
           </p:cNvPr>
           <p:cNvSpPr>
-            <a:spLocks xmlns:a="http://schemas.openxmlformats.org/drawingml/2006/main" noGrp="1"/>
-          </p:cNvSpPr>
-          <p:nvPr/>
-        </p:nvSpPr>
-        <p:spPr>
-          <a:xfrm xmlns:a="http://schemas.openxmlformats.org/drawingml/2006/main">
+            <a:spLocks noGrp="1"/>
+          </p:cNvSpPr>
+          <p:nvPr/>
+        </p:nvSpPr>
+        <p:spPr>
+          <a:xfrm>
             <a:off x="400050" y="1790700"/>
             <a:ext cx="685800" cy="38100"/>
           </a:xfrm>
-          <a:prstGeom xmlns:a="http://schemas.openxmlformats.org/drawingml/2006/main" prst="rect">
-            <a:avLst/>
-          </a:prstGeom>
-          <a:solidFill xmlns:a="http://schemas.openxmlformats.org/drawingml/2006/main">
+          <a:prstGeom prst="rect">
+            <a:avLst/>
+          </a:prstGeom>
+          <a:solidFill>
             <a:srgbClr val="FF6B35"/>
           </a:solidFill>
         </p:spPr>
@@ -3393,32 +3035,32 @@
       <p:sp>
         <p:nvSpPr>
           <p:cNvPr id="5" name="bandit-콘셉트-body">
-            <a:extLst xmlns:a="http://schemas.openxmlformats.org/drawingml/2006/main">
+            <a:extLst>
               <a:ext uri="{FF2B5EF4-FFF2-40B4-BE49-F238E27FC236}">
                 <a16:creationId xmlns:a16="http://schemas.microsoft.com/office/drawing/2014/main" id="{7BF121B2-03DA-4909-BB8A-FB138AC8B1B2}"/>
               </a:ext>
             </a:extLst>
           </p:cNvPr>
           <p:cNvSpPr>
-            <a:spLocks xmlns:a="http://schemas.openxmlformats.org/drawingml/2006/main" noGrp="1"/>
-          </p:cNvSpPr>
-          <p:nvPr/>
-        </p:nvSpPr>
-        <p:spPr>
-          <a:xfrm xmlns:a="http://schemas.openxmlformats.org/drawingml/2006/main">
+            <a:spLocks noGrp="1"/>
+          </p:cNvSpPr>
+          <p:nvPr/>
+        </p:nvSpPr>
+        <p:spPr>
+          <a:xfrm>
             <a:off x="400050" y="1962150"/>
             <a:ext cx="6096000" cy="819150"/>
           </a:xfrm>
-          <a:prstGeom xmlns:a="http://schemas.openxmlformats.org/drawingml/2006/main" prst="rect">
-            <a:avLst/>
-          </a:prstGeom>
-        </p:spPr>
-        <p:txBody>
-          <a:bodyPr xmlns:a="http://schemas.openxmlformats.org/drawingml/2006/main" spcFirstLastPara="1" lIns="0" tIns="0" rIns="0" bIns="0" anchor="t">
-            <a:normAutofit fontScale="100000"/>
-          </a:bodyPr>
-          <a:lstStyle xmlns:a="http://schemas.openxmlformats.org/drawingml/2006/main"/>
-          <a:p xmlns:a="http://schemas.openxmlformats.org/drawingml/2006/main">
+          <a:prstGeom prst="rect">
+            <a:avLst/>
+          </a:prstGeom>
+        </p:spPr>
+        <p:txBody>
+          <a:bodyPr spcFirstLastPara="1" lIns="0" tIns="0" rIns="0" bIns="0" anchor="t">
+            <a:normAutofit/>
+          </a:bodyPr>
+          <a:lstStyle/>
+          <a:p>
             <a:pPr>
               <a:defRPr sz="1575" b="0">
                 <a:solidFill>
@@ -3438,32 +3080,32 @@
       <p:sp>
         <p:nvSpPr>
           <p:cNvPr id="6" name="bandit-특수 공격-heading">
-            <a:extLst xmlns:a="http://schemas.openxmlformats.org/drawingml/2006/main">
+            <a:extLst>
               <a:ext uri="{FF2B5EF4-FFF2-40B4-BE49-F238E27FC236}">
                 <a16:creationId xmlns:a16="http://schemas.microsoft.com/office/drawing/2014/main" id="{E63E70DB-45F3-4151-9097-3900E7219B2F}"/>
               </a:ext>
             </a:extLst>
           </p:cNvPr>
           <p:cNvSpPr>
-            <a:spLocks xmlns:a="http://schemas.openxmlformats.org/drawingml/2006/main" noGrp="1"/>
-          </p:cNvSpPr>
-          <p:nvPr/>
-        </p:nvSpPr>
-        <p:spPr>
-          <a:xfrm xmlns:a="http://schemas.openxmlformats.org/drawingml/2006/main">
+            <a:spLocks noGrp="1"/>
+          </p:cNvSpPr>
+          <p:nvPr/>
+        </p:nvSpPr>
+        <p:spPr>
+          <a:xfrm>
             <a:off x="400050" y="3143250"/>
             <a:ext cx="6096000" cy="323850"/>
           </a:xfrm>
-          <a:prstGeom xmlns:a="http://schemas.openxmlformats.org/drawingml/2006/main" prst="rect">
-            <a:avLst/>
-          </a:prstGeom>
-        </p:spPr>
-        <p:txBody>
-          <a:bodyPr xmlns:a="http://schemas.openxmlformats.org/drawingml/2006/main" spcFirstLastPara="1" lIns="0" tIns="0" rIns="0" bIns="0" anchor="t">
-            <a:normAutofit fontScale="100000"/>
-          </a:bodyPr>
-          <a:lstStyle xmlns:a="http://schemas.openxmlformats.org/drawingml/2006/main"/>
-          <a:p xmlns:a="http://schemas.openxmlformats.org/drawingml/2006/main">
+          <a:prstGeom prst="rect">
+            <a:avLst/>
+          </a:prstGeom>
+        </p:spPr>
+        <p:txBody>
+          <a:bodyPr spcFirstLastPara="1" lIns="0" tIns="0" rIns="0" bIns="0" anchor="t">
+            <a:normAutofit/>
+          </a:bodyPr>
+          <a:lstStyle/>
+          <a:p>
             <a:pPr>
               <a:defRPr sz="1800" b="1">
                 <a:solidFill>
@@ -3483,26 +3125,26 @@
       <p:sp>
         <p:nvSpPr>
           <p:cNvPr id="7" name="bandit-특수 공격-rule">
-            <a:extLst xmlns:a="http://schemas.openxmlformats.org/drawingml/2006/main">
+            <a:extLst>
               <a:ext uri="{FF2B5EF4-FFF2-40B4-BE49-F238E27FC236}">
                 <a16:creationId xmlns:a16="http://schemas.microsoft.com/office/drawing/2014/main" id="{604806AC-AD30-4433-AA79-1561CC416C80}"/>
               </a:ext>
             </a:extLst>
           </p:cNvPr>
           <p:cNvSpPr>
-            <a:spLocks xmlns:a="http://schemas.openxmlformats.org/drawingml/2006/main" noGrp="1"/>
-          </p:cNvSpPr>
-          <p:nvPr/>
-        </p:nvSpPr>
-        <p:spPr>
-          <a:xfrm xmlns:a="http://schemas.openxmlformats.org/drawingml/2006/main">
+            <a:spLocks noGrp="1"/>
+          </p:cNvSpPr>
+          <p:nvPr/>
+        </p:nvSpPr>
+        <p:spPr>
+          <a:xfrm>
             <a:off x="400050" y="3543300"/>
             <a:ext cx="685800" cy="38100"/>
           </a:xfrm>
-          <a:prstGeom xmlns:a="http://schemas.openxmlformats.org/drawingml/2006/main" prst="rect">
-            <a:avLst/>
-          </a:prstGeom>
-          <a:solidFill xmlns:a="http://schemas.openxmlformats.org/drawingml/2006/main">
+          <a:prstGeom prst="rect">
+            <a:avLst/>
+          </a:prstGeom>
+          <a:solidFill>
             <a:srgbClr val="FF6B35"/>
           </a:solidFill>
         </p:spPr>
@@ -3510,32 +3152,32 @@
       <p:sp>
         <p:nvSpPr>
           <p:cNvPr id="8" name="bandit-특수 공격-body">
-            <a:extLst xmlns:a="http://schemas.openxmlformats.org/drawingml/2006/main">
+            <a:extLst>
               <a:ext uri="{FF2B5EF4-FFF2-40B4-BE49-F238E27FC236}">
                 <a16:creationId xmlns:a16="http://schemas.microsoft.com/office/drawing/2014/main" id="{DE36A920-15E9-478E-A515-8E22F10408A9}"/>
               </a:ext>
             </a:extLst>
           </p:cNvPr>
           <p:cNvSpPr>
-            <a:spLocks xmlns:a="http://schemas.openxmlformats.org/drawingml/2006/main" noGrp="1"/>
-          </p:cNvSpPr>
-          <p:nvPr/>
-        </p:nvSpPr>
-        <p:spPr>
-          <a:xfrm xmlns:a="http://schemas.openxmlformats.org/drawingml/2006/main">
+            <a:spLocks noGrp="1"/>
+          </p:cNvSpPr>
+          <p:nvPr/>
+        </p:nvSpPr>
+        <p:spPr>
+          <a:xfrm>
             <a:off x="400050" y="3714750"/>
             <a:ext cx="6096000" cy="1104900"/>
           </a:xfrm>
-          <a:prstGeom xmlns:a="http://schemas.openxmlformats.org/drawingml/2006/main" prst="rect">
-            <a:avLst/>
-          </a:prstGeom>
-        </p:spPr>
-        <p:txBody>
-          <a:bodyPr xmlns:a="http://schemas.openxmlformats.org/drawingml/2006/main" spcFirstLastPara="1" lIns="0" tIns="0" rIns="0" bIns="0" anchor="t">
-            <a:normAutofit fontScale="100000"/>
-          </a:bodyPr>
-          <a:lstStyle xmlns:a="http://schemas.openxmlformats.org/drawingml/2006/main"/>
-          <a:p xmlns:a="http://schemas.openxmlformats.org/drawingml/2006/main">
+          <a:prstGeom prst="rect">
+            <a:avLst/>
+          </a:prstGeom>
+        </p:spPr>
+        <p:txBody>
+          <a:bodyPr spcFirstLastPara="1" lIns="0" tIns="0" rIns="0" bIns="0" anchor="t">
+            <a:normAutofit/>
+          </a:bodyPr>
+          <a:lstStyle/>
+          <a:p>
             <a:pPr>
               <a:defRPr sz="1575" b="0">
                 <a:solidFill>
@@ -3555,26 +3197,26 @@
       <p:sp>
         <p:nvSpPr>
           <p:cNvPr id="9" name="bandit-note-band">
-            <a:extLst xmlns:a="http://schemas.openxmlformats.org/drawingml/2006/main">
+            <a:extLst>
               <a:ext uri="{FF2B5EF4-FFF2-40B4-BE49-F238E27FC236}">
                 <a16:creationId xmlns:a16="http://schemas.microsoft.com/office/drawing/2014/main" id="{B8995F33-C60D-4B1F-899C-B0AF812453C7}"/>
               </a:ext>
             </a:extLst>
           </p:cNvPr>
           <p:cNvSpPr>
-            <a:spLocks xmlns:a="http://schemas.openxmlformats.org/drawingml/2006/main" noGrp="1"/>
-          </p:cNvSpPr>
-          <p:nvPr/>
-        </p:nvSpPr>
-        <p:spPr>
-          <a:xfrm xmlns:a="http://schemas.openxmlformats.org/drawingml/2006/main">
+            <a:spLocks noGrp="1"/>
+          </p:cNvSpPr>
+          <p:nvPr/>
+        </p:nvSpPr>
+        <p:spPr>
+          <a:xfrm>
             <a:off x="400050" y="5219700"/>
             <a:ext cx="6096000" cy="666750"/>
           </a:xfrm>
-          <a:prstGeom xmlns:a="http://schemas.openxmlformats.org/drawingml/2006/main" prst="rect">
-            <a:avLst/>
-          </a:prstGeom>
-          <a:solidFill xmlns:a="http://schemas.openxmlformats.org/drawingml/2006/main">
+          <a:prstGeom prst="rect">
+            <a:avLst/>
+          </a:prstGeom>
+          <a:solidFill>
             <a:srgbClr val="EDEDED"/>
           </a:solidFill>
         </p:spPr>
@@ -3582,32 +3224,32 @@
       <p:sp>
         <p:nvSpPr>
           <p:cNvPr id="10" name="bandit-note">
-            <a:extLst xmlns:a="http://schemas.openxmlformats.org/drawingml/2006/main">
+            <a:extLst>
               <a:ext uri="{FF2B5EF4-FFF2-40B4-BE49-F238E27FC236}">
                 <a16:creationId xmlns:a16="http://schemas.microsoft.com/office/drawing/2014/main" id="{591B8DC7-9CDD-4339-8416-A1D503AC357A}"/>
               </a:ext>
             </a:extLst>
           </p:cNvPr>
           <p:cNvSpPr>
-            <a:spLocks xmlns:a="http://schemas.openxmlformats.org/drawingml/2006/main" noGrp="1"/>
-          </p:cNvSpPr>
-          <p:nvPr/>
-        </p:nvSpPr>
-        <p:spPr>
-          <a:xfrm xmlns:a="http://schemas.openxmlformats.org/drawingml/2006/main">
+            <a:spLocks noGrp="1"/>
+          </p:cNvSpPr>
+          <p:nvPr/>
+        </p:nvSpPr>
+        <p:spPr>
+          <a:xfrm>
             <a:off x="609600" y="5391150"/>
             <a:ext cx="5676900" cy="323850"/>
           </a:xfrm>
-          <a:prstGeom xmlns:a="http://schemas.openxmlformats.org/drawingml/2006/main" prst="rect">
-            <a:avLst/>
-          </a:prstGeom>
-        </p:spPr>
-        <p:txBody>
-          <a:bodyPr xmlns:a="http://schemas.openxmlformats.org/drawingml/2006/main" spcFirstLastPara="1" lIns="0" tIns="0" rIns="0" bIns="0" anchor="t">
-            <a:normAutofit fontScale="100000"/>
-          </a:bodyPr>
-          <a:lstStyle xmlns:a="http://schemas.openxmlformats.org/drawingml/2006/main"/>
-          <a:p xmlns:a="http://schemas.openxmlformats.org/drawingml/2006/main">
+          <a:prstGeom prst="rect">
+            <a:avLst/>
+          </a:prstGeom>
+        </p:spPr>
+        <p:txBody>
+          <a:bodyPr spcFirstLastPara="1" lIns="0" tIns="0" rIns="0" bIns="0" anchor="t">
+            <a:normAutofit/>
+          </a:bodyPr>
+          <a:lstStyle/>
+          <a:p>
             <a:pPr>
               <a:defRPr sz="1350" b="0">
                 <a:solidFill>
@@ -3627,26 +3269,26 @@
       <p:sp>
         <p:nvSpPr>
           <p:cNvPr id="11" name="bandit-image-slot-panel">
-            <a:extLst xmlns:a="http://schemas.openxmlformats.org/drawingml/2006/main">
+            <a:extLst>
               <a:ext uri="{FF2B5EF4-FFF2-40B4-BE49-F238E27FC236}">
                 <a16:creationId xmlns:a16="http://schemas.microsoft.com/office/drawing/2014/main" id="{A0E16D41-8C44-473F-B606-4C2D22CF90D6}"/>
               </a:ext>
             </a:extLst>
           </p:cNvPr>
           <p:cNvSpPr>
-            <a:spLocks xmlns:a="http://schemas.openxmlformats.org/drawingml/2006/main" noGrp="1"/>
-          </p:cNvSpPr>
-          <p:nvPr/>
-        </p:nvSpPr>
-        <p:spPr>
-          <a:xfrm xmlns:a="http://schemas.openxmlformats.org/drawingml/2006/main">
+            <a:spLocks noGrp="1"/>
+          </p:cNvSpPr>
+          <p:nvPr/>
+        </p:nvSpPr>
+        <p:spPr>
+          <a:xfrm>
             <a:off x="7372350" y="1181100"/>
             <a:ext cx="4419600" cy="2609850"/>
           </a:xfrm>
-          <a:prstGeom xmlns:a="http://schemas.openxmlformats.org/drawingml/2006/main" prst="rect">
-            <a:avLst/>
-          </a:prstGeom>
-          <a:solidFill xmlns:a="http://schemas.openxmlformats.org/drawingml/2006/main">
+          <a:prstGeom prst="rect">
+            <a:avLst/>
+          </a:prstGeom>
+          <a:solidFill>
             <a:srgbClr val="EDEDED"/>
           </a:solidFill>
         </p:spPr>
@@ -3654,26 +3296,26 @@
       <p:sp>
         <p:nvSpPr>
           <p:cNvPr id="12" name="bandit-image-slot-accent">
-            <a:extLst xmlns:a="http://schemas.openxmlformats.org/drawingml/2006/main">
+            <a:extLst>
               <a:ext uri="{FF2B5EF4-FFF2-40B4-BE49-F238E27FC236}">
                 <a16:creationId xmlns:a16="http://schemas.microsoft.com/office/drawing/2014/main" id="{29243381-8B0B-4EBA-BBE7-0BDA941F222F}"/>
               </a:ext>
             </a:extLst>
           </p:cNvPr>
           <p:cNvSpPr>
-            <a:spLocks xmlns:a="http://schemas.openxmlformats.org/drawingml/2006/main" noGrp="1"/>
-          </p:cNvSpPr>
-          <p:nvPr/>
-        </p:nvSpPr>
-        <p:spPr>
-          <a:xfrm xmlns:a="http://schemas.openxmlformats.org/drawingml/2006/main">
+            <a:spLocks noGrp="1"/>
+          </p:cNvSpPr>
+          <p:nvPr/>
+        </p:nvSpPr>
+        <p:spPr>
+          <a:xfrm>
             <a:off x="7372350" y="1181100"/>
             <a:ext cx="76200" cy="2609850"/>
           </a:xfrm>
-          <a:prstGeom xmlns:a="http://schemas.openxmlformats.org/drawingml/2006/main" prst="rect">
-            <a:avLst/>
-          </a:prstGeom>
-          <a:solidFill xmlns:a="http://schemas.openxmlformats.org/drawingml/2006/main">
+          <a:prstGeom prst="rect">
+            <a:avLst/>
+          </a:prstGeom>
+          <a:solidFill>
             <a:srgbClr val="FF6B35"/>
           </a:solidFill>
         </p:spPr>
@@ -3681,32 +3323,32 @@
       <p:sp>
         <p:nvSpPr>
           <p:cNvPr id="13" name="bandit-image-slot-label">
-            <a:extLst xmlns:a="http://schemas.openxmlformats.org/drawingml/2006/main">
+            <a:extLst>
               <a:ext uri="{FF2B5EF4-FFF2-40B4-BE49-F238E27FC236}">
                 <a16:creationId xmlns:a16="http://schemas.microsoft.com/office/drawing/2014/main" id="{977FA87F-0A32-4EAE-809A-88F367146DAD}"/>
               </a:ext>
             </a:extLst>
           </p:cNvPr>
           <p:cNvSpPr>
-            <a:spLocks xmlns:a="http://schemas.openxmlformats.org/drawingml/2006/main" noGrp="1"/>
-          </p:cNvSpPr>
-          <p:nvPr/>
-        </p:nvSpPr>
-        <p:spPr>
-          <a:xfrm xmlns:a="http://schemas.openxmlformats.org/drawingml/2006/main">
+            <a:spLocks noGrp="1"/>
+          </p:cNvSpPr>
+          <p:nvPr/>
+        </p:nvSpPr>
+        <p:spPr>
+          <a:xfrm>
             <a:off x="7639050" y="1447800"/>
             <a:ext cx="3886200" cy="323850"/>
           </a:xfrm>
-          <a:prstGeom xmlns:a="http://schemas.openxmlformats.org/drawingml/2006/main" prst="rect">
-            <a:avLst/>
-          </a:prstGeom>
-        </p:spPr>
-        <p:txBody>
-          <a:bodyPr xmlns:a="http://schemas.openxmlformats.org/drawingml/2006/main" spcFirstLastPara="1" lIns="0" tIns="0" rIns="0" bIns="0" anchor="t">
-            <a:normAutofit fontScale="100000"/>
-          </a:bodyPr>
-          <a:lstStyle xmlns:a="http://schemas.openxmlformats.org/drawingml/2006/main"/>
-          <a:p xmlns:a="http://schemas.openxmlformats.org/drawingml/2006/main">
+          <a:prstGeom prst="rect">
+            <a:avLst/>
+          </a:prstGeom>
+        </p:spPr>
+        <p:txBody>
+          <a:bodyPr spcFirstLastPara="1" lIns="0" tIns="0" rIns="0" bIns="0" anchor="t">
+            <a:normAutofit/>
+          </a:bodyPr>
+          <a:lstStyle/>
+          <a:p>
             <a:pPr>
               <a:defRPr sz="1800" b="1">
                 <a:solidFill>
@@ -3726,32 +3368,32 @@
       <p:sp>
         <p:nvSpPr>
           <p:cNvPr id="14" name="bandit-image-slot-hint">
-            <a:extLst xmlns:a="http://schemas.openxmlformats.org/drawingml/2006/main">
+            <a:extLst>
               <a:ext uri="{FF2B5EF4-FFF2-40B4-BE49-F238E27FC236}">
                 <a16:creationId xmlns:a16="http://schemas.microsoft.com/office/drawing/2014/main" id="{588160A8-834A-405F-A159-AD4DB4EDCFDB}"/>
               </a:ext>
             </a:extLst>
           </p:cNvPr>
           <p:cNvSpPr>
-            <a:spLocks xmlns:a="http://schemas.openxmlformats.org/drawingml/2006/main" noGrp="1"/>
-          </p:cNvSpPr>
-          <p:nvPr/>
-        </p:nvSpPr>
-        <p:spPr>
-          <a:xfrm xmlns:a="http://schemas.openxmlformats.org/drawingml/2006/main">
+            <a:spLocks noGrp="1"/>
+          </p:cNvSpPr>
+          <p:nvPr/>
+        </p:nvSpPr>
+        <p:spPr>
+          <a:xfrm>
             <a:off x="7639050" y="3143250"/>
             <a:ext cx="3886200" cy="381000"/>
           </a:xfrm>
-          <a:prstGeom xmlns:a="http://schemas.openxmlformats.org/drawingml/2006/main" prst="rect">
-            <a:avLst/>
-          </a:prstGeom>
-        </p:spPr>
-        <p:txBody>
-          <a:bodyPr xmlns:a="http://schemas.openxmlformats.org/drawingml/2006/main" spcFirstLastPara="1" lIns="0" tIns="0" rIns="0" bIns="0" anchor="t">
-            <a:normAutofit fontScale="100000"/>
-          </a:bodyPr>
-          <a:lstStyle xmlns:a="http://schemas.openxmlformats.org/drawingml/2006/main"/>
-          <a:p xmlns:a="http://schemas.openxmlformats.org/drawingml/2006/main">
+          <a:prstGeom prst="rect">
+            <a:avLst/>
+          </a:prstGeom>
+        </p:spPr>
+        <p:txBody>
+          <a:bodyPr spcFirstLastPara="1" lIns="0" tIns="0" rIns="0" bIns="0" anchor="t">
+            <a:normAutofit/>
+          </a:bodyPr>
+          <a:lstStyle/>
+          <a:p>
             <a:pPr>
               <a:defRPr sz="1350" b="0">
                 <a:solidFill>
@@ -3771,32 +3413,32 @@
       <p:sp>
         <p:nvSpPr>
           <p:cNvPr id="15" name="bandit-stats-heading">
-            <a:extLst xmlns:a="http://schemas.openxmlformats.org/drawingml/2006/main">
+            <a:extLst>
               <a:ext uri="{FF2B5EF4-FFF2-40B4-BE49-F238E27FC236}">
                 <a16:creationId xmlns:a16="http://schemas.microsoft.com/office/drawing/2014/main" id="{F02C54E8-B88D-4C23-83EE-28D6B090B02F}"/>
               </a:ext>
             </a:extLst>
           </p:cNvPr>
           <p:cNvSpPr>
-            <a:spLocks xmlns:a="http://schemas.openxmlformats.org/drawingml/2006/main" noGrp="1"/>
-          </p:cNvSpPr>
-          <p:nvPr/>
-        </p:nvSpPr>
-        <p:spPr>
-          <a:xfrm xmlns:a="http://schemas.openxmlformats.org/drawingml/2006/main">
+            <a:spLocks noGrp="1"/>
+          </p:cNvSpPr>
+          <p:nvPr/>
+        </p:nvSpPr>
+        <p:spPr>
+          <a:xfrm>
             <a:off x="7372350" y="4057650"/>
             <a:ext cx="4419600" cy="323850"/>
           </a:xfrm>
-          <a:prstGeom xmlns:a="http://schemas.openxmlformats.org/drawingml/2006/main" prst="rect">
-            <a:avLst/>
-          </a:prstGeom>
-        </p:spPr>
-        <p:txBody>
-          <a:bodyPr xmlns:a="http://schemas.openxmlformats.org/drawingml/2006/main" spcFirstLastPara="1" lIns="0" tIns="0" rIns="0" bIns="0" anchor="t">
-            <a:normAutofit fontScale="100000"/>
-          </a:bodyPr>
-          <a:lstStyle xmlns:a="http://schemas.openxmlformats.org/drawingml/2006/main"/>
-          <a:p xmlns:a="http://schemas.openxmlformats.org/drawingml/2006/main">
+          <a:prstGeom prst="rect">
+            <a:avLst/>
+          </a:prstGeom>
+        </p:spPr>
+        <p:txBody>
+          <a:bodyPr spcFirstLastPara="1" lIns="0" tIns="0" rIns="0" bIns="0" anchor="t">
+            <a:normAutofit/>
+          </a:bodyPr>
+          <a:lstStyle/>
+          <a:p>
             <a:pPr>
               <a:defRPr sz="1800" b="1">
                 <a:solidFill>
@@ -3816,26 +3458,26 @@
       <p:sp>
         <p:nvSpPr>
           <p:cNvPr id="16" name="bandit-stat-bg-1">
-            <a:extLst xmlns:a="http://schemas.openxmlformats.org/drawingml/2006/main">
+            <a:extLst>
               <a:ext uri="{FF2B5EF4-FFF2-40B4-BE49-F238E27FC236}">
                 <a16:creationId xmlns:a16="http://schemas.microsoft.com/office/drawing/2014/main" id="{DE7D9450-BD82-4776-8408-BABE8761EB46}"/>
               </a:ext>
             </a:extLst>
           </p:cNvPr>
           <p:cNvSpPr>
-            <a:spLocks xmlns:a="http://schemas.openxmlformats.org/drawingml/2006/main" noGrp="1"/>
-          </p:cNvSpPr>
-          <p:nvPr/>
-        </p:nvSpPr>
-        <p:spPr>
-          <a:xfrm xmlns:a="http://schemas.openxmlformats.org/drawingml/2006/main">
+            <a:spLocks noGrp="1"/>
+          </p:cNvSpPr>
+          <p:nvPr/>
+        </p:nvSpPr>
+        <p:spPr>
+          <a:xfrm>
             <a:off x="7372350" y="4438650"/>
             <a:ext cx="4419600" cy="280035"/>
           </a:xfrm>
-          <a:prstGeom xmlns:a="http://schemas.openxmlformats.org/drawingml/2006/main" prst="rect">
-            <a:avLst/>
-          </a:prstGeom>
-          <a:solidFill xmlns:a="http://schemas.openxmlformats.org/drawingml/2006/main">
+          <a:prstGeom prst="rect">
+            <a:avLst/>
+          </a:prstGeom>
+          <a:solidFill>
             <a:srgbClr val="F5F5F5"/>
           </a:solidFill>
         </p:spPr>
@@ -3843,32 +3485,32 @@
       <p:sp>
         <p:nvSpPr>
           <p:cNvPr id="17" name="bandit-stat-label-1">
-            <a:extLst xmlns:a="http://schemas.openxmlformats.org/drawingml/2006/main">
+            <a:extLst>
               <a:ext uri="{FF2B5EF4-FFF2-40B4-BE49-F238E27FC236}">
                 <a16:creationId xmlns:a16="http://schemas.microsoft.com/office/drawing/2014/main" id="{5AF73950-84FC-48B2-90EA-7BA6A15F812D}"/>
               </a:ext>
             </a:extLst>
           </p:cNvPr>
           <p:cNvSpPr>
-            <a:spLocks xmlns:a="http://schemas.openxmlformats.org/drawingml/2006/main" noGrp="1"/>
-          </p:cNvSpPr>
-          <p:nvPr/>
-        </p:nvSpPr>
-        <p:spPr>
-          <a:xfrm xmlns:a="http://schemas.openxmlformats.org/drawingml/2006/main">
+            <a:spLocks noGrp="1"/>
+          </p:cNvSpPr>
+          <p:nvPr/>
+        </p:nvSpPr>
+        <p:spPr>
+          <a:xfrm>
             <a:off x="7505700" y="4486275"/>
             <a:ext cx="1352550" cy="213360"/>
           </a:xfrm>
-          <a:prstGeom xmlns:a="http://schemas.openxmlformats.org/drawingml/2006/main" prst="rect">
-            <a:avLst/>
-          </a:prstGeom>
-        </p:spPr>
-        <p:txBody>
-          <a:bodyPr xmlns:a="http://schemas.openxmlformats.org/drawingml/2006/main" spcFirstLastPara="1" lIns="0" tIns="0" rIns="0" bIns="0" anchor="ctr">
-            <a:normAutofit fontScale="100000"/>
-          </a:bodyPr>
-          <a:lstStyle xmlns:a="http://schemas.openxmlformats.org/drawingml/2006/main"/>
-          <a:p xmlns:a="http://schemas.openxmlformats.org/drawingml/2006/main">
+          <a:prstGeom prst="rect">
+            <a:avLst/>
+          </a:prstGeom>
+        </p:spPr>
+        <p:txBody>
+          <a:bodyPr spcFirstLastPara="1" lIns="0" tIns="0" rIns="0" bIns="0" anchor="ctr">
+            <a:normAutofit/>
+          </a:bodyPr>
+          <a:lstStyle/>
+          <a:p>
             <a:pPr>
               <a:defRPr sz="1350" b="1">
                 <a:solidFill>
@@ -3888,32 +3530,32 @@
       <p:sp>
         <p:nvSpPr>
           <p:cNvPr id="18" name="bandit-stat-value-1">
-            <a:extLst xmlns:a="http://schemas.openxmlformats.org/drawingml/2006/main">
+            <a:extLst>
               <a:ext uri="{FF2B5EF4-FFF2-40B4-BE49-F238E27FC236}">
                 <a16:creationId xmlns:a16="http://schemas.microsoft.com/office/drawing/2014/main" id="{A781345F-8638-4D69-A5E2-F230EB195304}"/>
               </a:ext>
             </a:extLst>
           </p:cNvPr>
           <p:cNvSpPr>
-            <a:spLocks xmlns:a="http://schemas.openxmlformats.org/drawingml/2006/main" noGrp="1"/>
-          </p:cNvSpPr>
-          <p:nvPr/>
-        </p:nvSpPr>
-        <p:spPr>
-          <a:xfrm xmlns:a="http://schemas.openxmlformats.org/drawingml/2006/main">
+            <a:spLocks noGrp="1"/>
+          </p:cNvSpPr>
+          <p:nvPr/>
+        </p:nvSpPr>
+        <p:spPr>
+          <a:xfrm>
             <a:off x="8896350" y="4486275"/>
             <a:ext cx="2762250" cy="213360"/>
           </a:xfrm>
-          <a:prstGeom xmlns:a="http://schemas.openxmlformats.org/drawingml/2006/main" prst="rect">
-            <a:avLst/>
-          </a:prstGeom>
-        </p:spPr>
-        <p:txBody>
-          <a:bodyPr xmlns:a="http://schemas.openxmlformats.org/drawingml/2006/main" spcFirstLastPara="1" lIns="0" tIns="0" rIns="0" bIns="0" anchor="ctr">
+          <a:prstGeom prst="rect">
+            <a:avLst/>
+          </a:prstGeom>
+        </p:spPr>
+        <p:txBody>
+          <a:bodyPr spcFirstLastPara="1" lIns="0" tIns="0" rIns="0" bIns="0" anchor="ctr">
             <a:normAutofit fontScale="98246"/>
           </a:bodyPr>
-          <a:lstStyle xmlns:a="http://schemas.openxmlformats.org/drawingml/2006/main"/>
-          <a:p xmlns:a="http://schemas.openxmlformats.org/drawingml/2006/main">
+          <a:lstStyle/>
+          <a:p>
             <a:pPr>
               <a:defRPr sz="1425" b="0">
                 <a:solidFill>
@@ -3933,26 +3575,26 @@
       <p:sp>
         <p:nvSpPr>
           <p:cNvPr id="19" name="bandit-stat-bg-2">
-            <a:extLst xmlns:a="http://schemas.openxmlformats.org/drawingml/2006/main">
+            <a:extLst>
               <a:ext uri="{FF2B5EF4-FFF2-40B4-BE49-F238E27FC236}">
                 <a16:creationId xmlns:a16="http://schemas.microsoft.com/office/drawing/2014/main" id="{773F2F4B-78F1-4A27-9FB3-AD3903668443}"/>
               </a:ext>
             </a:extLst>
           </p:cNvPr>
           <p:cNvSpPr>
-            <a:spLocks xmlns:a="http://schemas.openxmlformats.org/drawingml/2006/main" noGrp="1"/>
-          </p:cNvSpPr>
-          <p:nvPr/>
-        </p:nvSpPr>
-        <p:spPr>
-          <a:xfrm xmlns:a="http://schemas.openxmlformats.org/drawingml/2006/main">
+            <a:spLocks noGrp="1"/>
+          </p:cNvSpPr>
+          <p:nvPr/>
+        </p:nvSpPr>
+        <p:spPr>
+          <a:xfrm>
             <a:off x="7372350" y="4728210"/>
             <a:ext cx="4419600" cy="280035"/>
           </a:xfrm>
-          <a:prstGeom xmlns:a="http://schemas.openxmlformats.org/drawingml/2006/main" prst="rect">
-            <a:avLst/>
-          </a:prstGeom>
-          <a:solidFill xmlns:a="http://schemas.openxmlformats.org/drawingml/2006/main">
+          <a:prstGeom prst="rect">
+            <a:avLst/>
+          </a:prstGeom>
+          <a:solidFill>
             <a:srgbClr val="FFFFFF"/>
           </a:solidFill>
         </p:spPr>
@@ -3960,32 +3602,32 @@
       <p:sp>
         <p:nvSpPr>
           <p:cNvPr id="20" name="bandit-stat-label-2">
-            <a:extLst xmlns:a="http://schemas.openxmlformats.org/drawingml/2006/main">
+            <a:extLst>
               <a:ext uri="{FF2B5EF4-FFF2-40B4-BE49-F238E27FC236}">
                 <a16:creationId xmlns:a16="http://schemas.microsoft.com/office/drawing/2014/main" id="{7411C0E0-60BE-49AA-8813-3F1DE6A510AB}"/>
               </a:ext>
             </a:extLst>
           </p:cNvPr>
           <p:cNvSpPr>
-            <a:spLocks xmlns:a="http://schemas.openxmlformats.org/drawingml/2006/main" noGrp="1"/>
-          </p:cNvSpPr>
-          <p:nvPr/>
-        </p:nvSpPr>
-        <p:spPr>
-          <a:xfrm xmlns:a="http://schemas.openxmlformats.org/drawingml/2006/main">
+            <a:spLocks noGrp="1"/>
+          </p:cNvSpPr>
+          <p:nvPr/>
+        </p:nvSpPr>
+        <p:spPr>
+          <a:xfrm>
             <a:off x="7505700" y="4775835"/>
             <a:ext cx="1352550" cy="213360"/>
           </a:xfrm>
-          <a:prstGeom xmlns:a="http://schemas.openxmlformats.org/drawingml/2006/main" prst="rect">
-            <a:avLst/>
-          </a:prstGeom>
-        </p:spPr>
-        <p:txBody>
-          <a:bodyPr xmlns:a="http://schemas.openxmlformats.org/drawingml/2006/main" spcFirstLastPara="1" lIns="0" tIns="0" rIns="0" bIns="0" anchor="ctr">
-            <a:normAutofit fontScale="100000"/>
-          </a:bodyPr>
-          <a:lstStyle xmlns:a="http://schemas.openxmlformats.org/drawingml/2006/main"/>
-          <a:p xmlns:a="http://schemas.openxmlformats.org/drawingml/2006/main">
+          <a:prstGeom prst="rect">
+            <a:avLst/>
+          </a:prstGeom>
+        </p:spPr>
+        <p:txBody>
+          <a:bodyPr spcFirstLastPara="1" lIns="0" tIns="0" rIns="0" bIns="0" anchor="ctr">
+            <a:normAutofit/>
+          </a:bodyPr>
+          <a:lstStyle/>
+          <a:p>
             <a:pPr>
               <a:defRPr sz="1350" b="1">
                 <a:solidFill>
@@ -4005,32 +3647,32 @@
       <p:sp>
         <p:nvSpPr>
           <p:cNvPr id="21" name="bandit-stat-value-2">
-            <a:extLst xmlns:a="http://schemas.openxmlformats.org/drawingml/2006/main">
+            <a:extLst>
               <a:ext uri="{FF2B5EF4-FFF2-40B4-BE49-F238E27FC236}">
                 <a16:creationId xmlns:a16="http://schemas.microsoft.com/office/drawing/2014/main" id="{B7B7D6A7-BF12-46B4-9D73-D55467458849}"/>
               </a:ext>
             </a:extLst>
           </p:cNvPr>
           <p:cNvSpPr>
-            <a:spLocks xmlns:a="http://schemas.openxmlformats.org/drawingml/2006/main" noGrp="1"/>
-          </p:cNvSpPr>
-          <p:nvPr/>
-        </p:nvSpPr>
-        <p:spPr>
-          <a:xfrm xmlns:a="http://schemas.openxmlformats.org/drawingml/2006/main">
+            <a:spLocks noGrp="1"/>
+          </p:cNvSpPr>
+          <p:nvPr/>
+        </p:nvSpPr>
+        <p:spPr>
+          <a:xfrm>
             <a:off x="8896350" y="4775835"/>
             <a:ext cx="2762250" cy="213360"/>
           </a:xfrm>
-          <a:prstGeom xmlns:a="http://schemas.openxmlformats.org/drawingml/2006/main" prst="rect">
-            <a:avLst/>
-          </a:prstGeom>
-        </p:spPr>
-        <p:txBody>
-          <a:bodyPr xmlns:a="http://schemas.openxmlformats.org/drawingml/2006/main" spcFirstLastPara="1" lIns="0" tIns="0" rIns="0" bIns="0" anchor="ctr">
+          <a:prstGeom prst="rect">
+            <a:avLst/>
+          </a:prstGeom>
+        </p:spPr>
+        <p:txBody>
+          <a:bodyPr spcFirstLastPara="1" lIns="0" tIns="0" rIns="0" bIns="0" anchor="ctr">
             <a:normAutofit fontScale="98246"/>
           </a:bodyPr>
-          <a:lstStyle xmlns:a="http://schemas.openxmlformats.org/drawingml/2006/main"/>
-          <a:p xmlns:a="http://schemas.openxmlformats.org/drawingml/2006/main">
+          <a:lstStyle/>
+          <a:p>
             <a:pPr>
               <a:defRPr sz="1425" b="0">
                 <a:solidFill>
@@ -4050,26 +3692,26 @@
       <p:sp>
         <p:nvSpPr>
           <p:cNvPr id="22" name="bandit-stat-bg-3">
-            <a:extLst xmlns:a="http://schemas.openxmlformats.org/drawingml/2006/main">
+            <a:extLst>
               <a:ext uri="{FF2B5EF4-FFF2-40B4-BE49-F238E27FC236}">
                 <a16:creationId xmlns:a16="http://schemas.microsoft.com/office/drawing/2014/main" id="{1855546A-E9EF-4477-BAA8-958F45F6F0ED}"/>
               </a:ext>
             </a:extLst>
           </p:cNvPr>
           <p:cNvSpPr>
-            <a:spLocks xmlns:a="http://schemas.openxmlformats.org/drawingml/2006/main" noGrp="1"/>
-          </p:cNvSpPr>
-          <p:nvPr/>
-        </p:nvSpPr>
-        <p:spPr>
-          <a:xfrm xmlns:a="http://schemas.openxmlformats.org/drawingml/2006/main">
+            <a:spLocks noGrp="1"/>
+          </p:cNvSpPr>
+          <p:nvPr/>
+        </p:nvSpPr>
+        <p:spPr>
+          <a:xfrm>
             <a:off x="7372350" y="5017770"/>
             <a:ext cx="4419600" cy="280035"/>
           </a:xfrm>
-          <a:prstGeom xmlns:a="http://schemas.openxmlformats.org/drawingml/2006/main" prst="rect">
-            <a:avLst/>
-          </a:prstGeom>
-          <a:solidFill xmlns:a="http://schemas.openxmlformats.org/drawingml/2006/main">
+          <a:prstGeom prst="rect">
+            <a:avLst/>
+          </a:prstGeom>
+          <a:solidFill>
             <a:srgbClr val="F5F5F5"/>
           </a:solidFill>
         </p:spPr>
@@ -4077,32 +3719,32 @@
       <p:sp>
         <p:nvSpPr>
           <p:cNvPr id="23" name="bandit-stat-label-3">
-            <a:extLst xmlns:a="http://schemas.openxmlformats.org/drawingml/2006/main">
+            <a:extLst>
               <a:ext uri="{FF2B5EF4-FFF2-40B4-BE49-F238E27FC236}">
                 <a16:creationId xmlns:a16="http://schemas.microsoft.com/office/drawing/2014/main" id="{864A8CE2-64D4-40BD-92F6-EF4DAE8B15C2}"/>
               </a:ext>
             </a:extLst>
           </p:cNvPr>
           <p:cNvSpPr>
-            <a:spLocks xmlns:a="http://schemas.openxmlformats.org/drawingml/2006/main" noGrp="1"/>
-          </p:cNvSpPr>
-          <p:nvPr/>
-        </p:nvSpPr>
-        <p:spPr>
-          <a:xfrm xmlns:a="http://schemas.openxmlformats.org/drawingml/2006/main">
+            <a:spLocks noGrp="1"/>
+          </p:cNvSpPr>
+          <p:nvPr/>
+        </p:nvSpPr>
+        <p:spPr>
+          <a:xfrm>
             <a:off x="7505700" y="5065395"/>
             <a:ext cx="1352550" cy="213360"/>
           </a:xfrm>
-          <a:prstGeom xmlns:a="http://schemas.openxmlformats.org/drawingml/2006/main" prst="rect">
-            <a:avLst/>
-          </a:prstGeom>
-        </p:spPr>
-        <p:txBody>
-          <a:bodyPr xmlns:a="http://schemas.openxmlformats.org/drawingml/2006/main" spcFirstLastPara="1" lIns="0" tIns="0" rIns="0" bIns="0" anchor="ctr">
-            <a:normAutofit fontScale="100000"/>
-          </a:bodyPr>
-          <a:lstStyle xmlns:a="http://schemas.openxmlformats.org/drawingml/2006/main"/>
-          <a:p xmlns:a="http://schemas.openxmlformats.org/drawingml/2006/main">
+          <a:prstGeom prst="rect">
+            <a:avLst/>
+          </a:prstGeom>
+        </p:spPr>
+        <p:txBody>
+          <a:bodyPr spcFirstLastPara="1" lIns="0" tIns="0" rIns="0" bIns="0" anchor="ctr">
+            <a:normAutofit/>
+          </a:bodyPr>
+          <a:lstStyle/>
+          <a:p>
             <a:pPr>
               <a:defRPr sz="1350" b="1">
                 <a:solidFill>
@@ -4122,32 +3764,32 @@
       <p:sp>
         <p:nvSpPr>
           <p:cNvPr id="24" name="bandit-stat-value-3">
-            <a:extLst xmlns:a="http://schemas.openxmlformats.org/drawingml/2006/main">
+            <a:extLst>
               <a:ext uri="{FF2B5EF4-FFF2-40B4-BE49-F238E27FC236}">
                 <a16:creationId xmlns:a16="http://schemas.microsoft.com/office/drawing/2014/main" id="{4A0F892E-F06A-4A47-B883-F98E4674613B}"/>
               </a:ext>
             </a:extLst>
           </p:cNvPr>
           <p:cNvSpPr>
-            <a:spLocks xmlns:a="http://schemas.openxmlformats.org/drawingml/2006/main" noGrp="1"/>
-          </p:cNvSpPr>
-          <p:nvPr/>
-        </p:nvSpPr>
-        <p:spPr>
-          <a:xfrm xmlns:a="http://schemas.openxmlformats.org/drawingml/2006/main">
+            <a:spLocks noGrp="1"/>
+          </p:cNvSpPr>
+          <p:nvPr/>
+        </p:nvSpPr>
+        <p:spPr>
+          <a:xfrm>
             <a:off x="8896350" y="5065395"/>
             <a:ext cx="2762250" cy="213360"/>
           </a:xfrm>
-          <a:prstGeom xmlns:a="http://schemas.openxmlformats.org/drawingml/2006/main" prst="rect">
-            <a:avLst/>
-          </a:prstGeom>
-        </p:spPr>
-        <p:txBody>
-          <a:bodyPr xmlns:a="http://schemas.openxmlformats.org/drawingml/2006/main" spcFirstLastPara="1" lIns="0" tIns="0" rIns="0" bIns="0" anchor="ctr">
+          <a:prstGeom prst="rect">
+            <a:avLst/>
+          </a:prstGeom>
+        </p:spPr>
+        <p:txBody>
+          <a:bodyPr spcFirstLastPara="1" lIns="0" tIns="0" rIns="0" bIns="0" anchor="ctr">
             <a:normAutofit fontScale="98246"/>
           </a:bodyPr>
-          <a:lstStyle xmlns:a="http://schemas.openxmlformats.org/drawingml/2006/main"/>
-          <a:p xmlns:a="http://schemas.openxmlformats.org/drawingml/2006/main">
+          <a:lstStyle/>
+          <a:p>
             <a:pPr>
               <a:defRPr sz="1425" b="0">
                 <a:solidFill>
@@ -4167,26 +3809,26 @@
       <p:sp>
         <p:nvSpPr>
           <p:cNvPr id="25" name="bandit-stat-bg-4">
-            <a:extLst xmlns:a="http://schemas.openxmlformats.org/drawingml/2006/main">
+            <a:extLst>
               <a:ext uri="{FF2B5EF4-FFF2-40B4-BE49-F238E27FC236}">
                 <a16:creationId xmlns:a16="http://schemas.microsoft.com/office/drawing/2014/main" id="{3D29412A-F698-440E-9E5F-2BCF4B142291}"/>
               </a:ext>
             </a:extLst>
           </p:cNvPr>
           <p:cNvSpPr>
-            <a:spLocks xmlns:a="http://schemas.openxmlformats.org/drawingml/2006/main" noGrp="1"/>
-          </p:cNvSpPr>
-          <p:nvPr/>
-        </p:nvSpPr>
-        <p:spPr>
-          <a:xfrm xmlns:a="http://schemas.openxmlformats.org/drawingml/2006/main">
+            <a:spLocks noGrp="1"/>
+          </p:cNvSpPr>
+          <p:nvPr/>
+        </p:nvSpPr>
+        <p:spPr>
+          <a:xfrm>
             <a:off x="7372350" y="5307330"/>
             <a:ext cx="4419600" cy="280035"/>
           </a:xfrm>
-          <a:prstGeom xmlns:a="http://schemas.openxmlformats.org/drawingml/2006/main" prst="rect">
-            <a:avLst/>
-          </a:prstGeom>
-          <a:solidFill xmlns:a="http://schemas.openxmlformats.org/drawingml/2006/main">
+          <a:prstGeom prst="rect">
+            <a:avLst/>
+          </a:prstGeom>
+          <a:solidFill>
             <a:srgbClr val="FFFFFF"/>
           </a:solidFill>
         </p:spPr>
@@ -4194,32 +3836,32 @@
       <p:sp>
         <p:nvSpPr>
           <p:cNvPr id="26" name="bandit-stat-label-4">
-            <a:extLst xmlns:a="http://schemas.openxmlformats.org/drawingml/2006/main">
+            <a:extLst>
               <a:ext uri="{FF2B5EF4-FFF2-40B4-BE49-F238E27FC236}">
                 <a16:creationId xmlns:a16="http://schemas.microsoft.com/office/drawing/2014/main" id="{7812F9CC-4750-4FA1-852F-A91DF5136E6C}"/>
               </a:ext>
             </a:extLst>
           </p:cNvPr>
           <p:cNvSpPr>
-            <a:spLocks xmlns:a="http://schemas.openxmlformats.org/drawingml/2006/main" noGrp="1"/>
-          </p:cNvSpPr>
-          <p:nvPr/>
-        </p:nvSpPr>
-        <p:spPr>
-          <a:xfrm xmlns:a="http://schemas.openxmlformats.org/drawingml/2006/main">
+            <a:spLocks noGrp="1"/>
+          </p:cNvSpPr>
+          <p:nvPr/>
+        </p:nvSpPr>
+        <p:spPr>
+          <a:xfrm>
             <a:off x="7505700" y="5354955"/>
             <a:ext cx="1352550" cy="213360"/>
           </a:xfrm>
-          <a:prstGeom xmlns:a="http://schemas.openxmlformats.org/drawingml/2006/main" prst="rect">
-            <a:avLst/>
-          </a:prstGeom>
-        </p:spPr>
-        <p:txBody>
-          <a:bodyPr xmlns:a="http://schemas.openxmlformats.org/drawingml/2006/main" spcFirstLastPara="1" lIns="0" tIns="0" rIns="0" bIns="0" anchor="ctr">
-            <a:normAutofit fontScale="100000"/>
-          </a:bodyPr>
-          <a:lstStyle xmlns:a="http://schemas.openxmlformats.org/drawingml/2006/main"/>
-          <a:p xmlns:a="http://schemas.openxmlformats.org/drawingml/2006/main">
+          <a:prstGeom prst="rect">
+            <a:avLst/>
+          </a:prstGeom>
+        </p:spPr>
+        <p:txBody>
+          <a:bodyPr spcFirstLastPara="1" lIns="0" tIns="0" rIns="0" bIns="0" anchor="ctr">
+            <a:normAutofit/>
+          </a:bodyPr>
+          <a:lstStyle/>
+          <a:p>
             <a:pPr>
               <a:defRPr sz="1350" b="1">
                 <a:solidFill>
@@ -4239,32 +3881,32 @@
       <p:sp>
         <p:nvSpPr>
           <p:cNvPr id="27" name="bandit-stat-value-4">
-            <a:extLst xmlns:a="http://schemas.openxmlformats.org/drawingml/2006/main">
+            <a:extLst>
               <a:ext uri="{FF2B5EF4-FFF2-40B4-BE49-F238E27FC236}">
                 <a16:creationId xmlns:a16="http://schemas.microsoft.com/office/drawing/2014/main" id="{B619AF1A-6F45-480E-8C25-F6694A1D5F36}"/>
               </a:ext>
             </a:extLst>
           </p:cNvPr>
           <p:cNvSpPr>
-            <a:spLocks xmlns:a="http://schemas.openxmlformats.org/drawingml/2006/main" noGrp="1"/>
-          </p:cNvSpPr>
-          <p:nvPr/>
-        </p:nvSpPr>
-        <p:spPr>
-          <a:xfrm xmlns:a="http://schemas.openxmlformats.org/drawingml/2006/main">
+            <a:spLocks noGrp="1"/>
+          </p:cNvSpPr>
+          <p:nvPr/>
+        </p:nvSpPr>
+        <p:spPr>
+          <a:xfrm>
             <a:off x="8896350" y="5354955"/>
             <a:ext cx="2762250" cy="213360"/>
           </a:xfrm>
-          <a:prstGeom xmlns:a="http://schemas.openxmlformats.org/drawingml/2006/main" prst="rect">
-            <a:avLst/>
-          </a:prstGeom>
-        </p:spPr>
-        <p:txBody>
-          <a:bodyPr xmlns:a="http://schemas.openxmlformats.org/drawingml/2006/main" spcFirstLastPara="1" lIns="0" tIns="0" rIns="0" bIns="0" anchor="ctr">
+          <a:prstGeom prst="rect">
+            <a:avLst/>
+          </a:prstGeom>
+        </p:spPr>
+        <p:txBody>
+          <a:bodyPr spcFirstLastPara="1" lIns="0" tIns="0" rIns="0" bIns="0" anchor="ctr">
             <a:normAutofit fontScale="98246"/>
           </a:bodyPr>
-          <a:lstStyle xmlns:a="http://schemas.openxmlformats.org/drawingml/2006/main"/>
-          <a:p xmlns:a="http://schemas.openxmlformats.org/drawingml/2006/main">
+          <a:lstStyle/>
+          <a:p>
             <a:pPr>
               <a:defRPr sz="1425" b="0">
                 <a:solidFill>
@@ -4284,26 +3926,26 @@
       <p:sp>
         <p:nvSpPr>
           <p:cNvPr id="28" name="bandit-stat-bg-5">
-            <a:extLst xmlns:a="http://schemas.openxmlformats.org/drawingml/2006/main">
+            <a:extLst>
               <a:ext uri="{FF2B5EF4-FFF2-40B4-BE49-F238E27FC236}">
                 <a16:creationId xmlns:a16="http://schemas.microsoft.com/office/drawing/2014/main" id="{1054343B-C006-4073-A99F-F4BE95DD9FD3}"/>
               </a:ext>
             </a:extLst>
           </p:cNvPr>
           <p:cNvSpPr>
-            <a:spLocks xmlns:a="http://schemas.openxmlformats.org/drawingml/2006/main" noGrp="1"/>
-          </p:cNvSpPr>
-          <p:nvPr/>
-        </p:nvSpPr>
-        <p:spPr>
-          <a:xfrm xmlns:a="http://schemas.openxmlformats.org/drawingml/2006/main">
+            <a:spLocks noGrp="1"/>
+          </p:cNvSpPr>
+          <p:nvPr/>
+        </p:nvSpPr>
+        <p:spPr>
+          <a:xfrm>
             <a:off x="7372350" y="5596890"/>
             <a:ext cx="4419600" cy="280035"/>
           </a:xfrm>
-          <a:prstGeom xmlns:a="http://schemas.openxmlformats.org/drawingml/2006/main" prst="rect">
-            <a:avLst/>
-          </a:prstGeom>
-          <a:solidFill xmlns:a="http://schemas.openxmlformats.org/drawingml/2006/main">
+          <a:prstGeom prst="rect">
+            <a:avLst/>
+          </a:prstGeom>
+          <a:solidFill>
             <a:srgbClr val="F5F5F5"/>
           </a:solidFill>
         </p:spPr>
@@ -4311,32 +3953,32 @@
       <p:sp>
         <p:nvSpPr>
           <p:cNvPr id="29" name="bandit-stat-label-5">
-            <a:extLst xmlns:a="http://schemas.openxmlformats.org/drawingml/2006/main">
+            <a:extLst>
               <a:ext uri="{FF2B5EF4-FFF2-40B4-BE49-F238E27FC236}">
                 <a16:creationId xmlns:a16="http://schemas.microsoft.com/office/drawing/2014/main" id="{26A3E879-C2AF-4B60-AA3C-7AE7DD4128D8}"/>
               </a:ext>
             </a:extLst>
           </p:cNvPr>
           <p:cNvSpPr>
-            <a:spLocks xmlns:a="http://schemas.openxmlformats.org/drawingml/2006/main" noGrp="1"/>
-          </p:cNvSpPr>
-          <p:nvPr/>
-        </p:nvSpPr>
-        <p:spPr>
-          <a:xfrm xmlns:a="http://schemas.openxmlformats.org/drawingml/2006/main">
+            <a:spLocks noGrp="1"/>
+          </p:cNvSpPr>
+          <p:nvPr/>
+        </p:nvSpPr>
+        <p:spPr>
+          <a:xfrm>
             <a:off x="7505700" y="5644515"/>
             <a:ext cx="1352550" cy="213360"/>
           </a:xfrm>
-          <a:prstGeom xmlns:a="http://schemas.openxmlformats.org/drawingml/2006/main" prst="rect">
-            <a:avLst/>
-          </a:prstGeom>
-        </p:spPr>
-        <p:txBody>
-          <a:bodyPr xmlns:a="http://schemas.openxmlformats.org/drawingml/2006/main" spcFirstLastPara="1" lIns="0" tIns="0" rIns="0" bIns="0" anchor="ctr">
-            <a:normAutofit fontScale="100000"/>
-          </a:bodyPr>
-          <a:lstStyle xmlns:a="http://schemas.openxmlformats.org/drawingml/2006/main"/>
-          <a:p xmlns:a="http://schemas.openxmlformats.org/drawingml/2006/main">
+          <a:prstGeom prst="rect">
+            <a:avLst/>
+          </a:prstGeom>
+        </p:spPr>
+        <p:txBody>
+          <a:bodyPr spcFirstLastPara="1" lIns="0" tIns="0" rIns="0" bIns="0" anchor="ctr">
+            <a:normAutofit/>
+          </a:bodyPr>
+          <a:lstStyle/>
+          <a:p>
             <a:pPr>
               <a:defRPr sz="1350" b="1">
                 <a:solidFill>
@@ -4356,32 +3998,32 @@
       <p:sp>
         <p:nvSpPr>
           <p:cNvPr id="30" name="bandit-stat-value-5">
-            <a:extLst xmlns:a="http://schemas.openxmlformats.org/drawingml/2006/main">
+            <a:extLst>
               <a:ext uri="{FF2B5EF4-FFF2-40B4-BE49-F238E27FC236}">
                 <a16:creationId xmlns:a16="http://schemas.microsoft.com/office/drawing/2014/main" id="{AA032979-F91B-48FA-80E8-0D42809AC4DE}"/>
               </a:ext>
             </a:extLst>
           </p:cNvPr>
           <p:cNvSpPr>
-            <a:spLocks xmlns:a="http://schemas.openxmlformats.org/drawingml/2006/main" noGrp="1"/>
-          </p:cNvSpPr>
-          <p:nvPr/>
-        </p:nvSpPr>
-        <p:spPr>
-          <a:xfrm xmlns:a="http://schemas.openxmlformats.org/drawingml/2006/main">
+            <a:spLocks noGrp="1"/>
+          </p:cNvSpPr>
+          <p:nvPr/>
+        </p:nvSpPr>
+        <p:spPr>
+          <a:xfrm>
             <a:off x="8896350" y="5644515"/>
             <a:ext cx="2762250" cy="213360"/>
           </a:xfrm>
-          <a:prstGeom xmlns:a="http://schemas.openxmlformats.org/drawingml/2006/main" prst="rect">
-            <a:avLst/>
-          </a:prstGeom>
-        </p:spPr>
-        <p:txBody>
-          <a:bodyPr xmlns:a="http://schemas.openxmlformats.org/drawingml/2006/main" spcFirstLastPara="1" lIns="0" tIns="0" rIns="0" bIns="0" anchor="ctr">
+          <a:prstGeom prst="rect">
+            <a:avLst/>
+          </a:prstGeom>
+        </p:spPr>
+        <p:txBody>
+          <a:bodyPr spcFirstLastPara="1" lIns="0" tIns="0" rIns="0" bIns="0" anchor="ctr">
             <a:normAutofit fontScale="98246"/>
           </a:bodyPr>
-          <a:lstStyle xmlns:a="http://schemas.openxmlformats.org/drawingml/2006/main"/>
-          <a:p xmlns:a="http://schemas.openxmlformats.org/drawingml/2006/main">
+          <a:lstStyle/>
+          <a:p>
             <a:pPr>
               <a:defRPr sz="1425" b="0">
                 <a:solidFill>
@@ -4401,26 +4043,26 @@
       <p:sp>
         <p:nvSpPr>
           <p:cNvPr id="31" name="footer-rule-3">
-            <a:extLst xmlns:a="http://schemas.openxmlformats.org/drawingml/2006/main">
+            <a:extLst>
               <a:ext uri="{FF2B5EF4-FFF2-40B4-BE49-F238E27FC236}">
                 <a16:creationId xmlns:a16="http://schemas.microsoft.com/office/drawing/2014/main" id="{1C6D9CC5-4AEF-4F91-934C-AF899609E36D}"/>
               </a:ext>
             </a:extLst>
           </p:cNvPr>
           <p:cNvSpPr>
-            <a:spLocks xmlns:a="http://schemas.openxmlformats.org/drawingml/2006/main" noGrp="1"/>
-          </p:cNvSpPr>
-          <p:nvPr/>
-        </p:nvSpPr>
-        <p:spPr>
-          <a:xfrm xmlns:a="http://schemas.openxmlformats.org/drawingml/2006/main">
+            <a:spLocks noGrp="1"/>
+          </p:cNvSpPr>
+          <p:nvPr/>
+        </p:nvSpPr>
+        <p:spPr>
+          <a:xfrm>
             <a:off x="400050" y="6172200"/>
             <a:ext cx="11391900" cy="9525"/>
           </a:xfrm>
-          <a:prstGeom xmlns:a="http://schemas.openxmlformats.org/drawingml/2006/main" prst="rect">
-            <a:avLst/>
-          </a:prstGeom>
-          <a:solidFill xmlns:a="http://schemas.openxmlformats.org/drawingml/2006/main">
+          <a:prstGeom prst="rect">
+            <a:avLst/>
+          </a:prstGeom>
+          <a:solidFill>
             <a:srgbClr val="B8BCC4"/>
           </a:solidFill>
         </p:spPr>
@@ -4428,32 +4070,32 @@
       <p:sp>
         <p:nvSpPr>
           <p:cNvPr id="32" name="footer-source-3">
-            <a:extLst xmlns:a="http://schemas.openxmlformats.org/drawingml/2006/main">
+            <a:extLst>
               <a:ext uri="{FF2B5EF4-FFF2-40B4-BE49-F238E27FC236}">
                 <a16:creationId xmlns:a16="http://schemas.microsoft.com/office/drawing/2014/main" id="{5C307C6A-C21E-4EC6-9DFE-6F21876E4939}"/>
               </a:ext>
             </a:extLst>
           </p:cNvPr>
           <p:cNvSpPr>
-            <a:spLocks xmlns:a="http://schemas.openxmlformats.org/drawingml/2006/main" noGrp="1"/>
-          </p:cNvSpPr>
-          <p:nvPr/>
-        </p:nvSpPr>
-        <p:spPr>
-          <a:xfrm xmlns:a="http://schemas.openxmlformats.org/drawingml/2006/main">
+            <a:spLocks noGrp="1"/>
+          </p:cNvSpPr>
+          <p:nvPr/>
+        </p:nvSpPr>
+        <p:spPr>
+          <a:xfrm>
             <a:off x="400050" y="6305550"/>
             <a:ext cx="3429000" cy="228600"/>
           </a:xfrm>
-          <a:prstGeom xmlns:a="http://schemas.openxmlformats.org/drawingml/2006/main" prst="rect">
-            <a:avLst/>
-          </a:prstGeom>
-        </p:spPr>
-        <p:txBody>
-          <a:bodyPr xmlns:a="http://schemas.openxmlformats.org/drawingml/2006/main" spcFirstLastPara="1" lIns="0" tIns="0" rIns="0" bIns="0" anchor="t">
-            <a:normAutofit fontScale="100000"/>
-          </a:bodyPr>
-          <a:lstStyle xmlns:a="http://schemas.openxmlformats.org/drawingml/2006/main"/>
-          <a:p xmlns:a="http://schemas.openxmlformats.org/drawingml/2006/main">
+          <a:prstGeom prst="rect">
+            <a:avLst/>
+          </a:prstGeom>
+        </p:spPr>
+        <p:txBody>
+          <a:bodyPr spcFirstLastPara="1" lIns="0" tIns="0" rIns="0" bIns="0" anchor="t">
+            <a:normAutofit/>
+          </a:bodyPr>
+          <a:lstStyle/>
+          <a:p>
             <a:pPr>
               <a:defRPr sz="1125" b="0">
                 <a:solidFill>
@@ -4473,32 +4115,32 @@
       <p:sp>
         <p:nvSpPr>
           <p:cNvPr id="33" name="footer-page-3">
-            <a:extLst xmlns:a="http://schemas.openxmlformats.org/drawingml/2006/main">
+            <a:extLst>
               <a:ext uri="{FF2B5EF4-FFF2-40B4-BE49-F238E27FC236}">
                 <a16:creationId xmlns:a16="http://schemas.microsoft.com/office/drawing/2014/main" id="{47401191-DB7C-4434-BD9E-462EEEA76A49}"/>
               </a:ext>
             </a:extLst>
           </p:cNvPr>
           <p:cNvSpPr>
-            <a:spLocks xmlns:a="http://schemas.openxmlformats.org/drawingml/2006/main" noGrp="1"/>
-          </p:cNvSpPr>
-          <p:nvPr/>
-        </p:nvSpPr>
-        <p:spPr>
-          <a:xfrm xmlns:a="http://schemas.openxmlformats.org/drawingml/2006/main">
+            <a:spLocks noGrp="1"/>
+          </p:cNvSpPr>
+          <p:nvPr/>
+        </p:nvSpPr>
+        <p:spPr>
+          <a:xfrm>
             <a:off x="11277600" y="6305550"/>
             <a:ext cx="514350" cy="228600"/>
           </a:xfrm>
-          <a:prstGeom xmlns:a="http://schemas.openxmlformats.org/drawingml/2006/main" prst="rect">
-            <a:avLst/>
-          </a:prstGeom>
-        </p:spPr>
-        <p:txBody>
-          <a:bodyPr xmlns:a="http://schemas.openxmlformats.org/drawingml/2006/main" spcFirstLastPara="1" lIns="0" tIns="0" rIns="0" bIns="0" anchor="t">
-            <a:normAutofit fontScale="100000"/>
-          </a:bodyPr>
-          <a:lstStyle xmlns:a="http://schemas.openxmlformats.org/drawingml/2006/main"/>
-          <a:p xmlns:a="http://schemas.openxmlformats.org/drawingml/2006/main">
+          <a:prstGeom prst="rect">
+            <a:avLst/>
+          </a:prstGeom>
+        </p:spPr>
+        <p:txBody>
+          <a:bodyPr spcFirstLastPara="1" lIns="0" tIns="0" rIns="0" bIns="0" anchor="t">
+            <a:normAutofit/>
+          </a:bodyPr>
+          <a:lstStyle/>
+          <a:p>
             <a:pPr algn="r">
               <a:defRPr sz="1125" b="0">
                 <a:solidFill>
@@ -4522,17 +4164,21 @@
       </p:ext>
     </p:extLst>
   </p:cSld>
+  <p:clrMapOvr>
+    <a:masterClrMapping/>
+  </p:clrMapOvr>
 </p:sld>
 </file>
 
 <file path=ppt/slides/slide4.xml><?xml version="1.0" encoding="utf-8"?>
-<p:sld xmlns:p="http://schemas.openxmlformats.org/presentationml/2006/main">
+<p:sld xmlns:a="http://schemas.openxmlformats.org/drawingml/2006/main" xmlns:r="http://schemas.openxmlformats.org/officeDocument/2006/relationships" xmlns:p="http://schemas.openxmlformats.org/presentationml/2006/main">
   <p:cSld>
     <p:bg>
       <p:bgPr>
-        <a:solidFill xmlns:a="http://schemas.openxmlformats.org/drawingml/2006/main">
+        <a:solidFill>
           <a:srgbClr val="FFFFFF"/>
         </a:solidFill>
+        <a:effectLst/>
       </p:bgPr>
     </p:bg>
     <p:spTree>
@@ -4542,37 +4188,42 @@
         <p:nvPr/>
       </p:nvGrpSpPr>
       <p:grpSpPr>
-        <a:xfrm xmlns:a="http://schemas.openxmlformats.org/drawingml/2006/main"/>
+        <a:xfrm>
+          <a:off x="0" y="0"/>
+          <a:ext cx="0" cy="0"/>
+          <a:chOff x="0" y="0"/>
+          <a:chExt cx="0" cy="0"/>
+        </a:xfrm>
       </p:grpSpPr>
       <p:sp>
         <p:nvSpPr>
-          <p:cNvPr id="1" name="miner-title">
-            <a:extLst xmlns:a="http://schemas.openxmlformats.org/drawingml/2006/main">
+          <p:cNvPr id="34" name="miner-title">
+            <a:extLst>
               <a:ext uri="{FF2B5EF4-FFF2-40B4-BE49-F238E27FC236}">
                 <a16:creationId xmlns:a16="http://schemas.microsoft.com/office/drawing/2014/main" id="{CBE2A975-5F9D-48A4-A289-637C92B9ECDC}"/>
               </a:ext>
             </a:extLst>
           </p:cNvPr>
           <p:cNvSpPr>
-            <a:spLocks xmlns:a="http://schemas.openxmlformats.org/drawingml/2006/main" noGrp="1"/>
-          </p:cNvSpPr>
-          <p:nvPr/>
-        </p:nvSpPr>
-        <p:spPr>
-          <a:xfrm xmlns:a="http://schemas.openxmlformats.org/drawingml/2006/main">
+            <a:spLocks noGrp="1"/>
+          </p:cNvSpPr>
+          <p:nvPr/>
+        </p:nvSpPr>
+        <p:spPr>
+          <a:xfrm>
             <a:off x="400050" y="342900"/>
             <a:ext cx="5905500" cy="704850"/>
           </a:xfrm>
-          <a:prstGeom xmlns:a="http://schemas.openxmlformats.org/drawingml/2006/main" prst="rect">
-            <a:avLst/>
-          </a:prstGeom>
-        </p:spPr>
-        <p:txBody>
-          <a:bodyPr xmlns:a="http://schemas.openxmlformats.org/drawingml/2006/main" spcFirstLastPara="1" lIns="0" tIns="0" rIns="0" bIns="0" anchor="t">
-            <a:normAutofit fontScale="100000"/>
-          </a:bodyPr>
-          <a:lstStyle xmlns:a="http://schemas.openxmlformats.org/drawingml/2006/main"/>
-          <a:p xmlns:a="http://schemas.openxmlformats.org/drawingml/2006/main">
+          <a:prstGeom prst="rect">
+            <a:avLst/>
+          </a:prstGeom>
+        </p:spPr>
+        <p:txBody>
+          <a:bodyPr spcFirstLastPara="1" lIns="0" tIns="0" rIns="0" bIns="0" anchor="t">
+            <a:normAutofit/>
+          </a:bodyPr>
+          <a:lstStyle/>
+          <a:p>
             <a:pPr>
               <a:defRPr sz="3750" b="1">
                 <a:solidFill>
@@ -4592,32 +4243,32 @@
       <p:sp>
         <p:nvSpPr>
           <p:cNvPr id="2" name="miner-eyebrow">
-            <a:extLst xmlns:a="http://schemas.openxmlformats.org/drawingml/2006/main">
+            <a:extLst>
               <a:ext uri="{FF2B5EF4-FFF2-40B4-BE49-F238E27FC236}">
                 <a16:creationId xmlns:a16="http://schemas.microsoft.com/office/drawing/2014/main" id="{0271964A-938E-44A5-83DD-F07B983070C4}"/>
               </a:ext>
             </a:extLst>
           </p:cNvPr>
           <p:cNvSpPr>
-            <a:spLocks xmlns:a="http://schemas.openxmlformats.org/drawingml/2006/main" noGrp="1"/>
-          </p:cNvSpPr>
-          <p:nvPr/>
-        </p:nvSpPr>
-        <p:spPr>
-          <a:xfrm xmlns:a="http://schemas.openxmlformats.org/drawingml/2006/main">
+            <a:spLocks noGrp="1"/>
+          </p:cNvSpPr>
+          <p:nvPr/>
+        </p:nvSpPr>
+        <p:spPr>
+          <a:xfrm>
             <a:off x="7372350" y="476250"/>
             <a:ext cx="4419600" cy="323850"/>
           </a:xfrm>
-          <a:prstGeom xmlns:a="http://schemas.openxmlformats.org/drawingml/2006/main" prst="rect">
-            <a:avLst/>
-          </a:prstGeom>
-        </p:spPr>
-        <p:txBody>
-          <a:bodyPr xmlns:a="http://schemas.openxmlformats.org/drawingml/2006/main" spcFirstLastPara="1" lIns="0" tIns="0" rIns="0" bIns="0" anchor="t">
-            <a:normAutofit fontScale="100000"/>
-          </a:bodyPr>
-          <a:lstStyle xmlns:a="http://schemas.openxmlformats.org/drawingml/2006/main"/>
-          <a:p xmlns:a="http://schemas.openxmlformats.org/drawingml/2006/main">
+          <a:prstGeom prst="rect">
+            <a:avLst/>
+          </a:prstGeom>
+        </p:spPr>
+        <p:txBody>
+          <a:bodyPr spcFirstLastPara="1" lIns="0" tIns="0" rIns="0" bIns="0" anchor="t">
+            <a:normAutofit/>
+          </a:bodyPr>
+          <a:lstStyle/>
+          <a:p>
             <a:pPr algn="r">
               <a:defRPr sz="1350" b="0">
                 <a:solidFill>
@@ -4637,32 +4288,32 @@
       <p:sp>
         <p:nvSpPr>
           <p:cNvPr id="3" name="miner-콘셉트-heading">
-            <a:extLst xmlns:a="http://schemas.openxmlformats.org/drawingml/2006/main">
+            <a:extLst>
               <a:ext uri="{FF2B5EF4-FFF2-40B4-BE49-F238E27FC236}">
                 <a16:creationId xmlns:a16="http://schemas.microsoft.com/office/drawing/2014/main" id="{2EDC46AF-AB82-47D4-B297-E5ADD83781ED}"/>
               </a:ext>
             </a:extLst>
           </p:cNvPr>
           <p:cNvSpPr>
-            <a:spLocks xmlns:a="http://schemas.openxmlformats.org/drawingml/2006/main" noGrp="1"/>
-          </p:cNvSpPr>
-          <p:nvPr/>
-        </p:nvSpPr>
-        <p:spPr>
-          <a:xfrm xmlns:a="http://schemas.openxmlformats.org/drawingml/2006/main">
+            <a:spLocks noGrp="1"/>
+          </p:cNvSpPr>
+          <p:nvPr/>
+        </p:nvSpPr>
+        <p:spPr>
+          <a:xfrm>
             <a:off x="400050" y="1390650"/>
             <a:ext cx="6096000" cy="323850"/>
           </a:xfrm>
-          <a:prstGeom xmlns:a="http://schemas.openxmlformats.org/drawingml/2006/main" prst="rect">
-            <a:avLst/>
-          </a:prstGeom>
-        </p:spPr>
-        <p:txBody>
-          <a:bodyPr xmlns:a="http://schemas.openxmlformats.org/drawingml/2006/main" spcFirstLastPara="1" lIns="0" tIns="0" rIns="0" bIns="0" anchor="t">
-            <a:normAutofit fontScale="100000"/>
-          </a:bodyPr>
-          <a:lstStyle xmlns:a="http://schemas.openxmlformats.org/drawingml/2006/main"/>
-          <a:p xmlns:a="http://schemas.openxmlformats.org/drawingml/2006/main">
+          <a:prstGeom prst="rect">
+            <a:avLst/>
+          </a:prstGeom>
+        </p:spPr>
+        <p:txBody>
+          <a:bodyPr spcFirstLastPara="1" lIns="0" tIns="0" rIns="0" bIns="0" anchor="t">
+            <a:normAutofit/>
+          </a:bodyPr>
+          <a:lstStyle/>
+          <a:p>
             <a:pPr>
               <a:defRPr sz="1800" b="1">
                 <a:solidFill>
@@ -4682,26 +4333,26 @@
       <p:sp>
         <p:nvSpPr>
           <p:cNvPr id="4" name="miner-콘셉트-rule">
-            <a:extLst xmlns:a="http://schemas.openxmlformats.org/drawingml/2006/main">
+            <a:extLst>
               <a:ext uri="{FF2B5EF4-FFF2-40B4-BE49-F238E27FC236}">
                 <a16:creationId xmlns:a16="http://schemas.microsoft.com/office/drawing/2014/main" id="{4E03FE3E-57CD-4F02-BF82-8966EEE9C235}"/>
               </a:ext>
             </a:extLst>
           </p:cNvPr>
           <p:cNvSpPr>
-            <a:spLocks xmlns:a="http://schemas.openxmlformats.org/drawingml/2006/main" noGrp="1"/>
-          </p:cNvSpPr>
-          <p:nvPr/>
-        </p:nvSpPr>
-        <p:spPr>
-          <a:xfrm xmlns:a="http://schemas.openxmlformats.org/drawingml/2006/main">
+            <a:spLocks noGrp="1"/>
+          </p:cNvSpPr>
+          <p:nvPr/>
+        </p:nvSpPr>
+        <p:spPr>
+          <a:xfrm>
             <a:off x="400050" y="1790700"/>
             <a:ext cx="685800" cy="38100"/>
           </a:xfrm>
-          <a:prstGeom xmlns:a="http://schemas.openxmlformats.org/drawingml/2006/main" prst="rect">
-            <a:avLst/>
-          </a:prstGeom>
-          <a:solidFill xmlns:a="http://schemas.openxmlformats.org/drawingml/2006/main">
+          <a:prstGeom prst="rect">
+            <a:avLst/>
+          </a:prstGeom>
+          <a:solidFill>
             <a:srgbClr val="FF6B35"/>
           </a:solidFill>
         </p:spPr>
@@ -4709,32 +4360,32 @@
       <p:sp>
         <p:nvSpPr>
           <p:cNvPr id="5" name="miner-콘셉트-body">
-            <a:extLst xmlns:a="http://schemas.openxmlformats.org/drawingml/2006/main">
+            <a:extLst>
               <a:ext uri="{FF2B5EF4-FFF2-40B4-BE49-F238E27FC236}">
                 <a16:creationId xmlns:a16="http://schemas.microsoft.com/office/drawing/2014/main" id="{AB74A0B6-628B-410E-9346-0430791B45A3}"/>
               </a:ext>
             </a:extLst>
           </p:cNvPr>
           <p:cNvSpPr>
-            <a:spLocks xmlns:a="http://schemas.openxmlformats.org/drawingml/2006/main" noGrp="1"/>
-          </p:cNvSpPr>
-          <p:nvPr/>
-        </p:nvSpPr>
-        <p:spPr>
-          <a:xfrm xmlns:a="http://schemas.openxmlformats.org/drawingml/2006/main">
+            <a:spLocks noGrp="1"/>
+          </p:cNvSpPr>
+          <p:nvPr/>
+        </p:nvSpPr>
+        <p:spPr>
+          <a:xfrm>
             <a:off x="400050" y="1962150"/>
             <a:ext cx="6096000" cy="819150"/>
           </a:xfrm>
-          <a:prstGeom xmlns:a="http://schemas.openxmlformats.org/drawingml/2006/main" prst="rect">
-            <a:avLst/>
-          </a:prstGeom>
-        </p:spPr>
-        <p:txBody>
-          <a:bodyPr xmlns:a="http://schemas.openxmlformats.org/drawingml/2006/main" spcFirstLastPara="1" lIns="0" tIns="0" rIns="0" bIns="0" anchor="t">
-            <a:normAutofit fontScale="100000"/>
-          </a:bodyPr>
-          <a:lstStyle xmlns:a="http://schemas.openxmlformats.org/drawingml/2006/main"/>
-          <a:p xmlns:a="http://schemas.openxmlformats.org/drawingml/2006/main">
+          <a:prstGeom prst="rect">
+            <a:avLst/>
+          </a:prstGeom>
+        </p:spPr>
+        <p:txBody>
+          <a:bodyPr spcFirstLastPara="1" lIns="0" tIns="0" rIns="0" bIns="0" anchor="t">
+            <a:normAutofit/>
+          </a:bodyPr>
+          <a:lstStyle/>
+          <a:p>
             <a:pPr>
               <a:defRPr sz="1575" b="0">
                 <a:solidFill>
@@ -4754,32 +4405,32 @@
       <p:sp>
         <p:nvSpPr>
           <p:cNvPr id="6" name="miner-특수 공격-heading">
-            <a:extLst xmlns:a="http://schemas.openxmlformats.org/drawingml/2006/main">
+            <a:extLst>
               <a:ext uri="{FF2B5EF4-FFF2-40B4-BE49-F238E27FC236}">
                 <a16:creationId xmlns:a16="http://schemas.microsoft.com/office/drawing/2014/main" id="{6DA497AD-2F08-41F9-9C19-6F55EF915457}"/>
               </a:ext>
             </a:extLst>
           </p:cNvPr>
           <p:cNvSpPr>
-            <a:spLocks xmlns:a="http://schemas.openxmlformats.org/drawingml/2006/main" noGrp="1"/>
-          </p:cNvSpPr>
-          <p:nvPr/>
-        </p:nvSpPr>
-        <p:spPr>
-          <a:xfrm xmlns:a="http://schemas.openxmlformats.org/drawingml/2006/main">
+            <a:spLocks noGrp="1"/>
+          </p:cNvSpPr>
+          <p:nvPr/>
+        </p:nvSpPr>
+        <p:spPr>
+          <a:xfrm>
             <a:off x="400050" y="3143250"/>
             <a:ext cx="6096000" cy="323850"/>
           </a:xfrm>
-          <a:prstGeom xmlns:a="http://schemas.openxmlformats.org/drawingml/2006/main" prst="rect">
-            <a:avLst/>
-          </a:prstGeom>
-        </p:spPr>
-        <p:txBody>
-          <a:bodyPr xmlns:a="http://schemas.openxmlformats.org/drawingml/2006/main" spcFirstLastPara="1" lIns="0" tIns="0" rIns="0" bIns="0" anchor="t">
-            <a:normAutofit fontScale="100000"/>
-          </a:bodyPr>
-          <a:lstStyle xmlns:a="http://schemas.openxmlformats.org/drawingml/2006/main"/>
-          <a:p xmlns:a="http://schemas.openxmlformats.org/drawingml/2006/main">
+          <a:prstGeom prst="rect">
+            <a:avLst/>
+          </a:prstGeom>
+        </p:spPr>
+        <p:txBody>
+          <a:bodyPr spcFirstLastPara="1" lIns="0" tIns="0" rIns="0" bIns="0" anchor="t">
+            <a:normAutofit/>
+          </a:bodyPr>
+          <a:lstStyle/>
+          <a:p>
             <a:pPr>
               <a:defRPr sz="1800" b="1">
                 <a:solidFill>
@@ -4799,26 +4450,26 @@
       <p:sp>
         <p:nvSpPr>
           <p:cNvPr id="7" name="miner-특수 공격-rule">
-            <a:extLst xmlns:a="http://schemas.openxmlformats.org/drawingml/2006/main">
+            <a:extLst>
               <a:ext uri="{FF2B5EF4-FFF2-40B4-BE49-F238E27FC236}">
                 <a16:creationId xmlns:a16="http://schemas.microsoft.com/office/drawing/2014/main" id="{2394F346-4B7E-41F3-BD21-9747D7310ABC}"/>
               </a:ext>
             </a:extLst>
           </p:cNvPr>
           <p:cNvSpPr>
-            <a:spLocks xmlns:a="http://schemas.openxmlformats.org/drawingml/2006/main" noGrp="1"/>
-          </p:cNvSpPr>
-          <p:nvPr/>
-        </p:nvSpPr>
-        <p:spPr>
-          <a:xfrm xmlns:a="http://schemas.openxmlformats.org/drawingml/2006/main">
+            <a:spLocks noGrp="1"/>
+          </p:cNvSpPr>
+          <p:nvPr/>
+        </p:nvSpPr>
+        <p:spPr>
+          <a:xfrm>
             <a:off x="400050" y="3543300"/>
             <a:ext cx="685800" cy="38100"/>
           </a:xfrm>
-          <a:prstGeom xmlns:a="http://schemas.openxmlformats.org/drawingml/2006/main" prst="rect">
-            <a:avLst/>
-          </a:prstGeom>
-          <a:solidFill xmlns:a="http://schemas.openxmlformats.org/drawingml/2006/main">
+          <a:prstGeom prst="rect">
+            <a:avLst/>
+          </a:prstGeom>
+          <a:solidFill>
             <a:srgbClr val="FF6B35"/>
           </a:solidFill>
         </p:spPr>
@@ -4826,32 +4477,32 @@
       <p:sp>
         <p:nvSpPr>
           <p:cNvPr id="8" name="miner-특수 공격-body">
-            <a:extLst xmlns:a="http://schemas.openxmlformats.org/drawingml/2006/main">
+            <a:extLst>
               <a:ext uri="{FF2B5EF4-FFF2-40B4-BE49-F238E27FC236}">
                 <a16:creationId xmlns:a16="http://schemas.microsoft.com/office/drawing/2014/main" id="{549D7B14-01DD-4013-B9E4-AD8DAE4AB633}"/>
               </a:ext>
             </a:extLst>
           </p:cNvPr>
           <p:cNvSpPr>
-            <a:spLocks xmlns:a="http://schemas.openxmlformats.org/drawingml/2006/main" noGrp="1"/>
-          </p:cNvSpPr>
-          <p:nvPr/>
-        </p:nvSpPr>
-        <p:spPr>
-          <a:xfrm xmlns:a="http://schemas.openxmlformats.org/drawingml/2006/main">
+            <a:spLocks noGrp="1"/>
+          </p:cNvSpPr>
+          <p:nvPr/>
+        </p:nvSpPr>
+        <p:spPr>
+          <a:xfrm>
             <a:off x="400050" y="3714750"/>
             <a:ext cx="6096000" cy="1104900"/>
           </a:xfrm>
-          <a:prstGeom xmlns:a="http://schemas.openxmlformats.org/drawingml/2006/main" prst="rect">
-            <a:avLst/>
-          </a:prstGeom>
-        </p:spPr>
-        <p:txBody>
-          <a:bodyPr xmlns:a="http://schemas.openxmlformats.org/drawingml/2006/main" spcFirstLastPara="1" lIns="0" tIns="0" rIns="0" bIns="0" anchor="t">
-            <a:normAutofit fontScale="100000"/>
-          </a:bodyPr>
-          <a:lstStyle xmlns:a="http://schemas.openxmlformats.org/drawingml/2006/main"/>
-          <a:p xmlns:a="http://schemas.openxmlformats.org/drawingml/2006/main">
+          <a:prstGeom prst="rect">
+            <a:avLst/>
+          </a:prstGeom>
+        </p:spPr>
+        <p:txBody>
+          <a:bodyPr spcFirstLastPara="1" lIns="0" tIns="0" rIns="0" bIns="0" anchor="t">
+            <a:normAutofit/>
+          </a:bodyPr>
+          <a:lstStyle/>
+          <a:p>
             <a:pPr>
               <a:defRPr sz="1575" b="0">
                 <a:solidFill>
@@ -4871,26 +4522,26 @@
       <p:sp>
         <p:nvSpPr>
           <p:cNvPr id="9" name="miner-note-band">
-            <a:extLst xmlns:a="http://schemas.openxmlformats.org/drawingml/2006/main">
+            <a:extLst>
               <a:ext uri="{FF2B5EF4-FFF2-40B4-BE49-F238E27FC236}">
                 <a16:creationId xmlns:a16="http://schemas.microsoft.com/office/drawing/2014/main" id="{53625281-1648-4AE3-B562-6AC105EE0DF3}"/>
               </a:ext>
             </a:extLst>
           </p:cNvPr>
           <p:cNvSpPr>
-            <a:spLocks xmlns:a="http://schemas.openxmlformats.org/drawingml/2006/main" noGrp="1"/>
-          </p:cNvSpPr>
-          <p:nvPr/>
-        </p:nvSpPr>
-        <p:spPr>
-          <a:xfrm xmlns:a="http://schemas.openxmlformats.org/drawingml/2006/main">
+            <a:spLocks noGrp="1"/>
+          </p:cNvSpPr>
+          <p:nvPr/>
+        </p:nvSpPr>
+        <p:spPr>
+          <a:xfrm>
             <a:off x="400050" y="5219700"/>
             <a:ext cx="6096000" cy="666750"/>
           </a:xfrm>
-          <a:prstGeom xmlns:a="http://schemas.openxmlformats.org/drawingml/2006/main" prst="rect">
-            <a:avLst/>
-          </a:prstGeom>
-          <a:solidFill xmlns:a="http://schemas.openxmlformats.org/drawingml/2006/main">
+          <a:prstGeom prst="rect">
+            <a:avLst/>
+          </a:prstGeom>
+          <a:solidFill>
             <a:srgbClr val="EDEDED"/>
           </a:solidFill>
         </p:spPr>
@@ -4898,32 +4549,32 @@
       <p:sp>
         <p:nvSpPr>
           <p:cNvPr id="10" name="miner-note">
-            <a:extLst xmlns:a="http://schemas.openxmlformats.org/drawingml/2006/main">
+            <a:extLst>
               <a:ext uri="{FF2B5EF4-FFF2-40B4-BE49-F238E27FC236}">
                 <a16:creationId xmlns:a16="http://schemas.microsoft.com/office/drawing/2014/main" id="{C0649E31-536E-448F-9E75-9B19F5CF42B2}"/>
               </a:ext>
             </a:extLst>
           </p:cNvPr>
           <p:cNvSpPr>
-            <a:spLocks xmlns:a="http://schemas.openxmlformats.org/drawingml/2006/main" noGrp="1"/>
-          </p:cNvSpPr>
-          <p:nvPr/>
-        </p:nvSpPr>
-        <p:spPr>
-          <a:xfrm xmlns:a="http://schemas.openxmlformats.org/drawingml/2006/main">
+            <a:spLocks noGrp="1"/>
+          </p:cNvSpPr>
+          <p:nvPr/>
+        </p:nvSpPr>
+        <p:spPr>
+          <a:xfrm>
             <a:off x="609600" y="5391150"/>
             <a:ext cx="5676900" cy="323850"/>
           </a:xfrm>
-          <a:prstGeom xmlns:a="http://schemas.openxmlformats.org/drawingml/2006/main" prst="rect">
-            <a:avLst/>
-          </a:prstGeom>
-        </p:spPr>
-        <p:txBody>
-          <a:bodyPr xmlns:a="http://schemas.openxmlformats.org/drawingml/2006/main" spcFirstLastPara="1" lIns="0" tIns="0" rIns="0" bIns="0" anchor="t">
-            <a:normAutofit fontScale="100000"/>
-          </a:bodyPr>
-          <a:lstStyle xmlns:a="http://schemas.openxmlformats.org/drawingml/2006/main"/>
-          <a:p xmlns:a="http://schemas.openxmlformats.org/drawingml/2006/main">
+          <a:prstGeom prst="rect">
+            <a:avLst/>
+          </a:prstGeom>
+        </p:spPr>
+        <p:txBody>
+          <a:bodyPr spcFirstLastPara="1" lIns="0" tIns="0" rIns="0" bIns="0" anchor="t">
+            <a:normAutofit/>
+          </a:bodyPr>
+          <a:lstStyle/>
+          <a:p>
             <a:pPr>
               <a:defRPr sz="1350" b="0">
                 <a:solidFill>
@@ -4943,26 +4594,26 @@
       <p:sp>
         <p:nvSpPr>
           <p:cNvPr id="11" name="miner-image-slot-panel">
-            <a:extLst xmlns:a="http://schemas.openxmlformats.org/drawingml/2006/main">
+            <a:extLst>
               <a:ext uri="{FF2B5EF4-FFF2-40B4-BE49-F238E27FC236}">
                 <a16:creationId xmlns:a16="http://schemas.microsoft.com/office/drawing/2014/main" id="{2F805D9B-4955-47CD-8456-AE9413059B6C}"/>
               </a:ext>
             </a:extLst>
           </p:cNvPr>
           <p:cNvSpPr>
-            <a:spLocks xmlns:a="http://schemas.openxmlformats.org/drawingml/2006/main" noGrp="1"/>
-          </p:cNvSpPr>
-          <p:nvPr/>
-        </p:nvSpPr>
-        <p:spPr>
-          <a:xfrm xmlns:a="http://schemas.openxmlformats.org/drawingml/2006/main">
+            <a:spLocks noGrp="1"/>
+          </p:cNvSpPr>
+          <p:nvPr/>
+        </p:nvSpPr>
+        <p:spPr>
+          <a:xfrm>
             <a:off x="7372350" y="1181100"/>
             <a:ext cx="4419600" cy="2609850"/>
           </a:xfrm>
-          <a:prstGeom xmlns:a="http://schemas.openxmlformats.org/drawingml/2006/main" prst="rect">
-            <a:avLst/>
-          </a:prstGeom>
-          <a:solidFill xmlns:a="http://schemas.openxmlformats.org/drawingml/2006/main">
+          <a:prstGeom prst="rect">
+            <a:avLst/>
+          </a:prstGeom>
+          <a:solidFill>
             <a:srgbClr val="EDEDED"/>
           </a:solidFill>
         </p:spPr>
@@ -4970,26 +4621,26 @@
       <p:sp>
         <p:nvSpPr>
           <p:cNvPr id="12" name="miner-image-slot-accent">
-            <a:extLst xmlns:a="http://schemas.openxmlformats.org/drawingml/2006/main">
+            <a:extLst>
               <a:ext uri="{FF2B5EF4-FFF2-40B4-BE49-F238E27FC236}">
                 <a16:creationId xmlns:a16="http://schemas.microsoft.com/office/drawing/2014/main" id="{C3FE38AD-467F-4C01-8B06-8D236E1FE01F}"/>
               </a:ext>
             </a:extLst>
           </p:cNvPr>
           <p:cNvSpPr>
-            <a:spLocks xmlns:a="http://schemas.openxmlformats.org/drawingml/2006/main" noGrp="1"/>
-          </p:cNvSpPr>
-          <p:nvPr/>
-        </p:nvSpPr>
-        <p:spPr>
-          <a:xfrm xmlns:a="http://schemas.openxmlformats.org/drawingml/2006/main">
+            <a:spLocks noGrp="1"/>
+          </p:cNvSpPr>
+          <p:nvPr/>
+        </p:nvSpPr>
+        <p:spPr>
+          <a:xfrm>
             <a:off x="7372350" y="1181100"/>
             <a:ext cx="76200" cy="2609850"/>
           </a:xfrm>
-          <a:prstGeom xmlns:a="http://schemas.openxmlformats.org/drawingml/2006/main" prst="rect">
-            <a:avLst/>
-          </a:prstGeom>
-          <a:solidFill xmlns:a="http://schemas.openxmlformats.org/drawingml/2006/main">
+          <a:prstGeom prst="rect">
+            <a:avLst/>
+          </a:prstGeom>
+          <a:solidFill>
             <a:srgbClr val="FF6B35"/>
           </a:solidFill>
         </p:spPr>
@@ -4997,32 +4648,32 @@
       <p:sp>
         <p:nvSpPr>
           <p:cNvPr id="13" name="miner-image-slot-label">
-            <a:extLst xmlns:a="http://schemas.openxmlformats.org/drawingml/2006/main">
+            <a:extLst>
               <a:ext uri="{FF2B5EF4-FFF2-40B4-BE49-F238E27FC236}">
                 <a16:creationId xmlns:a16="http://schemas.microsoft.com/office/drawing/2014/main" id="{37599C53-1EC9-4B07-91D0-2BD8969F976F}"/>
               </a:ext>
             </a:extLst>
           </p:cNvPr>
           <p:cNvSpPr>
-            <a:spLocks xmlns:a="http://schemas.openxmlformats.org/drawingml/2006/main" noGrp="1"/>
-          </p:cNvSpPr>
-          <p:nvPr/>
-        </p:nvSpPr>
-        <p:spPr>
-          <a:xfrm xmlns:a="http://schemas.openxmlformats.org/drawingml/2006/main">
+            <a:spLocks noGrp="1"/>
+          </p:cNvSpPr>
+          <p:nvPr/>
+        </p:nvSpPr>
+        <p:spPr>
+          <a:xfrm>
             <a:off x="7639050" y="1447800"/>
             <a:ext cx="3886200" cy="323850"/>
           </a:xfrm>
-          <a:prstGeom xmlns:a="http://schemas.openxmlformats.org/drawingml/2006/main" prst="rect">
-            <a:avLst/>
-          </a:prstGeom>
-        </p:spPr>
-        <p:txBody>
-          <a:bodyPr xmlns:a="http://schemas.openxmlformats.org/drawingml/2006/main" spcFirstLastPara="1" lIns="0" tIns="0" rIns="0" bIns="0" anchor="t">
-            <a:normAutofit fontScale="100000"/>
-          </a:bodyPr>
-          <a:lstStyle xmlns:a="http://schemas.openxmlformats.org/drawingml/2006/main"/>
-          <a:p xmlns:a="http://schemas.openxmlformats.org/drawingml/2006/main">
+          <a:prstGeom prst="rect">
+            <a:avLst/>
+          </a:prstGeom>
+        </p:spPr>
+        <p:txBody>
+          <a:bodyPr spcFirstLastPara="1" lIns="0" tIns="0" rIns="0" bIns="0" anchor="t">
+            <a:normAutofit/>
+          </a:bodyPr>
+          <a:lstStyle/>
+          <a:p>
             <a:pPr>
               <a:defRPr sz="1800" b="1">
                 <a:solidFill>
@@ -5042,32 +4693,32 @@
       <p:sp>
         <p:nvSpPr>
           <p:cNvPr id="14" name="miner-image-slot-hint">
-            <a:extLst xmlns:a="http://schemas.openxmlformats.org/drawingml/2006/main">
+            <a:extLst>
               <a:ext uri="{FF2B5EF4-FFF2-40B4-BE49-F238E27FC236}">
                 <a16:creationId xmlns:a16="http://schemas.microsoft.com/office/drawing/2014/main" id="{651FC84C-3070-4709-BCDD-E62C86A9FFE9}"/>
               </a:ext>
             </a:extLst>
           </p:cNvPr>
           <p:cNvSpPr>
-            <a:spLocks xmlns:a="http://schemas.openxmlformats.org/drawingml/2006/main" noGrp="1"/>
-          </p:cNvSpPr>
-          <p:nvPr/>
-        </p:nvSpPr>
-        <p:spPr>
-          <a:xfrm xmlns:a="http://schemas.openxmlformats.org/drawingml/2006/main">
+            <a:spLocks noGrp="1"/>
+          </p:cNvSpPr>
+          <p:nvPr/>
+        </p:nvSpPr>
+        <p:spPr>
+          <a:xfrm>
             <a:off x="7639050" y="3143250"/>
             <a:ext cx="3886200" cy="381000"/>
           </a:xfrm>
-          <a:prstGeom xmlns:a="http://schemas.openxmlformats.org/drawingml/2006/main" prst="rect">
-            <a:avLst/>
-          </a:prstGeom>
-        </p:spPr>
-        <p:txBody>
-          <a:bodyPr xmlns:a="http://schemas.openxmlformats.org/drawingml/2006/main" spcFirstLastPara="1" lIns="0" tIns="0" rIns="0" bIns="0" anchor="t">
-            <a:normAutofit fontScale="100000"/>
-          </a:bodyPr>
-          <a:lstStyle xmlns:a="http://schemas.openxmlformats.org/drawingml/2006/main"/>
-          <a:p xmlns:a="http://schemas.openxmlformats.org/drawingml/2006/main">
+          <a:prstGeom prst="rect">
+            <a:avLst/>
+          </a:prstGeom>
+        </p:spPr>
+        <p:txBody>
+          <a:bodyPr spcFirstLastPara="1" lIns="0" tIns="0" rIns="0" bIns="0" anchor="t">
+            <a:normAutofit/>
+          </a:bodyPr>
+          <a:lstStyle/>
+          <a:p>
             <a:pPr>
               <a:defRPr sz="1350" b="0">
                 <a:solidFill>
@@ -5087,32 +4738,32 @@
       <p:sp>
         <p:nvSpPr>
           <p:cNvPr id="15" name="miner-stats-heading">
-            <a:extLst xmlns:a="http://schemas.openxmlformats.org/drawingml/2006/main">
+            <a:extLst>
               <a:ext uri="{FF2B5EF4-FFF2-40B4-BE49-F238E27FC236}">
                 <a16:creationId xmlns:a16="http://schemas.microsoft.com/office/drawing/2014/main" id="{FBBC3CBE-D8EB-4425-9D47-B19F9DCE7DE1}"/>
               </a:ext>
             </a:extLst>
           </p:cNvPr>
           <p:cNvSpPr>
-            <a:spLocks xmlns:a="http://schemas.openxmlformats.org/drawingml/2006/main" noGrp="1"/>
-          </p:cNvSpPr>
-          <p:nvPr/>
-        </p:nvSpPr>
-        <p:spPr>
-          <a:xfrm xmlns:a="http://schemas.openxmlformats.org/drawingml/2006/main">
+            <a:spLocks noGrp="1"/>
+          </p:cNvSpPr>
+          <p:nvPr/>
+        </p:nvSpPr>
+        <p:spPr>
+          <a:xfrm>
             <a:off x="7372350" y="4057650"/>
             <a:ext cx="4419600" cy="323850"/>
           </a:xfrm>
-          <a:prstGeom xmlns:a="http://schemas.openxmlformats.org/drawingml/2006/main" prst="rect">
-            <a:avLst/>
-          </a:prstGeom>
-        </p:spPr>
-        <p:txBody>
-          <a:bodyPr xmlns:a="http://schemas.openxmlformats.org/drawingml/2006/main" spcFirstLastPara="1" lIns="0" tIns="0" rIns="0" bIns="0" anchor="t">
-            <a:normAutofit fontScale="100000"/>
-          </a:bodyPr>
-          <a:lstStyle xmlns:a="http://schemas.openxmlformats.org/drawingml/2006/main"/>
-          <a:p xmlns:a="http://schemas.openxmlformats.org/drawingml/2006/main">
+          <a:prstGeom prst="rect">
+            <a:avLst/>
+          </a:prstGeom>
+        </p:spPr>
+        <p:txBody>
+          <a:bodyPr spcFirstLastPara="1" lIns="0" tIns="0" rIns="0" bIns="0" anchor="t">
+            <a:normAutofit/>
+          </a:bodyPr>
+          <a:lstStyle/>
+          <a:p>
             <a:pPr>
               <a:defRPr sz="1800" b="1">
                 <a:solidFill>
@@ -5132,26 +4783,26 @@
       <p:sp>
         <p:nvSpPr>
           <p:cNvPr id="16" name="miner-stat-bg-1">
-            <a:extLst xmlns:a="http://schemas.openxmlformats.org/drawingml/2006/main">
+            <a:extLst>
               <a:ext uri="{FF2B5EF4-FFF2-40B4-BE49-F238E27FC236}">
                 <a16:creationId xmlns:a16="http://schemas.microsoft.com/office/drawing/2014/main" id="{170EFF95-3ECD-4B68-8760-E704DD48190F}"/>
               </a:ext>
             </a:extLst>
           </p:cNvPr>
           <p:cNvSpPr>
-            <a:spLocks xmlns:a="http://schemas.openxmlformats.org/drawingml/2006/main" noGrp="1"/>
-          </p:cNvSpPr>
-          <p:nvPr/>
-        </p:nvSpPr>
-        <p:spPr>
-          <a:xfrm xmlns:a="http://schemas.openxmlformats.org/drawingml/2006/main">
+            <a:spLocks noGrp="1"/>
+          </p:cNvSpPr>
+          <p:nvPr/>
+        </p:nvSpPr>
+        <p:spPr>
+          <a:xfrm>
             <a:off x="7372350" y="4438650"/>
             <a:ext cx="4419600" cy="280035"/>
           </a:xfrm>
-          <a:prstGeom xmlns:a="http://schemas.openxmlformats.org/drawingml/2006/main" prst="rect">
-            <a:avLst/>
-          </a:prstGeom>
-          <a:solidFill xmlns:a="http://schemas.openxmlformats.org/drawingml/2006/main">
+          <a:prstGeom prst="rect">
+            <a:avLst/>
+          </a:prstGeom>
+          <a:solidFill>
             <a:srgbClr val="F5F5F5"/>
           </a:solidFill>
         </p:spPr>
@@ -5159,32 +4810,32 @@
       <p:sp>
         <p:nvSpPr>
           <p:cNvPr id="17" name="miner-stat-label-1">
-            <a:extLst xmlns:a="http://schemas.openxmlformats.org/drawingml/2006/main">
+            <a:extLst>
               <a:ext uri="{FF2B5EF4-FFF2-40B4-BE49-F238E27FC236}">
                 <a16:creationId xmlns:a16="http://schemas.microsoft.com/office/drawing/2014/main" id="{90FC4CF4-51A4-41CB-ABFE-6E264B09056D}"/>
               </a:ext>
             </a:extLst>
           </p:cNvPr>
           <p:cNvSpPr>
-            <a:spLocks xmlns:a="http://schemas.openxmlformats.org/drawingml/2006/main" noGrp="1"/>
-          </p:cNvSpPr>
-          <p:nvPr/>
-        </p:nvSpPr>
-        <p:spPr>
-          <a:xfrm xmlns:a="http://schemas.openxmlformats.org/drawingml/2006/main">
+            <a:spLocks noGrp="1"/>
+          </p:cNvSpPr>
+          <p:nvPr/>
+        </p:nvSpPr>
+        <p:spPr>
+          <a:xfrm>
             <a:off x="7505700" y="4486275"/>
             <a:ext cx="1352550" cy="213360"/>
           </a:xfrm>
-          <a:prstGeom xmlns:a="http://schemas.openxmlformats.org/drawingml/2006/main" prst="rect">
-            <a:avLst/>
-          </a:prstGeom>
-        </p:spPr>
-        <p:txBody>
-          <a:bodyPr xmlns:a="http://schemas.openxmlformats.org/drawingml/2006/main" spcFirstLastPara="1" lIns="0" tIns="0" rIns="0" bIns="0" anchor="ctr">
-            <a:normAutofit fontScale="100000"/>
-          </a:bodyPr>
-          <a:lstStyle xmlns:a="http://schemas.openxmlformats.org/drawingml/2006/main"/>
-          <a:p xmlns:a="http://schemas.openxmlformats.org/drawingml/2006/main">
+          <a:prstGeom prst="rect">
+            <a:avLst/>
+          </a:prstGeom>
+        </p:spPr>
+        <p:txBody>
+          <a:bodyPr spcFirstLastPara="1" lIns="0" tIns="0" rIns="0" bIns="0" anchor="ctr">
+            <a:normAutofit/>
+          </a:bodyPr>
+          <a:lstStyle/>
+          <a:p>
             <a:pPr>
               <a:defRPr sz="1350" b="1">
                 <a:solidFill>
@@ -5204,32 +4855,32 @@
       <p:sp>
         <p:nvSpPr>
           <p:cNvPr id="18" name="miner-stat-value-1">
-            <a:extLst xmlns:a="http://schemas.openxmlformats.org/drawingml/2006/main">
+            <a:extLst>
               <a:ext uri="{FF2B5EF4-FFF2-40B4-BE49-F238E27FC236}">
                 <a16:creationId xmlns:a16="http://schemas.microsoft.com/office/drawing/2014/main" id="{D731FF08-8A85-4A03-9CB8-C2D8B8ACCB47}"/>
               </a:ext>
             </a:extLst>
           </p:cNvPr>
           <p:cNvSpPr>
-            <a:spLocks xmlns:a="http://schemas.openxmlformats.org/drawingml/2006/main" noGrp="1"/>
-          </p:cNvSpPr>
-          <p:nvPr/>
-        </p:nvSpPr>
-        <p:spPr>
-          <a:xfrm xmlns:a="http://schemas.openxmlformats.org/drawingml/2006/main">
+            <a:spLocks noGrp="1"/>
+          </p:cNvSpPr>
+          <p:nvPr/>
+        </p:nvSpPr>
+        <p:spPr>
+          <a:xfrm>
             <a:off x="8896350" y="4486275"/>
             <a:ext cx="2762250" cy="213360"/>
           </a:xfrm>
-          <a:prstGeom xmlns:a="http://schemas.openxmlformats.org/drawingml/2006/main" prst="rect">
-            <a:avLst/>
-          </a:prstGeom>
-        </p:spPr>
-        <p:txBody>
-          <a:bodyPr xmlns:a="http://schemas.openxmlformats.org/drawingml/2006/main" spcFirstLastPara="1" lIns="0" tIns="0" rIns="0" bIns="0" anchor="ctr">
+          <a:prstGeom prst="rect">
+            <a:avLst/>
+          </a:prstGeom>
+        </p:spPr>
+        <p:txBody>
+          <a:bodyPr spcFirstLastPara="1" lIns="0" tIns="0" rIns="0" bIns="0" anchor="ctr">
             <a:normAutofit fontScale="98246"/>
           </a:bodyPr>
-          <a:lstStyle xmlns:a="http://schemas.openxmlformats.org/drawingml/2006/main"/>
-          <a:p xmlns:a="http://schemas.openxmlformats.org/drawingml/2006/main">
+          <a:lstStyle/>
+          <a:p>
             <a:pPr>
               <a:defRPr sz="1425" b="0">
                 <a:solidFill>
@@ -5249,26 +4900,26 @@
       <p:sp>
         <p:nvSpPr>
           <p:cNvPr id="19" name="miner-stat-bg-2">
-            <a:extLst xmlns:a="http://schemas.openxmlformats.org/drawingml/2006/main">
+            <a:extLst>
               <a:ext uri="{FF2B5EF4-FFF2-40B4-BE49-F238E27FC236}">
                 <a16:creationId xmlns:a16="http://schemas.microsoft.com/office/drawing/2014/main" id="{AC902703-6A4F-4235-A956-278E0AFC3683}"/>
               </a:ext>
             </a:extLst>
           </p:cNvPr>
           <p:cNvSpPr>
-            <a:spLocks xmlns:a="http://schemas.openxmlformats.org/drawingml/2006/main" noGrp="1"/>
-          </p:cNvSpPr>
-          <p:nvPr/>
-        </p:nvSpPr>
-        <p:spPr>
-          <a:xfrm xmlns:a="http://schemas.openxmlformats.org/drawingml/2006/main">
+            <a:spLocks noGrp="1"/>
+          </p:cNvSpPr>
+          <p:nvPr/>
+        </p:nvSpPr>
+        <p:spPr>
+          <a:xfrm>
             <a:off x="7372350" y="4728210"/>
             <a:ext cx="4419600" cy="280035"/>
           </a:xfrm>
-          <a:prstGeom xmlns:a="http://schemas.openxmlformats.org/drawingml/2006/main" prst="rect">
-            <a:avLst/>
-          </a:prstGeom>
-          <a:solidFill xmlns:a="http://schemas.openxmlformats.org/drawingml/2006/main">
+          <a:prstGeom prst="rect">
+            <a:avLst/>
+          </a:prstGeom>
+          <a:solidFill>
             <a:srgbClr val="FFFFFF"/>
           </a:solidFill>
         </p:spPr>
@@ -5276,32 +4927,32 @@
       <p:sp>
         <p:nvSpPr>
           <p:cNvPr id="20" name="miner-stat-label-2">
-            <a:extLst xmlns:a="http://schemas.openxmlformats.org/drawingml/2006/main">
+            <a:extLst>
               <a:ext uri="{FF2B5EF4-FFF2-40B4-BE49-F238E27FC236}">
                 <a16:creationId xmlns:a16="http://schemas.microsoft.com/office/drawing/2014/main" id="{0FB86264-9E34-4522-9C77-339DB5E0F276}"/>
               </a:ext>
             </a:extLst>
           </p:cNvPr>
           <p:cNvSpPr>
-            <a:spLocks xmlns:a="http://schemas.openxmlformats.org/drawingml/2006/main" noGrp="1"/>
-          </p:cNvSpPr>
-          <p:nvPr/>
-        </p:nvSpPr>
-        <p:spPr>
-          <a:xfrm xmlns:a="http://schemas.openxmlformats.org/drawingml/2006/main">
+            <a:spLocks noGrp="1"/>
+          </p:cNvSpPr>
+          <p:nvPr/>
+        </p:nvSpPr>
+        <p:spPr>
+          <a:xfrm>
             <a:off x="7505700" y="4775835"/>
             <a:ext cx="1352550" cy="213360"/>
           </a:xfrm>
-          <a:prstGeom xmlns:a="http://schemas.openxmlformats.org/drawingml/2006/main" prst="rect">
-            <a:avLst/>
-          </a:prstGeom>
-        </p:spPr>
-        <p:txBody>
-          <a:bodyPr xmlns:a="http://schemas.openxmlformats.org/drawingml/2006/main" spcFirstLastPara="1" lIns="0" tIns="0" rIns="0" bIns="0" anchor="ctr">
-            <a:normAutofit fontScale="100000"/>
-          </a:bodyPr>
-          <a:lstStyle xmlns:a="http://schemas.openxmlformats.org/drawingml/2006/main"/>
-          <a:p xmlns:a="http://schemas.openxmlformats.org/drawingml/2006/main">
+          <a:prstGeom prst="rect">
+            <a:avLst/>
+          </a:prstGeom>
+        </p:spPr>
+        <p:txBody>
+          <a:bodyPr spcFirstLastPara="1" lIns="0" tIns="0" rIns="0" bIns="0" anchor="ctr">
+            <a:normAutofit/>
+          </a:bodyPr>
+          <a:lstStyle/>
+          <a:p>
             <a:pPr>
               <a:defRPr sz="1350" b="1">
                 <a:solidFill>
@@ -5321,32 +4972,32 @@
       <p:sp>
         <p:nvSpPr>
           <p:cNvPr id="21" name="miner-stat-value-2">
-            <a:extLst xmlns:a="http://schemas.openxmlformats.org/drawingml/2006/main">
+            <a:extLst>
               <a:ext uri="{FF2B5EF4-FFF2-40B4-BE49-F238E27FC236}">
                 <a16:creationId xmlns:a16="http://schemas.microsoft.com/office/drawing/2014/main" id="{CFE95897-7E2F-4F99-B056-14D092028B45}"/>
               </a:ext>
             </a:extLst>
           </p:cNvPr>
           <p:cNvSpPr>
-            <a:spLocks xmlns:a="http://schemas.openxmlformats.org/drawingml/2006/main" noGrp="1"/>
-          </p:cNvSpPr>
-          <p:nvPr/>
-        </p:nvSpPr>
-        <p:spPr>
-          <a:xfrm xmlns:a="http://schemas.openxmlformats.org/drawingml/2006/main">
+            <a:spLocks noGrp="1"/>
+          </p:cNvSpPr>
+          <p:nvPr/>
+        </p:nvSpPr>
+        <p:spPr>
+          <a:xfrm>
             <a:off x="8896350" y="4775835"/>
             <a:ext cx="2762250" cy="213360"/>
           </a:xfrm>
-          <a:prstGeom xmlns:a="http://schemas.openxmlformats.org/drawingml/2006/main" prst="rect">
-            <a:avLst/>
-          </a:prstGeom>
-        </p:spPr>
-        <p:txBody>
-          <a:bodyPr xmlns:a="http://schemas.openxmlformats.org/drawingml/2006/main" spcFirstLastPara="1" lIns="0" tIns="0" rIns="0" bIns="0" anchor="ctr">
+          <a:prstGeom prst="rect">
+            <a:avLst/>
+          </a:prstGeom>
+        </p:spPr>
+        <p:txBody>
+          <a:bodyPr spcFirstLastPara="1" lIns="0" tIns="0" rIns="0" bIns="0" anchor="ctr">
             <a:normAutofit fontScale="98246"/>
           </a:bodyPr>
-          <a:lstStyle xmlns:a="http://schemas.openxmlformats.org/drawingml/2006/main"/>
-          <a:p xmlns:a="http://schemas.openxmlformats.org/drawingml/2006/main">
+          <a:lstStyle/>
+          <a:p>
             <a:pPr>
               <a:defRPr sz="1425" b="0">
                 <a:solidFill>
@@ -5366,26 +5017,26 @@
       <p:sp>
         <p:nvSpPr>
           <p:cNvPr id="22" name="miner-stat-bg-3">
-            <a:extLst xmlns:a="http://schemas.openxmlformats.org/drawingml/2006/main">
+            <a:extLst>
               <a:ext uri="{FF2B5EF4-FFF2-40B4-BE49-F238E27FC236}">
                 <a16:creationId xmlns:a16="http://schemas.microsoft.com/office/drawing/2014/main" id="{6650B0E6-AB81-4DAA-8DDE-2B79897A7F71}"/>
               </a:ext>
             </a:extLst>
           </p:cNvPr>
           <p:cNvSpPr>
-            <a:spLocks xmlns:a="http://schemas.openxmlformats.org/drawingml/2006/main" noGrp="1"/>
-          </p:cNvSpPr>
-          <p:nvPr/>
-        </p:nvSpPr>
-        <p:spPr>
-          <a:xfrm xmlns:a="http://schemas.openxmlformats.org/drawingml/2006/main">
+            <a:spLocks noGrp="1"/>
+          </p:cNvSpPr>
+          <p:nvPr/>
+        </p:nvSpPr>
+        <p:spPr>
+          <a:xfrm>
             <a:off x="7372350" y="5017770"/>
             <a:ext cx="4419600" cy="280035"/>
           </a:xfrm>
-          <a:prstGeom xmlns:a="http://schemas.openxmlformats.org/drawingml/2006/main" prst="rect">
-            <a:avLst/>
-          </a:prstGeom>
-          <a:solidFill xmlns:a="http://schemas.openxmlformats.org/drawingml/2006/main">
+          <a:prstGeom prst="rect">
+            <a:avLst/>
+          </a:prstGeom>
+          <a:solidFill>
             <a:srgbClr val="F5F5F5"/>
           </a:solidFill>
         </p:spPr>
@@ -5393,32 +5044,32 @@
       <p:sp>
         <p:nvSpPr>
           <p:cNvPr id="23" name="miner-stat-label-3">
-            <a:extLst xmlns:a="http://schemas.openxmlformats.org/drawingml/2006/main">
+            <a:extLst>
               <a:ext uri="{FF2B5EF4-FFF2-40B4-BE49-F238E27FC236}">
                 <a16:creationId xmlns:a16="http://schemas.microsoft.com/office/drawing/2014/main" id="{4E6B5F94-7581-4B08-8747-D492E35BB816}"/>
               </a:ext>
             </a:extLst>
           </p:cNvPr>
           <p:cNvSpPr>
-            <a:spLocks xmlns:a="http://schemas.openxmlformats.org/drawingml/2006/main" noGrp="1"/>
-          </p:cNvSpPr>
-          <p:nvPr/>
-        </p:nvSpPr>
-        <p:spPr>
-          <a:xfrm xmlns:a="http://schemas.openxmlformats.org/drawingml/2006/main">
+            <a:spLocks noGrp="1"/>
+          </p:cNvSpPr>
+          <p:nvPr/>
+        </p:nvSpPr>
+        <p:spPr>
+          <a:xfrm>
             <a:off x="7505700" y="5065395"/>
             <a:ext cx="1352550" cy="213360"/>
           </a:xfrm>
-          <a:prstGeom xmlns:a="http://schemas.openxmlformats.org/drawingml/2006/main" prst="rect">
-            <a:avLst/>
-          </a:prstGeom>
-        </p:spPr>
-        <p:txBody>
-          <a:bodyPr xmlns:a="http://schemas.openxmlformats.org/drawingml/2006/main" spcFirstLastPara="1" lIns="0" tIns="0" rIns="0" bIns="0" anchor="ctr">
-            <a:normAutofit fontScale="100000"/>
-          </a:bodyPr>
-          <a:lstStyle xmlns:a="http://schemas.openxmlformats.org/drawingml/2006/main"/>
-          <a:p xmlns:a="http://schemas.openxmlformats.org/drawingml/2006/main">
+          <a:prstGeom prst="rect">
+            <a:avLst/>
+          </a:prstGeom>
+        </p:spPr>
+        <p:txBody>
+          <a:bodyPr spcFirstLastPara="1" lIns="0" tIns="0" rIns="0" bIns="0" anchor="ctr">
+            <a:normAutofit/>
+          </a:bodyPr>
+          <a:lstStyle/>
+          <a:p>
             <a:pPr>
               <a:defRPr sz="1350" b="1">
                 <a:solidFill>
@@ -5438,32 +5089,32 @@
       <p:sp>
         <p:nvSpPr>
           <p:cNvPr id="24" name="miner-stat-value-3">
-            <a:extLst xmlns:a="http://schemas.openxmlformats.org/drawingml/2006/main">
+            <a:extLst>
               <a:ext uri="{FF2B5EF4-FFF2-40B4-BE49-F238E27FC236}">
                 <a16:creationId xmlns:a16="http://schemas.microsoft.com/office/drawing/2014/main" id="{09BF38C7-3722-41D3-A1C3-9F58DDBE980A}"/>
               </a:ext>
             </a:extLst>
           </p:cNvPr>
           <p:cNvSpPr>
-            <a:spLocks xmlns:a="http://schemas.openxmlformats.org/drawingml/2006/main" noGrp="1"/>
-          </p:cNvSpPr>
-          <p:nvPr/>
-        </p:nvSpPr>
-        <p:spPr>
-          <a:xfrm xmlns:a="http://schemas.openxmlformats.org/drawingml/2006/main">
+            <a:spLocks noGrp="1"/>
+          </p:cNvSpPr>
+          <p:nvPr/>
+        </p:nvSpPr>
+        <p:spPr>
+          <a:xfrm>
             <a:off x="8896350" y="5065395"/>
             <a:ext cx="2762250" cy="213360"/>
           </a:xfrm>
-          <a:prstGeom xmlns:a="http://schemas.openxmlformats.org/drawingml/2006/main" prst="rect">
-            <a:avLst/>
-          </a:prstGeom>
-        </p:spPr>
-        <p:txBody>
-          <a:bodyPr xmlns:a="http://schemas.openxmlformats.org/drawingml/2006/main" spcFirstLastPara="1" lIns="0" tIns="0" rIns="0" bIns="0" anchor="ctr">
+          <a:prstGeom prst="rect">
+            <a:avLst/>
+          </a:prstGeom>
+        </p:spPr>
+        <p:txBody>
+          <a:bodyPr spcFirstLastPara="1" lIns="0" tIns="0" rIns="0" bIns="0" anchor="ctr">
             <a:normAutofit fontScale="98246"/>
           </a:bodyPr>
-          <a:lstStyle xmlns:a="http://schemas.openxmlformats.org/drawingml/2006/main"/>
-          <a:p xmlns:a="http://schemas.openxmlformats.org/drawingml/2006/main">
+          <a:lstStyle/>
+          <a:p>
             <a:pPr>
               <a:defRPr sz="1425" b="0">
                 <a:solidFill>
@@ -5483,26 +5134,26 @@
       <p:sp>
         <p:nvSpPr>
           <p:cNvPr id="25" name="miner-stat-bg-4">
-            <a:extLst xmlns:a="http://schemas.openxmlformats.org/drawingml/2006/main">
+            <a:extLst>
               <a:ext uri="{FF2B5EF4-FFF2-40B4-BE49-F238E27FC236}">
                 <a16:creationId xmlns:a16="http://schemas.microsoft.com/office/drawing/2014/main" id="{BB2317C7-4CC8-42F7-A507-E6F2E0214DB8}"/>
               </a:ext>
             </a:extLst>
           </p:cNvPr>
           <p:cNvSpPr>
-            <a:spLocks xmlns:a="http://schemas.openxmlformats.org/drawingml/2006/main" noGrp="1"/>
-          </p:cNvSpPr>
-          <p:nvPr/>
-        </p:nvSpPr>
-        <p:spPr>
-          <a:xfrm xmlns:a="http://schemas.openxmlformats.org/drawingml/2006/main">
+            <a:spLocks noGrp="1"/>
+          </p:cNvSpPr>
+          <p:nvPr/>
+        </p:nvSpPr>
+        <p:spPr>
+          <a:xfrm>
             <a:off x="7372350" y="5307330"/>
             <a:ext cx="4419600" cy="280035"/>
           </a:xfrm>
-          <a:prstGeom xmlns:a="http://schemas.openxmlformats.org/drawingml/2006/main" prst="rect">
-            <a:avLst/>
-          </a:prstGeom>
-          <a:solidFill xmlns:a="http://schemas.openxmlformats.org/drawingml/2006/main">
+          <a:prstGeom prst="rect">
+            <a:avLst/>
+          </a:prstGeom>
+          <a:solidFill>
             <a:srgbClr val="FFFFFF"/>
           </a:solidFill>
         </p:spPr>
@@ -5510,32 +5161,32 @@
       <p:sp>
         <p:nvSpPr>
           <p:cNvPr id="26" name="miner-stat-label-4">
-            <a:extLst xmlns:a="http://schemas.openxmlformats.org/drawingml/2006/main">
+            <a:extLst>
               <a:ext uri="{FF2B5EF4-FFF2-40B4-BE49-F238E27FC236}">
                 <a16:creationId xmlns:a16="http://schemas.microsoft.com/office/drawing/2014/main" id="{9F0DC03D-1E9B-4CB0-A935-6ABE5E86F94F}"/>
               </a:ext>
             </a:extLst>
           </p:cNvPr>
           <p:cNvSpPr>
-            <a:spLocks xmlns:a="http://schemas.openxmlformats.org/drawingml/2006/main" noGrp="1"/>
-          </p:cNvSpPr>
-          <p:nvPr/>
-        </p:nvSpPr>
-        <p:spPr>
-          <a:xfrm xmlns:a="http://schemas.openxmlformats.org/drawingml/2006/main">
+            <a:spLocks noGrp="1"/>
+          </p:cNvSpPr>
+          <p:nvPr/>
+        </p:nvSpPr>
+        <p:spPr>
+          <a:xfrm>
             <a:off x="7505700" y="5354955"/>
             <a:ext cx="1352550" cy="213360"/>
           </a:xfrm>
-          <a:prstGeom xmlns:a="http://schemas.openxmlformats.org/drawingml/2006/main" prst="rect">
-            <a:avLst/>
-          </a:prstGeom>
-        </p:spPr>
-        <p:txBody>
-          <a:bodyPr xmlns:a="http://schemas.openxmlformats.org/drawingml/2006/main" spcFirstLastPara="1" lIns="0" tIns="0" rIns="0" bIns="0" anchor="ctr">
-            <a:normAutofit fontScale="100000"/>
-          </a:bodyPr>
-          <a:lstStyle xmlns:a="http://schemas.openxmlformats.org/drawingml/2006/main"/>
-          <a:p xmlns:a="http://schemas.openxmlformats.org/drawingml/2006/main">
+          <a:prstGeom prst="rect">
+            <a:avLst/>
+          </a:prstGeom>
+        </p:spPr>
+        <p:txBody>
+          <a:bodyPr spcFirstLastPara="1" lIns="0" tIns="0" rIns="0" bIns="0" anchor="ctr">
+            <a:normAutofit/>
+          </a:bodyPr>
+          <a:lstStyle/>
+          <a:p>
             <a:pPr>
               <a:defRPr sz="1350" b="1">
                 <a:solidFill>
@@ -5555,32 +5206,32 @@
       <p:sp>
         <p:nvSpPr>
           <p:cNvPr id="27" name="miner-stat-value-4">
-            <a:extLst xmlns:a="http://schemas.openxmlformats.org/drawingml/2006/main">
+            <a:extLst>
               <a:ext uri="{FF2B5EF4-FFF2-40B4-BE49-F238E27FC236}">
                 <a16:creationId xmlns:a16="http://schemas.microsoft.com/office/drawing/2014/main" id="{6F47A5C0-3C69-4DF0-AA4C-43774374F6D9}"/>
               </a:ext>
             </a:extLst>
           </p:cNvPr>
           <p:cNvSpPr>
-            <a:spLocks xmlns:a="http://schemas.openxmlformats.org/drawingml/2006/main" noGrp="1"/>
-          </p:cNvSpPr>
-          <p:nvPr/>
-        </p:nvSpPr>
-        <p:spPr>
-          <a:xfrm xmlns:a="http://schemas.openxmlformats.org/drawingml/2006/main">
+            <a:spLocks noGrp="1"/>
+          </p:cNvSpPr>
+          <p:nvPr/>
+        </p:nvSpPr>
+        <p:spPr>
+          <a:xfrm>
             <a:off x="8896350" y="5354955"/>
             <a:ext cx="2762250" cy="213360"/>
           </a:xfrm>
-          <a:prstGeom xmlns:a="http://schemas.openxmlformats.org/drawingml/2006/main" prst="rect">
-            <a:avLst/>
-          </a:prstGeom>
-        </p:spPr>
-        <p:txBody>
-          <a:bodyPr xmlns:a="http://schemas.openxmlformats.org/drawingml/2006/main" spcFirstLastPara="1" lIns="0" tIns="0" rIns="0" bIns="0" anchor="ctr">
+          <a:prstGeom prst="rect">
+            <a:avLst/>
+          </a:prstGeom>
+        </p:spPr>
+        <p:txBody>
+          <a:bodyPr spcFirstLastPara="1" lIns="0" tIns="0" rIns="0" bIns="0" anchor="ctr">
             <a:normAutofit fontScale="98246"/>
           </a:bodyPr>
-          <a:lstStyle xmlns:a="http://schemas.openxmlformats.org/drawingml/2006/main"/>
-          <a:p xmlns:a="http://schemas.openxmlformats.org/drawingml/2006/main">
+          <a:lstStyle/>
+          <a:p>
             <a:pPr>
               <a:defRPr sz="1425" b="0">
                 <a:solidFill>
@@ -5600,26 +5251,26 @@
       <p:sp>
         <p:nvSpPr>
           <p:cNvPr id="28" name="miner-stat-bg-5">
-            <a:extLst xmlns:a="http://schemas.openxmlformats.org/drawingml/2006/main">
+            <a:extLst>
               <a:ext uri="{FF2B5EF4-FFF2-40B4-BE49-F238E27FC236}">
                 <a16:creationId xmlns:a16="http://schemas.microsoft.com/office/drawing/2014/main" id="{9FB270D8-0BAA-4BB1-9ECC-5CF401D3CAEC}"/>
               </a:ext>
             </a:extLst>
           </p:cNvPr>
           <p:cNvSpPr>
-            <a:spLocks xmlns:a="http://schemas.openxmlformats.org/drawingml/2006/main" noGrp="1"/>
-          </p:cNvSpPr>
-          <p:nvPr/>
-        </p:nvSpPr>
-        <p:spPr>
-          <a:xfrm xmlns:a="http://schemas.openxmlformats.org/drawingml/2006/main">
+            <a:spLocks noGrp="1"/>
+          </p:cNvSpPr>
+          <p:nvPr/>
+        </p:nvSpPr>
+        <p:spPr>
+          <a:xfrm>
             <a:off x="7372350" y="5596890"/>
             <a:ext cx="4419600" cy="280035"/>
           </a:xfrm>
-          <a:prstGeom xmlns:a="http://schemas.openxmlformats.org/drawingml/2006/main" prst="rect">
-            <a:avLst/>
-          </a:prstGeom>
-          <a:solidFill xmlns:a="http://schemas.openxmlformats.org/drawingml/2006/main">
+          <a:prstGeom prst="rect">
+            <a:avLst/>
+          </a:prstGeom>
+          <a:solidFill>
             <a:srgbClr val="F5F5F5"/>
           </a:solidFill>
         </p:spPr>
@@ -5627,32 +5278,32 @@
       <p:sp>
         <p:nvSpPr>
           <p:cNvPr id="29" name="miner-stat-label-5">
-            <a:extLst xmlns:a="http://schemas.openxmlformats.org/drawingml/2006/main">
+            <a:extLst>
               <a:ext uri="{FF2B5EF4-FFF2-40B4-BE49-F238E27FC236}">
                 <a16:creationId xmlns:a16="http://schemas.microsoft.com/office/drawing/2014/main" id="{AEEF9153-EED4-4C7F-91B7-C0419336EA1F}"/>
               </a:ext>
             </a:extLst>
           </p:cNvPr>
           <p:cNvSpPr>
-            <a:spLocks xmlns:a="http://schemas.openxmlformats.org/drawingml/2006/main" noGrp="1"/>
-          </p:cNvSpPr>
-          <p:nvPr/>
-        </p:nvSpPr>
-        <p:spPr>
-          <a:xfrm xmlns:a="http://schemas.openxmlformats.org/drawingml/2006/main">
+            <a:spLocks noGrp="1"/>
+          </p:cNvSpPr>
+          <p:nvPr/>
+        </p:nvSpPr>
+        <p:spPr>
+          <a:xfrm>
             <a:off x="7505700" y="5644515"/>
             <a:ext cx="1352550" cy="213360"/>
           </a:xfrm>
-          <a:prstGeom xmlns:a="http://schemas.openxmlformats.org/drawingml/2006/main" prst="rect">
-            <a:avLst/>
-          </a:prstGeom>
-        </p:spPr>
-        <p:txBody>
-          <a:bodyPr xmlns:a="http://schemas.openxmlformats.org/drawingml/2006/main" spcFirstLastPara="1" lIns="0" tIns="0" rIns="0" bIns="0" anchor="ctr">
-            <a:normAutofit fontScale="100000"/>
-          </a:bodyPr>
-          <a:lstStyle xmlns:a="http://schemas.openxmlformats.org/drawingml/2006/main"/>
-          <a:p xmlns:a="http://schemas.openxmlformats.org/drawingml/2006/main">
+          <a:prstGeom prst="rect">
+            <a:avLst/>
+          </a:prstGeom>
+        </p:spPr>
+        <p:txBody>
+          <a:bodyPr spcFirstLastPara="1" lIns="0" tIns="0" rIns="0" bIns="0" anchor="ctr">
+            <a:normAutofit/>
+          </a:bodyPr>
+          <a:lstStyle/>
+          <a:p>
             <a:pPr>
               <a:defRPr sz="1350" b="1">
                 <a:solidFill>
@@ -5672,32 +5323,32 @@
       <p:sp>
         <p:nvSpPr>
           <p:cNvPr id="30" name="miner-stat-value-5">
-            <a:extLst xmlns:a="http://schemas.openxmlformats.org/drawingml/2006/main">
+            <a:extLst>
               <a:ext uri="{FF2B5EF4-FFF2-40B4-BE49-F238E27FC236}">
                 <a16:creationId xmlns:a16="http://schemas.microsoft.com/office/drawing/2014/main" id="{D23B1FE8-2F9F-4DDA-A5AE-3E47D1BD8DEB}"/>
               </a:ext>
             </a:extLst>
           </p:cNvPr>
           <p:cNvSpPr>
-            <a:spLocks xmlns:a="http://schemas.openxmlformats.org/drawingml/2006/main" noGrp="1"/>
-          </p:cNvSpPr>
-          <p:nvPr/>
-        </p:nvSpPr>
-        <p:spPr>
-          <a:xfrm xmlns:a="http://schemas.openxmlformats.org/drawingml/2006/main">
+            <a:spLocks noGrp="1"/>
+          </p:cNvSpPr>
+          <p:nvPr/>
+        </p:nvSpPr>
+        <p:spPr>
+          <a:xfrm>
             <a:off x="8896350" y="5644515"/>
             <a:ext cx="2762250" cy="213360"/>
           </a:xfrm>
-          <a:prstGeom xmlns:a="http://schemas.openxmlformats.org/drawingml/2006/main" prst="rect">
-            <a:avLst/>
-          </a:prstGeom>
-        </p:spPr>
-        <p:txBody>
-          <a:bodyPr xmlns:a="http://schemas.openxmlformats.org/drawingml/2006/main" spcFirstLastPara="1" lIns="0" tIns="0" rIns="0" bIns="0" anchor="ctr">
+          <a:prstGeom prst="rect">
+            <a:avLst/>
+          </a:prstGeom>
+        </p:spPr>
+        <p:txBody>
+          <a:bodyPr spcFirstLastPara="1" lIns="0" tIns="0" rIns="0" bIns="0" anchor="ctr">
             <a:normAutofit fontScale="98246"/>
           </a:bodyPr>
-          <a:lstStyle xmlns:a="http://schemas.openxmlformats.org/drawingml/2006/main"/>
-          <a:p xmlns:a="http://schemas.openxmlformats.org/drawingml/2006/main">
+          <a:lstStyle/>
+          <a:p>
             <a:pPr>
               <a:defRPr sz="1425" b="0">
                 <a:solidFill>
@@ -5717,26 +5368,26 @@
       <p:sp>
         <p:nvSpPr>
           <p:cNvPr id="31" name="footer-rule-4">
-            <a:extLst xmlns:a="http://schemas.openxmlformats.org/drawingml/2006/main">
+            <a:extLst>
               <a:ext uri="{FF2B5EF4-FFF2-40B4-BE49-F238E27FC236}">
                 <a16:creationId xmlns:a16="http://schemas.microsoft.com/office/drawing/2014/main" id="{7FAEA6DC-6760-4A6C-B681-5EB0244B66E3}"/>
               </a:ext>
             </a:extLst>
           </p:cNvPr>
           <p:cNvSpPr>
-            <a:spLocks xmlns:a="http://schemas.openxmlformats.org/drawingml/2006/main" noGrp="1"/>
-          </p:cNvSpPr>
-          <p:nvPr/>
-        </p:nvSpPr>
-        <p:spPr>
-          <a:xfrm xmlns:a="http://schemas.openxmlformats.org/drawingml/2006/main">
+            <a:spLocks noGrp="1"/>
+          </p:cNvSpPr>
+          <p:nvPr/>
+        </p:nvSpPr>
+        <p:spPr>
+          <a:xfrm>
             <a:off x="400050" y="6172200"/>
             <a:ext cx="11391900" cy="9525"/>
           </a:xfrm>
-          <a:prstGeom xmlns:a="http://schemas.openxmlformats.org/drawingml/2006/main" prst="rect">
-            <a:avLst/>
-          </a:prstGeom>
-          <a:solidFill xmlns:a="http://schemas.openxmlformats.org/drawingml/2006/main">
+          <a:prstGeom prst="rect">
+            <a:avLst/>
+          </a:prstGeom>
+          <a:solidFill>
             <a:srgbClr val="B8BCC4"/>
           </a:solidFill>
         </p:spPr>
@@ -5744,32 +5395,32 @@
       <p:sp>
         <p:nvSpPr>
           <p:cNvPr id="32" name="footer-source-4">
-            <a:extLst xmlns:a="http://schemas.openxmlformats.org/drawingml/2006/main">
+            <a:extLst>
               <a:ext uri="{FF2B5EF4-FFF2-40B4-BE49-F238E27FC236}">
                 <a16:creationId xmlns:a16="http://schemas.microsoft.com/office/drawing/2014/main" id="{438380FA-E461-4562-AEA7-0B81C128229A}"/>
               </a:ext>
             </a:extLst>
           </p:cNvPr>
           <p:cNvSpPr>
-            <a:spLocks xmlns:a="http://schemas.openxmlformats.org/drawingml/2006/main" noGrp="1"/>
-          </p:cNvSpPr>
-          <p:nvPr/>
-        </p:nvSpPr>
-        <p:spPr>
-          <a:xfrm xmlns:a="http://schemas.openxmlformats.org/drawingml/2006/main">
+            <a:spLocks noGrp="1"/>
+          </p:cNvSpPr>
+          <p:nvPr/>
+        </p:nvSpPr>
+        <p:spPr>
+          <a:xfrm>
             <a:off x="400050" y="6305550"/>
             <a:ext cx="3429000" cy="228600"/>
           </a:xfrm>
-          <a:prstGeom xmlns:a="http://schemas.openxmlformats.org/drawingml/2006/main" prst="rect">
-            <a:avLst/>
-          </a:prstGeom>
-        </p:spPr>
-        <p:txBody>
-          <a:bodyPr xmlns:a="http://schemas.openxmlformats.org/drawingml/2006/main" spcFirstLastPara="1" lIns="0" tIns="0" rIns="0" bIns="0" anchor="t">
-            <a:normAutofit fontScale="100000"/>
-          </a:bodyPr>
-          <a:lstStyle xmlns:a="http://schemas.openxmlformats.org/drawingml/2006/main"/>
-          <a:p xmlns:a="http://schemas.openxmlformats.org/drawingml/2006/main">
+          <a:prstGeom prst="rect">
+            <a:avLst/>
+          </a:prstGeom>
+        </p:spPr>
+        <p:txBody>
+          <a:bodyPr spcFirstLastPara="1" lIns="0" tIns="0" rIns="0" bIns="0" anchor="t">
+            <a:normAutofit/>
+          </a:bodyPr>
+          <a:lstStyle/>
+          <a:p>
             <a:pPr>
               <a:defRPr sz="1125" b="0">
                 <a:solidFill>
@@ -5789,32 +5440,32 @@
       <p:sp>
         <p:nvSpPr>
           <p:cNvPr id="33" name="footer-page-4">
-            <a:extLst xmlns:a="http://schemas.openxmlformats.org/drawingml/2006/main">
+            <a:extLst>
               <a:ext uri="{FF2B5EF4-FFF2-40B4-BE49-F238E27FC236}">
                 <a16:creationId xmlns:a16="http://schemas.microsoft.com/office/drawing/2014/main" id="{731298D1-0453-42CB-AC12-4469ACF898C7}"/>
               </a:ext>
             </a:extLst>
           </p:cNvPr>
           <p:cNvSpPr>
-            <a:spLocks xmlns:a="http://schemas.openxmlformats.org/drawingml/2006/main" noGrp="1"/>
-          </p:cNvSpPr>
-          <p:nvPr/>
-        </p:nvSpPr>
-        <p:spPr>
-          <a:xfrm xmlns:a="http://schemas.openxmlformats.org/drawingml/2006/main">
+            <a:spLocks noGrp="1"/>
+          </p:cNvSpPr>
+          <p:nvPr/>
+        </p:nvSpPr>
+        <p:spPr>
+          <a:xfrm>
             <a:off x="11277600" y="6305550"/>
             <a:ext cx="514350" cy="228600"/>
           </a:xfrm>
-          <a:prstGeom xmlns:a="http://schemas.openxmlformats.org/drawingml/2006/main" prst="rect">
-            <a:avLst/>
-          </a:prstGeom>
-        </p:spPr>
-        <p:txBody>
-          <a:bodyPr xmlns:a="http://schemas.openxmlformats.org/drawingml/2006/main" spcFirstLastPara="1" lIns="0" tIns="0" rIns="0" bIns="0" anchor="t">
-            <a:normAutofit fontScale="100000"/>
-          </a:bodyPr>
-          <a:lstStyle xmlns:a="http://schemas.openxmlformats.org/drawingml/2006/main"/>
-          <a:p xmlns:a="http://schemas.openxmlformats.org/drawingml/2006/main">
+          <a:prstGeom prst="rect">
+            <a:avLst/>
+          </a:prstGeom>
+        </p:spPr>
+        <p:txBody>
+          <a:bodyPr spcFirstLastPara="1" lIns="0" tIns="0" rIns="0" bIns="0" anchor="t">
+            <a:normAutofit/>
+          </a:bodyPr>
+          <a:lstStyle/>
+          <a:p>
             <a:pPr algn="r">
               <a:defRPr sz="1125" b="0">
                 <a:solidFill>
@@ -5838,17 +5489,21 @@
       </p:ext>
     </p:extLst>
   </p:cSld>
+  <p:clrMapOvr>
+    <a:masterClrMapping/>
+  </p:clrMapOvr>
 </p:sld>
 </file>
 
 <file path=ppt/slides/slide5.xml><?xml version="1.0" encoding="utf-8"?>
-<p:sld xmlns:p="http://schemas.openxmlformats.org/presentationml/2006/main">
+<p:sld xmlns:a="http://schemas.openxmlformats.org/drawingml/2006/main" xmlns:r="http://schemas.openxmlformats.org/officeDocument/2006/relationships" xmlns:p="http://schemas.openxmlformats.org/presentationml/2006/main">
   <p:cSld>
     <p:bg>
       <p:bgPr>
-        <a:solidFill xmlns:a="http://schemas.openxmlformats.org/drawingml/2006/main">
+        <a:solidFill>
           <a:srgbClr val="FFFFFF"/>
         </a:solidFill>
+        <a:effectLst/>
       </p:bgPr>
     </p:bg>
     <p:spTree>
@@ -5858,37 +5513,42 @@
         <p:nvPr/>
       </p:nvGrpSpPr>
       <p:grpSpPr>
-        <a:xfrm xmlns:a="http://schemas.openxmlformats.org/drawingml/2006/main"/>
+        <a:xfrm>
+          <a:off x="0" y="0"/>
+          <a:ext cx="0" cy="0"/>
+          <a:chOff x="0" y="0"/>
+          <a:chExt cx="0" cy="0"/>
+        </a:xfrm>
       </p:grpSpPr>
       <p:sp>
         <p:nvSpPr>
-          <p:cNvPr id="1" name="engineer-title">
-            <a:extLst xmlns:a="http://schemas.openxmlformats.org/drawingml/2006/main">
+          <p:cNvPr id="34" name="engineer-title">
+            <a:extLst>
               <a:ext uri="{FF2B5EF4-FFF2-40B4-BE49-F238E27FC236}">
                 <a16:creationId xmlns:a16="http://schemas.microsoft.com/office/drawing/2014/main" id="{728FB307-10A3-4F03-AB4A-4F25A1088B06}"/>
               </a:ext>
             </a:extLst>
           </p:cNvPr>
           <p:cNvSpPr>
-            <a:spLocks xmlns:a="http://schemas.openxmlformats.org/drawingml/2006/main" noGrp="1"/>
-          </p:cNvSpPr>
-          <p:nvPr/>
-        </p:nvSpPr>
-        <p:spPr>
-          <a:xfrm xmlns:a="http://schemas.openxmlformats.org/drawingml/2006/main">
+            <a:spLocks noGrp="1"/>
+          </p:cNvSpPr>
+          <p:nvPr/>
+        </p:nvSpPr>
+        <p:spPr>
+          <a:xfrm>
             <a:off x="400050" y="342900"/>
             <a:ext cx="5905500" cy="704850"/>
           </a:xfrm>
-          <a:prstGeom xmlns:a="http://schemas.openxmlformats.org/drawingml/2006/main" prst="rect">
-            <a:avLst/>
-          </a:prstGeom>
-        </p:spPr>
-        <p:txBody>
-          <a:bodyPr xmlns:a="http://schemas.openxmlformats.org/drawingml/2006/main" spcFirstLastPara="1" lIns="0" tIns="0" rIns="0" bIns="0" anchor="t">
-            <a:normAutofit fontScale="100000"/>
-          </a:bodyPr>
-          <a:lstStyle xmlns:a="http://schemas.openxmlformats.org/drawingml/2006/main"/>
-          <a:p xmlns:a="http://schemas.openxmlformats.org/drawingml/2006/main">
+          <a:prstGeom prst="rect">
+            <a:avLst/>
+          </a:prstGeom>
+        </p:spPr>
+        <p:txBody>
+          <a:bodyPr spcFirstLastPara="1" lIns="0" tIns="0" rIns="0" bIns="0" anchor="t">
+            <a:normAutofit/>
+          </a:bodyPr>
+          <a:lstStyle/>
+          <a:p>
             <a:pPr>
               <a:defRPr sz="3750" b="1">
                 <a:solidFill>
@@ -5908,32 +5568,32 @@
       <p:sp>
         <p:nvSpPr>
           <p:cNvPr id="2" name="engineer-eyebrow">
-            <a:extLst xmlns:a="http://schemas.openxmlformats.org/drawingml/2006/main">
+            <a:extLst>
               <a:ext uri="{FF2B5EF4-FFF2-40B4-BE49-F238E27FC236}">
                 <a16:creationId xmlns:a16="http://schemas.microsoft.com/office/drawing/2014/main" id="{7F85F543-A250-498A-9119-DF3047CD12B5}"/>
               </a:ext>
             </a:extLst>
           </p:cNvPr>
           <p:cNvSpPr>
-            <a:spLocks xmlns:a="http://schemas.openxmlformats.org/drawingml/2006/main" noGrp="1"/>
-          </p:cNvSpPr>
-          <p:nvPr/>
-        </p:nvSpPr>
-        <p:spPr>
-          <a:xfrm xmlns:a="http://schemas.openxmlformats.org/drawingml/2006/main">
+            <a:spLocks noGrp="1"/>
+          </p:cNvSpPr>
+          <p:nvPr/>
+        </p:nvSpPr>
+        <p:spPr>
+          <a:xfrm>
             <a:off x="7372350" y="476250"/>
             <a:ext cx="4419600" cy="323850"/>
           </a:xfrm>
-          <a:prstGeom xmlns:a="http://schemas.openxmlformats.org/drawingml/2006/main" prst="rect">
-            <a:avLst/>
-          </a:prstGeom>
-        </p:spPr>
-        <p:txBody>
-          <a:bodyPr xmlns:a="http://schemas.openxmlformats.org/drawingml/2006/main" spcFirstLastPara="1" lIns="0" tIns="0" rIns="0" bIns="0" anchor="t">
-            <a:normAutofit fontScale="100000"/>
-          </a:bodyPr>
-          <a:lstStyle xmlns:a="http://schemas.openxmlformats.org/drawingml/2006/main"/>
-          <a:p xmlns:a="http://schemas.openxmlformats.org/drawingml/2006/main">
+          <a:prstGeom prst="rect">
+            <a:avLst/>
+          </a:prstGeom>
+        </p:spPr>
+        <p:txBody>
+          <a:bodyPr spcFirstLastPara="1" lIns="0" tIns="0" rIns="0" bIns="0" anchor="t">
+            <a:normAutofit/>
+          </a:bodyPr>
+          <a:lstStyle/>
+          <a:p>
             <a:pPr algn="r">
               <a:defRPr sz="1350" b="0">
                 <a:solidFill>
@@ -5953,32 +5613,32 @@
       <p:sp>
         <p:nvSpPr>
           <p:cNvPr id="3" name="engineer-콘셉트-heading">
-            <a:extLst xmlns:a="http://schemas.openxmlformats.org/drawingml/2006/main">
+            <a:extLst>
               <a:ext uri="{FF2B5EF4-FFF2-40B4-BE49-F238E27FC236}">
                 <a16:creationId xmlns:a16="http://schemas.microsoft.com/office/drawing/2014/main" id="{32B10849-02A0-4B3E-91F5-DFEEB999F804}"/>
               </a:ext>
             </a:extLst>
           </p:cNvPr>
           <p:cNvSpPr>
-            <a:spLocks xmlns:a="http://schemas.openxmlformats.org/drawingml/2006/main" noGrp="1"/>
-          </p:cNvSpPr>
-          <p:nvPr/>
-        </p:nvSpPr>
-        <p:spPr>
-          <a:xfrm xmlns:a="http://schemas.openxmlformats.org/drawingml/2006/main">
+            <a:spLocks noGrp="1"/>
+          </p:cNvSpPr>
+          <p:nvPr/>
+        </p:nvSpPr>
+        <p:spPr>
+          <a:xfrm>
             <a:off x="400050" y="1390650"/>
             <a:ext cx="6096000" cy="323850"/>
           </a:xfrm>
-          <a:prstGeom xmlns:a="http://schemas.openxmlformats.org/drawingml/2006/main" prst="rect">
-            <a:avLst/>
-          </a:prstGeom>
-        </p:spPr>
-        <p:txBody>
-          <a:bodyPr xmlns:a="http://schemas.openxmlformats.org/drawingml/2006/main" spcFirstLastPara="1" lIns="0" tIns="0" rIns="0" bIns="0" anchor="t">
-            <a:normAutofit fontScale="100000"/>
-          </a:bodyPr>
-          <a:lstStyle xmlns:a="http://schemas.openxmlformats.org/drawingml/2006/main"/>
-          <a:p xmlns:a="http://schemas.openxmlformats.org/drawingml/2006/main">
+          <a:prstGeom prst="rect">
+            <a:avLst/>
+          </a:prstGeom>
+        </p:spPr>
+        <p:txBody>
+          <a:bodyPr spcFirstLastPara="1" lIns="0" tIns="0" rIns="0" bIns="0" anchor="t">
+            <a:normAutofit/>
+          </a:bodyPr>
+          <a:lstStyle/>
+          <a:p>
             <a:pPr>
               <a:defRPr sz="1800" b="1">
                 <a:solidFill>
@@ -5998,26 +5658,26 @@
       <p:sp>
         <p:nvSpPr>
           <p:cNvPr id="4" name="engineer-콘셉트-rule">
-            <a:extLst xmlns:a="http://schemas.openxmlformats.org/drawingml/2006/main">
+            <a:extLst>
               <a:ext uri="{FF2B5EF4-FFF2-40B4-BE49-F238E27FC236}">
                 <a16:creationId xmlns:a16="http://schemas.microsoft.com/office/drawing/2014/main" id="{2CC3F8B3-B32D-42F9-B71E-6D5FC2551DCF}"/>
               </a:ext>
             </a:extLst>
           </p:cNvPr>
           <p:cNvSpPr>
-            <a:spLocks xmlns:a="http://schemas.openxmlformats.org/drawingml/2006/main" noGrp="1"/>
-          </p:cNvSpPr>
-          <p:nvPr/>
-        </p:nvSpPr>
-        <p:spPr>
-          <a:xfrm xmlns:a="http://schemas.openxmlformats.org/drawingml/2006/main">
+            <a:spLocks noGrp="1"/>
+          </p:cNvSpPr>
+          <p:nvPr/>
+        </p:nvSpPr>
+        <p:spPr>
+          <a:xfrm>
             <a:off x="400050" y="1790700"/>
             <a:ext cx="685800" cy="38100"/>
           </a:xfrm>
-          <a:prstGeom xmlns:a="http://schemas.openxmlformats.org/drawingml/2006/main" prst="rect">
-            <a:avLst/>
-          </a:prstGeom>
-          <a:solidFill xmlns:a="http://schemas.openxmlformats.org/drawingml/2006/main">
+          <a:prstGeom prst="rect">
+            <a:avLst/>
+          </a:prstGeom>
+          <a:solidFill>
             <a:srgbClr val="FF6B35"/>
           </a:solidFill>
         </p:spPr>
@@ -6025,32 +5685,32 @@
       <p:sp>
         <p:nvSpPr>
           <p:cNvPr id="5" name="engineer-콘셉트-body">
-            <a:extLst xmlns:a="http://schemas.openxmlformats.org/drawingml/2006/main">
+            <a:extLst>
               <a:ext uri="{FF2B5EF4-FFF2-40B4-BE49-F238E27FC236}">
                 <a16:creationId xmlns:a16="http://schemas.microsoft.com/office/drawing/2014/main" id="{87D54810-6DA6-4782-979F-2BB636956FCE}"/>
               </a:ext>
             </a:extLst>
           </p:cNvPr>
           <p:cNvSpPr>
-            <a:spLocks xmlns:a="http://schemas.openxmlformats.org/drawingml/2006/main" noGrp="1"/>
-          </p:cNvSpPr>
-          <p:nvPr/>
-        </p:nvSpPr>
-        <p:spPr>
-          <a:xfrm xmlns:a="http://schemas.openxmlformats.org/drawingml/2006/main">
+            <a:spLocks noGrp="1"/>
+          </p:cNvSpPr>
+          <p:nvPr/>
+        </p:nvSpPr>
+        <p:spPr>
+          <a:xfrm>
             <a:off x="400050" y="1962150"/>
             <a:ext cx="6096000" cy="819150"/>
           </a:xfrm>
-          <a:prstGeom xmlns:a="http://schemas.openxmlformats.org/drawingml/2006/main" prst="rect">
-            <a:avLst/>
-          </a:prstGeom>
-        </p:spPr>
-        <p:txBody>
-          <a:bodyPr xmlns:a="http://schemas.openxmlformats.org/drawingml/2006/main" spcFirstLastPara="1" lIns="0" tIns="0" rIns="0" bIns="0" anchor="t">
-            <a:normAutofit fontScale="100000"/>
-          </a:bodyPr>
-          <a:lstStyle xmlns:a="http://schemas.openxmlformats.org/drawingml/2006/main"/>
-          <a:p xmlns:a="http://schemas.openxmlformats.org/drawingml/2006/main">
+          <a:prstGeom prst="rect">
+            <a:avLst/>
+          </a:prstGeom>
+        </p:spPr>
+        <p:txBody>
+          <a:bodyPr spcFirstLastPara="1" lIns="0" tIns="0" rIns="0" bIns="0" anchor="t">
+            <a:normAutofit/>
+          </a:bodyPr>
+          <a:lstStyle/>
+          <a:p>
             <a:pPr>
               <a:defRPr sz="1575" b="0">
                 <a:solidFill>
@@ -6070,32 +5730,32 @@
       <p:sp>
         <p:nvSpPr>
           <p:cNvPr id="6" name="engineer-특수 공격-heading">
-            <a:extLst xmlns:a="http://schemas.openxmlformats.org/drawingml/2006/main">
+            <a:extLst>
               <a:ext uri="{FF2B5EF4-FFF2-40B4-BE49-F238E27FC236}">
                 <a16:creationId xmlns:a16="http://schemas.microsoft.com/office/drawing/2014/main" id="{A128F9A5-2C00-437E-92B6-6477152D27DF}"/>
               </a:ext>
             </a:extLst>
           </p:cNvPr>
           <p:cNvSpPr>
-            <a:spLocks xmlns:a="http://schemas.openxmlformats.org/drawingml/2006/main" noGrp="1"/>
-          </p:cNvSpPr>
-          <p:nvPr/>
-        </p:nvSpPr>
-        <p:spPr>
-          <a:xfrm xmlns:a="http://schemas.openxmlformats.org/drawingml/2006/main">
+            <a:spLocks noGrp="1"/>
+          </p:cNvSpPr>
+          <p:nvPr/>
+        </p:nvSpPr>
+        <p:spPr>
+          <a:xfrm>
             <a:off x="400050" y="3143250"/>
             <a:ext cx="6096000" cy="323850"/>
           </a:xfrm>
-          <a:prstGeom xmlns:a="http://schemas.openxmlformats.org/drawingml/2006/main" prst="rect">
-            <a:avLst/>
-          </a:prstGeom>
-        </p:spPr>
-        <p:txBody>
-          <a:bodyPr xmlns:a="http://schemas.openxmlformats.org/drawingml/2006/main" spcFirstLastPara="1" lIns="0" tIns="0" rIns="0" bIns="0" anchor="t">
-            <a:normAutofit fontScale="100000"/>
-          </a:bodyPr>
-          <a:lstStyle xmlns:a="http://schemas.openxmlformats.org/drawingml/2006/main"/>
-          <a:p xmlns:a="http://schemas.openxmlformats.org/drawingml/2006/main">
+          <a:prstGeom prst="rect">
+            <a:avLst/>
+          </a:prstGeom>
+        </p:spPr>
+        <p:txBody>
+          <a:bodyPr spcFirstLastPara="1" lIns="0" tIns="0" rIns="0" bIns="0" anchor="t">
+            <a:normAutofit/>
+          </a:bodyPr>
+          <a:lstStyle/>
+          <a:p>
             <a:pPr>
               <a:defRPr sz="1800" b="1">
                 <a:solidFill>
@@ -6115,26 +5775,26 @@
       <p:sp>
         <p:nvSpPr>
           <p:cNvPr id="7" name="engineer-특수 공격-rule">
-            <a:extLst xmlns:a="http://schemas.openxmlformats.org/drawingml/2006/main">
+            <a:extLst>
               <a:ext uri="{FF2B5EF4-FFF2-40B4-BE49-F238E27FC236}">
                 <a16:creationId xmlns:a16="http://schemas.microsoft.com/office/drawing/2014/main" id="{B76F7F4B-F110-4BE9-A4CE-73F810D6CC1E}"/>
               </a:ext>
             </a:extLst>
           </p:cNvPr>
           <p:cNvSpPr>
-            <a:spLocks xmlns:a="http://schemas.openxmlformats.org/drawingml/2006/main" noGrp="1"/>
-          </p:cNvSpPr>
-          <p:nvPr/>
-        </p:nvSpPr>
-        <p:spPr>
-          <a:xfrm xmlns:a="http://schemas.openxmlformats.org/drawingml/2006/main">
+            <a:spLocks noGrp="1"/>
+          </p:cNvSpPr>
+          <p:nvPr/>
+        </p:nvSpPr>
+        <p:spPr>
+          <a:xfrm>
             <a:off x="400050" y="3543300"/>
             <a:ext cx="685800" cy="38100"/>
           </a:xfrm>
-          <a:prstGeom xmlns:a="http://schemas.openxmlformats.org/drawingml/2006/main" prst="rect">
-            <a:avLst/>
-          </a:prstGeom>
-          <a:solidFill xmlns:a="http://schemas.openxmlformats.org/drawingml/2006/main">
+          <a:prstGeom prst="rect">
+            <a:avLst/>
+          </a:prstGeom>
+          <a:solidFill>
             <a:srgbClr val="FF6B35"/>
           </a:solidFill>
         </p:spPr>
@@ -6142,32 +5802,32 @@
       <p:sp>
         <p:nvSpPr>
           <p:cNvPr id="8" name="engineer-특수 공격-body">
-            <a:extLst xmlns:a="http://schemas.openxmlformats.org/drawingml/2006/main">
+            <a:extLst>
               <a:ext uri="{FF2B5EF4-FFF2-40B4-BE49-F238E27FC236}">
                 <a16:creationId xmlns:a16="http://schemas.microsoft.com/office/drawing/2014/main" id="{66C5EB5F-E2A6-4995-B0F5-B671860CBD68}"/>
               </a:ext>
             </a:extLst>
           </p:cNvPr>
           <p:cNvSpPr>
-            <a:spLocks xmlns:a="http://schemas.openxmlformats.org/drawingml/2006/main" noGrp="1"/>
-          </p:cNvSpPr>
-          <p:nvPr/>
-        </p:nvSpPr>
-        <p:spPr>
-          <a:xfrm xmlns:a="http://schemas.openxmlformats.org/drawingml/2006/main">
+            <a:spLocks noGrp="1"/>
+          </p:cNvSpPr>
+          <p:nvPr/>
+        </p:nvSpPr>
+        <p:spPr>
+          <a:xfrm>
             <a:off x="400050" y="3714750"/>
             <a:ext cx="6096000" cy="1104900"/>
           </a:xfrm>
-          <a:prstGeom xmlns:a="http://schemas.openxmlformats.org/drawingml/2006/main" prst="rect">
-            <a:avLst/>
-          </a:prstGeom>
-        </p:spPr>
-        <p:txBody>
-          <a:bodyPr xmlns:a="http://schemas.openxmlformats.org/drawingml/2006/main" spcFirstLastPara="1" lIns="0" tIns="0" rIns="0" bIns="0" anchor="t">
-            <a:normAutofit fontScale="100000"/>
-          </a:bodyPr>
-          <a:lstStyle xmlns:a="http://schemas.openxmlformats.org/drawingml/2006/main"/>
-          <a:p xmlns:a="http://schemas.openxmlformats.org/drawingml/2006/main">
+          <a:prstGeom prst="rect">
+            <a:avLst/>
+          </a:prstGeom>
+        </p:spPr>
+        <p:txBody>
+          <a:bodyPr spcFirstLastPara="1" lIns="0" tIns="0" rIns="0" bIns="0" anchor="t">
+            <a:normAutofit/>
+          </a:bodyPr>
+          <a:lstStyle/>
+          <a:p>
             <a:pPr>
               <a:defRPr sz="1575" b="0">
                 <a:solidFill>
@@ -6187,26 +5847,26 @@
       <p:sp>
         <p:nvSpPr>
           <p:cNvPr id="9" name="engineer-note-band">
-            <a:extLst xmlns:a="http://schemas.openxmlformats.org/drawingml/2006/main">
+            <a:extLst>
               <a:ext uri="{FF2B5EF4-FFF2-40B4-BE49-F238E27FC236}">
                 <a16:creationId xmlns:a16="http://schemas.microsoft.com/office/drawing/2014/main" id="{2AAFAB98-EE86-435B-9671-1C58707B9B71}"/>
               </a:ext>
             </a:extLst>
           </p:cNvPr>
           <p:cNvSpPr>
-            <a:spLocks xmlns:a="http://schemas.openxmlformats.org/drawingml/2006/main" noGrp="1"/>
-          </p:cNvSpPr>
-          <p:nvPr/>
-        </p:nvSpPr>
-        <p:spPr>
-          <a:xfrm xmlns:a="http://schemas.openxmlformats.org/drawingml/2006/main">
+            <a:spLocks noGrp="1"/>
+          </p:cNvSpPr>
+          <p:nvPr/>
+        </p:nvSpPr>
+        <p:spPr>
+          <a:xfrm>
             <a:off x="400050" y="5219700"/>
             <a:ext cx="6096000" cy="666750"/>
           </a:xfrm>
-          <a:prstGeom xmlns:a="http://schemas.openxmlformats.org/drawingml/2006/main" prst="rect">
-            <a:avLst/>
-          </a:prstGeom>
-          <a:solidFill xmlns:a="http://schemas.openxmlformats.org/drawingml/2006/main">
+          <a:prstGeom prst="rect">
+            <a:avLst/>
+          </a:prstGeom>
+          <a:solidFill>
             <a:srgbClr val="EDEDED"/>
           </a:solidFill>
         </p:spPr>
@@ -6214,32 +5874,32 @@
       <p:sp>
         <p:nvSpPr>
           <p:cNvPr id="10" name="engineer-note">
-            <a:extLst xmlns:a="http://schemas.openxmlformats.org/drawingml/2006/main">
+            <a:extLst>
               <a:ext uri="{FF2B5EF4-FFF2-40B4-BE49-F238E27FC236}">
                 <a16:creationId xmlns:a16="http://schemas.microsoft.com/office/drawing/2014/main" id="{28806180-E283-4379-BCD4-02B74FE0E7D9}"/>
               </a:ext>
             </a:extLst>
           </p:cNvPr>
           <p:cNvSpPr>
-            <a:spLocks xmlns:a="http://schemas.openxmlformats.org/drawingml/2006/main" noGrp="1"/>
-          </p:cNvSpPr>
-          <p:nvPr/>
-        </p:nvSpPr>
-        <p:spPr>
-          <a:xfrm xmlns:a="http://schemas.openxmlformats.org/drawingml/2006/main">
+            <a:spLocks noGrp="1"/>
+          </p:cNvSpPr>
+          <p:nvPr/>
+        </p:nvSpPr>
+        <p:spPr>
+          <a:xfrm>
             <a:off x="609600" y="5391150"/>
             <a:ext cx="5676900" cy="323850"/>
           </a:xfrm>
-          <a:prstGeom xmlns:a="http://schemas.openxmlformats.org/drawingml/2006/main" prst="rect">
-            <a:avLst/>
-          </a:prstGeom>
-        </p:spPr>
-        <p:txBody>
-          <a:bodyPr xmlns:a="http://schemas.openxmlformats.org/drawingml/2006/main" spcFirstLastPara="1" lIns="0" tIns="0" rIns="0" bIns="0" anchor="t">
-            <a:normAutofit fontScale="100000"/>
-          </a:bodyPr>
-          <a:lstStyle xmlns:a="http://schemas.openxmlformats.org/drawingml/2006/main"/>
-          <a:p xmlns:a="http://schemas.openxmlformats.org/drawingml/2006/main">
+          <a:prstGeom prst="rect">
+            <a:avLst/>
+          </a:prstGeom>
+        </p:spPr>
+        <p:txBody>
+          <a:bodyPr spcFirstLastPara="1" lIns="0" tIns="0" rIns="0" bIns="0" anchor="t">
+            <a:normAutofit/>
+          </a:bodyPr>
+          <a:lstStyle/>
+          <a:p>
             <a:pPr>
               <a:defRPr sz="1350" b="0">
                 <a:solidFill>
@@ -6259,26 +5919,26 @@
       <p:sp>
         <p:nvSpPr>
           <p:cNvPr id="11" name="engineer-image-slot-panel">
-            <a:extLst xmlns:a="http://schemas.openxmlformats.org/drawingml/2006/main">
+            <a:extLst>
               <a:ext uri="{FF2B5EF4-FFF2-40B4-BE49-F238E27FC236}">
                 <a16:creationId xmlns:a16="http://schemas.microsoft.com/office/drawing/2014/main" id="{A60CDE87-D73A-4FED-A037-BD9FA4FF27F7}"/>
               </a:ext>
             </a:extLst>
           </p:cNvPr>
           <p:cNvSpPr>
-            <a:spLocks xmlns:a="http://schemas.openxmlformats.org/drawingml/2006/main" noGrp="1"/>
-          </p:cNvSpPr>
-          <p:nvPr/>
-        </p:nvSpPr>
-        <p:spPr>
-          <a:xfrm xmlns:a="http://schemas.openxmlformats.org/drawingml/2006/main">
+            <a:spLocks noGrp="1"/>
+          </p:cNvSpPr>
+          <p:nvPr/>
+        </p:nvSpPr>
+        <p:spPr>
+          <a:xfrm>
             <a:off x="7372350" y="1181100"/>
             <a:ext cx="4419600" cy="2609850"/>
           </a:xfrm>
-          <a:prstGeom xmlns:a="http://schemas.openxmlformats.org/drawingml/2006/main" prst="rect">
-            <a:avLst/>
-          </a:prstGeom>
-          <a:solidFill xmlns:a="http://schemas.openxmlformats.org/drawingml/2006/main">
+          <a:prstGeom prst="rect">
+            <a:avLst/>
+          </a:prstGeom>
+          <a:solidFill>
             <a:srgbClr val="EDEDED"/>
           </a:solidFill>
         </p:spPr>
@@ -6286,26 +5946,26 @@
       <p:sp>
         <p:nvSpPr>
           <p:cNvPr id="12" name="engineer-image-slot-accent">
-            <a:extLst xmlns:a="http://schemas.openxmlformats.org/drawingml/2006/main">
+            <a:extLst>
               <a:ext uri="{FF2B5EF4-FFF2-40B4-BE49-F238E27FC236}">
                 <a16:creationId xmlns:a16="http://schemas.microsoft.com/office/drawing/2014/main" id="{D84A766A-9352-4967-8D6A-B4AD36440F7A}"/>
               </a:ext>
             </a:extLst>
           </p:cNvPr>
           <p:cNvSpPr>
-            <a:spLocks xmlns:a="http://schemas.openxmlformats.org/drawingml/2006/main" noGrp="1"/>
-          </p:cNvSpPr>
-          <p:nvPr/>
-        </p:nvSpPr>
-        <p:spPr>
-          <a:xfrm xmlns:a="http://schemas.openxmlformats.org/drawingml/2006/main">
+            <a:spLocks noGrp="1"/>
+          </p:cNvSpPr>
+          <p:nvPr/>
+        </p:nvSpPr>
+        <p:spPr>
+          <a:xfrm>
             <a:off x="7372350" y="1181100"/>
             <a:ext cx="76200" cy="2609850"/>
           </a:xfrm>
-          <a:prstGeom xmlns:a="http://schemas.openxmlformats.org/drawingml/2006/main" prst="rect">
-            <a:avLst/>
-          </a:prstGeom>
-          <a:solidFill xmlns:a="http://schemas.openxmlformats.org/drawingml/2006/main">
+          <a:prstGeom prst="rect">
+            <a:avLst/>
+          </a:prstGeom>
+          <a:solidFill>
             <a:srgbClr val="FF6B35"/>
           </a:solidFill>
         </p:spPr>
@@ -6313,32 +5973,32 @@
       <p:sp>
         <p:nvSpPr>
           <p:cNvPr id="13" name="engineer-image-slot-label">
-            <a:extLst xmlns:a="http://schemas.openxmlformats.org/drawingml/2006/main">
+            <a:extLst>
               <a:ext uri="{FF2B5EF4-FFF2-40B4-BE49-F238E27FC236}">
                 <a16:creationId xmlns:a16="http://schemas.microsoft.com/office/drawing/2014/main" id="{A4FEA5D4-50E4-4915-BBC1-008AEC0A8E0B}"/>
               </a:ext>
             </a:extLst>
           </p:cNvPr>
           <p:cNvSpPr>
-            <a:spLocks xmlns:a="http://schemas.openxmlformats.org/drawingml/2006/main" noGrp="1"/>
-          </p:cNvSpPr>
-          <p:nvPr/>
-        </p:nvSpPr>
-        <p:spPr>
-          <a:xfrm xmlns:a="http://schemas.openxmlformats.org/drawingml/2006/main">
+            <a:spLocks noGrp="1"/>
+          </p:cNvSpPr>
+          <p:nvPr/>
+        </p:nvSpPr>
+        <p:spPr>
+          <a:xfrm>
             <a:off x="7639050" y="1447800"/>
             <a:ext cx="3886200" cy="323850"/>
           </a:xfrm>
-          <a:prstGeom xmlns:a="http://schemas.openxmlformats.org/drawingml/2006/main" prst="rect">
-            <a:avLst/>
-          </a:prstGeom>
-        </p:spPr>
-        <p:txBody>
-          <a:bodyPr xmlns:a="http://schemas.openxmlformats.org/drawingml/2006/main" spcFirstLastPara="1" lIns="0" tIns="0" rIns="0" bIns="0" anchor="t">
-            <a:normAutofit fontScale="100000"/>
-          </a:bodyPr>
-          <a:lstStyle xmlns:a="http://schemas.openxmlformats.org/drawingml/2006/main"/>
-          <a:p xmlns:a="http://schemas.openxmlformats.org/drawingml/2006/main">
+          <a:prstGeom prst="rect">
+            <a:avLst/>
+          </a:prstGeom>
+        </p:spPr>
+        <p:txBody>
+          <a:bodyPr spcFirstLastPara="1" lIns="0" tIns="0" rIns="0" bIns="0" anchor="t">
+            <a:normAutofit/>
+          </a:bodyPr>
+          <a:lstStyle/>
+          <a:p>
             <a:pPr>
               <a:defRPr sz="1800" b="1">
                 <a:solidFill>
@@ -6358,32 +6018,32 @@
       <p:sp>
         <p:nvSpPr>
           <p:cNvPr id="14" name="engineer-image-slot-hint">
-            <a:extLst xmlns:a="http://schemas.openxmlformats.org/drawingml/2006/main">
+            <a:extLst>
               <a:ext uri="{FF2B5EF4-FFF2-40B4-BE49-F238E27FC236}">
                 <a16:creationId xmlns:a16="http://schemas.microsoft.com/office/drawing/2014/main" id="{B7806D59-C62D-4315-8C8A-55EE556158B3}"/>
               </a:ext>
             </a:extLst>
           </p:cNvPr>
           <p:cNvSpPr>
-            <a:spLocks xmlns:a="http://schemas.openxmlformats.org/drawingml/2006/main" noGrp="1"/>
-          </p:cNvSpPr>
-          <p:nvPr/>
-        </p:nvSpPr>
-        <p:spPr>
-          <a:xfrm xmlns:a="http://schemas.openxmlformats.org/drawingml/2006/main">
+            <a:spLocks noGrp="1"/>
+          </p:cNvSpPr>
+          <p:nvPr/>
+        </p:nvSpPr>
+        <p:spPr>
+          <a:xfrm>
             <a:off x="7639050" y="3143250"/>
             <a:ext cx="3886200" cy="381000"/>
           </a:xfrm>
-          <a:prstGeom xmlns:a="http://schemas.openxmlformats.org/drawingml/2006/main" prst="rect">
-            <a:avLst/>
-          </a:prstGeom>
-        </p:spPr>
-        <p:txBody>
-          <a:bodyPr xmlns:a="http://schemas.openxmlformats.org/drawingml/2006/main" spcFirstLastPara="1" lIns="0" tIns="0" rIns="0" bIns="0" anchor="t">
-            <a:normAutofit fontScale="100000"/>
-          </a:bodyPr>
-          <a:lstStyle xmlns:a="http://schemas.openxmlformats.org/drawingml/2006/main"/>
-          <a:p xmlns:a="http://schemas.openxmlformats.org/drawingml/2006/main">
+          <a:prstGeom prst="rect">
+            <a:avLst/>
+          </a:prstGeom>
+        </p:spPr>
+        <p:txBody>
+          <a:bodyPr spcFirstLastPara="1" lIns="0" tIns="0" rIns="0" bIns="0" anchor="t">
+            <a:normAutofit/>
+          </a:bodyPr>
+          <a:lstStyle/>
+          <a:p>
             <a:pPr>
               <a:defRPr sz="1350" b="0">
                 <a:solidFill>
@@ -6403,32 +6063,32 @@
       <p:sp>
         <p:nvSpPr>
           <p:cNvPr id="15" name="engineer-stats-heading">
-            <a:extLst xmlns:a="http://schemas.openxmlformats.org/drawingml/2006/main">
+            <a:extLst>
               <a:ext uri="{FF2B5EF4-FFF2-40B4-BE49-F238E27FC236}">
                 <a16:creationId xmlns:a16="http://schemas.microsoft.com/office/drawing/2014/main" id="{3A00AFF1-425E-4AA8-869A-2966FA21B128}"/>
               </a:ext>
             </a:extLst>
           </p:cNvPr>
           <p:cNvSpPr>
-            <a:spLocks xmlns:a="http://schemas.openxmlformats.org/drawingml/2006/main" noGrp="1"/>
-          </p:cNvSpPr>
-          <p:nvPr/>
-        </p:nvSpPr>
-        <p:spPr>
-          <a:xfrm xmlns:a="http://schemas.openxmlformats.org/drawingml/2006/main">
+            <a:spLocks noGrp="1"/>
+          </p:cNvSpPr>
+          <p:nvPr/>
+        </p:nvSpPr>
+        <p:spPr>
+          <a:xfrm>
             <a:off x="7372350" y="4057650"/>
             <a:ext cx="4419600" cy="323850"/>
           </a:xfrm>
-          <a:prstGeom xmlns:a="http://schemas.openxmlformats.org/drawingml/2006/main" prst="rect">
-            <a:avLst/>
-          </a:prstGeom>
-        </p:spPr>
-        <p:txBody>
-          <a:bodyPr xmlns:a="http://schemas.openxmlformats.org/drawingml/2006/main" spcFirstLastPara="1" lIns="0" tIns="0" rIns="0" bIns="0" anchor="t">
-            <a:normAutofit fontScale="100000"/>
-          </a:bodyPr>
-          <a:lstStyle xmlns:a="http://schemas.openxmlformats.org/drawingml/2006/main"/>
-          <a:p xmlns:a="http://schemas.openxmlformats.org/drawingml/2006/main">
+          <a:prstGeom prst="rect">
+            <a:avLst/>
+          </a:prstGeom>
+        </p:spPr>
+        <p:txBody>
+          <a:bodyPr spcFirstLastPara="1" lIns="0" tIns="0" rIns="0" bIns="0" anchor="t">
+            <a:normAutofit/>
+          </a:bodyPr>
+          <a:lstStyle/>
+          <a:p>
             <a:pPr>
               <a:defRPr sz="1800" b="1">
                 <a:solidFill>
@@ -6448,26 +6108,26 @@
       <p:sp>
         <p:nvSpPr>
           <p:cNvPr id="16" name="engineer-stat-bg-1">
-            <a:extLst xmlns:a="http://schemas.openxmlformats.org/drawingml/2006/main">
+            <a:extLst>
               <a:ext uri="{FF2B5EF4-FFF2-40B4-BE49-F238E27FC236}">
                 <a16:creationId xmlns:a16="http://schemas.microsoft.com/office/drawing/2014/main" id="{0E3D2ADC-39EC-4DD7-944F-0DC805D9285E}"/>
               </a:ext>
             </a:extLst>
           </p:cNvPr>
           <p:cNvSpPr>
-            <a:spLocks xmlns:a="http://schemas.openxmlformats.org/drawingml/2006/main" noGrp="1"/>
-          </p:cNvSpPr>
-          <p:nvPr/>
-        </p:nvSpPr>
-        <p:spPr>
-          <a:xfrm xmlns:a="http://schemas.openxmlformats.org/drawingml/2006/main">
+            <a:spLocks noGrp="1"/>
+          </p:cNvSpPr>
+          <p:nvPr/>
+        </p:nvSpPr>
+        <p:spPr>
+          <a:xfrm>
             <a:off x="7372350" y="4438650"/>
             <a:ext cx="4419600" cy="280035"/>
           </a:xfrm>
-          <a:prstGeom xmlns:a="http://schemas.openxmlformats.org/drawingml/2006/main" prst="rect">
-            <a:avLst/>
-          </a:prstGeom>
-          <a:solidFill xmlns:a="http://schemas.openxmlformats.org/drawingml/2006/main">
+          <a:prstGeom prst="rect">
+            <a:avLst/>
+          </a:prstGeom>
+          <a:solidFill>
             <a:srgbClr val="F5F5F5"/>
           </a:solidFill>
         </p:spPr>
@@ -6475,32 +6135,32 @@
       <p:sp>
         <p:nvSpPr>
           <p:cNvPr id="17" name="engineer-stat-label-1">
-            <a:extLst xmlns:a="http://schemas.openxmlformats.org/drawingml/2006/main">
+            <a:extLst>
               <a:ext uri="{FF2B5EF4-FFF2-40B4-BE49-F238E27FC236}">
                 <a16:creationId xmlns:a16="http://schemas.microsoft.com/office/drawing/2014/main" id="{409AE207-555E-49B9-A9C0-078BFC937429}"/>
               </a:ext>
             </a:extLst>
           </p:cNvPr>
           <p:cNvSpPr>
-            <a:spLocks xmlns:a="http://schemas.openxmlformats.org/drawingml/2006/main" noGrp="1"/>
-          </p:cNvSpPr>
-          <p:nvPr/>
-        </p:nvSpPr>
-        <p:spPr>
-          <a:xfrm xmlns:a="http://schemas.openxmlformats.org/drawingml/2006/main">
+            <a:spLocks noGrp="1"/>
+          </p:cNvSpPr>
+          <p:nvPr/>
+        </p:nvSpPr>
+        <p:spPr>
+          <a:xfrm>
             <a:off x="7505700" y="4486275"/>
             <a:ext cx="1352550" cy="213360"/>
           </a:xfrm>
-          <a:prstGeom xmlns:a="http://schemas.openxmlformats.org/drawingml/2006/main" prst="rect">
-            <a:avLst/>
-          </a:prstGeom>
-        </p:spPr>
-        <p:txBody>
-          <a:bodyPr xmlns:a="http://schemas.openxmlformats.org/drawingml/2006/main" spcFirstLastPara="1" lIns="0" tIns="0" rIns="0" bIns="0" anchor="ctr">
-            <a:normAutofit fontScale="100000"/>
-          </a:bodyPr>
-          <a:lstStyle xmlns:a="http://schemas.openxmlformats.org/drawingml/2006/main"/>
-          <a:p xmlns:a="http://schemas.openxmlformats.org/drawingml/2006/main">
+          <a:prstGeom prst="rect">
+            <a:avLst/>
+          </a:prstGeom>
+        </p:spPr>
+        <p:txBody>
+          <a:bodyPr spcFirstLastPara="1" lIns="0" tIns="0" rIns="0" bIns="0" anchor="ctr">
+            <a:normAutofit/>
+          </a:bodyPr>
+          <a:lstStyle/>
+          <a:p>
             <a:pPr>
               <a:defRPr sz="1350" b="1">
                 <a:solidFill>
@@ -6520,32 +6180,32 @@
       <p:sp>
         <p:nvSpPr>
           <p:cNvPr id="18" name="engineer-stat-value-1">
-            <a:extLst xmlns:a="http://schemas.openxmlformats.org/drawingml/2006/main">
+            <a:extLst>
               <a:ext uri="{FF2B5EF4-FFF2-40B4-BE49-F238E27FC236}">
                 <a16:creationId xmlns:a16="http://schemas.microsoft.com/office/drawing/2014/main" id="{120827AB-6F6F-41FE-9D43-C7CE8D736FB0}"/>
               </a:ext>
             </a:extLst>
           </p:cNvPr>
           <p:cNvSpPr>
-            <a:spLocks xmlns:a="http://schemas.openxmlformats.org/drawingml/2006/main" noGrp="1"/>
-          </p:cNvSpPr>
-          <p:nvPr/>
-        </p:nvSpPr>
-        <p:spPr>
-          <a:xfrm xmlns:a="http://schemas.openxmlformats.org/drawingml/2006/main">
+            <a:spLocks noGrp="1"/>
+          </p:cNvSpPr>
+          <p:nvPr/>
+        </p:nvSpPr>
+        <p:spPr>
+          <a:xfrm>
             <a:off x="8896350" y="4486275"/>
             <a:ext cx="2762250" cy="213360"/>
           </a:xfrm>
-          <a:prstGeom xmlns:a="http://schemas.openxmlformats.org/drawingml/2006/main" prst="rect">
-            <a:avLst/>
-          </a:prstGeom>
-        </p:spPr>
-        <p:txBody>
-          <a:bodyPr xmlns:a="http://schemas.openxmlformats.org/drawingml/2006/main" spcFirstLastPara="1" lIns="0" tIns="0" rIns="0" bIns="0" anchor="ctr">
+          <a:prstGeom prst="rect">
+            <a:avLst/>
+          </a:prstGeom>
+        </p:spPr>
+        <p:txBody>
+          <a:bodyPr spcFirstLastPara="1" lIns="0" tIns="0" rIns="0" bIns="0" anchor="ctr">
             <a:normAutofit fontScale="98246"/>
           </a:bodyPr>
-          <a:lstStyle xmlns:a="http://schemas.openxmlformats.org/drawingml/2006/main"/>
-          <a:p xmlns:a="http://schemas.openxmlformats.org/drawingml/2006/main">
+          <a:lstStyle/>
+          <a:p>
             <a:pPr>
               <a:defRPr sz="1425" b="0">
                 <a:solidFill>
@@ -6565,26 +6225,26 @@
       <p:sp>
         <p:nvSpPr>
           <p:cNvPr id="19" name="engineer-stat-bg-2">
-            <a:extLst xmlns:a="http://schemas.openxmlformats.org/drawingml/2006/main">
+            <a:extLst>
               <a:ext uri="{FF2B5EF4-FFF2-40B4-BE49-F238E27FC236}">
                 <a16:creationId xmlns:a16="http://schemas.microsoft.com/office/drawing/2014/main" id="{1C8EE109-5C4D-485F-8A90-D4233F2D217C}"/>
               </a:ext>
             </a:extLst>
           </p:cNvPr>
           <p:cNvSpPr>
-            <a:spLocks xmlns:a="http://schemas.openxmlformats.org/drawingml/2006/main" noGrp="1"/>
-          </p:cNvSpPr>
-          <p:nvPr/>
-        </p:nvSpPr>
-        <p:spPr>
-          <a:xfrm xmlns:a="http://schemas.openxmlformats.org/drawingml/2006/main">
+            <a:spLocks noGrp="1"/>
+          </p:cNvSpPr>
+          <p:nvPr/>
+        </p:nvSpPr>
+        <p:spPr>
+          <a:xfrm>
             <a:off x="7372350" y="4728210"/>
             <a:ext cx="4419600" cy="280035"/>
           </a:xfrm>
-          <a:prstGeom xmlns:a="http://schemas.openxmlformats.org/drawingml/2006/main" prst="rect">
-            <a:avLst/>
-          </a:prstGeom>
-          <a:solidFill xmlns:a="http://schemas.openxmlformats.org/drawingml/2006/main">
+          <a:prstGeom prst="rect">
+            <a:avLst/>
+          </a:prstGeom>
+          <a:solidFill>
             <a:srgbClr val="FFFFFF"/>
           </a:solidFill>
         </p:spPr>
@@ -6592,32 +6252,32 @@
       <p:sp>
         <p:nvSpPr>
           <p:cNvPr id="20" name="engineer-stat-label-2">
-            <a:extLst xmlns:a="http://schemas.openxmlformats.org/drawingml/2006/main">
+            <a:extLst>
               <a:ext uri="{FF2B5EF4-FFF2-40B4-BE49-F238E27FC236}">
                 <a16:creationId xmlns:a16="http://schemas.microsoft.com/office/drawing/2014/main" id="{8A4FF2AB-ACA4-4A62-B4D2-24F7E41C106C}"/>
               </a:ext>
             </a:extLst>
           </p:cNvPr>
           <p:cNvSpPr>
-            <a:spLocks xmlns:a="http://schemas.openxmlformats.org/drawingml/2006/main" noGrp="1"/>
-          </p:cNvSpPr>
-          <p:nvPr/>
-        </p:nvSpPr>
-        <p:spPr>
-          <a:xfrm xmlns:a="http://schemas.openxmlformats.org/drawingml/2006/main">
+            <a:spLocks noGrp="1"/>
+          </p:cNvSpPr>
+          <p:nvPr/>
+        </p:nvSpPr>
+        <p:spPr>
+          <a:xfrm>
             <a:off x="7505700" y="4775835"/>
             <a:ext cx="1352550" cy="213360"/>
           </a:xfrm>
-          <a:prstGeom xmlns:a="http://schemas.openxmlformats.org/drawingml/2006/main" prst="rect">
-            <a:avLst/>
-          </a:prstGeom>
-        </p:spPr>
-        <p:txBody>
-          <a:bodyPr xmlns:a="http://schemas.openxmlformats.org/drawingml/2006/main" spcFirstLastPara="1" lIns="0" tIns="0" rIns="0" bIns="0" anchor="ctr">
-            <a:normAutofit fontScale="100000"/>
-          </a:bodyPr>
-          <a:lstStyle xmlns:a="http://schemas.openxmlformats.org/drawingml/2006/main"/>
-          <a:p xmlns:a="http://schemas.openxmlformats.org/drawingml/2006/main">
+          <a:prstGeom prst="rect">
+            <a:avLst/>
+          </a:prstGeom>
+        </p:spPr>
+        <p:txBody>
+          <a:bodyPr spcFirstLastPara="1" lIns="0" tIns="0" rIns="0" bIns="0" anchor="ctr">
+            <a:normAutofit/>
+          </a:bodyPr>
+          <a:lstStyle/>
+          <a:p>
             <a:pPr>
               <a:defRPr sz="1350" b="1">
                 <a:solidFill>
@@ -6637,32 +6297,32 @@
       <p:sp>
         <p:nvSpPr>
           <p:cNvPr id="21" name="engineer-stat-value-2">
-            <a:extLst xmlns:a="http://schemas.openxmlformats.org/drawingml/2006/main">
+            <a:extLst>
               <a:ext uri="{FF2B5EF4-FFF2-40B4-BE49-F238E27FC236}">
                 <a16:creationId xmlns:a16="http://schemas.microsoft.com/office/drawing/2014/main" id="{B69F0680-5A38-4411-A073-C611698D9620}"/>
               </a:ext>
             </a:extLst>
           </p:cNvPr>
           <p:cNvSpPr>
-            <a:spLocks xmlns:a="http://schemas.openxmlformats.org/drawingml/2006/main" noGrp="1"/>
-          </p:cNvSpPr>
-          <p:nvPr/>
-        </p:nvSpPr>
-        <p:spPr>
-          <a:xfrm xmlns:a="http://schemas.openxmlformats.org/drawingml/2006/main">
+            <a:spLocks noGrp="1"/>
+          </p:cNvSpPr>
+          <p:nvPr/>
+        </p:nvSpPr>
+        <p:spPr>
+          <a:xfrm>
             <a:off x="8896350" y="4775835"/>
             <a:ext cx="2762250" cy="213360"/>
           </a:xfrm>
-          <a:prstGeom xmlns:a="http://schemas.openxmlformats.org/drawingml/2006/main" prst="rect">
-            <a:avLst/>
-          </a:prstGeom>
-        </p:spPr>
-        <p:txBody>
-          <a:bodyPr xmlns:a="http://schemas.openxmlformats.org/drawingml/2006/main" spcFirstLastPara="1" lIns="0" tIns="0" rIns="0" bIns="0" anchor="ctr">
+          <a:prstGeom prst="rect">
+            <a:avLst/>
+          </a:prstGeom>
+        </p:spPr>
+        <p:txBody>
+          <a:bodyPr spcFirstLastPara="1" lIns="0" tIns="0" rIns="0" bIns="0" anchor="ctr">
             <a:normAutofit fontScale="98246"/>
           </a:bodyPr>
-          <a:lstStyle xmlns:a="http://schemas.openxmlformats.org/drawingml/2006/main"/>
-          <a:p xmlns:a="http://schemas.openxmlformats.org/drawingml/2006/main">
+          <a:lstStyle/>
+          <a:p>
             <a:pPr>
               <a:defRPr sz="1425" b="0">
                 <a:solidFill>
@@ -6682,26 +6342,26 @@
       <p:sp>
         <p:nvSpPr>
           <p:cNvPr id="22" name="engineer-stat-bg-3">
-            <a:extLst xmlns:a="http://schemas.openxmlformats.org/drawingml/2006/main">
+            <a:extLst>
               <a:ext uri="{FF2B5EF4-FFF2-40B4-BE49-F238E27FC236}">
                 <a16:creationId xmlns:a16="http://schemas.microsoft.com/office/drawing/2014/main" id="{465A51AE-1C7E-4EAA-9ECE-183635D5ECEF}"/>
               </a:ext>
             </a:extLst>
           </p:cNvPr>
           <p:cNvSpPr>
-            <a:spLocks xmlns:a="http://schemas.openxmlformats.org/drawingml/2006/main" noGrp="1"/>
-          </p:cNvSpPr>
-          <p:nvPr/>
-        </p:nvSpPr>
-        <p:spPr>
-          <a:xfrm xmlns:a="http://schemas.openxmlformats.org/drawingml/2006/main">
+            <a:spLocks noGrp="1"/>
+          </p:cNvSpPr>
+          <p:nvPr/>
+        </p:nvSpPr>
+        <p:spPr>
+          <a:xfrm>
             <a:off x="7372350" y="5017770"/>
             <a:ext cx="4419600" cy="280035"/>
           </a:xfrm>
-          <a:prstGeom xmlns:a="http://schemas.openxmlformats.org/drawingml/2006/main" prst="rect">
-            <a:avLst/>
-          </a:prstGeom>
-          <a:solidFill xmlns:a="http://schemas.openxmlformats.org/drawingml/2006/main">
+          <a:prstGeom prst="rect">
+            <a:avLst/>
+          </a:prstGeom>
+          <a:solidFill>
             <a:srgbClr val="F5F5F5"/>
           </a:solidFill>
         </p:spPr>
@@ -6709,32 +6369,32 @@
       <p:sp>
         <p:nvSpPr>
           <p:cNvPr id="23" name="engineer-stat-label-3">
-            <a:extLst xmlns:a="http://schemas.openxmlformats.org/drawingml/2006/main">
+            <a:extLst>
               <a:ext uri="{FF2B5EF4-FFF2-40B4-BE49-F238E27FC236}">
                 <a16:creationId xmlns:a16="http://schemas.microsoft.com/office/drawing/2014/main" id="{9FA93E35-6D93-40F9-8F6D-3CF82BCF13AF}"/>
               </a:ext>
             </a:extLst>
           </p:cNvPr>
           <p:cNvSpPr>
-            <a:spLocks xmlns:a="http://schemas.openxmlformats.org/drawingml/2006/main" noGrp="1"/>
-          </p:cNvSpPr>
-          <p:nvPr/>
-        </p:nvSpPr>
-        <p:spPr>
-          <a:xfrm xmlns:a="http://schemas.openxmlformats.org/drawingml/2006/main">
+            <a:spLocks noGrp="1"/>
+          </p:cNvSpPr>
+          <p:nvPr/>
+        </p:nvSpPr>
+        <p:spPr>
+          <a:xfrm>
             <a:off x="7505700" y="5065395"/>
             <a:ext cx="1352550" cy="213360"/>
           </a:xfrm>
-          <a:prstGeom xmlns:a="http://schemas.openxmlformats.org/drawingml/2006/main" prst="rect">
-            <a:avLst/>
-          </a:prstGeom>
-        </p:spPr>
-        <p:txBody>
-          <a:bodyPr xmlns:a="http://schemas.openxmlformats.org/drawingml/2006/main" spcFirstLastPara="1" lIns="0" tIns="0" rIns="0" bIns="0" anchor="ctr">
-            <a:normAutofit fontScale="100000"/>
-          </a:bodyPr>
-          <a:lstStyle xmlns:a="http://schemas.openxmlformats.org/drawingml/2006/main"/>
-          <a:p xmlns:a="http://schemas.openxmlformats.org/drawingml/2006/main">
+          <a:prstGeom prst="rect">
+            <a:avLst/>
+          </a:prstGeom>
+        </p:spPr>
+        <p:txBody>
+          <a:bodyPr spcFirstLastPara="1" lIns="0" tIns="0" rIns="0" bIns="0" anchor="ctr">
+            <a:normAutofit/>
+          </a:bodyPr>
+          <a:lstStyle/>
+          <a:p>
             <a:pPr>
               <a:defRPr sz="1350" b="1">
                 <a:solidFill>
@@ -6754,32 +6414,32 @@
       <p:sp>
         <p:nvSpPr>
           <p:cNvPr id="24" name="engineer-stat-value-3">
-            <a:extLst xmlns:a="http://schemas.openxmlformats.org/drawingml/2006/main">
+            <a:extLst>
               <a:ext uri="{FF2B5EF4-FFF2-40B4-BE49-F238E27FC236}">
                 <a16:creationId xmlns:a16="http://schemas.microsoft.com/office/drawing/2014/main" id="{EE79C674-BDE3-4BAB-BE5B-8F721537A4E6}"/>
               </a:ext>
             </a:extLst>
           </p:cNvPr>
           <p:cNvSpPr>
-            <a:spLocks xmlns:a="http://schemas.openxmlformats.org/drawingml/2006/main" noGrp="1"/>
-          </p:cNvSpPr>
-          <p:nvPr/>
-        </p:nvSpPr>
-        <p:spPr>
-          <a:xfrm xmlns:a="http://schemas.openxmlformats.org/drawingml/2006/main">
+            <a:spLocks noGrp="1"/>
+          </p:cNvSpPr>
+          <p:nvPr/>
+        </p:nvSpPr>
+        <p:spPr>
+          <a:xfrm>
             <a:off x="8896350" y="5065395"/>
             <a:ext cx="2762250" cy="213360"/>
           </a:xfrm>
-          <a:prstGeom xmlns:a="http://schemas.openxmlformats.org/drawingml/2006/main" prst="rect">
-            <a:avLst/>
-          </a:prstGeom>
-        </p:spPr>
-        <p:txBody>
-          <a:bodyPr xmlns:a="http://schemas.openxmlformats.org/drawingml/2006/main" spcFirstLastPara="1" lIns="0" tIns="0" rIns="0" bIns="0" anchor="ctr">
+          <a:prstGeom prst="rect">
+            <a:avLst/>
+          </a:prstGeom>
+        </p:spPr>
+        <p:txBody>
+          <a:bodyPr spcFirstLastPara="1" lIns="0" tIns="0" rIns="0" bIns="0" anchor="ctr">
             <a:normAutofit fontScale="98246"/>
           </a:bodyPr>
-          <a:lstStyle xmlns:a="http://schemas.openxmlformats.org/drawingml/2006/main"/>
-          <a:p xmlns:a="http://schemas.openxmlformats.org/drawingml/2006/main">
+          <a:lstStyle/>
+          <a:p>
             <a:pPr>
               <a:defRPr sz="1425" b="0">
                 <a:solidFill>
@@ -6799,26 +6459,26 @@
       <p:sp>
         <p:nvSpPr>
           <p:cNvPr id="25" name="engineer-stat-bg-4">
-            <a:extLst xmlns:a="http://schemas.openxmlformats.org/drawingml/2006/main">
+            <a:extLst>
               <a:ext uri="{FF2B5EF4-FFF2-40B4-BE49-F238E27FC236}">
                 <a16:creationId xmlns:a16="http://schemas.microsoft.com/office/drawing/2014/main" id="{F5AF724E-3C9C-4769-BDD3-CA3CD82FA30B}"/>
               </a:ext>
             </a:extLst>
           </p:cNvPr>
           <p:cNvSpPr>
-            <a:spLocks xmlns:a="http://schemas.openxmlformats.org/drawingml/2006/main" noGrp="1"/>
-          </p:cNvSpPr>
-          <p:nvPr/>
-        </p:nvSpPr>
-        <p:spPr>
-          <a:xfrm xmlns:a="http://schemas.openxmlformats.org/drawingml/2006/main">
+            <a:spLocks noGrp="1"/>
+          </p:cNvSpPr>
+          <p:nvPr/>
+        </p:nvSpPr>
+        <p:spPr>
+          <a:xfrm>
             <a:off x="7372350" y="5307330"/>
             <a:ext cx="4419600" cy="280035"/>
           </a:xfrm>
-          <a:prstGeom xmlns:a="http://schemas.openxmlformats.org/drawingml/2006/main" prst="rect">
-            <a:avLst/>
-          </a:prstGeom>
-          <a:solidFill xmlns:a="http://schemas.openxmlformats.org/drawingml/2006/main">
+          <a:prstGeom prst="rect">
+            <a:avLst/>
+          </a:prstGeom>
+          <a:solidFill>
             <a:srgbClr val="FFFFFF"/>
           </a:solidFill>
         </p:spPr>
@@ -6826,32 +6486,32 @@
       <p:sp>
         <p:nvSpPr>
           <p:cNvPr id="26" name="engineer-stat-label-4">
-            <a:extLst xmlns:a="http://schemas.openxmlformats.org/drawingml/2006/main">
+            <a:extLst>
               <a:ext uri="{FF2B5EF4-FFF2-40B4-BE49-F238E27FC236}">
                 <a16:creationId xmlns:a16="http://schemas.microsoft.com/office/drawing/2014/main" id="{16BF62C8-016D-421E-BD03-AA70F226D99D}"/>
               </a:ext>
             </a:extLst>
           </p:cNvPr>
           <p:cNvSpPr>
-            <a:spLocks xmlns:a="http://schemas.openxmlformats.org/drawingml/2006/main" noGrp="1"/>
-          </p:cNvSpPr>
-          <p:nvPr/>
-        </p:nvSpPr>
-        <p:spPr>
-          <a:xfrm xmlns:a="http://schemas.openxmlformats.org/drawingml/2006/main">
+            <a:spLocks noGrp="1"/>
+          </p:cNvSpPr>
+          <p:nvPr/>
+        </p:nvSpPr>
+        <p:spPr>
+          <a:xfrm>
             <a:off x="7505700" y="5354955"/>
             <a:ext cx="1352550" cy="213360"/>
           </a:xfrm>
-          <a:prstGeom xmlns:a="http://schemas.openxmlformats.org/drawingml/2006/main" prst="rect">
-            <a:avLst/>
-          </a:prstGeom>
-        </p:spPr>
-        <p:txBody>
-          <a:bodyPr xmlns:a="http://schemas.openxmlformats.org/drawingml/2006/main" spcFirstLastPara="1" lIns="0" tIns="0" rIns="0" bIns="0" anchor="ctr">
-            <a:normAutofit fontScale="100000"/>
-          </a:bodyPr>
-          <a:lstStyle xmlns:a="http://schemas.openxmlformats.org/drawingml/2006/main"/>
-          <a:p xmlns:a="http://schemas.openxmlformats.org/drawingml/2006/main">
+          <a:prstGeom prst="rect">
+            <a:avLst/>
+          </a:prstGeom>
+        </p:spPr>
+        <p:txBody>
+          <a:bodyPr spcFirstLastPara="1" lIns="0" tIns="0" rIns="0" bIns="0" anchor="ctr">
+            <a:normAutofit/>
+          </a:bodyPr>
+          <a:lstStyle/>
+          <a:p>
             <a:pPr>
               <a:defRPr sz="1350" b="1">
                 <a:solidFill>
@@ -6871,32 +6531,32 @@
       <p:sp>
         <p:nvSpPr>
           <p:cNvPr id="27" name="engineer-stat-value-4">
-            <a:extLst xmlns:a="http://schemas.openxmlformats.org/drawingml/2006/main">
+            <a:extLst>
               <a:ext uri="{FF2B5EF4-FFF2-40B4-BE49-F238E27FC236}">
                 <a16:creationId xmlns:a16="http://schemas.microsoft.com/office/drawing/2014/main" id="{F7D39760-8C0F-4D3F-B3D7-A04028910904}"/>
               </a:ext>
             </a:extLst>
           </p:cNvPr>
           <p:cNvSpPr>
-            <a:spLocks xmlns:a="http://schemas.openxmlformats.org/drawingml/2006/main" noGrp="1"/>
-          </p:cNvSpPr>
-          <p:nvPr/>
-        </p:nvSpPr>
-        <p:spPr>
-          <a:xfrm xmlns:a="http://schemas.openxmlformats.org/drawingml/2006/main">
+            <a:spLocks noGrp="1"/>
+          </p:cNvSpPr>
+          <p:nvPr/>
+        </p:nvSpPr>
+        <p:spPr>
+          <a:xfrm>
             <a:off x="8896350" y="5354955"/>
             <a:ext cx="2762250" cy="213360"/>
           </a:xfrm>
-          <a:prstGeom xmlns:a="http://schemas.openxmlformats.org/drawingml/2006/main" prst="rect">
-            <a:avLst/>
-          </a:prstGeom>
-        </p:spPr>
-        <p:txBody>
-          <a:bodyPr xmlns:a="http://schemas.openxmlformats.org/drawingml/2006/main" spcFirstLastPara="1" lIns="0" tIns="0" rIns="0" bIns="0" anchor="ctr">
+          <a:prstGeom prst="rect">
+            <a:avLst/>
+          </a:prstGeom>
+        </p:spPr>
+        <p:txBody>
+          <a:bodyPr spcFirstLastPara="1" lIns="0" tIns="0" rIns="0" bIns="0" anchor="ctr">
             <a:normAutofit fontScale="98246"/>
           </a:bodyPr>
-          <a:lstStyle xmlns:a="http://schemas.openxmlformats.org/drawingml/2006/main"/>
-          <a:p xmlns:a="http://schemas.openxmlformats.org/drawingml/2006/main">
+          <a:lstStyle/>
+          <a:p>
             <a:pPr>
               <a:defRPr sz="1425" b="0">
                 <a:solidFill>
@@ -6916,26 +6576,26 @@
       <p:sp>
         <p:nvSpPr>
           <p:cNvPr id="28" name="engineer-stat-bg-5">
-            <a:extLst xmlns:a="http://schemas.openxmlformats.org/drawingml/2006/main">
+            <a:extLst>
               <a:ext uri="{FF2B5EF4-FFF2-40B4-BE49-F238E27FC236}">
                 <a16:creationId xmlns:a16="http://schemas.microsoft.com/office/drawing/2014/main" id="{2BF21D34-0122-4E35-A5F6-5E073402B2BB}"/>
               </a:ext>
             </a:extLst>
           </p:cNvPr>
           <p:cNvSpPr>
-            <a:spLocks xmlns:a="http://schemas.openxmlformats.org/drawingml/2006/main" noGrp="1"/>
-          </p:cNvSpPr>
-          <p:nvPr/>
-        </p:nvSpPr>
-        <p:spPr>
-          <a:xfrm xmlns:a="http://schemas.openxmlformats.org/drawingml/2006/main">
+            <a:spLocks noGrp="1"/>
+          </p:cNvSpPr>
+          <p:nvPr/>
+        </p:nvSpPr>
+        <p:spPr>
+          <a:xfrm>
             <a:off x="7372350" y="5596890"/>
             <a:ext cx="4419600" cy="280035"/>
           </a:xfrm>
-          <a:prstGeom xmlns:a="http://schemas.openxmlformats.org/drawingml/2006/main" prst="rect">
-            <a:avLst/>
-          </a:prstGeom>
-          <a:solidFill xmlns:a="http://schemas.openxmlformats.org/drawingml/2006/main">
+          <a:prstGeom prst="rect">
+            <a:avLst/>
+          </a:prstGeom>
+          <a:solidFill>
             <a:srgbClr val="F5F5F5"/>
           </a:solidFill>
         </p:spPr>
@@ -6943,32 +6603,32 @@
       <p:sp>
         <p:nvSpPr>
           <p:cNvPr id="29" name="engineer-stat-label-5">
-            <a:extLst xmlns:a="http://schemas.openxmlformats.org/drawingml/2006/main">
+            <a:extLst>
               <a:ext uri="{FF2B5EF4-FFF2-40B4-BE49-F238E27FC236}">
                 <a16:creationId xmlns:a16="http://schemas.microsoft.com/office/drawing/2014/main" id="{D5F38BB1-9752-46E1-B9F6-15C31EC58AE2}"/>
               </a:ext>
             </a:extLst>
           </p:cNvPr>
           <p:cNvSpPr>
-            <a:spLocks xmlns:a="http://schemas.openxmlformats.org/drawingml/2006/main" noGrp="1"/>
-          </p:cNvSpPr>
-          <p:nvPr/>
-        </p:nvSpPr>
-        <p:spPr>
-          <a:xfrm xmlns:a="http://schemas.openxmlformats.org/drawingml/2006/main">
+            <a:spLocks noGrp="1"/>
+          </p:cNvSpPr>
+          <p:nvPr/>
+        </p:nvSpPr>
+        <p:spPr>
+          <a:xfrm>
             <a:off x="7505700" y="5644515"/>
             <a:ext cx="1352550" cy="213360"/>
           </a:xfrm>
-          <a:prstGeom xmlns:a="http://schemas.openxmlformats.org/drawingml/2006/main" prst="rect">
-            <a:avLst/>
-          </a:prstGeom>
-        </p:spPr>
-        <p:txBody>
-          <a:bodyPr xmlns:a="http://schemas.openxmlformats.org/drawingml/2006/main" spcFirstLastPara="1" lIns="0" tIns="0" rIns="0" bIns="0" anchor="ctr">
-            <a:normAutofit fontScale="100000"/>
-          </a:bodyPr>
-          <a:lstStyle xmlns:a="http://schemas.openxmlformats.org/drawingml/2006/main"/>
-          <a:p xmlns:a="http://schemas.openxmlformats.org/drawingml/2006/main">
+          <a:prstGeom prst="rect">
+            <a:avLst/>
+          </a:prstGeom>
+        </p:spPr>
+        <p:txBody>
+          <a:bodyPr spcFirstLastPara="1" lIns="0" tIns="0" rIns="0" bIns="0" anchor="ctr">
+            <a:normAutofit/>
+          </a:bodyPr>
+          <a:lstStyle/>
+          <a:p>
             <a:pPr>
               <a:defRPr sz="1350" b="1">
                 <a:solidFill>
@@ -6988,32 +6648,32 @@
       <p:sp>
         <p:nvSpPr>
           <p:cNvPr id="30" name="engineer-stat-value-5">
-            <a:extLst xmlns:a="http://schemas.openxmlformats.org/drawingml/2006/main">
+            <a:extLst>
               <a:ext uri="{FF2B5EF4-FFF2-40B4-BE49-F238E27FC236}">
                 <a16:creationId xmlns:a16="http://schemas.microsoft.com/office/drawing/2014/main" id="{7A775F5E-0A58-4B32-BF61-0D9C7575C65E}"/>
               </a:ext>
             </a:extLst>
           </p:cNvPr>
           <p:cNvSpPr>
-            <a:spLocks xmlns:a="http://schemas.openxmlformats.org/drawingml/2006/main" noGrp="1"/>
-          </p:cNvSpPr>
-          <p:nvPr/>
-        </p:nvSpPr>
-        <p:spPr>
-          <a:xfrm xmlns:a="http://schemas.openxmlformats.org/drawingml/2006/main">
+            <a:spLocks noGrp="1"/>
+          </p:cNvSpPr>
+          <p:nvPr/>
+        </p:nvSpPr>
+        <p:spPr>
+          <a:xfrm>
             <a:off x="8896350" y="5644515"/>
             <a:ext cx="2762250" cy="213360"/>
           </a:xfrm>
-          <a:prstGeom xmlns:a="http://schemas.openxmlformats.org/drawingml/2006/main" prst="rect">
-            <a:avLst/>
-          </a:prstGeom>
-        </p:spPr>
-        <p:txBody>
-          <a:bodyPr xmlns:a="http://schemas.openxmlformats.org/drawingml/2006/main" spcFirstLastPara="1" lIns="0" tIns="0" rIns="0" bIns="0" anchor="ctr">
+          <a:prstGeom prst="rect">
+            <a:avLst/>
+          </a:prstGeom>
+        </p:spPr>
+        <p:txBody>
+          <a:bodyPr spcFirstLastPara="1" lIns="0" tIns="0" rIns="0" bIns="0" anchor="ctr">
             <a:normAutofit fontScale="98246"/>
           </a:bodyPr>
-          <a:lstStyle xmlns:a="http://schemas.openxmlformats.org/drawingml/2006/main"/>
-          <a:p xmlns:a="http://schemas.openxmlformats.org/drawingml/2006/main">
+          <a:lstStyle/>
+          <a:p>
             <a:pPr>
               <a:defRPr sz="1425" b="0">
                 <a:solidFill>
@@ -7033,26 +6693,26 @@
       <p:sp>
         <p:nvSpPr>
           <p:cNvPr id="31" name="footer-rule-5">
-            <a:extLst xmlns:a="http://schemas.openxmlformats.org/drawingml/2006/main">
+            <a:extLst>
               <a:ext uri="{FF2B5EF4-FFF2-40B4-BE49-F238E27FC236}">
                 <a16:creationId xmlns:a16="http://schemas.microsoft.com/office/drawing/2014/main" id="{E9E4F297-B11C-43E9-9067-15F678AF0C3A}"/>
               </a:ext>
             </a:extLst>
           </p:cNvPr>
           <p:cNvSpPr>
-            <a:spLocks xmlns:a="http://schemas.openxmlformats.org/drawingml/2006/main" noGrp="1"/>
-          </p:cNvSpPr>
-          <p:nvPr/>
-        </p:nvSpPr>
-        <p:spPr>
-          <a:xfrm xmlns:a="http://schemas.openxmlformats.org/drawingml/2006/main">
+            <a:spLocks noGrp="1"/>
+          </p:cNvSpPr>
+          <p:nvPr/>
+        </p:nvSpPr>
+        <p:spPr>
+          <a:xfrm>
             <a:off x="400050" y="6172200"/>
             <a:ext cx="11391900" cy="9525"/>
           </a:xfrm>
-          <a:prstGeom xmlns:a="http://schemas.openxmlformats.org/drawingml/2006/main" prst="rect">
-            <a:avLst/>
-          </a:prstGeom>
-          <a:solidFill xmlns:a="http://schemas.openxmlformats.org/drawingml/2006/main">
+          <a:prstGeom prst="rect">
+            <a:avLst/>
+          </a:prstGeom>
+          <a:solidFill>
             <a:srgbClr val="B8BCC4"/>
           </a:solidFill>
         </p:spPr>
@@ -7060,32 +6720,32 @@
       <p:sp>
         <p:nvSpPr>
           <p:cNvPr id="32" name="footer-source-5">
-            <a:extLst xmlns:a="http://schemas.openxmlformats.org/drawingml/2006/main">
+            <a:extLst>
               <a:ext uri="{FF2B5EF4-FFF2-40B4-BE49-F238E27FC236}">
                 <a16:creationId xmlns:a16="http://schemas.microsoft.com/office/drawing/2014/main" id="{FBD3ACF0-6EA7-492C-8B49-5A4A30C2B00E}"/>
               </a:ext>
             </a:extLst>
           </p:cNvPr>
           <p:cNvSpPr>
-            <a:spLocks xmlns:a="http://schemas.openxmlformats.org/drawingml/2006/main" noGrp="1"/>
-          </p:cNvSpPr>
-          <p:nvPr/>
-        </p:nvSpPr>
-        <p:spPr>
-          <a:xfrm xmlns:a="http://schemas.openxmlformats.org/drawingml/2006/main">
+            <a:spLocks noGrp="1"/>
+          </p:cNvSpPr>
+          <p:nvPr/>
+        </p:nvSpPr>
+        <p:spPr>
+          <a:xfrm>
             <a:off x="400050" y="6305550"/>
             <a:ext cx="3429000" cy="228600"/>
           </a:xfrm>
-          <a:prstGeom xmlns:a="http://schemas.openxmlformats.org/drawingml/2006/main" prst="rect">
-            <a:avLst/>
-          </a:prstGeom>
-        </p:spPr>
-        <p:txBody>
-          <a:bodyPr xmlns:a="http://schemas.openxmlformats.org/drawingml/2006/main" spcFirstLastPara="1" lIns="0" tIns="0" rIns="0" bIns="0" anchor="t">
-            <a:normAutofit fontScale="100000"/>
-          </a:bodyPr>
-          <a:lstStyle xmlns:a="http://schemas.openxmlformats.org/drawingml/2006/main"/>
-          <a:p xmlns:a="http://schemas.openxmlformats.org/drawingml/2006/main">
+          <a:prstGeom prst="rect">
+            <a:avLst/>
+          </a:prstGeom>
+        </p:spPr>
+        <p:txBody>
+          <a:bodyPr spcFirstLastPara="1" lIns="0" tIns="0" rIns="0" bIns="0" anchor="t">
+            <a:normAutofit/>
+          </a:bodyPr>
+          <a:lstStyle/>
+          <a:p>
             <a:pPr>
               <a:defRPr sz="1125" b="0">
                 <a:solidFill>
@@ -7105,32 +6765,32 @@
       <p:sp>
         <p:nvSpPr>
           <p:cNvPr id="33" name="footer-page-5">
-            <a:extLst xmlns:a="http://schemas.openxmlformats.org/drawingml/2006/main">
+            <a:extLst>
               <a:ext uri="{FF2B5EF4-FFF2-40B4-BE49-F238E27FC236}">
                 <a16:creationId xmlns:a16="http://schemas.microsoft.com/office/drawing/2014/main" id="{0ADAC6F9-7977-46EB-AEF5-FF25FEC25F2B}"/>
               </a:ext>
             </a:extLst>
           </p:cNvPr>
           <p:cNvSpPr>
-            <a:spLocks xmlns:a="http://schemas.openxmlformats.org/drawingml/2006/main" noGrp="1"/>
-          </p:cNvSpPr>
-          <p:nvPr/>
-        </p:nvSpPr>
-        <p:spPr>
-          <a:xfrm xmlns:a="http://schemas.openxmlformats.org/drawingml/2006/main">
+            <a:spLocks noGrp="1"/>
+          </p:cNvSpPr>
+          <p:nvPr/>
+        </p:nvSpPr>
+        <p:spPr>
+          <a:xfrm>
             <a:off x="11277600" y="6305550"/>
             <a:ext cx="514350" cy="228600"/>
           </a:xfrm>
-          <a:prstGeom xmlns:a="http://schemas.openxmlformats.org/drawingml/2006/main" prst="rect">
-            <a:avLst/>
-          </a:prstGeom>
-        </p:spPr>
-        <p:txBody>
-          <a:bodyPr xmlns:a="http://schemas.openxmlformats.org/drawingml/2006/main" spcFirstLastPara="1" lIns="0" tIns="0" rIns="0" bIns="0" anchor="t">
-            <a:normAutofit fontScale="100000"/>
-          </a:bodyPr>
-          <a:lstStyle xmlns:a="http://schemas.openxmlformats.org/drawingml/2006/main"/>
-          <a:p xmlns:a="http://schemas.openxmlformats.org/drawingml/2006/main">
+          <a:prstGeom prst="rect">
+            <a:avLst/>
+          </a:prstGeom>
+        </p:spPr>
+        <p:txBody>
+          <a:bodyPr spcFirstLastPara="1" lIns="0" tIns="0" rIns="0" bIns="0" anchor="t">
+            <a:normAutofit/>
+          </a:bodyPr>
+          <a:lstStyle/>
+          <a:p>
             <a:pPr algn="r">
               <a:defRPr sz="1125" b="0">
                 <a:solidFill>
@@ -7154,6 +6814,9 @@
       </p:ext>
     </p:extLst>
   </p:cSld>
+  <p:clrMapOvr>
+    <a:masterClrMapping/>
+  </p:clrMapOvr>
 </p:sld>
 </file>
 
@@ -7399,5 +7062,254 @@
       </a:bgFillStyleLst>
     </a:fmtScheme>
   </a:themeElements>
+  <a:objectDefaults/>
+  <a:extraClrSchemeLst/>
+</a:theme>
+</file>
+
+<file path=ppt/theme/theme2.xml><?xml version="1.0" encoding="utf-8"?>
+<a:theme xmlns:a="http://schemas.openxmlformats.org/drawingml/2006/main" name="ChatGPT">
+  <a:themeElements>
+    <a:clrScheme name="ChatGPT">
+      <a:dk1>
+        <a:srgbClr val="000000"/>
+      </a:dk1>
+      <a:lt1>
+        <a:srgbClr val="FFFFFF"/>
+      </a:lt1>
+      <a:dk2>
+        <a:srgbClr val="0E2841"/>
+      </a:dk2>
+      <a:lt2>
+        <a:srgbClr val="E8E8E8"/>
+      </a:lt2>
+      <a:accent1>
+        <a:srgbClr val="156082"/>
+      </a:accent1>
+      <a:accent2>
+        <a:srgbClr val="E97132"/>
+      </a:accent2>
+      <a:accent3>
+        <a:srgbClr val="196B24"/>
+      </a:accent3>
+      <a:accent4>
+        <a:srgbClr val="0F9ED5"/>
+      </a:accent4>
+      <a:accent5>
+        <a:srgbClr val="A02B93"/>
+      </a:accent5>
+      <a:accent6>
+        <a:srgbClr val="4EA72E"/>
+      </a:accent6>
+      <a:hlink>
+        <a:srgbClr val="467886"/>
+      </a:hlink>
+      <a:folHlink>
+        <a:srgbClr val="96607D"/>
+      </a:folHlink>
+    </a:clrScheme>
+    <a:fontScheme name="Office">
+      <a:majorFont>
+        <a:latin typeface="Calibri Light"/>
+        <a:ea typeface="Calibri Light"/>
+        <a:cs typeface="Calibri Light"/>
+      </a:majorFont>
+      <a:minorFont>
+        <a:latin typeface="Calibri"/>
+        <a:ea typeface="Calibri"/>
+        <a:cs typeface="Calibri"/>
+      </a:minorFont>
+    </a:fontScheme>
+    <a:fmtScheme name="ChatGPT">
+      <a:fillStyleLst>
+        <a:solidFill>
+          <a:schemeClr val="phClr"/>
+        </a:solidFill>
+        <a:gradFill>
+          <a:gsLst>
+            <a:gs pos="0">
+              <a:schemeClr val="phClr">
+                <a:tint val="67000"/>
+                <a:lumMod val="110000"/>
+                <a:satMod val="105000"/>
+              </a:schemeClr>
+            </a:gs>
+            <a:gs pos="50000">
+              <a:schemeClr val="phClr">
+                <a:tint val="73000"/>
+                <a:lumMod val="105000"/>
+                <a:satMod val="103000"/>
+              </a:schemeClr>
+            </a:gs>
+            <a:gs pos="100000">
+              <a:schemeClr val="phClr">
+                <a:tint val="81000"/>
+                <a:lumMod val="105000"/>
+                <a:satMod val="109000"/>
+              </a:schemeClr>
+            </a:gs>
+          </a:gsLst>
+          <a:lin ang="5400000" scaled="0"/>
+        </a:gradFill>
+        <a:gradFill>
+          <a:gsLst>
+            <a:gs pos="0">
+              <a:schemeClr val="phClr">
+                <a:tint val="94000"/>
+                <a:lumMod val="102000"/>
+                <a:satMod val="103000"/>
+              </a:schemeClr>
+            </a:gs>
+            <a:gs pos="50000">
+              <a:schemeClr val="phClr">
+                <a:shade val="100000"/>
+                <a:lumMod val="100000"/>
+                <a:satMod val="110000"/>
+              </a:schemeClr>
+            </a:gs>
+            <a:gs pos="100000">
+              <a:schemeClr val="phClr">
+                <a:shade val="78000"/>
+                <a:lumMod val="99000"/>
+                <a:satMod val="120000"/>
+              </a:schemeClr>
+            </a:gs>
+          </a:gsLst>
+          <a:lin ang="5400000" scaled="0"/>
+        </a:gradFill>
+      </a:fillStyleLst>
+      <a:lnStyleLst>
+        <a:ln w="12700">
+          <a:solidFill>
+            <a:schemeClr val="phClr"/>
+          </a:solidFill>
+          <a:prstDash val="solid"/>
+        </a:ln>
+        <a:ln w="19050">
+          <a:solidFill>
+            <a:schemeClr val="phClr"/>
+          </a:solidFill>
+          <a:prstDash val="solid"/>
+        </a:ln>
+        <a:ln w="25400">
+          <a:solidFill>
+            <a:schemeClr val="phClr"/>
+          </a:solidFill>
+          <a:prstDash val="solid"/>
+        </a:ln>
+      </a:lnStyleLst>
+      <a:effectStyleLst>
+        <a:effectStyle>
+          <a:effectLst/>
+        </a:effectStyle>
+        <a:effectStyle>
+          <a:effectLst/>
+        </a:effectStyle>
+        <a:effectStyle>
+          <a:effectLst>
+            <a:outerShdw blurRad="57150" dist="19050" dir="5400000">
+              <a:srgbClr val="000000">
+                <a:alpha val="16000"/>
+              </a:srgbClr>
+            </a:outerShdw>
+          </a:effectLst>
+        </a:effectStyle>
+        <a:effectStyle>
+          <a:effectLst>
+            <a:outerShdw blurRad="19050" dist="9525" dir="5400000">
+              <a:srgbClr val="000000">
+                <a:alpha val="6000"/>
+              </a:srgbClr>
+            </a:outerShdw>
+          </a:effectLst>
+        </a:effectStyle>
+        <a:effectStyle>
+          <a:effectLst>
+            <a:outerShdw blurRad="28575" dist="9525" dir="5400000">
+              <a:srgbClr val="000000">
+                <a:alpha val="8000"/>
+              </a:srgbClr>
+            </a:outerShdw>
+          </a:effectLst>
+        </a:effectStyle>
+        <a:effectStyle>
+          <a:effectLst>
+            <a:outerShdw blurRad="57150" dist="19050" dir="5400000">
+              <a:srgbClr val="000000">
+                <a:alpha val="10000"/>
+              </a:srgbClr>
+            </a:outerShdw>
+          </a:effectLst>
+        </a:effectStyle>
+        <a:effectStyle>
+          <a:effectLst>
+            <a:outerShdw blurRad="114300" dist="38100" dir="5400000">
+              <a:srgbClr val="000000">
+                <a:alpha val="12000"/>
+              </a:srgbClr>
+            </a:outerShdw>
+          </a:effectLst>
+        </a:effectStyle>
+        <a:effectStyle>
+          <a:effectLst>
+            <a:outerShdw blurRad="171450" dist="57150" dir="5400000">
+              <a:srgbClr val="000000">
+                <a:alpha val="16000"/>
+              </a:srgbClr>
+            </a:outerShdw>
+          </a:effectLst>
+        </a:effectStyle>
+        <a:effectStyle>
+          <a:effectLst>
+            <a:outerShdw blurRad="266700" dist="95250" dir="5400000">
+              <a:srgbClr val="000000">
+                <a:alpha val="24000"/>
+              </a:srgbClr>
+            </a:outerShdw>
+          </a:effectLst>
+        </a:effectStyle>
+      </a:effectStyleLst>
+      <a:bgFillStyleLst>
+        <a:solidFill>
+          <a:schemeClr val="phClr"/>
+        </a:solidFill>
+        <a:solidFill>
+          <a:schemeClr val="phClr">
+            <a:tint val="95000"/>
+            <a:satMod val="170000"/>
+          </a:schemeClr>
+        </a:solidFill>
+        <a:gradFill>
+          <a:gsLst>
+            <a:gs pos="0">
+              <a:schemeClr val="phClr">
+                <a:tint val="93000"/>
+                <a:shade val="98000"/>
+                <a:lumMod val="102000"/>
+                <a:satMod val="150000"/>
+              </a:schemeClr>
+            </a:gs>
+            <a:gs pos="50000">
+              <a:schemeClr val="phClr">
+                <a:tint val="98000"/>
+                <a:shade val="90000"/>
+                <a:lumMod val="103000"/>
+                <a:satMod val="130000"/>
+              </a:schemeClr>
+            </a:gs>
+            <a:gs pos="100000">
+              <a:schemeClr val="phClr">
+                <a:shade val="63000"/>
+                <a:satMod val="120000"/>
+              </a:schemeClr>
+            </a:gs>
+          </a:gsLst>
+          <a:lin ang="5400000" scaled="0"/>
+        </a:gradFill>
+      </a:bgFillStyleLst>
+    </a:fmtScheme>
+  </a:themeElements>
+  <a:objectDefaults/>
+  <a:extraClrSchemeLst/>
 </a:theme>
 </file>